--- a/protected-downloads/praesentation/M20.pptx
+++ b/protected-downloads/praesentation/M20.pptx
@@ -8,17 +8,17 @@
     <p:sldId id="256" r:id="rId7"/>
     <p:sldId id="257" r:id="rId8"/>
     <p:sldId id="258" r:id="rId9"/>
-    <p:sldId id="259" r:id="rId10"/>
-    <p:sldId id="260" r:id="rId11"/>
-    <p:sldId id="261" r:id="rId12"/>
-    <p:sldId id="262" r:id="rId13"/>
-    <p:sldId id="263" r:id="rId14"/>
-    <p:sldId id="264" r:id="rId15"/>
-    <p:sldId id="265" r:id="rId16"/>
-    <p:sldId id="266" r:id="rId17"/>
-    <p:sldId id="267" r:id="rId18"/>
-    <p:sldId id="268" r:id="rId19"/>
-    <p:sldId id="269" r:id="rId20"/>
+    <p:sldId id="259" r:id="rId11"/>
+    <p:sldId id="260" r:id="rId12"/>
+    <p:sldId id="261" r:id="rId13"/>
+    <p:sldId id="262" r:id="rId14"/>
+    <p:sldId id="263" r:id="rId15"/>
+    <p:sldId id="264" r:id="rId16"/>
+    <p:sldId id="265" r:id="rId17"/>
+    <p:sldId id="266" r:id="rId18"/>
+    <p:sldId id="267" r:id="rId19"/>
+    <p:sldId id="268" r:id="rId20"/>
+    <p:sldId id="269" r:id="rId21"/>
   </p:sldIdLst>
   <p:sldSz cx="12188952" cy="6858000" type="screen4x3"/>
   <p:notesSz cx="6858000" cy="9144000"/>
@@ -118,6 +118,1126 @@
     </a:lvl9pPr>
   </p:defaultTextStyle>
 </p:presentation>
+</file>
+
+<file path=ppt/notesMasters/notesMaster1.xml><?xml version="1.0" encoding="utf-8"?>
+<p:notesMaster xmlns:a="http://schemas.openxmlformats.org/drawingml/2006/main" xmlns:p="http://schemas.openxmlformats.org/presentationml/2006/main" xmlns:r="http://schemas.openxmlformats.org/officeDocument/2006/relationships">
+  <p:cSld>
+    <p:bg>
+      <p:bgRef idx="1001">
+        <a:schemeClr val="bg1"/>
+      </p:bgRef>
+    </p:bg>
+    <p:spTree>
+      <p:nvGrpSpPr>
+        <p:cNvPr id="1" name=""/>
+        <p:cNvGrpSpPr/>
+        <p:nvPr/>
+      </p:nvGrpSpPr>
+      <p:grpSpPr>
+        <a:xfrm>
+          <a:off x="0" y="0"/>
+          <a:ext cx="0" cy="0"/>
+          <a:chOff x="0" y="0"/>
+          <a:chExt cx="0" cy="0"/>
+        </a:xfrm>
+      </p:grpSpPr>
+      <p:sp>
+        <p:nvSpPr>
+          <p:cNvPr id="2" name="Header Placeholder 1"/>
+          <p:cNvSpPr>
+            <a:spLocks noGrp="1"/>
+          </p:cNvSpPr>
+          <p:nvPr>
+            <p:ph type="hdr" sz="quarter"/>
+          </p:nvPr>
+        </p:nvSpPr>
+        <p:spPr>
+          <a:xfrm>
+            <a:off x="0" y="0"/>
+            <a:ext cx="2971800" cy="457200"/>
+          </a:xfrm>
+          <a:prstGeom prst="rect">
+            <a:avLst/>
+          </a:prstGeom>
+        </p:spPr>
+        <p:txBody>
+          <a:bodyPr vert="horz" lIns="91440" tIns="45720" rIns="91440" bIns="45720" rtlCol="0"/>
+          <a:lstStyle>
+            <a:lvl1pPr algn="l">
+              <a:defRPr sz="1200"/>
+            </a:lvl1pPr>
+          </a:lstStyle>
+          <a:p>
+            <a:endParaRPr lang="en-US"/>
+          </a:p>
+        </p:txBody>
+      </p:sp>
+      <p:sp>
+        <p:nvSpPr>
+          <p:cNvPr id="3" name="Date Placeholder 2"/>
+          <p:cNvSpPr>
+            <a:spLocks noGrp="1"/>
+          </p:cNvSpPr>
+          <p:nvPr>
+            <p:ph type="dt" idx="1"/>
+          </p:nvPr>
+        </p:nvSpPr>
+        <p:spPr>
+          <a:xfrm>
+            <a:off x="3884613" y="0"/>
+            <a:ext cx="2971800" cy="457200"/>
+          </a:xfrm>
+          <a:prstGeom prst="rect">
+            <a:avLst/>
+          </a:prstGeom>
+        </p:spPr>
+        <p:txBody>
+          <a:bodyPr vert="horz" lIns="91440" tIns="45720" rIns="91440" bIns="45720" rtlCol="0"/>
+          <a:lstStyle>
+            <a:lvl1pPr algn="r">
+              <a:defRPr sz="1200"/>
+            </a:lvl1pPr>
+          </a:lstStyle>
+          <a:p>
+            <a:fld id="{0F89C1C7-3DCD-1040-A9CF-14679D8B5DDD}" type="datetimeFigureOut">
+              <a:rPr lang="en-US" smtClean="0"/>
+              <a:t>10/17/16</a:t>
+            </a:fld>
+            <a:endParaRPr lang="en-US"/>
+          </a:p>
+        </p:txBody>
+      </p:sp>
+      <p:sp>
+        <p:nvSpPr>
+          <p:cNvPr id="4" name="Slide Image Placeholder 3"/>
+          <p:cNvSpPr>
+            <a:spLocks noGrp="1" noRot="1" noChangeAspect="1"/>
+          </p:cNvSpPr>
+          <p:nvPr>
+            <p:ph type="sldImg" idx="2"/>
+          </p:nvPr>
+        </p:nvSpPr>
+        <p:spPr>
+          <a:xfrm>
+            <a:off x="1143000" y="685800"/>
+            <a:ext cx="4572000" cy="3429000"/>
+          </a:xfrm>
+          <a:prstGeom prst="rect">
+            <a:avLst/>
+          </a:prstGeom>
+          <a:noFill/>
+          <a:ln w="12700">
+            <a:solidFill>
+              <a:prstClr val="black"/>
+            </a:solidFill>
+          </a:ln>
+        </p:spPr>
+        <p:txBody>
+          <a:bodyPr vert="horz" lIns="91440" tIns="45720" rIns="91440" bIns="45720" rtlCol="0" anchor="ctr"/>
+          <a:lstStyle/>
+          <a:p>
+            <a:endParaRPr lang="en-US"/>
+          </a:p>
+        </p:txBody>
+      </p:sp>
+      <p:sp>
+        <p:nvSpPr>
+          <p:cNvPr id="5" name="Notes Placeholder 4"/>
+          <p:cNvSpPr>
+            <a:spLocks noGrp="1"/>
+          </p:cNvSpPr>
+          <p:nvPr>
+            <p:ph type="body" sz="quarter" idx="3"/>
+          </p:nvPr>
+        </p:nvSpPr>
+        <p:spPr>
+          <a:xfrm>
+            <a:off x="685800" y="4343400"/>
+            <a:ext cx="5486400" cy="4114800"/>
+          </a:xfrm>
+          <a:prstGeom prst="rect">
+            <a:avLst/>
+          </a:prstGeom>
+        </p:spPr>
+        <p:txBody>
+          <a:bodyPr vert="horz" lIns="91440" tIns="45720" rIns="91440" bIns="45720" rtlCol="0"/>
+          <a:lstStyle/>
+          <a:p>
+            <a:pPr lvl="0"/>
+            <a:r>
+              <a:rPr lang="en-US" smtClean="0"/>
+              <a:t>Click to edit Master text styles</a:t>
+            </a:r>
+          </a:p>
+          <a:p>
+            <a:pPr lvl="1"/>
+            <a:r>
+              <a:rPr lang="en-US" smtClean="0"/>
+              <a:t>Second level</a:t>
+            </a:r>
+          </a:p>
+          <a:p>
+            <a:pPr lvl="2"/>
+            <a:r>
+              <a:rPr lang="en-US" smtClean="0"/>
+              <a:t>Third level</a:t>
+            </a:r>
+          </a:p>
+          <a:p>
+            <a:pPr lvl="3"/>
+            <a:r>
+              <a:rPr lang="en-US" smtClean="0"/>
+              <a:t>Fourth level</a:t>
+            </a:r>
+          </a:p>
+          <a:p>
+            <a:pPr lvl="4"/>
+            <a:r>
+              <a:rPr lang="en-US" smtClean="0"/>
+              <a:t>Fifth level</a:t>
+            </a:r>
+            <a:endParaRPr lang="en-US"/>
+          </a:p>
+        </p:txBody>
+      </p:sp>
+      <p:sp>
+        <p:nvSpPr>
+          <p:cNvPr id="6" name="Footer Placeholder 5"/>
+          <p:cNvSpPr>
+            <a:spLocks noGrp="1"/>
+          </p:cNvSpPr>
+          <p:nvPr>
+            <p:ph type="ftr" sz="quarter" idx="4"/>
+          </p:nvPr>
+        </p:nvSpPr>
+        <p:spPr>
+          <a:xfrm>
+            <a:off x="0" y="8685213"/>
+            <a:ext cx="2971800" cy="457200"/>
+          </a:xfrm>
+          <a:prstGeom prst="rect">
+            <a:avLst/>
+          </a:prstGeom>
+        </p:spPr>
+        <p:txBody>
+          <a:bodyPr vert="horz" lIns="91440" tIns="45720" rIns="91440" bIns="45720" rtlCol="0" anchor="b"/>
+          <a:lstStyle>
+            <a:lvl1pPr algn="l">
+              <a:defRPr sz="1200"/>
+            </a:lvl1pPr>
+          </a:lstStyle>
+          <a:p>
+            <a:endParaRPr lang="en-US"/>
+          </a:p>
+        </p:txBody>
+      </p:sp>
+      <p:sp>
+        <p:nvSpPr>
+          <p:cNvPr id="7" name="Slide Number Placeholder 6"/>
+          <p:cNvSpPr>
+            <a:spLocks noGrp="1"/>
+          </p:cNvSpPr>
+          <p:nvPr>
+            <p:ph type="sldNum" sz="quarter" idx="5"/>
+          </p:nvPr>
+        </p:nvSpPr>
+        <p:spPr>
+          <a:xfrm>
+            <a:off x="3884613" y="8685213"/>
+            <a:ext cx="2971800" cy="457200"/>
+          </a:xfrm>
+          <a:prstGeom prst="rect">
+            <a:avLst/>
+          </a:prstGeom>
+        </p:spPr>
+        <p:txBody>
+          <a:bodyPr vert="horz" lIns="91440" tIns="45720" rIns="91440" bIns="45720" rtlCol="0" anchor="b"/>
+          <a:lstStyle>
+            <a:lvl1pPr algn="r">
+              <a:defRPr sz="1200"/>
+            </a:lvl1pPr>
+          </a:lstStyle>
+          <a:p>
+            <a:fld id="{BB5E49A5-4136-284D-997B-48E1D791AD67}" type="slidenum">
+              <a:rPr lang="en-US" smtClean="0"/>
+              <a:t>‹#›</a:t>
+            </a:fld>
+            <a:endParaRPr lang="en-US"/>
+          </a:p>
+        </p:txBody>
+      </p:sp>
+    </p:spTree>
+    <p:extLst>
+      <p:ext uri="{BB962C8B-B14F-4D97-AF65-F5344CB8AC3E}">
+        <p14:creationId xmlns:p14="http://schemas.microsoft.com/office/powerpoint/2010/main" val="2623252185"/>
+      </p:ext>
+    </p:extLst>
+  </p:cSld>
+  <p:clrMap bg1="lt1" tx1="dk1" bg2="lt2" tx2="dk2" accent1="accent1" accent2="accent2" accent3="accent3" accent4="accent4" accent5="accent5" accent6="accent6" hlink="hlink" folHlink="folHlink"/>
+  <p:notesStyle>
+    <a:lvl1pPr marL="0" algn="l" defTabSz="457200" rtl="0" eaLnBrk="1" latinLnBrk="0" hangingPunct="1">
+      <a:defRPr sz="1200" kern="1200">
+        <a:solidFill>
+          <a:schemeClr val="tx1"/>
+        </a:solidFill>
+        <a:latin typeface="+mn-lt"/>
+        <a:ea typeface="+mn-ea"/>
+        <a:cs typeface="+mn-cs"/>
+      </a:defRPr>
+    </a:lvl1pPr>
+    <a:lvl2pPr marL="457200" algn="l" defTabSz="457200" rtl="0" eaLnBrk="1" latinLnBrk="0" hangingPunct="1">
+      <a:defRPr sz="1200" kern="1200">
+        <a:solidFill>
+          <a:schemeClr val="tx1"/>
+        </a:solidFill>
+        <a:latin typeface="+mn-lt"/>
+        <a:ea typeface="+mn-ea"/>
+        <a:cs typeface="+mn-cs"/>
+      </a:defRPr>
+    </a:lvl2pPr>
+    <a:lvl3pPr marL="914400" algn="l" defTabSz="457200" rtl="0" eaLnBrk="1" latinLnBrk="0" hangingPunct="1">
+      <a:defRPr sz="1200" kern="1200">
+        <a:solidFill>
+          <a:schemeClr val="tx1"/>
+        </a:solidFill>
+        <a:latin typeface="+mn-lt"/>
+        <a:ea typeface="+mn-ea"/>
+        <a:cs typeface="+mn-cs"/>
+      </a:defRPr>
+    </a:lvl3pPr>
+    <a:lvl4pPr marL="1371600" algn="l" defTabSz="457200" rtl="0" eaLnBrk="1" latinLnBrk="0" hangingPunct="1">
+      <a:defRPr sz="1200" kern="1200">
+        <a:solidFill>
+          <a:schemeClr val="tx1"/>
+        </a:solidFill>
+        <a:latin typeface="+mn-lt"/>
+        <a:ea typeface="+mn-ea"/>
+        <a:cs typeface="+mn-cs"/>
+      </a:defRPr>
+    </a:lvl4pPr>
+    <a:lvl5pPr marL="1828800" algn="l" defTabSz="457200" rtl="0" eaLnBrk="1" latinLnBrk="0" hangingPunct="1">
+      <a:defRPr sz="1200" kern="1200">
+        <a:solidFill>
+          <a:schemeClr val="tx1"/>
+        </a:solidFill>
+        <a:latin typeface="+mn-lt"/>
+        <a:ea typeface="+mn-ea"/>
+        <a:cs typeface="+mn-cs"/>
+      </a:defRPr>
+    </a:lvl5pPr>
+    <a:lvl6pPr marL="2286000" algn="l" defTabSz="457200" rtl="0" eaLnBrk="1" latinLnBrk="0" hangingPunct="1">
+      <a:defRPr sz="1200" kern="1200">
+        <a:solidFill>
+          <a:schemeClr val="tx1"/>
+        </a:solidFill>
+        <a:latin typeface="+mn-lt"/>
+        <a:ea typeface="+mn-ea"/>
+        <a:cs typeface="+mn-cs"/>
+      </a:defRPr>
+    </a:lvl6pPr>
+    <a:lvl7pPr marL="2743200" algn="l" defTabSz="457200" rtl="0" eaLnBrk="1" latinLnBrk="0" hangingPunct="1">
+      <a:defRPr sz="1200" kern="1200">
+        <a:solidFill>
+          <a:schemeClr val="tx1"/>
+        </a:solidFill>
+        <a:latin typeface="+mn-lt"/>
+        <a:ea typeface="+mn-ea"/>
+        <a:cs typeface="+mn-cs"/>
+      </a:defRPr>
+    </a:lvl7pPr>
+    <a:lvl8pPr marL="3200400" algn="l" defTabSz="457200" rtl="0" eaLnBrk="1" latinLnBrk="0" hangingPunct="1">
+      <a:defRPr sz="1200" kern="1200">
+        <a:solidFill>
+          <a:schemeClr val="tx1"/>
+        </a:solidFill>
+        <a:latin typeface="+mn-lt"/>
+        <a:ea typeface="+mn-ea"/>
+        <a:cs typeface="+mn-cs"/>
+      </a:defRPr>
+    </a:lvl8pPr>
+    <a:lvl9pPr marL="3657600" algn="l" defTabSz="457200" rtl="0" eaLnBrk="1" latinLnBrk="0" hangingPunct="1">
+      <a:defRPr sz="1200" kern="1200">
+        <a:solidFill>
+          <a:schemeClr val="tx1"/>
+        </a:solidFill>
+        <a:latin typeface="+mn-lt"/>
+        <a:ea typeface="+mn-ea"/>
+        <a:cs typeface="+mn-cs"/>
+      </a:defRPr>
+    </a:lvl9pPr>
+  </p:notesStyle>
+</p:notesMaster>
+</file>
+
+<file path=ppt/notesSlides/notesSlide1.xml><?xml version="1.0" encoding="utf-8"?>
+<p:notes xmlns:a="http://schemas.openxmlformats.org/drawingml/2006/main" xmlns:p="http://schemas.openxmlformats.org/presentationml/2006/main" xmlns:r="http://schemas.openxmlformats.org/officeDocument/2006/relationships">
+  <p:cSld>
+    <p:spTree>
+      <p:nvGrpSpPr>
+        <p:cNvPr id="1" name=""/>
+        <p:cNvGrpSpPr/>
+        <p:nvPr/>
+      </p:nvGrpSpPr>
+      <p:grpSpPr>
+        <a:xfrm>
+          <a:off x="0" y="0"/>
+          <a:ext cx="0" cy="0"/>
+          <a:chOff x="0" y="0"/>
+          <a:chExt cx="0" cy="0"/>
+        </a:xfrm>
+      </p:grpSpPr>
+      <p:sp>
+        <p:nvSpPr>
+          <p:cNvPr id="2" name="Slide Image Placeholder 1"/>
+          <p:cNvSpPr>
+            <a:spLocks noGrp="1"/>
+          </p:cNvSpPr>
+          <p:nvPr>
+            <p:ph type="sldImg" idx="2"/>
+          </p:nvPr>
+        </p:nvSpPr>
+        <p:spPr/>
+      </p:sp>
+      <p:sp>
+        <p:nvSpPr>
+          <p:cNvPr id="3" name="Notes Placeholder 2"/>
+          <p:cNvSpPr>
+            <a:spLocks noGrp="1"/>
+          </p:cNvSpPr>
+          <p:nvPr>
+            <p:ph type="body" idx="3" sz="quarter"/>
+          </p:nvPr>
+        </p:nvSpPr>
+        <p:spPr/>
+        <p:txBody>
+          <a:bodyPr/>
+          <a:lstStyle/>
+          <a:p>
+            <a:r>
+              <a:t>Siehe Trainerhandbuch (Sektion 3) für Moderationshinweise, Timing und erwartete Teilnehmerreaktionen.</a:t>
+            </a:r>
+          </a:p>
+        </p:txBody>
+      </p:sp>
+      <p:sp>
+        <p:nvSpPr>
+          <p:cNvPr id="4" name="Slide Number Placeholder 3"/>
+          <p:cNvSpPr>
+            <a:spLocks noGrp="1"/>
+          </p:cNvSpPr>
+          <p:nvPr>
+            <p:ph type="sldNum" idx="5" sz="quarter"/>
+          </p:nvPr>
+        </p:nvSpPr>
+        <p:spPr/>
+      </p:sp>
+    </p:spTree>
+  </p:cSld>
+  <p:clrMapOvr>
+    <a:masterClrMapping/>
+  </p:clrMapOvr>
+</p:notes>
+</file>
+
+<file path=ppt/notesSlides/notesSlide10.xml><?xml version="1.0" encoding="utf-8"?>
+<p:notes xmlns:a="http://schemas.openxmlformats.org/drawingml/2006/main" xmlns:p="http://schemas.openxmlformats.org/presentationml/2006/main" xmlns:r="http://schemas.openxmlformats.org/officeDocument/2006/relationships">
+  <p:cSld>
+    <p:spTree>
+      <p:nvGrpSpPr>
+        <p:cNvPr id="1" name=""/>
+        <p:cNvGrpSpPr/>
+        <p:nvPr/>
+      </p:nvGrpSpPr>
+      <p:grpSpPr>
+        <a:xfrm>
+          <a:off x="0" y="0"/>
+          <a:ext cx="0" cy="0"/>
+          <a:chOff x="0" y="0"/>
+          <a:chExt cx="0" cy="0"/>
+        </a:xfrm>
+      </p:grpSpPr>
+      <p:sp>
+        <p:nvSpPr>
+          <p:cNvPr id="2" name="Slide Image Placeholder 1"/>
+          <p:cNvSpPr>
+            <a:spLocks noGrp="1"/>
+          </p:cNvSpPr>
+          <p:nvPr>
+            <p:ph type="sldImg" idx="2"/>
+          </p:nvPr>
+        </p:nvSpPr>
+        <p:spPr/>
+      </p:sp>
+      <p:sp>
+        <p:nvSpPr>
+          <p:cNvPr id="3" name="Notes Placeholder 2"/>
+          <p:cNvSpPr>
+            <a:spLocks noGrp="1"/>
+          </p:cNvSpPr>
+          <p:nvPr>
+            <p:ph type="body" idx="3" sz="quarter"/>
+          </p:nvPr>
+        </p:nvSpPr>
+        <p:spPr/>
+        <p:txBody>
+          <a:bodyPr/>
+          <a:lstStyle/>
+          <a:p>
+            <a:r>
+              <a:t>Siehe Trainerhandbuch (Sektion 3) für Moderationshinweise, Timing und erwartete Teilnehmerreaktionen.</a:t>
+            </a:r>
+          </a:p>
+        </p:txBody>
+      </p:sp>
+      <p:sp>
+        <p:nvSpPr>
+          <p:cNvPr id="4" name="Slide Number Placeholder 3"/>
+          <p:cNvSpPr>
+            <a:spLocks noGrp="1"/>
+          </p:cNvSpPr>
+          <p:nvPr>
+            <p:ph type="sldNum" idx="5" sz="quarter"/>
+          </p:nvPr>
+        </p:nvSpPr>
+        <p:spPr/>
+      </p:sp>
+    </p:spTree>
+  </p:cSld>
+  <p:clrMapOvr>
+    <a:masterClrMapping/>
+  </p:clrMapOvr>
+</p:notes>
+</file>
+
+<file path=ppt/notesSlides/notesSlide11.xml><?xml version="1.0" encoding="utf-8"?>
+<p:notes xmlns:a="http://schemas.openxmlformats.org/drawingml/2006/main" xmlns:p="http://schemas.openxmlformats.org/presentationml/2006/main" xmlns:r="http://schemas.openxmlformats.org/officeDocument/2006/relationships">
+  <p:cSld>
+    <p:spTree>
+      <p:nvGrpSpPr>
+        <p:cNvPr id="1" name=""/>
+        <p:cNvGrpSpPr/>
+        <p:nvPr/>
+      </p:nvGrpSpPr>
+      <p:grpSpPr>
+        <a:xfrm>
+          <a:off x="0" y="0"/>
+          <a:ext cx="0" cy="0"/>
+          <a:chOff x="0" y="0"/>
+          <a:chExt cx="0" cy="0"/>
+        </a:xfrm>
+      </p:grpSpPr>
+      <p:sp>
+        <p:nvSpPr>
+          <p:cNvPr id="2" name="Slide Image Placeholder 1"/>
+          <p:cNvSpPr>
+            <a:spLocks noGrp="1"/>
+          </p:cNvSpPr>
+          <p:nvPr>
+            <p:ph type="sldImg" idx="2"/>
+          </p:nvPr>
+        </p:nvSpPr>
+        <p:spPr/>
+      </p:sp>
+      <p:sp>
+        <p:nvSpPr>
+          <p:cNvPr id="3" name="Notes Placeholder 2"/>
+          <p:cNvSpPr>
+            <a:spLocks noGrp="1"/>
+          </p:cNvSpPr>
+          <p:nvPr>
+            <p:ph type="body" idx="3" sz="quarter"/>
+          </p:nvPr>
+        </p:nvSpPr>
+        <p:spPr/>
+        <p:txBody>
+          <a:bodyPr/>
+          <a:lstStyle/>
+          <a:p>
+            <a:r>
+              <a:t>Siehe Trainerhandbuch (Sektion 3) für Moderationshinweise, Timing und erwartete Teilnehmerreaktionen.</a:t>
+            </a:r>
+          </a:p>
+        </p:txBody>
+      </p:sp>
+      <p:sp>
+        <p:nvSpPr>
+          <p:cNvPr id="4" name="Slide Number Placeholder 3"/>
+          <p:cNvSpPr>
+            <a:spLocks noGrp="1"/>
+          </p:cNvSpPr>
+          <p:nvPr>
+            <p:ph type="sldNum" idx="5" sz="quarter"/>
+          </p:nvPr>
+        </p:nvSpPr>
+        <p:spPr/>
+      </p:sp>
+    </p:spTree>
+  </p:cSld>
+  <p:clrMapOvr>
+    <a:masterClrMapping/>
+  </p:clrMapOvr>
+</p:notes>
+</file>
+
+<file path=ppt/notesSlides/notesSlide2.xml><?xml version="1.0" encoding="utf-8"?>
+<p:notes xmlns:a="http://schemas.openxmlformats.org/drawingml/2006/main" xmlns:p="http://schemas.openxmlformats.org/presentationml/2006/main" xmlns:r="http://schemas.openxmlformats.org/officeDocument/2006/relationships">
+  <p:cSld>
+    <p:spTree>
+      <p:nvGrpSpPr>
+        <p:cNvPr id="1" name=""/>
+        <p:cNvGrpSpPr/>
+        <p:nvPr/>
+      </p:nvGrpSpPr>
+      <p:grpSpPr>
+        <a:xfrm>
+          <a:off x="0" y="0"/>
+          <a:ext cx="0" cy="0"/>
+          <a:chOff x="0" y="0"/>
+          <a:chExt cx="0" cy="0"/>
+        </a:xfrm>
+      </p:grpSpPr>
+      <p:sp>
+        <p:nvSpPr>
+          <p:cNvPr id="2" name="Slide Image Placeholder 1"/>
+          <p:cNvSpPr>
+            <a:spLocks noGrp="1"/>
+          </p:cNvSpPr>
+          <p:nvPr>
+            <p:ph type="sldImg" idx="2"/>
+          </p:nvPr>
+        </p:nvSpPr>
+        <p:spPr/>
+      </p:sp>
+      <p:sp>
+        <p:nvSpPr>
+          <p:cNvPr id="3" name="Notes Placeholder 2"/>
+          <p:cNvSpPr>
+            <a:spLocks noGrp="1"/>
+          </p:cNvSpPr>
+          <p:nvPr>
+            <p:ph type="body" idx="3" sz="quarter"/>
+          </p:nvPr>
+        </p:nvSpPr>
+        <p:spPr/>
+        <p:txBody>
+          <a:bodyPr/>
+          <a:lstStyle/>
+          <a:p>
+            <a:r>
+              <a:t>Siehe Trainerhandbuch (Sektion 3) für Moderationshinweise, Timing und erwartete Teilnehmerreaktionen.</a:t>
+            </a:r>
+          </a:p>
+        </p:txBody>
+      </p:sp>
+      <p:sp>
+        <p:nvSpPr>
+          <p:cNvPr id="4" name="Slide Number Placeholder 3"/>
+          <p:cNvSpPr>
+            <a:spLocks noGrp="1"/>
+          </p:cNvSpPr>
+          <p:nvPr>
+            <p:ph type="sldNum" idx="5" sz="quarter"/>
+          </p:nvPr>
+        </p:nvSpPr>
+        <p:spPr/>
+      </p:sp>
+    </p:spTree>
+  </p:cSld>
+  <p:clrMapOvr>
+    <a:masterClrMapping/>
+  </p:clrMapOvr>
+</p:notes>
+</file>
+
+<file path=ppt/notesSlides/notesSlide3.xml><?xml version="1.0" encoding="utf-8"?>
+<p:notes xmlns:a="http://schemas.openxmlformats.org/drawingml/2006/main" xmlns:p="http://schemas.openxmlformats.org/presentationml/2006/main" xmlns:r="http://schemas.openxmlformats.org/officeDocument/2006/relationships">
+  <p:cSld>
+    <p:spTree>
+      <p:nvGrpSpPr>
+        <p:cNvPr id="1" name=""/>
+        <p:cNvGrpSpPr/>
+        <p:nvPr/>
+      </p:nvGrpSpPr>
+      <p:grpSpPr>
+        <a:xfrm>
+          <a:off x="0" y="0"/>
+          <a:ext cx="0" cy="0"/>
+          <a:chOff x="0" y="0"/>
+          <a:chExt cx="0" cy="0"/>
+        </a:xfrm>
+      </p:grpSpPr>
+      <p:sp>
+        <p:nvSpPr>
+          <p:cNvPr id="2" name="Slide Image Placeholder 1"/>
+          <p:cNvSpPr>
+            <a:spLocks noGrp="1"/>
+          </p:cNvSpPr>
+          <p:nvPr>
+            <p:ph type="sldImg" idx="2"/>
+          </p:nvPr>
+        </p:nvSpPr>
+        <p:spPr/>
+      </p:sp>
+      <p:sp>
+        <p:nvSpPr>
+          <p:cNvPr id="3" name="Notes Placeholder 2"/>
+          <p:cNvSpPr>
+            <a:spLocks noGrp="1"/>
+          </p:cNvSpPr>
+          <p:nvPr>
+            <p:ph type="body" idx="3" sz="quarter"/>
+          </p:nvPr>
+        </p:nvSpPr>
+        <p:spPr/>
+        <p:txBody>
+          <a:bodyPr/>
+          <a:lstStyle/>
+          <a:p>
+            <a:r>
+              <a:t>Siehe Trainerhandbuch (Sektion 3) für Moderationshinweise, Timing und erwartete Teilnehmerreaktionen.</a:t>
+            </a:r>
+          </a:p>
+        </p:txBody>
+      </p:sp>
+      <p:sp>
+        <p:nvSpPr>
+          <p:cNvPr id="4" name="Slide Number Placeholder 3"/>
+          <p:cNvSpPr>
+            <a:spLocks noGrp="1"/>
+          </p:cNvSpPr>
+          <p:nvPr>
+            <p:ph type="sldNum" idx="5" sz="quarter"/>
+          </p:nvPr>
+        </p:nvSpPr>
+        <p:spPr/>
+      </p:sp>
+    </p:spTree>
+  </p:cSld>
+  <p:clrMapOvr>
+    <a:masterClrMapping/>
+  </p:clrMapOvr>
+</p:notes>
+</file>
+
+<file path=ppt/notesSlides/notesSlide4.xml><?xml version="1.0" encoding="utf-8"?>
+<p:notes xmlns:a="http://schemas.openxmlformats.org/drawingml/2006/main" xmlns:p="http://schemas.openxmlformats.org/presentationml/2006/main" xmlns:r="http://schemas.openxmlformats.org/officeDocument/2006/relationships">
+  <p:cSld>
+    <p:spTree>
+      <p:nvGrpSpPr>
+        <p:cNvPr id="1" name=""/>
+        <p:cNvGrpSpPr/>
+        <p:nvPr/>
+      </p:nvGrpSpPr>
+      <p:grpSpPr>
+        <a:xfrm>
+          <a:off x="0" y="0"/>
+          <a:ext cx="0" cy="0"/>
+          <a:chOff x="0" y="0"/>
+          <a:chExt cx="0" cy="0"/>
+        </a:xfrm>
+      </p:grpSpPr>
+      <p:sp>
+        <p:nvSpPr>
+          <p:cNvPr id="2" name="Slide Image Placeholder 1"/>
+          <p:cNvSpPr>
+            <a:spLocks noGrp="1"/>
+          </p:cNvSpPr>
+          <p:nvPr>
+            <p:ph type="sldImg" idx="2"/>
+          </p:nvPr>
+        </p:nvSpPr>
+        <p:spPr/>
+      </p:sp>
+      <p:sp>
+        <p:nvSpPr>
+          <p:cNvPr id="3" name="Notes Placeholder 2"/>
+          <p:cNvSpPr>
+            <a:spLocks noGrp="1"/>
+          </p:cNvSpPr>
+          <p:nvPr>
+            <p:ph type="body" idx="3" sz="quarter"/>
+          </p:nvPr>
+        </p:nvSpPr>
+        <p:spPr/>
+        <p:txBody>
+          <a:bodyPr/>
+          <a:lstStyle/>
+          <a:p>
+            <a:r>
+              <a:t>Siehe Trainerhandbuch (Sektion 3) für Moderationshinweise, Timing und erwartete Teilnehmerreaktionen.</a:t>
+            </a:r>
+          </a:p>
+        </p:txBody>
+      </p:sp>
+      <p:sp>
+        <p:nvSpPr>
+          <p:cNvPr id="4" name="Slide Number Placeholder 3"/>
+          <p:cNvSpPr>
+            <a:spLocks noGrp="1"/>
+          </p:cNvSpPr>
+          <p:nvPr>
+            <p:ph type="sldNum" idx="5" sz="quarter"/>
+          </p:nvPr>
+        </p:nvSpPr>
+        <p:spPr/>
+      </p:sp>
+    </p:spTree>
+  </p:cSld>
+  <p:clrMapOvr>
+    <a:masterClrMapping/>
+  </p:clrMapOvr>
+</p:notes>
+</file>
+
+<file path=ppt/notesSlides/notesSlide5.xml><?xml version="1.0" encoding="utf-8"?>
+<p:notes xmlns:a="http://schemas.openxmlformats.org/drawingml/2006/main" xmlns:p="http://schemas.openxmlformats.org/presentationml/2006/main" xmlns:r="http://schemas.openxmlformats.org/officeDocument/2006/relationships">
+  <p:cSld>
+    <p:spTree>
+      <p:nvGrpSpPr>
+        <p:cNvPr id="1" name=""/>
+        <p:cNvGrpSpPr/>
+        <p:nvPr/>
+      </p:nvGrpSpPr>
+      <p:grpSpPr>
+        <a:xfrm>
+          <a:off x="0" y="0"/>
+          <a:ext cx="0" cy="0"/>
+          <a:chOff x="0" y="0"/>
+          <a:chExt cx="0" cy="0"/>
+        </a:xfrm>
+      </p:grpSpPr>
+      <p:sp>
+        <p:nvSpPr>
+          <p:cNvPr id="2" name="Slide Image Placeholder 1"/>
+          <p:cNvSpPr>
+            <a:spLocks noGrp="1"/>
+          </p:cNvSpPr>
+          <p:nvPr>
+            <p:ph type="sldImg" idx="2"/>
+          </p:nvPr>
+        </p:nvSpPr>
+        <p:spPr/>
+      </p:sp>
+      <p:sp>
+        <p:nvSpPr>
+          <p:cNvPr id="3" name="Notes Placeholder 2"/>
+          <p:cNvSpPr>
+            <a:spLocks noGrp="1"/>
+          </p:cNvSpPr>
+          <p:nvPr>
+            <p:ph type="body" idx="3" sz="quarter"/>
+          </p:nvPr>
+        </p:nvSpPr>
+        <p:spPr/>
+        <p:txBody>
+          <a:bodyPr/>
+          <a:lstStyle/>
+          <a:p>
+            <a:r>
+              <a:t>Siehe Trainerhandbuch (Sektion 3) für Moderationshinweise, Timing und erwartete Teilnehmerreaktionen.</a:t>
+            </a:r>
+          </a:p>
+        </p:txBody>
+      </p:sp>
+      <p:sp>
+        <p:nvSpPr>
+          <p:cNvPr id="4" name="Slide Number Placeholder 3"/>
+          <p:cNvSpPr>
+            <a:spLocks noGrp="1"/>
+          </p:cNvSpPr>
+          <p:nvPr>
+            <p:ph type="sldNum" idx="5" sz="quarter"/>
+          </p:nvPr>
+        </p:nvSpPr>
+        <p:spPr/>
+      </p:sp>
+    </p:spTree>
+  </p:cSld>
+  <p:clrMapOvr>
+    <a:masterClrMapping/>
+  </p:clrMapOvr>
+</p:notes>
+</file>
+
+<file path=ppt/notesSlides/notesSlide6.xml><?xml version="1.0" encoding="utf-8"?>
+<p:notes xmlns:a="http://schemas.openxmlformats.org/drawingml/2006/main" xmlns:p="http://schemas.openxmlformats.org/presentationml/2006/main" xmlns:r="http://schemas.openxmlformats.org/officeDocument/2006/relationships">
+  <p:cSld>
+    <p:spTree>
+      <p:nvGrpSpPr>
+        <p:cNvPr id="1" name=""/>
+        <p:cNvGrpSpPr/>
+        <p:nvPr/>
+      </p:nvGrpSpPr>
+      <p:grpSpPr>
+        <a:xfrm>
+          <a:off x="0" y="0"/>
+          <a:ext cx="0" cy="0"/>
+          <a:chOff x="0" y="0"/>
+          <a:chExt cx="0" cy="0"/>
+        </a:xfrm>
+      </p:grpSpPr>
+      <p:sp>
+        <p:nvSpPr>
+          <p:cNvPr id="2" name="Slide Image Placeholder 1"/>
+          <p:cNvSpPr>
+            <a:spLocks noGrp="1"/>
+          </p:cNvSpPr>
+          <p:nvPr>
+            <p:ph type="sldImg" idx="2"/>
+          </p:nvPr>
+        </p:nvSpPr>
+        <p:spPr/>
+      </p:sp>
+      <p:sp>
+        <p:nvSpPr>
+          <p:cNvPr id="3" name="Notes Placeholder 2"/>
+          <p:cNvSpPr>
+            <a:spLocks noGrp="1"/>
+          </p:cNvSpPr>
+          <p:nvPr>
+            <p:ph type="body" idx="3" sz="quarter"/>
+          </p:nvPr>
+        </p:nvSpPr>
+        <p:spPr/>
+        <p:txBody>
+          <a:bodyPr/>
+          <a:lstStyle/>
+          <a:p>
+            <a:r>
+              <a:t>Siehe Trainerhandbuch (Sektion 3) für Moderationshinweise, Timing und erwartete Teilnehmerreaktionen.</a:t>
+            </a:r>
+          </a:p>
+        </p:txBody>
+      </p:sp>
+      <p:sp>
+        <p:nvSpPr>
+          <p:cNvPr id="4" name="Slide Number Placeholder 3"/>
+          <p:cNvSpPr>
+            <a:spLocks noGrp="1"/>
+          </p:cNvSpPr>
+          <p:nvPr>
+            <p:ph type="sldNum" idx="5" sz="quarter"/>
+          </p:nvPr>
+        </p:nvSpPr>
+        <p:spPr/>
+      </p:sp>
+    </p:spTree>
+  </p:cSld>
+  <p:clrMapOvr>
+    <a:masterClrMapping/>
+  </p:clrMapOvr>
+</p:notes>
+</file>
+
+<file path=ppt/notesSlides/notesSlide7.xml><?xml version="1.0" encoding="utf-8"?>
+<p:notes xmlns:a="http://schemas.openxmlformats.org/drawingml/2006/main" xmlns:p="http://schemas.openxmlformats.org/presentationml/2006/main" xmlns:r="http://schemas.openxmlformats.org/officeDocument/2006/relationships">
+  <p:cSld>
+    <p:spTree>
+      <p:nvGrpSpPr>
+        <p:cNvPr id="1" name=""/>
+        <p:cNvGrpSpPr/>
+        <p:nvPr/>
+      </p:nvGrpSpPr>
+      <p:grpSpPr>
+        <a:xfrm>
+          <a:off x="0" y="0"/>
+          <a:ext cx="0" cy="0"/>
+          <a:chOff x="0" y="0"/>
+          <a:chExt cx="0" cy="0"/>
+        </a:xfrm>
+      </p:grpSpPr>
+      <p:sp>
+        <p:nvSpPr>
+          <p:cNvPr id="2" name="Slide Image Placeholder 1"/>
+          <p:cNvSpPr>
+            <a:spLocks noGrp="1"/>
+          </p:cNvSpPr>
+          <p:nvPr>
+            <p:ph type="sldImg" idx="2"/>
+          </p:nvPr>
+        </p:nvSpPr>
+        <p:spPr/>
+      </p:sp>
+      <p:sp>
+        <p:nvSpPr>
+          <p:cNvPr id="3" name="Notes Placeholder 2"/>
+          <p:cNvSpPr>
+            <a:spLocks noGrp="1"/>
+          </p:cNvSpPr>
+          <p:nvPr>
+            <p:ph type="body" idx="3" sz="quarter"/>
+          </p:nvPr>
+        </p:nvSpPr>
+        <p:spPr/>
+        <p:txBody>
+          <a:bodyPr/>
+          <a:lstStyle/>
+          <a:p>
+            <a:r>
+              <a:t>Siehe Trainerhandbuch (Sektion 3) für Moderationshinweise, Timing und erwartete Teilnehmerreaktionen.</a:t>
+            </a:r>
+          </a:p>
+        </p:txBody>
+      </p:sp>
+      <p:sp>
+        <p:nvSpPr>
+          <p:cNvPr id="4" name="Slide Number Placeholder 3"/>
+          <p:cNvSpPr>
+            <a:spLocks noGrp="1"/>
+          </p:cNvSpPr>
+          <p:nvPr>
+            <p:ph type="sldNum" idx="5" sz="quarter"/>
+          </p:nvPr>
+        </p:nvSpPr>
+        <p:spPr/>
+      </p:sp>
+    </p:spTree>
+  </p:cSld>
+  <p:clrMapOvr>
+    <a:masterClrMapping/>
+  </p:clrMapOvr>
+</p:notes>
+</file>
+
+<file path=ppt/notesSlides/notesSlide8.xml><?xml version="1.0" encoding="utf-8"?>
+<p:notes xmlns:a="http://schemas.openxmlformats.org/drawingml/2006/main" xmlns:p="http://schemas.openxmlformats.org/presentationml/2006/main" xmlns:r="http://schemas.openxmlformats.org/officeDocument/2006/relationships">
+  <p:cSld>
+    <p:spTree>
+      <p:nvGrpSpPr>
+        <p:cNvPr id="1" name=""/>
+        <p:cNvGrpSpPr/>
+        <p:nvPr/>
+      </p:nvGrpSpPr>
+      <p:grpSpPr>
+        <a:xfrm>
+          <a:off x="0" y="0"/>
+          <a:ext cx="0" cy="0"/>
+          <a:chOff x="0" y="0"/>
+          <a:chExt cx="0" cy="0"/>
+        </a:xfrm>
+      </p:grpSpPr>
+      <p:sp>
+        <p:nvSpPr>
+          <p:cNvPr id="2" name="Slide Image Placeholder 1"/>
+          <p:cNvSpPr>
+            <a:spLocks noGrp="1"/>
+          </p:cNvSpPr>
+          <p:nvPr>
+            <p:ph type="sldImg" idx="2"/>
+          </p:nvPr>
+        </p:nvSpPr>
+        <p:spPr/>
+      </p:sp>
+      <p:sp>
+        <p:nvSpPr>
+          <p:cNvPr id="3" name="Notes Placeholder 2"/>
+          <p:cNvSpPr>
+            <a:spLocks noGrp="1"/>
+          </p:cNvSpPr>
+          <p:nvPr>
+            <p:ph type="body" idx="3" sz="quarter"/>
+          </p:nvPr>
+        </p:nvSpPr>
+        <p:spPr/>
+        <p:txBody>
+          <a:bodyPr/>
+          <a:lstStyle/>
+          <a:p>
+            <a:r>
+              <a:t>Siehe Trainerhandbuch (Sektion 3) für Moderationshinweise, Timing und erwartete Teilnehmerreaktionen.</a:t>
+            </a:r>
+          </a:p>
+        </p:txBody>
+      </p:sp>
+      <p:sp>
+        <p:nvSpPr>
+          <p:cNvPr id="4" name="Slide Number Placeholder 3"/>
+          <p:cNvSpPr>
+            <a:spLocks noGrp="1"/>
+          </p:cNvSpPr>
+          <p:nvPr>
+            <p:ph type="sldNum" idx="5" sz="quarter"/>
+          </p:nvPr>
+        </p:nvSpPr>
+        <p:spPr/>
+      </p:sp>
+    </p:spTree>
+  </p:cSld>
+  <p:clrMapOvr>
+    <a:masterClrMapping/>
+  </p:clrMapOvr>
+</p:notes>
+</file>
+
+<file path=ppt/notesSlides/notesSlide9.xml><?xml version="1.0" encoding="utf-8"?>
+<p:notes xmlns:a="http://schemas.openxmlformats.org/drawingml/2006/main" xmlns:p="http://schemas.openxmlformats.org/presentationml/2006/main" xmlns:r="http://schemas.openxmlformats.org/officeDocument/2006/relationships">
+  <p:cSld>
+    <p:spTree>
+      <p:nvGrpSpPr>
+        <p:cNvPr id="1" name=""/>
+        <p:cNvGrpSpPr/>
+        <p:nvPr/>
+      </p:nvGrpSpPr>
+      <p:grpSpPr>
+        <a:xfrm>
+          <a:off x="0" y="0"/>
+          <a:ext cx="0" cy="0"/>
+          <a:chOff x="0" y="0"/>
+          <a:chExt cx="0" cy="0"/>
+        </a:xfrm>
+      </p:grpSpPr>
+      <p:sp>
+        <p:nvSpPr>
+          <p:cNvPr id="2" name="Slide Image Placeholder 1"/>
+          <p:cNvSpPr>
+            <a:spLocks noGrp="1"/>
+          </p:cNvSpPr>
+          <p:nvPr>
+            <p:ph type="sldImg" idx="2"/>
+          </p:nvPr>
+        </p:nvSpPr>
+        <p:spPr/>
+      </p:sp>
+      <p:sp>
+        <p:nvSpPr>
+          <p:cNvPr id="3" name="Notes Placeholder 2"/>
+          <p:cNvSpPr>
+            <a:spLocks noGrp="1"/>
+          </p:cNvSpPr>
+          <p:nvPr>
+            <p:ph type="body" idx="3" sz="quarter"/>
+          </p:nvPr>
+        </p:nvSpPr>
+        <p:spPr/>
+        <p:txBody>
+          <a:bodyPr/>
+          <a:lstStyle/>
+          <a:p>
+            <a:r>
+              <a:t>Siehe Trainerhandbuch (Sektion 3) für Moderationshinweise, Timing und erwartete Teilnehmerreaktionen.</a:t>
+            </a:r>
+          </a:p>
+        </p:txBody>
+      </p:sp>
+      <p:sp>
+        <p:nvSpPr>
+          <p:cNvPr id="4" name="Slide Number Placeholder 3"/>
+          <p:cNvSpPr>
+            <a:spLocks noGrp="1"/>
+          </p:cNvSpPr>
+          <p:nvPr>
+            <p:ph type="sldNum" idx="5" sz="quarter"/>
+          </p:nvPr>
+        </p:nvSpPr>
+        <p:spPr/>
+      </p:sp>
+    </p:spTree>
+  </p:cSld>
+  <p:clrMapOvr>
+    <a:masterClrMapping/>
+  </p:clrMapOvr>
+</p:notes>
 </file>
 
 <file path=ppt/slideLayouts/slideLayout1.xml><?xml version="1.0" encoding="utf-8"?>
@@ -9592,4 +10712,324 @@
   </a:objectDefaults>
   <a:extraClrSchemeLst/>
 </a:theme>
+</file>
+
+<file path=ppt/theme/theme2.xml><?xml version="1.0" encoding="utf-8"?>
+<a:theme xmlns:a="http://schemas.openxmlformats.org/drawingml/2006/main" name="Office Theme">
+  <a:themeElements>
+    <a:clrScheme name="Office">
+      <a:dk1>
+        <a:sysClr val="windowText" lastClr="000000"/>
+      </a:dk1>
+      <a:lt1>
+        <a:sysClr val="window" lastClr="FFFFFF"/>
+      </a:lt1>
+      <a:dk2>
+        <a:srgbClr val="1F497D"/>
+      </a:dk2>
+      <a:lt2>
+        <a:srgbClr val="EEECE1"/>
+      </a:lt2>
+      <a:accent1>
+        <a:srgbClr val="4F81BD"/>
+      </a:accent1>
+      <a:accent2>
+        <a:srgbClr val="C0504D"/>
+      </a:accent2>
+      <a:accent3>
+        <a:srgbClr val="9BBB59"/>
+      </a:accent3>
+      <a:accent4>
+        <a:srgbClr val="8064A2"/>
+      </a:accent4>
+      <a:accent5>
+        <a:srgbClr val="4BACC6"/>
+      </a:accent5>
+      <a:accent6>
+        <a:srgbClr val="F79646"/>
+      </a:accent6>
+      <a:hlink>
+        <a:srgbClr val="0000FF"/>
+      </a:hlink>
+      <a:folHlink>
+        <a:srgbClr val="800080"/>
+      </a:folHlink>
+    </a:clrScheme>
+    <a:fontScheme name="Office">
+      <a:majorFont>
+        <a:latin typeface="Calibri"/>
+        <a:ea typeface=""/>
+        <a:cs typeface=""/>
+        <a:font script="Jpan" typeface="ＭＳ Ｐゴシック"/>
+        <a:font script="Hang" typeface="맑은 고딕"/>
+        <a:font script="Hans" typeface="宋体"/>
+        <a:font script="Hant" typeface="新細明體"/>
+        <a:font script="Arab" typeface="Times New Roman"/>
+        <a:font script="Hebr" typeface="Times New Roman"/>
+        <a:font script="Thai" typeface="Angsana New"/>
+        <a:font script="Ethi" typeface="Nyala"/>
+        <a:font script="Beng" typeface="Vrinda"/>
+        <a:font script="Gujr" typeface="Shruti"/>
+        <a:font script="Khmr" typeface="MoolBoran"/>
+        <a:font script="Knda" typeface="Tunga"/>
+        <a:font script="Guru" typeface="Raavi"/>
+        <a:font script="Cans" typeface="Euphemia"/>
+        <a:font script="Cher" typeface="Plantagenet Cherokee"/>
+        <a:font script="Yiii" typeface="Microsoft Yi Baiti"/>
+        <a:font script="Tibt" typeface="Microsoft Himalaya"/>
+        <a:font script="Thaa" typeface="MV Boli"/>
+        <a:font script="Deva" typeface="Mangal"/>
+        <a:font script="Telu" typeface="Gautami"/>
+        <a:font script="Taml" typeface="Latha"/>
+        <a:font script="Syrc" typeface="Estrangelo Edessa"/>
+        <a:font script="Orya" typeface="Kalinga"/>
+        <a:font script="Mlym" typeface="Kartika"/>
+        <a:font script="Laoo" typeface="DokChampa"/>
+        <a:font script="Sinh" typeface="Iskoola Pota"/>
+        <a:font script="Mong" typeface="Mongolian Baiti"/>
+        <a:font script="Viet" typeface="Times New Roman"/>
+        <a:font script="Uigh" typeface="Microsoft Uighur"/>
+        <a:font script="Geor" typeface="Sylfaen"/>
+      </a:majorFont>
+      <a:minorFont>
+        <a:latin typeface="Calibri"/>
+        <a:ea typeface=""/>
+        <a:cs typeface=""/>
+        <a:font script="Jpan" typeface="ＭＳ Ｐゴシック"/>
+        <a:font script="Hang" typeface="맑은 고딕"/>
+        <a:font script="Hans" typeface="宋体"/>
+        <a:font script="Hant" typeface="新細明體"/>
+        <a:font script="Arab" typeface="Arial"/>
+        <a:font script="Hebr" typeface="Arial"/>
+        <a:font script="Thai" typeface="Cordia New"/>
+        <a:font script="Ethi" typeface="Nyala"/>
+        <a:font script="Beng" typeface="Vrinda"/>
+        <a:font script="Gujr" typeface="Shruti"/>
+        <a:font script="Khmr" typeface="DaunPenh"/>
+        <a:font script="Knda" typeface="Tunga"/>
+        <a:font script="Guru" typeface="Raavi"/>
+        <a:font script="Cans" typeface="Euphemia"/>
+        <a:font script="Cher" typeface="Plantagenet Cherokee"/>
+        <a:font script="Yiii" typeface="Microsoft Yi Baiti"/>
+        <a:font script="Tibt" typeface="Microsoft Himalaya"/>
+        <a:font script="Thaa" typeface="MV Boli"/>
+        <a:font script="Deva" typeface="Mangal"/>
+        <a:font script="Telu" typeface="Gautami"/>
+        <a:font script="Taml" typeface="Latha"/>
+        <a:font script="Syrc" typeface="Estrangelo Edessa"/>
+        <a:font script="Orya" typeface="Kalinga"/>
+        <a:font script="Mlym" typeface="Kartika"/>
+        <a:font script="Laoo" typeface="DokChampa"/>
+        <a:font script="Sinh" typeface="Iskoola Pota"/>
+        <a:font script="Mong" typeface="Mongolian Baiti"/>
+        <a:font script="Viet" typeface="Arial"/>
+        <a:font script="Uigh" typeface="Microsoft Uighur"/>
+        <a:font script="Geor" typeface="Sylfaen"/>
+      </a:minorFont>
+    </a:fontScheme>
+    <a:fmtScheme name="Office">
+      <a:fillStyleLst>
+        <a:solidFill>
+          <a:schemeClr val="phClr"/>
+        </a:solidFill>
+        <a:gradFill rotWithShape="1">
+          <a:gsLst>
+            <a:gs pos="0">
+              <a:schemeClr val="phClr">
+                <a:tint val="50000"/>
+                <a:satMod val="300000"/>
+              </a:schemeClr>
+            </a:gs>
+            <a:gs pos="35000">
+              <a:schemeClr val="phClr">
+                <a:tint val="37000"/>
+                <a:satMod val="300000"/>
+              </a:schemeClr>
+            </a:gs>
+            <a:gs pos="100000">
+              <a:schemeClr val="phClr">
+                <a:tint val="15000"/>
+                <a:satMod val="350000"/>
+              </a:schemeClr>
+            </a:gs>
+          </a:gsLst>
+          <a:lin ang="16200000" scaled="1"/>
+        </a:gradFill>
+        <a:gradFill rotWithShape="1">
+          <a:gsLst>
+            <a:gs pos="0">
+              <a:schemeClr val="phClr">
+                <a:tint val="100000"/>
+                <a:shade val="100000"/>
+                <a:satMod val="130000"/>
+              </a:schemeClr>
+            </a:gs>
+            <a:gs pos="100000">
+              <a:schemeClr val="phClr">
+                <a:tint val="50000"/>
+                <a:shade val="100000"/>
+                <a:satMod val="350000"/>
+              </a:schemeClr>
+            </a:gs>
+          </a:gsLst>
+          <a:lin ang="16200000" scaled="0"/>
+        </a:gradFill>
+      </a:fillStyleLst>
+      <a:lnStyleLst>
+        <a:ln w="9525" cap="flat" cmpd="sng" algn="ctr">
+          <a:solidFill>
+            <a:schemeClr val="phClr">
+              <a:shade val="95000"/>
+              <a:satMod val="105000"/>
+            </a:schemeClr>
+          </a:solidFill>
+          <a:prstDash val="solid"/>
+        </a:ln>
+        <a:ln w="25400" cap="flat" cmpd="sng" algn="ctr">
+          <a:solidFill>
+            <a:schemeClr val="phClr"/>
+          </a:solidFill>
+          <a:prstDash val="solid"/>
+        </a:ln>
+        <a:ln w="38100" cap="flat" cmpd="sng" algn="ctr">
+          <a:solidFill>
+            <a:schemeClr val="phClr"/>
+          </a:solidFill>
+          <a:prstDash val="solid"/>
+        </a:ln>
+      </a:lnStyleLst>
+      <a:effectStyleLst>
+        <a:effectStyle>
+          <a:effectLst>
+            <a:outerShdw blurRad="40000" dist="20000" dir="5400000" rotWithShape="0">
+              <a:srgbClr val="000000">
+                <a:alpha val="38000"/>
+              </a:srgbClr>
+            </a:outerShdw>
+          </a:effectLst>
+        </a:effectStyle>
+        <a:effectStyle>
+          <a:effectLst>
+            <a:outerShdw blurRad="40000" dist="23000" dir="5400000" rotWithShape="0">
+              <a:srgbClr val="000000">
+                <a:alpha val="35000"/>
+              </a:srgbClr>
+            </a:outerShdw>
+          </a:effectLst>
+        </a:effectStyle>
+        <a:effectStyle>
+          <a:effectLst>
+            <a:outerShdw blurRad="40000" dist="23000" dir="5400000" rotWithShape="0">
+              <a:srgbClr val="000000">
+                <a:alpha val="35000"/>
+              </a:srgbClr>
+            </a:outerShdw>
+          </a:effectLst>
+          <a:scene3d>
+            <a:camera prst="orthographicFront">
+              <a:rot lat="0" lon="0" rev="0"/>
+            </a:camera>
+            <a:lightRig rig="threePt" dir="t">
+              <a:rot lat="0" lon="0" rev="1200000"/>
+            </a:lightRig>
+          </a:scene3d>
+          <a:sp3d>
+            <a:bevelT w="63500" h="25400"/>
+          </a:sp3d>
+        </a:effectStyle>
+      </a:effectStyleLst>
+      <a:bgFillStyleLst>
+        <a:solidFill>
+          <a:schemeClr val="phClr"/>
+        </a:solidFill>
+        <a:gradFill rotWithShape="1">
+          <a:gsLst>
+            <a:gs pos="0">
+              <a:schemeClr val="phClr">
+                <a:tint val="40000"/>
+                <a:satMod val="350000"/>
+              </a:schemeClr>
+            </a:gs>
+            <a:gs pos="40000">
+              <a:schemeClr val="phClr">
+                <a:tint val="45000"/>
+                <a:shade val="99000"/>
+                <a:satMod val="350000"/>
+              </a:schemeClr>
+            </a:gs>
+            <a:gs pos="100000">
+              <a:schemeClr val="phClr">
+                <a:shade val="20000"/>
+                <a:satMod val="255000"/>
+              </a:schemeClr>
+            </a:gs>
+          </a:gsLst>
+          <a:path path="circle">
+            <a:fillToRect l="50000" t="-80000" r="50000" b="180000"/>
+          </a:path>
+        </a:gradFill>
+        <a:gradFill rotWithShape="1">
+          <a:gsLst>
+            <a:gs pos="0">
+              <a:schemeClr val="phClr">
+                <a:tint val="80000"/>
+                <a:satMod val="300000"/>
+              </a:schemeClr>
+            </a:gs>
+            <a:gs pos="100000">
+              <a:schemeClr val="phClr">
+                <a:shade val="30000"/>
+                <a:satMod val="200000"/>
+              </a:schemeClr>
+            </a:gs>
+          </a:gsLst>
+          <a:path path="circle">
+            <a:fillToRect l="50000" t="50000" r="50000" b="50000"/>
+          </a:path>
+        </a:gradFill>
+      </a:bgFillStyleLst>
+    </a:fmtScheme>
+  </a:themeElements>
+  <a:objectDefaults>
+    <a:spDef>
+      <a:spPr/>
+      <a:bodyPr/>
+      <a:lstStyle/>
+      <a:style>
+        <a:lnRef idx="1">
+          <a:schemeClr val="accent1"/>
+        </a:lnRef>
+        <a:fillRef idx="3">
+          <a:schemeClr val="accent1"/>
+        </a:fillRef>
+        <a:effectRef idx="2">
+          <a:schemeClr val="accent1"/>
+        </a:effectRef>
+        <a:fontRef idx="minor">
+          <a:schemeClr val="lt1"/>
+        </a:fontRef>
+      </a:style>
+    </a:spDef>
+    <a:lnDef>
+      <a:spPr/>
+      <a:bodyPr/>
+      <a:lstStyle/>
+      <a:style>
+        <a:lnRef idx="2">
+          <a:schemeClr val="accent1"/>
+        </a:lnRef>
+        <a:fillRef idx="0">
+          <a:schemeClr val="accent1"/>
+        </a:fillRef>
+        <a:effectRef idx="1">
+          <a:schemeClr val="accent1"/>
+        </a:effectRef>
+        <a:fontRef idx="minor">
+          <a:schemeClr val="tx1"/>
+        </a:fontRef>
+      </a:style>
+    </a:lnDef>
+  </a:objectDefaults>
+  <a:extraClrSchemeLst/>
+</a:theme>
 </file>
--- a/protected-downloads/praesentation/M20.pptx
+++ b/protected-downloads/praesentation/M20.pptx
@@ -4590,7 +4590,7 @@
                 </a:solidFill>
                 <a:latin typeface="Arial"/>
               </a:rPr>
-              <a:t>Stratege</a:t>
+              <a:t>Strategischer Partner</a:t>
             </a:r>
           </a:p>
         </p:txBody>

--- a/protected-downloads/praesentation/M20.pptx
+++ b/protected-downloads/praesentation/M20.pptx
@@ -6803,49 +6803,7 @@
       </p:sp>
       <p:sp>
         <p:nvSpPr>
-          <p:cNvPr id="8" name="TextBox 7"/>
-          <p:cNvSpPr txBox="1"/>
-          <p:nvPr/>
-        </p:nvSpPr>
-        <p:spPr>
-          <a:xfrm>
-            <a:off x="685800" y="1417320"/>
-            <a:ext cx="10817352" cy="5029200"/>
-          </a:xfrm>
-          <a:prstGeom prst="rect">
-            <a:avLst/>
-          </a:prstGeom>
-          <a:noFill/>
-        </p:spPr>
-        <p:txBody>
-          <a:bodyPr wrap="square">
-            <a:spAutoFit/>
-          </a:bodyPr>
-          <a:lstStyle/>
-          <a:p>
-            <a:pPr>
-              <a:spcBef>
-                <a:spcPts val="400"/>
-              </a:spcBef>
-              <a:spcAft>
-                <a:spcPts val="200"/>
-              </a:spcAft>
-            </a:pPr>
-            <a:r>
-              <a:rPr sz="1200">
-                <a:solidFill>
-                  <a:srgbClr val="3D5466"/>
-                </a:solidFill>
-                <a:latin typeface="Arial"/>
-              </a:rPr>
-              <a:t># 5. PRAXISTRANSFER</a:t>
-            </a:r>
-          </a:p>
-        </p:txBody>
-      </p:sp>
-      <p:sp>
-        <p:nvSpPr>
-          <p:cNvPr id="9" name="Rectangle 8"/>
+          <p:cNvPr id="8" name="Rectangle 7"/>
           <p:cNvSpPr/>
           <p:nvPr/>
         </p:nvSpPr>
@@ -6888,7 +6846,7 @@
       </p:sp>
       <p:sp>
         <p:nvSpPr>
-          <p:cNvPr id="10" name="TextBox 9"/>
+          <p:cNvPr id="9" name="TextBox 8"/>
           <p:cNvSpPr txBox="1"/>
           <p:nvPr/>
         </p:nvSpPr>

--- a/protected-downloads/praesentation/M20.pptx
+++ b/protected-downloads/praesentation/M20.pptx
@@ -8,7 +8,7 @@
     <p:sldId id="256" r:id="rId7"/>
     <p:sldId id="257" r:id="rId8"/>
     <p:sldId id="258" r:id="rId9"/>
-    <p:sldId id="259" r:id="rId11"/>
+    <p:sldId id="259" r:id="rId10"/>
     <p:sldId id="260" r:id="rId12"/>
     <p:sldId id="261" r:id="rId13"/>
     <p:sldId id="262" r:id="rId14"/>
@@ -19,6 +19,7 @@
     <p:sldId id="267" r:id="rId19"/>
     <p:sldId id="268" r:id="rId20"/>
     <p:sldId id="269" r:id="rId21"/>
+    <p:sldId id="270" r:id="rId22"/>
   </p:sldIdLst>
   <p:sldSz cx="12188952" cy="6858000" type="screen4x3"/>
   <p:notesSz cx="6858000" cy="9144000"/>
@@ -5033,7 +5034,7 @@
                 </a:solidFill>
                 <a:latin typeface="Source Serif 4"/>
               </a:rPr>
-              <a:t>Format 3: Präsenz in Gremien und Verbänden</a:t>
+              <a:t>Format 2: Empfehlungen geben, bevor man welche bekommt</a:t>
             </a:r>
           </a:p>
         </p:txBody>
@@ -5075,83 +5076,7 @@
                 </a:solidFill>
                 <a:latin typeface="Arial"/>
               </a:rPr>
-              <a:t>Strategisch wählen: Nicht jede Mitgliedschaft lohnt sich. Kriterien:</a:t>
-            </a:r>
-          </a:p>
-          <a:p>
-            <a:pPr>
-              <a:spcBef>
-                <a:spcPts val="400"/>
-              </a:spcBef>
-              <a:spcAft>
-                <a:spcPts val="200"/>
-              </a:spcAft>
-            </a:pPr>
-            <a:r>
-              <a:rPr sz="1300">
-                <a:solidFill>
-                  <a:srgbClr val="3D5466"/>
-                </a:solidFill>
-                <a:latin typeface="Arial"/>
-              </a:rPr>
-              <a:t>▸  Sind meine Zielkunden oder ihre Berater dort aktiv?</a:t>
-            </a:r>
-          </a:p>
-          <a:p>
-            <a:pPr>
-              <a:spcBef>
-                <a:spcPts val="400"/>
-              </a:spcBef>
-              <a:spcAft>
-                <a:spcPts val="200"/>
-              </a:spcAft>
-            </a:pPr>
-            <a:r>
-              <a:rPr sz="1300">
-                <a:solidFill>
-                  <a:srgbClr val="3D5466"/>
-                </a:solidFill>
-                <a:latin typeface="Arial"/>
-              </a:rPr>
-              <a:t>▸  Gibt es eine Möglichkeit, sich inhaltlich einzubringen (Vortrag, Arbeitskreis)?</a:t>
-            </a:r>
-          </a:p>
-          <a:p>
-            <a:pPr>
-              <a:spcBef>
-                <a:spcPts val="400"/>
-              </a:spcBef>
-              <a:spcAft>
-                <a:spcPts val="200"/>
-              </a:spcAft>
-            </a:pPr>
-            <a:r>
-              <a:rPr sz="1300">
-                <a:solidFill>
-                  <a:srgbClr val="3D5466"/>
-                </a:solidFill>
-                <a:latin typeface="Arial"/>
-              </a:rPr>
-              <a:t>▸  Lässt sich die Zeitinvestition rechtfertigen (qualitativ hochwertige Kontakte)?</a:t>
-            </a:r>
-          </a:p>
-          <a:p>
-            <a:pPr>
-              <a:spcBef>
-                <a:spcPts val="400"/>
-              </a:spcBef>
-              <a:spcAft>
-                <a:spcPts val="200"/>
-              </a:spcAft>
-            </a:pPr>
-            <a:r>
-              <a:rPr sz="1200">
-                <a:solidFill>
-                  <a:srgbClr val="3D5466"/>
-                </a:solidFill>
-                <a:latin typeface="Arial"/>
-              </a:rPr>
-              <a:t>Empfehlungen für FK-Berater in Süddeutschland – bewährteste Formate nach Zeitaufwand und Netzwerkqualität:</a:t>
+              <a:t>Praxisregel: „Ein guter Netzwerkpartner merkt, dass er zu mir gehört, bevor er das erste Mal mit mir gearbeitet hat."</a:t>
             </a:r>
           </a:p>
         </p:txBody>
@@ -5489,7 +5414,7 @@
                 </a:solidFill>
                 <a:latin typeface="Source Serif 4"/>
               </a:rPr>
-              <a:t>Format 4: Digitale Sichtbarkeit (nachrangig, selektiv)</a:t>
+              <a:t>Format 3: Präsenz in Gremien und Verbänden</a:t>
             </a:r>
           </a:p>
         </p:txBody>
@@ -5531,7 +5456,7 @@
                 </a:solidFill>
                 <a:latin typeface="Arial"/>
               </a:rPr>
-              <a:t>## 4.5 Der 90-Tage-Netzwerkplan</a:t>
+              <a:t>Strategisch wählen: Nicht jede Mitgliedschaft lohnt sich. Kriterien:</a:t>
             </a:r>
           </a:p>
           <a:p>
@@ -5544,13 +5469,13 @@
               </a:spcAft>
             </a:pPr>
             <a:r>
-              <a:rPr sz="1200">
+              <a:rPr sz="1300">
                 <a:solidFill>
                   <a:srgbClr val="3D5466"/>
                 </a:solidFill>
                 <a:latin typeface="Arial"/>
               </a:rPr>
-              <a:t>Ein Netzwerk entsteht nicht durch einmalige Aktionen. Es braucht ein System – klein, aber regelmäßig.</a:t>
+              <a:t>▸  Sind meine Zielkunden oder ihre Berater dort aktiv?</a:t>
             </a:r>
           </a:p>
           <a:p>
@@ -5563,13 +5488,13 @@
               </a:spcAft>
             </a:pPr>
             <a:r>
-              <a:rPr sz="1200">
+              <a:rPr sz="1300">
                 <a:solidFill>
                   <a:srgbClr val="3D5466"/>
                 </a:solidFill>
                 <a:latin typeface="Arial"/>
               </a:rPr>
-              <a:t>## 4.6 Praxiscase: Stefan Köhler – vom Geheimtipp zur Autorität</a:t>
+              <a:t>▸  Gibt es eine Möglichkeit, sich inhaltlich einzubringen (Vortrag, Arbeitskreis)?</a:t>
             </a:r>
           </a:p>
           <a:p>
@@ -5582,13 +5507,13 @@
               </a:spcAft>
             </a:pPr>
             <a:r>
-              <a:rPr sz="1200">
+              <a:rPr sz="1300">
                 <a:solidFill>
                   <a:srgbClr val="3D5466"/>
                 </a:solidFill>
                 <a:latin typeface="Arial"/>
               </a:rPr>
-              <a:t>Ausgangssituation</a:t>
+              <a:t>▸  Lässt sich die Zeitinvestition rechtfertigen (qualitativ hochwertige Kontakte)?</a:t>
             </a:r>
           </a:p>
           <a:p>
@@ -5607,140 +5532,7 @@
                 </a:solidFill>
                 <a:latin typeface="Arial"/>
               </a:rPr>
-              <a:t>Stefan arbeitet hart, berät gut – aber er ist unsichtbar.</a:t>
-            </a:r>
-          </a:p>
-          <a:p>
-            <a:pPr>
-              <a:spcBef>
-                <a:spcPts val="400"/>
-              </a:spcBef>
-              <a:spcAft>
-                <a:spcPts val="200"/>
-              </a:spcAft>
-            </a:pPr>
-            <a:r>
-              <a:rPr sz="1200">
-                <a:solidFill>
-                  <a:srgbClr val="3D5466"/>
-                </a:solidFill>
-                <a:latin typeface="Arial"/>
-              </a:rPr>
-              <a:t>Was Stefan verändert (in 90 Tagen)</a:t>
-            </a:r>
-          </a:p>
-          <a:p>
-            <a:pPr>
-              <a:spcBef>
-                <a:spcPts val="400"/>
-              </a:spcBef>
-              <a:spcAft>
-                <a:spcPts val="200"/>
-              </a:spcAft>
-            </a:pPr>
-            <a:r>
-              <a:rPr sz="1200">
-                <a:solidFill>
-                  <a:srgbClr val="3D5466"/>
-                </a:solidFill>
-                <a:latin typeface="Arial"/>
-              </a:rPr>
-              <a:t>Monat 1 – Analyse &amp; Positionierung:</a:t>
-            </a:r>
-          </a:p>
-          <a:p>
-            <a:pPr>
-              <a:spcBef>
-                <a:spcPts val="400"/>
-              </a:spcBef>
-              <a:spcAft>
-                <a:spcPts val="200"/>
-              </a:spcAft>
-            </a:pPr>
-            <a:r>
-              <a:rPr sz="1300">
-                <a:solidFill>
-                  <a:srgbClr val="3D5466"/>
-                </a:solidFill>
-                <a:latin typeface="Arial"/>
-              </a:rPr>
-              <a:t>▸  Stefan erstellt seine persönliche Netzwerkkarte. Ergebnis: Intern gut vernetzt, intern überbekannt. Extern: kaum Kontakte außerhalb seiner eigenen Kunden.</a:t>
-            </a:r>
-          </a:p>
-          <a:p>
-            <a:pPr>
-              <a:spcBef>
-                <a:spcPts val="400"/>
-              </a:spcBef>
-              <a:spcAft>
-                <a:spcPts val="200"/>
-              </a:spcAft>
-            </a:pPr>
-            <a:r>
-              <a:rPr sz="1300">
-                <a:solidFill>
-                  <a:srgbClr val="3D5466"/>
-                </a:solidFill>
-                <a:latin typeface="Arial"/>
-              </a:rPr>
-              <a:t>▸  Er identifiziert drei Multiplikatoren, die für sein Zielfeld entscheidend sind: (1) der größte Steuerberater für Landwirte in der Region, (2) der Geschäftsführer des regionalen Maschinenrings, (3) der BBV-Kreisverband.</a:t>
-            </a:r>
-          </a:p>
-          <a:p>
-            <a:pPr>
-              <a:spcBef>
-                <a:spcPts val="400"/>
-              </a:spcBef>
-              <a:spcAft>
-                <a:spcPts val="200"/>
-              </a:spcAft>
-            </a:pPr>
-            <a:r>
-              <a:rPr sz="1300">
-                <a:solidFill>
-                  <a:srgbClr val="3D5466"/>
-                </a:solidFill>
-                <a:latin typeface="Arial"/>
-              </a:rPr>
-              <a:t>▸  Er formuliert sein Positionierungsversprechen: „Ich bin der Ansprechpartner für Agrar- und Forstbetriebe ab 200 ha im Allgäu, wenn es um Investitionsfinanzierung, Betriebsumstrukturierung und Nachfolge geht."</a:t>
-            </a:r>
-          </a:p>
-          <a:p>
-            <a:pPr>
-              <a:spcBef>
-                <a:spcPts val="400"/>
-              </a:spcBef>
-              <a:spcAft>
-                <a:spcPts val="200"/>
-              </a:spcAft>
-            </a:pPr>
-            <a:r>
-              <a:rPr sz="1200">
-                <a:solidFill>
-                  <a:srgbClr val="3D5466"/>
-                </a:solidFill>
-                <a:latin typeface="Arial"/>
-              </a:rPr>
-              <a:t>Monat 2 – Erste Kontakte:</a:t>
-            </a:r>
-          </a:p>
-          <a:p>
-            <a:pPr>
-              <a:spcBef>
-                <a:spcPts val="400"/>
-              </a:spcBef>
-              <a:spcAft>
-                <a:spcPts val="200"/>
-              </a:spcAft>
-            </a:pPr>
-            <a:r>
-              <a:rPr sz="1300">
-                <a:solidFill>
-                  <a:srgbClr val="3D5466"/>
-                </a:solidFill>
-                <a:latin typeface="Arial"/>
-              </a:rPr>
-              <a:t>▸  Stefan ruft den Steuerberater an – nicht mit einem Verkaufsangebot, sondern mit einer konkreten Einladung: „Ich würde Ihnen gerne zeigen, wie wir bei Biogasinvestitionen vorgehen – vielleicht ist das für Ihre Mandanten relevant." Er bezieht sich dabei auf eine jüngste GAP-Meldung im Bayerischen Landwirtschaftlichen Wochenblatt als sachlichen Aufhänger. Der Steuerberater ist anfangs reserviert – Bankberater haben keinen guten Ruf bei Steuerberatern, die Direktvertrieb fürchten. Stefan macht deshalb keinen Produktbezug, sondern bietet ein fachliches Kurzgespräch über Fördermittel an, das dem Steuerberater selbst gegenüber seinen Mandanten nützt. → Treffen findet statt. Wäre möglich: Vorab-Kontakt über das BBV-Netzwerk oder ein gemeinsames IHK-Event hätte diesen Anruf noch einfacher gemacht.</a:t>
+              <a:t>Empfehlungen für FK-Berater in Süddeutschland – bewährteste Formate nach Zeitaufwand und Netzwerkqualität:</a:t>
             </a:r>
           </a:p>
         </p:txBody>
@@ -6078,7 +5870,7 @@
                 </a:solidFill>
                 <a:latin typeface="Source Serif 4"/>
               </a:rPr>
-              <a:t>Arbeitsblatt 1: Persönliche Netzwerkkarte</a:t>
+              <a:t>Format 4: Digitale Sichtbarkeit (nachrangig, selektiv)</a:t>
             </a:r>
           </a:p>
         </p:txBody>
@@ -6120,7 +5912,216 @@
                 </a:solidFill>
                 <a:latin typeface="Arial"/>
               </a:rPr>
-              <a:t>(Zeichnen oder tabellarisch ausfüllen)</a:t>
+              <a:t>## 4.5 Der 90-Tage-Netzwerkplan</a:t>
+            </a:r>
+          </a:p>
+          <a:p>
+            <a:pPr>
+              <a:spcBef>
+                <a:spcPts val="400"/>
+              </a:spcBef>
+              <a:spcAft>
+                <a:spcPts val="200"/>
+              </a:spcAft>
+            </a:pPr>
+            <a:r>
+              <a:rPr sz="1200">
+                <a:solidFill>
+                  <a:srgbClr val="3D5466"/>
+                </a:solidFill>
+                <a:latin typeface="Arial"/>
+              </a:rPr>
+              <a:t>Ein Netzwerk entsteht nicht durch einmalige Aktionen. Es braucht ein System – klein, aber regelmäßig.</a:t>
+            </a:r>
+          </a:p>
+          <a:p>
+            <a:pPr>
+              <a:spcBef>
+                <a:spcPts val="400"/>
+              </a:spcBef>
+              <a:spcAft>
+                <a:spcPts val="200"/>
+              </a:spcAft>
+            </a:pPr>
+            <a:r>
+              <a:rPr sz="1200">
+                <a:solidFill>
+                  <a:srgbClr val="3D5466"/>
+                </a:solidFill>
+                <a:latin typeface="Arial"/>
+              </a:rPr>
+              <a:t>## 4.6 Praxiscase: Stefan Köhler – vom Geheimtipp zur Autorität</a:t>
+            </a:r>
+          </a:p>
+          <a:p>
+            <a:pPr>
+              <a:spcBef>
+                <a:spcPts val="400"/>
+              </a:spcBef>
+              <a:spcAft>
+                <a:spcPts val="200"/>
+              </a:spcAft>
+            </a:pPr>
+            <a:r>
+              <a:rPr sz="1200">
+                <a:solidFill>
+                  <a:srgbClr val="3D5466"/>
+                </a:solidFill>
+                <a:latin typeface="Arial"/>
+              </a:rPr>
+              <a:t>Ausgangssituation</a:t>
+            </a:r>
+          </a:p>
+          <a:p>
+            <a:pPr>
+              <a:spcBef>
+                <a:spcPts val="400"/>
+              </a:spcBef>
+              <a:spcAft>
+                <a:spcPts val="200"/>
+              </a:spcAft>
+            </a:pPr>
+            <a:r>
+              <a:rPr sz="1200">
+                <a:solidFill>
+                  <a:srgbClr val="3D5466"/>
+                </a:solidFill>
+                <a:latin typeface="Arial"/>
+              </a:rPr>
+              <a:t>Stefan arbeitet hart, berät gut – aber er ist unsichtbar.</a:t>
+            </a:r>
+          </a:p>
+          <a:p>
+            <a:pPr>
+              <a:spcBef>
+                <a:spcPts val="400"/>
+              </a:spcBef>
+              <a:spcAft>
+                <a:spcPts val="200"/>
+              </a:spcAft>
+            </a:pPr>
+            <a:r>
+              <a:rPr sz="1200">
+                <a:solidFill>
+                  <a:srgbClr val="3D5466"/>
+                </a:solidFill>
+                <a:latin typeface="Arial"/>
+              </a:rPr>
+              <a:t>Was Stefan verändert (in 90 Tagen)</a:t>
+            </a:r>
+          </a:p>
+          <a:p>
+            <a:pPr>
+              <a:spcBef>
+                <a:spcPts val="400"/>
+              </a:spcBef>
+              <a:spcAft>
+                <a:spcPts val="200"/>
+              </a:spcAft>
+            </a:pPr>
+            <a:r>
+              <a:rPr sz="1200">
+                <a:solidFill>
+                  <a:srgbClr val="3D5466"/>
+                </a:solidFill>
+                <a:latin typeface="Arial"/>
+              </a:rPr>
+              <a:t>Monat 1 – Analyse &amp; Positionierung:</a:t>
+            </a:r>
+          </a:p>
+          <a:p>
+            <a:pPr>
+              <a:spcBef>
+                <a:spcPts val="400"/>
+              </a:spcBef>
+              <a:spcAft>
+                <a:spcPts val="200"/>
+              </a:spcAft>
+            </a:pPr>
+            <a:r>
+              <a:rPr sz="1300">
+                <a:solidFill>
+                  <a:srgbClr val="3D5466"/>
+                </a:solidFill>
+                <a:latin typeface="Arial"/>
+              </a:rPr>
+              <a:t>▸  Stefan erstellt seine persönliche Netzwerkkarte. Ergebnis: Intern gut vernetzt, intern überbekannt. Extern: kaum Kontakte außerhalb seiner eigenen Kunden.</a:t>
+            </a:r>
+          </a:p>
+          <a:p>
+            <a:pPr>
+              <a:spcBef>
+                <a:spcPts val="400"/>
+              </a:spcBef>
+              <a:spcAft>
+                <a:spcPts val="200"/>
+              </a:spcAft>
+            </a:pPr>
+            <a:r>
+              <a:rPr sz="1300">
+                <a:solidFill>
+                  <a:srgbClr val="3D5466"/>
+                </a:solidFill>
+                <a:latin typeface="Arial"/>
+              </a:rPr>
+              <a:t>▸  Er identifiziert drei Multiplikatoren, die für sein Zielfeld entscheidend sind: (1) der größte Steuerberater für Landwirte in der Region, (2) der Geschäftsführer des regionalen Maschinenrings, (3) der BBV-Kreisverband.</a:t>
+            </a:r>
+          </a:p>
+          <a:p>
+            <a:pPr>
+              <a:spcBef>
+                <a:spcPts val="400"/>
+              </a:spcBef>
+              <a:spcAft>
+                <a:spcPts val="200"/>
+              </a:spcAft>
+            </a:pPr>
+            <a:r>
+              <a:rPr sz="1300">
+                <a:solidFill>
+                  <a:srgbClr val="3D5466"/>
+                </a:solidFill>
+                <a:latin typeface="Arial"/>
+              </a:rPr>
+              <a:t>▸  Er formuliert sein Positionierungsversprechen: „Ich bin der Ansprechpartner für Agrar- und Forstbetriebe ab 200 ha im Allgäu, wenn es um Investitionsfinanzierung, Betriebsumstrukturierung und Nachfolge geht."</a:t>
+            </a:r>
+          </a:p>
+          <a:p>
+            <a:pPr>
+              <a:spcBef>
+                <a:spcPts val="400"/>
+              </a:spcBef>
+              <a:spcAft>
+                <a:spcPts val="200"/>
+              </a:spcAft>
+            </a:pPr>
+            <a:r>
+              <a:rPr sz="1200">
+                <a:solidFill>
+                  <a:srgbClr val="3D5466"/>
+                </a:solidFill>
+                <a:latin typeface="Arial"/>
+              </a:rPr>
+              <a:t>Monat 2 – Erste Kontakte:</a:t>
+            </a:r>
+          </a:p>
+          <a:p>
+            <a:pPr>
+              <a:spcBef>
+                <a:spcPts val="400"/>
+              </a:spcBef>
+              <a:spcAft>
+                <a:spcPts val="200"/>
+              </a:spcAft>
+            </a:pPr>
+            <a:r>
+              <a:rPr sz="1300">
+                <a:solidFill>
+                  <a:srgbClr val="3D5466"/>
+                </a:solidFill>
+                <a:latin typeface="Arial"/>
+              </a:rPr>
+              <a:t>▸  Stefan ruft den Steuerberater an – nicht mit einem Verkaufsangebot, sondern mit einer konkreten Einladung: „Ich würde Ihnen gerne zeigen, wie wir bei Biogasinvestitionen vorgehen – vielleicht ist das für Ihre Mandanten relevant." Er bezieht sich dabei auf eine jüngste GAP-Meldung im Bayerischen Landwirtschaftlichen Wochenblatt als sachlichen Aufhänger. Der Steuerberater ist anfangs reserviert – Bankberater haben keinen guten Ruf bei Steuerberatern, die Direktvertrieb fürchten. Stefan macht deshalb keinen Produktbezug, sondern bietet ein fachliches Kurzgespräch über Fördermittel an, das dem Steuerberater selbst gegenüber seinen Mandanten nützt. → Treffen findet statt. Wäre möglich: Vorab-Kontakt über das BBV-Netzwerk oder ein gemeinsames IHK-Event hätte diesen Anruf noch einfacher gemacht.</a:t>
             </a:r>
           </a:p>
         </p:txBody>
@@ -6458,14 +6459,56 @@
                 </a:solidFill>
                 <a:latin typeface="Source Serif 4"/>
               </a:rPr>
-              <a:t>Arbeitsblatt 2: Lückenanalyse</a:t>
-            </a:r>
-          </a:p>
-        </p:txBody>
-      </p:sp>
-      <p:sp>
-        <p:nvSpPr>
-          <p:cNvPr id="8" name="Rectangle 7"/>
+              <a:t>Arbeitsblatt 1: Persönliche Netzwerkkarte</a:t>
+            </a:r>
+          </a:p>
+        </p:txBody>
+      </p:sp>
+      <p:sp>
+        <p:nvSpPr>
+          <p:cNvPr id="8" name="TextBox 7"/>
+          <p:cNvSpPr txBox="1"/>
+          <p:nvPr/>
+        </p:nvSpPr>
+        <p:spPr>
+          <a:xfrm>
+            <a:off x="685800" y="1417320"/>
+            <a:ext cx="10817352" cy="5029200"/>
+          </a:xfrm>
+          <a:prstGeom prst="rect">
+            <a:avLst/>
+          </a:prstGeom>
+          <a:noFill/>
+        </p:spPr>
+        <p:txBody>
+          <a:bodyPr wrap="square">
+            <a:spAutoFit/>
+          </a:bodyPr>
+          <a:lstStyle/>
+          <a:p>
+            <a:pPr>
+              <a:spcBef>
+                <a:spcPts val="400"/>
+              </a:spcBef>
+              <a:spcAft>
+                <a:spcPts val="200"/>
+              </a:spcAft>
+            </a:pPr>
+            <a:r>
+              <a:rPr sz="1200">
+                <a:solidFill>
+                  <a:srgbClr val="3D5466"/>
+                </a:solidFill>
+                <a:latin typeface="Arial"/>
+              </a:rPr>
+              <a:t>(Zeichnen oder tabellarisch ausfüllen)</a:t>
+            </a:r>
+          </a:p>
+        </p:txBody>
+      </p:sp>
+      <p:sp>
+        <p:nvSpPr>
+          <p:cNvPr id="9" name="Rectangle 8"/>
           <p:cNvSpPr/>
           <p:nvPr/>
         </p:nvSpPr>
@@ -6508,7 +6551,7 @@
       </p:sp>
       <p:sp>
         <p:nvSpPr>
-          <p:cNvPr id="9" name="TextBox 8"/>
+          <p:cNvPr id="10" name="TextBox 9"/>
           <p:cNvSpPr txBox="1"/>
           <p:nvPr/>
         </p:nvSpPr>
@@ -6796,6 +6839,344 @@
                 </a:solidFill>
                 <a:latin typeface="Source Serif 4"/>
               </a:rPr>
+              <a:t>Arbeitsblatt 2: Lückenanalyse</a:t>
+            </a:r>
+          </a:p>
+        </p:txBody>
+      </p:sp>
+      <p:sp>
+        <p:nvSpPr>
+          <p:cNvPr id="8" name="Rectangle 7"/>
+          <p:cNvSpPr/>
+          <p:nvPr/>
+        </p:nvSpPr>
+        <p:spPr>
+          <a:xfrm>
+            <a:off x="0" y="6510528"/>
+            <a:ext cx="12188952" cy="347472"/>
+          </a:xfrm>
+          <a:prstGeom prst="rect">
+            <a:avLst/>
+          </a:prstGeom>
+          <a:solidFill>
+            <a:srgbClr val="0A1937"/>
+          </a:solidFill>
+          <a:ln>
+            <a:noFill/>
+          </a:ln>
+        </p:spPr>
+        <p:style>
+          <a:lnRef idx="1">
+            <a:schemeClr val="accent1"/>
+          </a:lnRef>
+          <a:fillRef idx="3">
+            <a:schemeClr val="accent1"/>
+          </a:fillRef>
+          <a:effectRef idx="2">
+            <a:schemeClr val="accent1"/>
+          </a:effectRef>
+          <a:fontRef idx="minor">
+            <a:schemeClr val="lt1"/>
+          </a:fontRef>
+        </p:style>
+        <p:txBody>
+          <a:bodyPr rtlCol="0" anchor="ctr"/>
+          <a:lstStyle/>
+          <a:p>
+            <a:pPr algn="ctr"/>
+          </a:p>
+        </p:txBody>
+      </p:sp>
+      <p:sp>
+        <p:nvSpPr>
+          <p:cNvPr id="9" name="TextBox 8"/>
+          <p:cNvSpPr txBox="1"/>
+          <p:nvPr/>
+        </p:nvSpPr>
+        <p:spPr>
+          <a:xfrm>
+            <a:off x="685800" y="6583680"/>
+            <a:ext cx="6490411" cy="256032"/>
+          </a:xfrm>
+          <a:prstGeom prst="rect">
+            <a:avLst/>
+          </a:prstGeom>
+          <a:noFill/>
+        </p:spPr>
+        <p:txBody>
+          <a:bodyPr wrap="none">
+            <a:spAutoFit/>
+          </a:bodyPr>
+          <a:lstStyle/>
+          <a:p>
+            <a:pPr algn="l"/>
+            <a:r>
+              <a:rPr sz="700">
+                <a:solidFill>
+                  <a:srgbClr val="A0B4D2"/>
+                </a:solidFill>
+                <a:latin typeface="JetBrains Mono"/>
+              </a:rPr>
+              <a:t>Benedikt Zoller Coaching  ·  FKB Campus  ·  M20</a:t>
+            </a:r>
+          </a:p>
+        </p:txBody>
+      </p:sp>
+    </p:spTree>
+  </p:cSld>
+  <p:clrMapOvr>
+    <a:masterClrMapping/>
+  </p:clrMapOvr>
+</p:sld>
+</file>
+
+<file path=ppt/slides/slide15.xml><?xml version="1.0" encoding="utf-8"?>
+<p:sld xmlns:a="http://schemas.openxmlformats.org/drawingml/2006/main" xmlns:p="http://schemas.openxmlformats.org/presentationml/2006/main" xmlns:r="http://schemas.openxmlformats.org/officeDocument/2006/relationships">
+  <p:cSld>
+    <p:spTree>
+      <p:nvGrpSpPr>
+        <p:cNvPr id="1" name=""/>
+        <p:cNvGrpSpPr/>
+        <p:nvPr/>
+      </p:nvGrpSpPr>
+      <p:grpSpPr/>
+      <p:sp>
+        <p:nvSpPr>
+          <p:cNvPr id="2" name="Rectangle 1"/>
+          <p:cNvSpPr/>
+          <p:nvPr/>
+        </p:nvSpPr>
+        <p:spPr>
+          <a:xfrm>
+            <a:off x="0" y="0"/>
+            <a:ext cx="12188952" cy="6858000"/>
+          </a:xfrm>
+          <a:prstGeom prst="rect">
+            <a:avLst/>
+          </a:prstGeom>
+          <a:solidFill>
+            <a:srgbClr val="EDEDF3"/>
+          </a:solidFill>
+          <a:ln>
+            <a:noFill/>
+          </a:ln>
+        </p:spPr>
+        <p:style>
+          <a:lnRef idx="1">
+            <a:schemeClr val="accent1"/>
+          </a:lnRef>
+          <a:fillRef idx="3">
+            <a:schemeClr val="accent1"/>
+          </a:fillRef>
+          <a:effectRef idx="2">
+            <a:schemeClr val="accent1"/>
+          </a:effectRef>
+          <a:fontRef idx="minor">
+            <a:schemeClr val="lt1"/>
+          </a:fontRef>
+        </p:style>
+        <p:txBody>
+          <a:bodyPr rtlCol="0" anchor="ctr"/>
+          <a:lstStyle/>
+          <a:p>
+            <a:pPr algn="ctr"/>
+          </a:p>
+        </p:txBody>
+      </p:sp>
+      <p:sp>
+        <p:nvSpPr>
+          <p:cNvPr id="3" name="Rectangle 2"/>
+          <p:cNvSpPr/>
+          <p:nvPr/>
+        </p:nvSpPr>
+        <p:spPr>
+          <a:xfrm>
+            <a:off x="0" y="0"/>
+            <a:ext cx="12188952" cy="50292"/>
+          </a:xfrm>
+          <a:prstGeom prst="rect">
+            <a:avLst/>
+          </a:prstGeom>
+          <a:solidFill>
+            <a:srgbClr val="1F2C56"/>
+          </a:solidFill>
+          <a:ln>
+            <a:noFill/>
+          </a:ln>
+        </p:spPr>
+        <p:style>
+          <a:lnRef idx="1">
+            <a:schemeClr val="accent1"/>
+          </a:lnRef>
+          <a:fillRef idx="3">
+            <a:schemeClr val="accent1"/>
+          </a:fillRef>
+          <a:effectRef idx="2">
+            <a:schemeClr val="accent1"/>
+          </a:effectRef>
+          <a:fontRef idx="minor">
+            <a:schemeClr val="lt1"/>
+          </a:fontRef>
+        </p:style>
+        <p:txBody>
+          <a:bodyPr rtlCol="0" anchor="ctr"/>
+          <a:lstStyle/>
+          <a:p>
+            <a:pPr algn="ctr"/>
+          </a:p>
+        </p:txBody>
+      </p:sp>
+      <p:sp>
+        <p:nvSpPr>
+          <p:cNvPr id="4" name="TextBox 3"/>
+          <p:cNvSpPr txBox="1"/>
+          <p:nvPr/>
+        </p:nvSpPr>
+        <p:spPr>
+          <a:xfrm>
+            <a:off x="685800" y="109728"/>
+            <a:ext cx="10817352" cy="228600"/>
+          </a:xfrm>
+          <a:prstGeom prst="rect">
+            <a:avLst/>
+          </a:prstGeom>
+          <a:noFill/>
+        </p:spPr>
+        <p:txBody>
+          <a:bodyPr wrap="none">
+            <a:spAutoFit/>
+          </a:bodyPr>
+          <a:lstStyle/>
+          <a:p>
+            <a:pPr algn="l"/>
+            <a:r>
+              <a:rPr sz="750">
+                <a:solidFill>
+                  <a:srgbClr val="78808C"/>
+                </a:solidFill>
+                <a:latin typeface="JetBrains Mono"/>
+              </a:rPr>
+              <a:t>M20  ·  INHALT</a:t>
+            </a:r>
+          </a:p>
+        </p:txBody>
+      </p:sp>
+      <p:sp>
+        <p:nvSpPr>
+          <p:cNvPr id="5" name="Rectangle 4"/>
+          <p:cNvSpPr/>
+          <p:nvPr/>
+        </p:nvSpPr>
+        <p:spPr>
+          <a:xfrm>
+            <a:off x="0" y="1234440"/>
+            <a:ext cx="12188952" cy="12700"/>
+          </a:xfrm>
+          <a:prstGeom prst="rect">
+            <a:avLst/>
+          </a:prstGeom>
+          <a:solidFill>
+            <a:srgbClr val="D8DFE4"/>
+          </a:solidFill>
+          <a:ln>
+            <a:noFill/>
+          </a:ln>
+        </p:spPr>
+        <p:style>
+          <a:lnRef idx="1">
+            <a:schemeClr val="accent1"/>
+          </a:lnRef>
+          <a:fillRef idx="3">
+            <a:schemeClr val="accent1"/>
+          </a:fillRef>
+          <a:effectRef idx="2">
+            <a:schemeClr val="accent1"/>
+          </a:effectRef>
+          <a:fontRef idx="minor">
+            <a:schemeClr val="lt1"/>
+          </a:fontRef>
+        </p:style>
+        <p:txBody>
+          <a:bodyPr rtlCol="0" anchor="ctr"/>
+          <a:lstStyle/>
+          <a:p>
+            <a:pPr algn="ctr"/>
+          </a:p>
+        </p:txBody>
+      </p:sp>
+      <p:sp>
+        <p:nvSpPr>
+          <p:cNvPr id="6" name="Rectangle 5"/>
+          <p:cNvSpPr/>
+          <p:nvPr/>
+        </p:nvSpPr>
+        <p:spPr>
+          <a:xfrm>
+            <a:off x="685800" y="502920"/>
+            <a:ext cx="36576" cy="658368"/>
+          </a:xfrm>
+          <a:prstGeom prst="rect">
+            <a:avLst/>
+          </a:prstGeom>
+          <a:solidFill>
+            <a:srgbClr val="D9C089"/>
+          </a:solidFill>
+          <a:ln>
+            <a:noFill/>
+          </a:ln>
+        </p:spPr>
+        <p:style>
+          <a:lnRef idx="1">
+            <a:schemeClr val="accent1"/>
+          </a:lnRef>
+          <a:fillRef idx="3">
+            <a:schemeClr val="accent1"/>
+          </a:fillRef>
+          <a:effectRef idx="2">
+            <a:schemeClr val="accent1"/>
+          </a:effectRef>
+          <a:fontRef idx="minor">
+            <a:schemeClr val="lt1"/>
+          </a:fontRef>
+        </p:style>
+        <p:txBody>
+          <a:bodyPr rtlCol="0" anchor="ctr"/>
+          <a:lstStyle/>
+          <a:p>
+            <a:pPr algn="ctr"/>
+          </a:p>
+        </p:txBody>
+      </p:sp>
+      <p:sp>
+        <p:nvSpPr>
+          <p:cNvPr id="7" name="TextBox 6"/>
+          <p:cNvSpPr txBox="1"/>
+          <p:nvPr/>
+        </p:nvSpPr>
+        <p:spPr>
+          <a:xfrm>
+            <a:off x="813816" y="502920"/>
+            <a:ext cx="10634472" cy="685800"/>
+          </a:xfrm>
+          <a:prstGeom prst="rect">
+            <a:avLst/>
+          </a:prstGeom>
+          <a:noFill/>
+        </p:spPr>
+        <p:txBody>
+          <a:bodyPr wrap="square">
+            <a:spAutoFit/>
+          </a:bodyPr>
+          <a:lstStyle/>
+          <a:p>
+            <a:pPr algn="l"/>
+            <a:r>
+              <a:rPr sz="2400" b="1" i="0">
+                <a:solidFill>
+                  <a:srgbClr val="1F2C56"/>
+                </a:solidFill>
+                <a:latin typeface="Source Serif 4"/>
+              </a:rPr>
               <a:t>Arbeitsblatt 3: 90-Tage-Aktionsplan</a:t>
             </a:r>
           </a:p>
@@ -7013,7 +7394,7 @@
                 </a:solidFill>
                 <a:latin typeface="JetBrains Mono"/>
               </a:rPr>
-              <a:t>LERNZIELE  ·  M20</a:t>
+              <a:t>ÜBERBLICK  ·  M20</a:t>
             </a:r>
           </a:p>
         </p:txBody>
@@ -7091,7 +7472,7 @@
                 </a:solidFill>
                 <a:latin typeface="Source Serif 4"/>
               </a:rPr>
-              <a:t>Was Sie heute mitnehmen</a:t>
+              <a:t>Worum geht es heute</a:t>
             </a:r>
           </a:p>
         </p:txBody>
@@ -7104,8 +7485,8 @@
         </p:nvSpPr>
         <p:spPr>
           <a:xfrm>
-            <a:off x="685800" y="1371600"/>
-            <a:ext cx="10817352" cy="5120640"/>
+            <a:off x="685800" y="1737360"/>
+            <a:ext cx="9720072" cy="4206240"/>
           </a:xfrm>
           <a:prstGeom prst="rect">
             <a:avLst/>
@@ -7119,97 +7500,50 @@
           <a:lstStyle/>
           <a:p>
             <a:pPr>
-              <a:spcBef>
-                <a:spcPts val="800"/>
-              </a:spcBef>
               <a:spcAft>
-                <a:spcPts val="200"/>
+                <a:spcPts val="1200"/>
               </a:spcAft>
             </a:pPr>
             <a:r>
-              <a:rPr sz="1400">
+              <a:rPr sz="1700">
                 <a:solidFill>
                   <a:srgbClr val="3D5466"/>
                 </a:solidFill>
                 <a:latin typeface="Arial"/>
               </a:rPr>
-              <a:t>▸  Eigenes Netzwerk nach Stärke, Brücken und Lücken analysieren und Erweiterungsstrategie ableiten</a:t>
+              <a:t>Strategische Partner werden empfohlen – dafür braucht es Sichtbarkeit im regionalen Wirtschaftsleben.</a:t>
             </a:r>
           </a:p>
           <a:p>
             <a:pPr>
-              <a:spcBef>
-                <a:spcPts val="800"/>
-              </a:spcBef>
               <a:spcAft>
-                <a:spcPts val="200"/>
+                <a:spcPts val="1200"/>
               </a:spcAft>
             </a:pPr>
             <a:r>
-              <a:rPr sz="1400">
+              <a:rPr sz="1700">
                 <a:solidFill>
                   <a:srgbClr val="3D5466"/>
                 </a:solidFill>
                 <a:latin typeface="Arial"/>
               </a:rPr>
-              <a:t>▸  Verschiedene Netzwerk-Kanäle nach strategischer Eignung bewerten</a:t>
+              <a:t>In diesem Praxisprojekt entwickeln Sie Ihre Netzwerkstrategie über drei Monate und setzen sie in konkreten Schritten um.</a:t>
             </a:r>
           </a:p>
           <a:p>
             <a:pPr>
-              <a:spcBef>
-                <a:spcPts val="800"/>
-              </a:spcBef>
               <a:spcAft>
-                <a:spcPts val="200"/>
+                <a:spcPts val="1200"/>
               </a:spcAft>
             </a:pPr>
             <a:r>
-              <a:rPr sz="1400">
+              <a:rPr sz="1700">
                 <a:solidFill>
                   <a:srgbClr val="3D5466"/>
                 </a:solidFill>
                 <a:latin typeface="Arial"/>
               </a:rPr>
-              <a:t>▸  Persönliche Sichtbarkeitsstrategie entwickeln</a:t>
-            </a:r>
-          </a:p>
-          <a:p>
-            <a:pPr>
-              <a:spcBef>
-                <a:spcPts val="800"/>
-              </a:spcBef>
-              <a:spcAft>
-                <a:spcPts val="200"/>
-              </a:spcAft>
-            </a:pPr>
-            <a:r>
-              <a:rPr sz="1400">
-                <a:solidFill>
-                  <a:srgbClr val="3D5466"/>
-                </a:solidFill>
-                <a:latin typeface="Arial"/>
-              </a:rPr>
-              <a:t>▸  90-Tage-Netzwerkstrategie mit konkreten Aktivitäten gestalten</a:t>
-            </a:r>
-          </a:p>
-          <a:p>
-            <a:pPr>
-              <a:spcBef>
-                <a:spcPts val="800"/>
-              </a:spcBef>
-              <a:spcAft>
-                <a:spcPts val="200"/>
-              </a:spcAft>
-            </a:pPr>
-            <a:r>
-              <a:rPr sz="1400">
-                <a:solidFill>
-                  <a:srgbClr val="3D5466"/>
-                </a:solidFill>
-                <a:latin typeface="Arial"/>
-              </a:rPr>
-              <a:t>▸  Operative Netzwerkpflege von strategischem Beziehungsaufbau unterscheiden</a:t>
+              <a:t>Danach haben Sie ein tragfähiges regionales Netzwerk und eine persönliche Positionierung als Ansprechpartner für Unternehmer.</a:t>
             </a:r>
           </a:p>
         </p:txBody>
@@ -7426,7 +7760,7 @@
                 </a:solidFill>
                 <a:latin typeface="JetBrains Mono"/>
               </a:rPr>
-              <a:t>M20  ·  INHALT</a:t>
+              <a:t>LERNZIELE  ·  M20</a:t>
             </a:r>
           </a:p>
         </p:txBody>
@@ -7476,57 +7810,14 @@
       </p:sp>
       <p:sp>
         <p:nvSpPr>
-          <p:cNvPr id="6" name="Rectangle 5"/>
-          <p:cNvSpPr/>
+          <p:cNvPr id="6" name="TextBox 5"/>
+          <p:cNvSpPr txBox="1"/>
           <p:nvPr/>
         </p:nvSpPr>
         <p:spPr>
           <a:xfrm>
             <a:off x="685800" y="502920"/>
-            <a:ext cx="36576" cy="658368"/>
-          </a:xfrm>
-          <a:prstGeom prst="rect">
-            <a:avLst/>
-          </a:prstGeom>
-          <a:solidFill>
-            <a:srgbClr val="D9C089"/>
-          </a:solidFill>
-          <a:ln>
-            <a:noFill/>
-          </a:ln>
-        </p:spPr>
-        <p:style>
-          <a:lnRef idx="1">
-            <a:schemeClr val="accent1"/>
-          </a:lnRef>
-          <a:fillRef idx="3">
-            <a:schemeClr val="accent1"/>
-          </a:fillRef>
-          <a:effectRef idx="2">
-            <a:schemeClr val="accent1"/>
-          </a:effectRef>
-          <a:fontRef idx="minor">
-            <a:schemeClr val="lt1"/>
-          </a:fontRef>
-        </p:style>
-        <p:txBody>
-          <a:bodyPr rtlCol="0" anchor="ctr"/>
-          <a:lstStyle/>
-          <a:p>
-            <a:pPr algn="ctr"/>
-          </a:p>
-        </p:txBody>
-      </p:sp>
-      <p:sp>
-        <p:nvSpPr>
-          <p:cNvPr id="7" name="TextBox 6"/>
-          <p:cNvSpPr txBox="1"/>
-          <p:nvPr/>
-        </p:nvSpPr>
-        <p:spPr>
-          <a:xfrm>
-            <a:off x="813816" y="502920"/>
-            <a:ext cx="10634472" cy="685800"/>
+            <a:ext cx="10817352" cy="658368"/>
           </a:xfrm>
           <a:prstGeom prst="rect">
             <a:avLst/>
@@ -7541,27 +7832,27 @@
           <a:p>
             <a:pPr algn="l"/>
             <a:r>
-              <a:rPr sz="2400" b="1" i="0">
+              <a:rPr sz="2600" b="1" i="0">
                 <a:solidFill>
                   <a:srgbClr val="1F2C56"/>
                 </a:solidFill>
                 <a:latin typeface="Source Serif 4"/>
               </a:rPr>
-              <a:t>Dimension 1: Internes Netzwerk</a:t>
-            </a:r>
-          </a:p>
-        </p:txBody>
-      </p:sp>
-      <p:sp>
-        <p:nvSpPr>
-          <p:cNvPr id="8" name="TextBox 7"/>
+              <a:t>Was Sie heute mitnehmen</a:t>
+            </a:r>
+          </a:p>
+        </p:txBody>
+      </p:sp>
+      <p:sp>
+        <p:nvSpPr>
+          <p:cNvPr id="7" name="TextBox 6"/>
           <p:cNvSpPr txBox="1"/>
           <p:nvPr/>
         </p:nvSpPr>
         <p:spPr>
           <a:xfrm>
-            <a:off x="685800" y="1417320"/>
-            <a:ext cx="10817352" cy="5029200"/>
+            <a:off x="685800" y="1371600"/>
+            <a:ext cx="10817352" cy="5120640"/>
           </a:xfrm>
           <a:prstGeom prst="rect">
             <a:avLst/>
@@ -7576,103 +7867,103 @@
           <a:p>
             <a:pPr>
               <a:spcBef>
-                <a:spcPts val="400"/>
+                <a:spcPts val="800"/>
               </a:spcBef>
               <a:spcAft>
                 <a:spcPts val="200"/>
               </a:spcAft>
             </a:pPr>
             <a:r>
-              <a:rPr sz="1200">
+              <a:rPr sz="1400">
                 <a:solidFill>
                   <a:srgbClr val="3D5466"/>
                 </a:solidFill>
                 <a:latin typeface="Arial"/>
               </a:rPr>
-              <a:t>Die häufig unterschätzte Dimension. Wer im eigenen Haus als kompetenter Ansprechpartner bekannt ist, bekommt:</a:t>
+              <a:t>▸  Eigenes Netzwerk nach Stärke, Brücken und Lücken analysieren und Erweiterungsstrategie ableiten</a:t>
             </a:r>
           </a:p>
           <a:p>
             <a:pPr>
               <a:spcBef>
-                <a:spcPts val="400"/>
+                <a:spcPts val="800"/>
               </a:spcBef>
               <a:spcAft>
                 <a:spcPts val="200"/>
               </a:spcAft>
             </a:pPr>
             <a:r>
-              <a:rPr sz="1300">
+              <a:rPr sz="1400">
                 <a:solidFill>
                   <a:srgbClr val="3D5466"/>
                 </a:solidFill>
                 <a:latin typeface="Arial"/>
               </a:rPr>
-              <a:t>▸  Interne Empfehlungen aus Privatkundenbereichen</a:t>
+              <a:t>▸  Verschiedene Netzwerk-Kanäle nach strategischer Eignung bewerten</a:t>
             </a:r>
           </a:p>
           <a:p>
             <a:pPr>
               <a:spcBef>
-                <a:spcPts val="400"/>
+                <a:spcPts val="800"/>
               </a:spcBef>
               <a:spcAft>
                 <a:spcPts val="200"/>
               </a:spcAft>
             </a:pPr>
             <a:r>
-              <a:rPr sz="1300">
+              <a:rPr sz="1400">
                 <a:solidFill>
                   <a:srgbClr val="3D5466"/>
                 </a:solidFill>
                 <a:latin typeface="Arial"/>
               </a:rPr>
-              <a:t>▸  Frühzeitige Informationen über anstehende Regulierungen oder Strategieänderungen</a:t>
+              <a:t>▸  Persönliche Sichtbarkeitsstrategie entwickeln</a:t>
             </a:r>
           </a:p>
           <a:p>
             <a:pPr>
               <a:spcBef>
-                <a:spcPts val="400"/>
+                <a:spcPts val="800"/>
               </a:spcBef>
               <a:spcAft>
                 <a:spcPts val="200"/>
               </a:spcAft>
             </a:pPr>
             <a:r>
-              <a:rPr sz="1300">
+              <a:rPr sz="1400">
                 <a:solidFill>
                   <a:srgbClr val="3D5466"/>
                 </a:solidFill>
                 <a:latin typeface="Arial"/>
               </a:rPr>
-              <a:t>▸  Unterstützung bei komplexen Fällen durch Spezialisten (Immobilien, Strukturierte Finanzierung, Ausland)</a:t>
+              <a:t>▸  90-Tage-Netzwerkstrategie mit konkreten Aktivitäten gestalten</a:t>
             </a:r>
           </a:p>
           <a:p>
             <a:pPr>
               <a:spcBef>
-                <a:spcPts val="400"/>
+                <a:spcPts val="800"/>
               </a:spcBef>
               <a:spcAft>
                 <a:spcPts val="200"/>
               </a:spcAft>
             </a:pPr>
             <a:r>
-              <a:rPr sz="1200">
+              <a:rPr sz="1400">
                 <a:solidFill>
                   <a:srgbClr val="3D5466"/>
                 </a:solidFill>
                 <a:latin typeface="Arial"/>
               </a:rPr>
-              <a:t>Netzwerkanker intern: Bereichsleiter FK, Kreditspezialisten, Risikomanager, Privatkundenberater mit Unternehmerkunden, Verbundpartner-Spezialisten (R+V, Union Investment).</a:t>
-            </a:r>
-          </a:p>
-        </p:txBody>
-      </p:sp>
-      <p:sp>
-        <p:nvSpPr>
-          <p:cNvPr id="9" name="Rectangle 8"/>
+              <a:t>▸  Operative Netzwerkpflege von strategischem Beziehungsaufbau unterscheiden</a:t>
+            </a:r>
+          </a:p>
+        </p:txBody>
+      </p:sp>
+      <p:sp>
+        <p:nvSpPr>
+          <p:cNvPr id="8" name="Rectangle 7"/>
           <p:cNvSpPr/>
           <p:nvPr/>
         </p:nvSpPr>
@@ -7715,7 +8006,7 @@
       </p:sp>
       <p:sp>
         <p:nvSpPr>
-          <p:cNvPr id="10" name="TextBox 9"/>
+          <p:cNvPr id="9" name="TextBox 8"/>
           <p:cNvSpPr txBox="1"/>
           <p:nvPr/>
         </p:nvSpPr>
@@ -8003,7 +8294,7 @@
                 </a:solidFill>
                 <a:latin typeface="Source Serif 4"/>
               </a:rPr>
-              <a:t>Dimension 2: Verbundpartner-Netzwerk</a:t>
+              <a:t>Dimension 1: Internes Netzwerk</a:t>
             </a:r>
           </a:p>
         </p:txBody>
@@ -8045,7 +8336,7 @@
                 </a:solidFill>
                 <a:latin typeface="Arial"/>
               </a:rPr>
-              <a:t>Strategischer Nutzen: Verbundpartner können den Berater bei ihren eigenen Kundenkontakten empfehlen; der Berater positioniert sich als Koordinator der gesamten Verbundleistung.</a:t>
+              <a:t>Die häufig unterschätzte Dimension. Wer im eigenen Haus als kompetenter Ansprechpartner bekannt ist, bekommt:</a:t>
             </a:r>
           </a:p>
           <a:p>
@@ -8058,13 +8349,13 @@
               </a:spcAft>
             </a:pPr>
             <a:r>
-              <a:rPr sz="1200">
+              <a:rPr sz="1300">
                 <a:solidFill>
                   <a:srgbClr val="3D5466"/>
                 </a:solidFill>
                 <a:latin typeface="Arial"/>
               </a:rPr>
-              <a:t>Konkrete Formate, die in der Praxis funktionieren:</a:t>
+              <a:t>▸  Interne Empfehlungen aus Privatkundenbereichen</a:t>
             </a:r>
           </a:p>
           <a:p>
@@ -8083,7 +8374,7 @@
                 </a:solidFill>
                 <a:latin typeface="Arial"/>
               </a:rPr>
-              <a:t>▸  Gemeinsame Kundenveranstaltungen mit R+V oder Union Investment: Der FK-Berater tritt als Co-Moderator auf und gewinnt Sichtbarkeit bei Kunden anderer Berater.</a:t>
+              <a:t>▸  Frühzeitige Informationen über anstehende Regulierungen oder Strategieänderungen</a:t>
             </a:r>
           </a:p>
           <a:p>
@@ -8102,7 +8393,7 @@
                 </a:solidFill>
                 <a:latin typeface="Arial"/>
               </a:rPr>
-              <a:t>▸  Monatlicher Jour fixe (30 Min.) mit dem R+V-Gebietsleiter oder UIN-Regionalbetreuer: Leads gegenseitig teilen, aktuelle Cross-Selling-Opportunitäten besprechen.</a:t>
+              <a:t>▸  Unterstützung bei komplexen Fällen durch Spezialisten (Immobilien, Strukturierte Finanzierung, Ausland)</a:t>
             </a:r>
           </a:p>
           <a:p>
@@ -8115,13 +8406,13 @@
               </a:spcAft>
             </a:pPr>
             <a:r>
-              <a:rPr sz="1300">
+              <a:rPr sz="1200">
                 <a:solidFill>
                   <a:srgbClr val="3D5466"/>
                 </a:solidFill>
                 <a:latin typeface="Arial"/>
               </a:rPr>
-              <a:t>▸  Internes Cross-Selling-Meeting: Privatkundenberater mit Unternehmerkunden systematisch ansprechen – das ist im Alltag oft der schnellste Weg zu Neukunden, wird aber selten als aktives Format geführt.</a:t>
+              <a:t>Netzwerkanker intern: Bereichsleiter FK, Kreditspezialisten, Risikomanager, Privatkundenberater mit Unternehmerkunden, Verbundpartner-Spezialisten (R+V, Union Investment).</a:t>
             </a:r>
           </a:p>
         </p:txBody>
@@ -8459,7 +8750,7 @@
                 </a:solidFill>
                 <a:latin typeface="Source Serif 4"/>
               </a:rPr>
-              <a:t>Dimension 3: Markt-Netzwerk</a:t>
+              <a:t>Dimension 2: Verbundpartner-Netzwerk</a:t>
             </a:r>
           </a:p>
         </p:txBody>
@@ -8501,7 +8792,7 @@
                 </a:solidFill>
                 <a:latin typeface="Arial"/>
               </a:rPr>
-              <a:t>## 4.3 Netzwerkanalyse: Den eigenen Status realistisch einschätzen</a:t>
+              <a:t>Strategischer Nutzen: Verbundpartner können den Berater bei ihren eigenen Kundenkontakten empfehlen; der Berater positioniert sich als Koordinator der gesamten Verbundleistung.</a:t>
             </a:r>
           </a:p>
           <a:p>
@@ -8520,7 +8811,64 @@
                 </a:solidFill>
                 <a:latin typeface="Arial"/>
               </a:rPr>
-              <a:t>Vor jeder Netzwerkstrategie steht die Analyse. Nicht: „Wie viele Kontakte habe ich?" – sondern: „Welche Verbindungen fehlen mir für meine Ziele?"</a:t>
+              <a:t>Konkrete Formate, die in der Praxis funktionieren:</a:t>
+            </a:r>
+          </a:p>
+          <a:p>
+            <a:pPr>
+              <a:spcBef>
+                <a:spcPts val="400"/>
+              </a:spcBef>
+              <a:spcAft>
+                <a:spcPts val="200"/>
+              </a:spcAft>
+            </a:pPr>
+            <a:r>
+              <a:rPr sz="1300">
+                <a:solidFill>
+                  <a:srgbClr val="3D5466"/>
+                </a:solidFill>
+                <a:latin typeface="Arial"/>
+              </a:rPr>
+              <a:t>▸  Gemeinsame Kundenveranstaltungen mit R+V oder Union Investment: Der FK-Berater tritt als Co-Moderator auf und gewinnt Sichtbarkeit bei Kunden anderer Berater.</a:t>
+            </a:r>
+          </a:p>
+          <a:p>
+            <a:pPr>
+              <a:spcBef>
+                <a:spcPts val="400"/>
+              </a:spcBef>
+              <a:spcAft>
+                <a:spcPts val="200"/>
+              </a:spcAft>
+            </a:pPr>
+            <a:r>
+              <a:rPr sz="1300">
+                <a:solidFill>
+                  <a:srgbClr val="3D5466"/>
+                </a:solidFill>
+                <a:latin typeface="Arial"/>
+              </a:rPr>
+              <a:t>▸  Monatlicher Jour fixe (30 Min.) mit dem R+V-Gebietsleiter oder UIN-Regionalbetreuer: Leads gegenseitig teilen, aktuelle Cross-Selling-Opportunitäten besprechen.</a:t>
+            </a:r>
+          </a:p>
+          <a:p>
+            <a:pPr>
+              <a:spcBef>
+                <a:spcPts val="400"/>
+              </a:spcBef>
+              <a:spcAft>
+                <a:spcPts val="200"/>
+              </a:spcAft>
+            </a:pPr>
+            <a:r>
+              <a:rPr sz="1300">
+                <a:solidFill>
+                  <a:srgbClr val="3D5466"/>
+                </a:solidFill>
+                <a:latin typeface="Arial"/>
+              </a:rPr>
+              <a:t>▸  Internes Cross-Selling-Meeting: Privatkundenberater mit Unternehmerkunden systematisch ansprechen – das ist im Alltag oft der schnellste Weg zu Neukunden, wird aber selten als aktives Format geführt.</a:t>
             </a:r>
           </a:p>
         </p:txBody>
@@ -8636,7 +8984,7 @@
             <a:avLst/>
           </a:prstGeom>
           <a:solidFill>
-            <a:srgbClr val="FFFFFF"/>
+            <a:srgbClr val="EDEDF3"/>
           </a:solidFill>
           <a:ln>
             <a:noFill/>
@@ -8737,43 +9085,51 @@
                 </a:solidFill>
                 <a:latin typeface="JetBrains Mono"/>
               </a:rPr>
-              <a:t>M20  ·  SCHAUBILD</a:t>
-            </a:r>
-          </a:p>
-        </p:txBody>
-      </p:sp>
-      <p:sp>
-        <p:nvSpPr>
-          <p:cNvPr id="5" name="TextBox 4"/>
-          <p:cNvSpPr txBox="1"/>
-          <p:nvPr/>
-        </p:nvSpPr>
-        <p:spPr>
-          <a:xfrm>
-            <a:off x="685800" y="502920"/>
-            <a:ext cx="10817352" cy="594360"/>
-          </a:xfrm>
-          <a:prstGeom prst="rect">
-            <a:avLst/>
-          </a:prstGeom>
-          <a:noFill/>
-        </p:spPr>
-        <p:txBody>
-          <a:bodyPr wrap="square">
-            <a:spAutoFit/>
-          </a:bodyPr>
-          <a:lstStyle/>
-          <a:p>
-            <a:pPr algn="l"/>
-            <a:r>
-              <a:rPr sz="2000" b="1" i="0">
-                <a:solidFill>
-                  <a:srgbClr val="1F2C56"/>
-                </a:solidFill>
-                <a:latin typeface="Source Serif 4"/>
-              </a:rPr>
-              <a:t>Netzwerk-Dimensionen eines FK-Beraters</a:t>
-            </a:r>
+              <a:t>M20  ·  INHALT</a:t>
+            </a:r>
+          </a:p>
+        </p:txBody>
+      </p:sp>
+      <p:sp>
+        <p:nvSpPr>
+          <p:cNvPr id="5" name="Rectangle 4"/>
+          <p:cNvSpPr/>
+          <p:nvPr/>
+        </p:nvSpPr>
+        <p:spPr>
+          <a:xfrm>
+            <a:off x="0" y="1234440"/>
+            <a:ext cx="12188952" cy="12700"/>
+          </a:xfrm>
+          <a:prstGeom prst="rect">
+            <a:avLst/>
+          </a:prstGeom>
+          <a:solidFill>
+            <a:srgbClr val="D8DFE4"/>
+          </a:solidFill>
+          <a:ln>
+            <a:noFill/>
+          </a:ln>
+        </p:spPr>
+        <p:style>
+          <a:lnRef idx="1">
+            <a:schemeClr val="accent1"/>
+          </a:lnRef>
+          <a:fillRef idx="3">
+            <a:schemeClr val="accent1"/>
+          </a:fillRef>
+          <a:effectRef idx="2">
+            <a:schemeClr val="accent1"/>
+          </a:effectRef>
+          <a:fontRef idx="minor">
+            <a:schemeClr val="lt1"/>
+          </a:fontRef>
+        </p:style>
+        <p:txBody>
+          <a:bodyPr rtlCol="0" anchor="ctr"/>
+          <a:lstStyle/>
+          <a:p>
+            <a:pPr algn="ctr"/>
           </a:p>
         </p:txBody>
       </p:sp>
@@ -8785,8 +9141,8 @@
         </p:nvSpPr>
         <p:spPr>
           <a:xfrm>
-            <a:off x="685800" y="1143000"/>
-            <a:ext cx="10817352" cy="25400"/>
+            <a:off x="685800" y="502920"/>
+            <a:ext cx="36576" cy="658368"/>
           </a:xfrm>
           <a:prstGeom prst="rect">
             <a:avLst/>
@@ -8820,33 +9176,105 @@
           </a:p>
         </p:txBody>
       </p:sp>
-      <p:pic>
-        <p:nvPicPr>
-          <p:cNvPr id="7" name="Picture 6" descr="image.png"/>
-          <p:cNvPicPr>
-            <a:picLocks noChangeAspect="1"/>
-          </p:cNvPicPr>
-          <p:nvPr/>
-        </p:nvPicPr>
-        <p:blipFill>
-          <a:blip r:embed="rId2"/>
-          <a:stretch>
-            <a:fillRect/>
-          </a:stretch>
-        </p:blipFill>
-        <p:spPr>
-          <a:xfrm>
-            <a:off x="2303489" y="1325880"/>
-            <a:ext cx="7581973" cy="4937760"/>
-          </a:xfrm>
-          <a:prstGeom prst="rect">
-            <a:avLst/>
-          </a:prstGeom>
-        </p:spPr>
-      </p:pic>
-      <p:sp>
-        <p:nvSpPr>
-          <p:cNvPr id="8" name="Rectangle 7"/>
+      <p:sp>
+        <p:nvSpPr>
+          <p:cNvPr id="7" name="TextBox 6"/>
+          <p:cNvSpPr txBox="1"/>
+          <p:nvPr/>
+        </p:nvSpPr>
+        <p:spPr>
+          <a:xfrm>
+            <a:off x="813816" y="502920"/>
+            <a:ext cx="10634472" cy="685800"/>
+          </a:xfrm>
+          <a:prstGeom prst="rect">
+            <a:avLst/>
+          </a:prstGeom>
+          <a:noFill/>
+        </p:spPr>
+        <p:txBody>
+          <a:bodyPr wrap="square">
+            <a:spAutoFit/>
+          </a:bodyPr>
+          <a:lstStyle/>
+          <a:p>
+            <a:pPr algn="l"/>
+            <a:r>
+              <a:rPr sz="2400" b="1" i="0">
+                <a:solidFill>
+                  <a:srgbClr val="1F2C56"/>
+                </a:solidFill>
+                <a:latin typeface="Source Serif 4"/>
+              </a:rPr>
+              <a:t>Dimension 3: Markt-Netzwerk</a:t>
+            </a:r>
+          </a:p>
+        </p:txBody>
+      </p:sp>
+      <p:sp>
+        <p:nvSpPr>
+          <p:cNvPr id="8" name="TextBox 7"/>
+          <p:cNvSpPr txBox="1"/>
+          <p:nvPr/>
+        </p:nvSpPr>
+        <p:spPr>
+          <a:xfrm>
+            <a:off x="685800" y="1417320"/>
+            <a:ext cx="10817352" cy="5029200"/>
+          </a:xfrm>
+          <a:prstGeom prst="rect">
+            <a:avLst/>
+          </a:prstGeom>
+          <a:noFill/>
+        </p:spPr>
+        <p:txBody>
+          <a:bodyPr wrap="square">
+            <a:spAutoFit/>
+          </a:bodyPr>
+          <a:lstStyle/>
+          <a:p>
+            <a:pPr>
+              <a:spcBef>
+                <a:spcPts val="400"/>
+              </a:spcBef>
+              <a:spcAft>
+                <a:spcPts val="200"/>
+              </a:spcAft>
+            </a:pPr>
+            <a:r>
+              <a:rPr sz="1200">
+                <a:solidFill>
+                  <a:srgbClr val="3D5466"/>
+                </a:solidFill>
+                <a:latin typeface="Arial"/>
+              </a:rPr>
+              <a:t>## 4.3 Netzwerkanalyse: Den eigenen Status realistisch einschätzen</a:t>
+            </a:r>
+          </a:p>
+          <a:p>
+            <a:pPr>
+              <a:spcBef>
+                <a:spcPts val="400"/>
+              </a:spcBef>
+              <a:spcAft>
+                <a:spcPts val="200"/>
+              </a:spcAft>
+            </a:pPr>
+            <a:r>
+              <a:rPr sz="1200">
+                <a:solidFill>
+                  <a:srgbClr val="3D5466"/>
+                </a:solidFill>
+                <a:latin typeface="Arial"/>
+              </a:rPr>
+              <a:t>Vor jeder Netzwerkstrategie steht die Analyse. Nicht: „Wie viele Kontakte habe ich?" – sondern: „Welche Verbindungen fehlen mir für meine Ziele?"</a:t>
+            </a:r>
+          </a:p>
+        </p:txBody>
+      </p:sp>
+      <p:sp>
+        <p:nvSpPr>
+          <p:cNvPr id="9" name="Rectangle 8"/>
           <p:cNvSpPr/>
           <p:nvPr/>
         </p:nvSpPr>
@@ -8889,7 +9317,7 @@
       </p:sp>
       <p:sp>
         <p:nvSpPr>
-          <p:cNvPr id="9" name="TextBox 8"/>
+          <p:cNvPr id="10" name="TextBox 9"/>
           <p:cNvSpPr txBox="1"/>
           <p:nvPr/>
         </p:nvSpPr>
@@ -8918,41 +9346,6 @@
                 <a:latin typeface="JetBrains Mono"/>
               </a:rPr>
               <a:t>Benedikt Zoller Coaching  ·  FKB Campus  ·  M20</a:t>
-            </a:r>
-          </a:p>
-        </p:txBody>
-      </p:sp>
-      <p:sp>
-        <p:nvSpPr>
-          <p:cNvPr id="10" name="TextBox 9"/>
-          <p:cNvSpPr txBox="1"/>
-          <p:nvPr/>
-        </p:nvSpPr>
-        <p:spPr>
-          <a:xfrm>
-            <a:off x="7176211" y="6583680"/>
-            <a:ext cx="4326940" cy="256032"/>
-          </a:xfrm>
-          <a:prstGeom prst="rect">
-            <a:avLst/>
-          </a:prstGeom>
-          <a:noFill/>
-        </p:spPr>
-        <p:txBody>
-          <a:bodyPr wrap="none">
-            <a:spAutoFit/>
-          </a:bodyPr>
-          <a:lstStyle/>
-          <a:p>
-            <a:pPr algn="r"/>
-            <a:r>
-              <a:rPr sz="700">
-                <a:solidFill>
-                  <a:srgbClr val="A0B4D2"/>
-                </a:solidFill>
-                <a:latin typeface="JetBrains Mono"/>
-              </a:rPr>
-              <a:t>Schaubild</a:t>
             </a:r>
           </a:p>
         </p:txBody>
@@ -8990,7 +9383,7 @@
             <a:avLst/>
           </a:prstGeom>
           <a:solidFill>
-            <a:srgbClr val="EDEDF3"/>
+            <a:srgbClr val="FFFFFF"/>
           </a:solidFill>
           <a:ln>
             <a:noFill/>
@@ -9091,51 +9484,43 @@
                 </a:solidFill>
                 <a:latin typeface="JetBrains Mono"/>
               </a:rPr>
-              <a:t>M20  ·  INHALT</a:t>
-            </a:r>
-          </a:p>
-        </p:txBody>
-      </p:sp>
-      <p:sp>
-        <p:nvSpPr>
-          <p:cNvPr id="5" name="Rectangle 4"/>
-          <p:cNvSpPr/>
-          <p:nvPr/>
-        </p:nvSpPr>
-        <p:spPr>
-          <a:xfrm>
-            <a:off x="0" y="1234440"/>
-            <a:ext cx="12188952" cy="12700"/>
-          </a:xfrm>
-          <a:prstGeom prst="rect">
-            <a:avLst/>
-          </a:prstGeom>
-          <a:solidFill>
-            <a:srgbClr val="D8DFE4"/>
-          </a:solidFill>
-          <a:ln>
-            <a:noFill/>
-          </a:ln>
-        </p:spPr>
-        <p:style>
-          <a:lnRef idx="1">
-            <a:schemeClr val="accent1"/>
-          </a:lnRef>
-          <a:fillRef idx="3">
-            <a:schemeClr val="accent1"/>
-          </a:fillRef>
-          <a:effectRef idx="2">
-            <a:schemeClr val="accent1"/>
-          </a:effectRef>
-          <a:fontRef idx="minor">
-            <a:schemeClr val="lt1"/>
-          </a:fontRef>
-        </p:style>
-        <p:txBody>
-          <a:bodyPr rtlCol="0" anchor="ctr"/>
-          <a:lstStyle/>
-          <a:p>
-            <a:pPr algn="ctr"/>
+              <a:t>M20  ·  SCHAUBILD</a:t>
+            </a:r>
+          </a:p>
+        </p:txBody>
+      </p:sp>
+      <p:sp>
+        <p:nvSpPr>
+          <p:cNvPr id="5" name="TextBox 4"/>
+          <p:cNvSpPr txBox="1"/>
+          <p:nvPr/>
+        </p:nvSpPr>
+        <p:spPr>
+          <a:xfrm>
+            <a:off x="685800" y="502920"/>
+            <a:ext cx="10817352" cy="594360"/>
+          </a:xfrm>
+          <a:prstGeom prst="rect">
+            <a:avLst/>
+          </a:prstGeom>
+          <a:noFill/>
+        </p:spPr>
+        <p:txBody>
+          <a:bodyPr wrap="square">
+            <a:spAutoFit/>
+          </a:bodyPr>
+          <a:lstStyle/>
+          <a:p>
+            <a:pPr algn="l"/>
+            <a:r>
+              <a:rPr sz="2000" b="1" i="0">
+                <a:solidFill>
+                  <a:srgbClr val="1F2C56"/>
+                </a:solidFill>
+                <a:latin typeface="Source Serif 4"/>
+              </a:rPr>
+              <a:t>Netzwerk-Dimensionen eines FK-Beraters</a:t>
+            </a:r>
           </a:p>
         </p:txBody>
       </p:sp>
@@ -9147,8 +9532,8 @@
         </p:nvSpPr>
         <p:spPr>
           <a:xfrm>
-            <a:off x="685800" y="502920"/>
-            <a:ext cx="36576" cy="658368"/>
+            <a:off x="685800" y="1143000"/>
+            <a:ext cx="10817352" cy="25400"/>
           </a:xfrm>
           <a:prstGeom prst="rect">
             <a:avLst/>
@@ -9182,257 +9567,33 @@
           </a:p>
         </p:txBody>
       </p:sp>
-      <p:sp>
-        <p:nvSpPr>
-          <p:cNvPr id="7" name="TextBox 6"/>
-          <p:cNvSpPr txBox="1"/>
-          <p:nvPr/>
-        </p:nvSpPr>
-        <p:spPr>
-          <a:xfrm>
-            <a:off x="813816" y="502920"/>
-            <a:ext cx="10634472" cy="685800"/>
-          </a:xfrm>
-          <a:prstGeom prst="rect">
-            <a:avLst/>
-          </a:prstGeom>
-          <a:noFill/>
-        </p:spPr>
-        <p:txBody>
-          <a:bodyPr wrap="square">
-            <a:spAutoFit/>
-          </a:bodyPr>
-          <a:lstStyle/>
-          <a:p>
-            <a:pPr algn="l"/>
-            <a:r>
-              <a:rPr sz="2400" b="1" i="0">
-                <a:solidFill>
-                  <a:srgbClr val="1F2C56"/>
-                </a:solidFill>
-                <a:latin typeface="Source Serif 4"/>
-              </a:rPr>
-              <a:t>Das Netzwerk-Audit (3 Fragen)</a:t>
-            </a:r>
-          </a:p>
-        </p:txBody>
-      </p:sp>
-      <p:sp>
-        <p:nvSpPr>
-          <p:cNvPr id="8" name="TextBox 7"/>
-          <p:cNvSpPr txBox="1"/>
-          <p:nvPr/>
-        </p:nvSpPr>
-        <p:spPr>
-          <a:xfrm>
-            <a:off x="685800" y="1417320"/>
-            <a:ext cx="10817352" cy="5029200"/>
-          </a:xfrm>
-          <a:prstGeom prst="rect">
-            <a:avLst/>
-          </a:prstGeom>
-          <a:noFill/>
-        </p:spPr>
-        <p:txBody>
-          <a:bodyPr wrap="square">
-            <a:spAutoFit/>
-          </a:bodyPr>
-          <a:lstStyle/>
-          <a:p>
-            <a:pPr>
-              <a:spcBef>
-                <a:spcPts val="400"/>
-              </a:spcBef>
-              <a:spcAft>
-                <a:spcPts val="200"/>
-              </a:spcAft>
-            </a:pPr>
-            <a:r>
-              <a:rPr sz="1200">
-                <a:solidFill>
-                  <a:srgbClr val="3D5466"/>
-                </a:solidFill>
-                <a:latin typeface="Arial"/>
-              </a:rPr>
-              <a:t>Frage 1: Stärke meiner bestehenden Verbindungen</a:t>
-            </a:r>
-          </a:p>
-          <a:p>
-            <a:pPr>
-              <a:spcBef>
-                <a:spcPts val="400"/>
-              </a:spcBef>
-              <a:spcAft>
-                <a:spcPts val="200"/>
-              </a:spcAft>
-            </a:pPr>
-            <a:r>
-              <a:rPr sz="1200">
-                <a:solidFill>
-                  <a:srgbClr val="3D5466"/>
-                </a:solidFill>
-                <a:latin typeface="Arial"/>
-              </a:rPr>
-              <a:t>Frage 2: Wo sind meine strukturellen Lücken?</a:t>
-            </a:r>
-          </a:p>
-          <a:p>
-            <a:pPr>
-              <a:spcBef>
-                <a:spcPts val="400"/>
-              </a:spcBef>
-              <a:spcAft>
-                <a:spcPts val="200"/>
-              </a:spcAft>
-            </a:pPr>
-            <a:r>
-              <a:rPr sz="1300">
-                <a:solidFill>
-                  <a:srgbClr val="3D5466"/>
-                </a:solidFill>
-                <a:latin typeface="Arial"/>
-              </a:rPr>
-              <a:t>▸  In welchen Branchen kenne ich niemanden außer meinen eigenen Kunden?</a:t>
-            </a:r>
-          </a:p>
-          <a:p>
-            <a:pPr>
-              <a:spcBef>
-                <a:spcPts val="400"/>
-              </a:spcBef>
-              <a:spcAft>
-                <a:spcPts val="200"/>
-              </a:spcAft>
-            </a:pPr>
-            <a:r>
-              <a:rPr sz="1300">
-                <a:solidFill>
-                  <a:srgbClr val="3D5466"/>
-                </a:solidFill>
-                <a:latin typeface="Arial"/>
-              </a:rPr>
-              <a:t>▸  Mit welchen Multiplikatoren hätte ich gerne Kontakt, aber noch keinen?</a:t>
-            </a:r>
-          </a:p>
-          <a:p>
-            <a:pPr>
-              <a:spcBef>
-                <a:spcPts val="400"/>
-              </a:spcBef>
-              <a:spcAft>
-                <a:spcPts val="200"/>
-              </a:spcAft>
-            </a:pPr>
-            <a:r>
-              <a:rPr sz="1300">
-                <a:solidFill>
-                  <a:srgbClr val="3D5466"/>
-                </a:solidFill>
-                <a:latin typeface="Arial"/>
-              </a:rPr>
-              <a:t>▸  Welche internen Bereiche kenne ich zu wenig?</a:t>
-            </a:r>
-          </a:p>
-          <a:p>
-            <a:pPr>
-              <a:spcBef>
-                <a:spcPts val="400"/>
-              </a:spcBef>
-              <a:spcAft>
-                <a:spcPts val="200"/>
-              </a:spcAft>
-            </a:pPr>
-            <a:r>
-              <a:rPr sz="1200">
-                <a:solidFill>
-                  <a:srgbClr val="3D5466"/>
-                </a:solidFill>
-                <a:latin typeface="Arial"/>
-              </a:rPr>
-              <a:t>Frage 3: Wo liegt mein Broker-Potenzial?</a:t>
-            </a:r>
-          </a:p>
-          <a:p>
-            <a:pPr>
-              <a:spcBef>
-                <a:spcPts val="400"/>
-              </a:spcBef>
-              <a:spcAft>
-                <a:spcPts val="200"/>
-              </a:spcAft>
-            </a:pPr>
-            <a:r>
-              <a:rPr sz="1300">
-                <a:solidFill>
-                  <a:srgbClr val="3D5466"/>
-                </a:solidFill>
-                <a:latin typeface="Arial"/>
-              </a:rPr>
-              <a:t>▸  Welche zwei Gruppen in meinem Netzwerk kennen sich nicht, würden aber voneinander profitieren?</a:t>
-            </a:r>
-          </a:p>
-          <a:p>
-            <a:pPr>
-              <a:spcBef>
-                <a:spcPts val="400"/>
-              </a:spcBef>
-              <a:spcAft>
-                <a:spcPts val="200"/>
-              </a:spcAft>
-            </a:pPr>
-            <a:r>
-              <a:rPr sz="1300">
-                <a:solidFill>
-                  <a:srgbClr val="3D5466"/>
-                </a:solidFill>
-                <a:latin typeface="Arial"/>
-              </a:rPr>
-              <a:t>▸  Wo kann ich durch Zusammenführen Mehrwert stiften – ohne Eigeninteresse?</a:t>
-            </a:r>
-          </a:p>
-          <a:p>
-            <a:pPr>
-              <a:spcBef>
-                <a:spcPts val="400"/>
-              </a:spcBef>
-              <a:spcAft>
-                <a:spcPts val="200"/>
-              </a:spcAft>
-            </a:pPr>
-            <a:r>
-              <a:rPr sz="1200">
-                <a:solidFill>
-                  <a:srgbClr val="3D5466"/>
-                </a:solidFill>
-                <a:latin typeface="Arial"/>
-              </a:rPr>
-              <a:t>## 4.4 Sichtbarkeit: Expertise sichtbar machen ohne Eigenwerbung</a:t>
-            </a:r>
-          </a:p>
-          <a:p>
-            <a:pPr>
-              <a:spcBef>
-                <a:spcPts val="400"/>
-              </a:spcBef>
-              <a:spcAft>
-                <a:spcPts val="200"/>
-              </a:spcAft>
-            </a:pPr>
-            <a:r>
-              <a:rPr sz="1200">
-                <a:solidFill>
-                  <a:srgbClr val="3D5466"/>
-                </a:solidFill>
-                <a:latin typeface="Arial"/>
-              </a:rPr>
-              <a:t>Sichtbarkeit entsteht nicht durch Selbstlob, sondern durch konsistente Fachkompetenz, die anderen nutzt. Die wirkmächtigsten Formate:</a:t>
-            </a:r>
-          </a:p>
-        </p:txBody>
-      </p:sp>
-      <p:sp>
-        <p:nvSpPr>
-          <p:cNvPr id="9" name="Rectangle 8"/>
+      <p:pic>
+        <p:nvPicPr>
+          <p:cNvPr id="7" name="Picture 6" descr="image.png"/>
+          <p:cNvPicPr>
+            <a:picLocks noChangeAspect="1"/>
+          </p:cNvPicPr>
+          <p:nvPr/>
+        </p:nvPicPr>
+        <p:blipFill>
+          <a:blip r:embed="rId2"/>
+          <a:stretch>
+            <a:fillRect/>
+          </a:stretch>
+        </p:blipFill>
+        <p:spPr>
+          <a:xfrm>
+            <a:off x="2303489" y="1325880"/>
+            <a:ext cx="7581973" cy="4937760"/>
+          </a:xfrm>
+          <a:prstGeom prst="rect">
+            <a:avLst/>
+          </a:prstGeom>
+        </p:spPr>
+      </p:pic>
+      <p:sp>
+        <p:nvSpPr>
+          <p:cNvPr id="8" name="Rectangle 7"/>
           <p:cNvSpPr/>
           <p:nvPr/>
         </p:nvSpPr>
@@ -9475,7 +9636,7 @@
       </p:sp>
       <p:sp>
         <p:nvSpPr>
-          <p:cNvPr id="10" name="TextBox 9"/>
+          <p:cNvPr id="9" name="TextBox 8"/>
           <p:cNvSpPr txBox="1"/>
           <p:nvPr/>
         </p:nvSpPr>
@@ -9504,6 +9665,41 @@
                 <a:latin typeface="JetBrains Mono"/>
               </a:rPr>
               <a:t>Benedikt Zoller Coaching  ·  FKB Campus  ·  M20</a:t>
+            </a:r>
+          </a:p>
+        </p:txBody>
+      </p:sp>
+      <p:sp>
+        <p:nvSpPr>
+          <p:cNvPr id="10" name="TextBox 9"/>
+          <p:cNvSpPr txBox="1"/>
+          <p:nvPr/>
+        </p:nvSpPr>
+        <p:spPr>
+          <a:xfrm>
+            <a:off x="7176211" y="6583680"/>
+            <a:ext cx="4326940" cy="256032"/>
+          </a:xfrm>
+          <a:prstGeom prst="rect">
+            <a:avLst/>
+          </a:prstGeom>
+          <a:noFill/>
+        </p:spPr>
+        <p:txBody>
+          <a:bodyPr wrap="none">
+            <a:spAutoFit/>
+          </a:bodyPr>
+          <a:lstStyle/>
+          <a:p>
+            <a:pPr algn="r"/>
+            <a:r>
+              <a:rPr sz="700">
+                <a:solidFill>
+                  <a:srgbClr val="A0B4D2"/>
+                </a:solidFill>
+                <a:latin typeface="JetBrains Mono"/>
+              </a:rPr>
+              <a:t>Schaubild</a:t>
             </a:r>
           </a:p>
         </p:txBody>
@@ -9763,7 +9959,7 @@
                 </a:solidFill>
                 <a:latin typeface="Source Serif 4"/>
               </a:rPr>
-              <a:t>Format 1: Fachbeiträge und Impulse</a:t>
+              <a:t>Das Netzwerk-Audit (3 Fragen)</a:t>
             </a:r>
           </a:p>
         </p:txBody>
@@ -9805,7 +10001,7 @@
                 </a:solidFill>
                 <a:latin typeface="Arial"/>
               </a:rPr>
-              <a:t>Was: Kurze, prägnante Wissensimpulse – nicht als Werbung, sondern als echten Mehrwert für Netzwerkkontakte.</a:t>
+              <a:t>Frage 1: Stärke meiner bestehenden Verbindungen</a:t>
             </a:r>
           </a:p>
           <a:p>
@@ -9824,7 +10020,7 @@
                 </a:solidFill>
                 <a:latin typeface="Arial"/>
               </a:rPr>
-              <a:t>Beispiele:</a:t>
+              <a:t>Frage 2: Wo sind meine strukturellen Lücken?</a:t>
             </a:r>
           </a:p>
           <a:p>
@@ -9843,7 +10039,7 @@
                 </a:solidFill>
                 <a:latin typeface="Arial"/>
               </a:rPr>
-              <a:t>▸  Monatliche E-Mail an 5–10 Steuerberater mit einem aktuellen Branchenhinweis: „Für Ihre Mandanten in der Landwirtschaft: GAP-Änderungen ab Q3 2026 – was das für Investitionsfinanzierungen bedeutet" (Hinweis: Regelmäßige E-Mail-Kommunikation an externe Multiplikatoren ist datenschutzrechtlich und complianceseitig vorab mit der Compliance-/Datenschutzabteilung der Bank abzustimmen. Empfehlung: Kommunikation über offizielle Bank-Einladungen oder bankveranstaltete Formate läuft oft reibungsloser.)</a:t>
+              <a:t>▸  In welchen Branchen kenne ich niemanden außer meinen eigenen Kunden?</a:t>
             </a:r>
           </a:p>
           <a:p>
@@ -9862,7 +10058,7 @@
                 </a:solidFill>
                 <a:latin typeface="Arial"/>
               </a:rPr>
-              <a:t>▸  Kurzer Vortrag (15 Min.) bei IHK-Frühstück zu einem konkreten Finanzierungsthema</a:t>
+              <a:t>▸  Mit welchen Multiplikatoren hätte ich gerne Kontakt, aber noch keinen?</a:t>
             </a:r>
           </a:p>
           <a:p>
@@ -9881,7 +10077,102 @@
                 </a:solidFill>
                 <a:latin typeface="Arial"/>
               </a:rPr>
-              <a:t>▸  LinkedIn-Post mit einer praxisnahen Erkenntnis aus einem anonymisierten Kundengespräch</a:t>
+              <a:t>▸  Welche internen Bereiche kenne ich zu wenig?</a:t>
+            </a:r>
+          </a:p>
+          <a:p>
+            <a:pPr>
+              <a:spcBef>
+                <a:spcPts val="400"/>
+              </a:spcBef>
+              <a:spcAft>
+                <a:spcPts val="200"/>
+              </a:spcAft>
+            </a:pPr>
+            <a:r>
+              <a:rPr sz="1200">
+                <a:solidFill>
+                  <a:srgbClr val="3D5466"/>
+                </a:solidFill>
+                <a:latin typeface="Arial"/>
+              </a:rPr>
+              <a:t>Frage 3: Wo liegt mein Broker-Potenzial?</a:t>
+            </a:r>
+          </a:p>
+          <a:p>
+            <a:pPr>
+              <a:spcBef>
+                <a:spcPts val="400"/>
+              </a:spcBef>
+              <a:spcAft>
+                <a:spcPts val="200"/>
+              </a:spcAft>
+            </a:pPr>
+            <a:r>
+              <a:rPr sz="1300">
+                <a:solidFill>
+                  <a:srgbClr val="3D5466"/>
+                </a:solidFill>
+                <a:latin typeface="Arial"/>
+              </a:rPr>
+              <a:t>▸  Welche zwei Gruppen in meinem Netzwerk kennen sich nicht, würden aber voneinander profitieren?</a:t>
+            </a:r>
+          </a:p>
+          <a:p>
+            <a:pPr>
+              <a:spcBef>
+                <a:spcPts val="400"/>
+              </a:spcBef>
+              <a:spcAft>
+                <a:spcPts val="200"/>
+              </a:spcAft>
+            </a:pPr>
+            <a:r>
+              <a:rPr sz="1300">
+                <a:solidFill>
+                  <a:srgbClr val="3D5466"/>
+                </a:solidFill>
+                <a:latin typeface="Arial"/>
+              </a:rPr>
+              <a:t>▸  Wo kann ich durch Zusammenführen Mehrwert stiften – ohne Eigeninteresse?</a:t>
+            </a:r>
+          </a:p>
+          <a:p>
+            <a:pPr>
+              <a:spcBef>
+                <a:spcPts val="400"/>
+              </a:spcBef>
+              <a:spcAft>
+                <a:spcPts val="200"/>
+              </a:spcAft>
+            </a:pPr>
+            <a:r>
+              <a:rPr sz="1200">
+                <a:solidFill>
+                  <a:srgbClr val="3D5466"/>
+                </a:solidFill>
+                <a:latin typeface="Arial"/>
+              </a:rPr>
+              <a:t>## 4.4 Sichtbarkeit: Expertise sichtbar machen ohne Eigenwerbung</a:t>
+            </a:r>
+          </a:p>
+          <a:p>
+            <a:pPr>
+              <a:spcBef>
+                <a:spcPts val="400"/>
+              </a:spcBef>
+              <a:spcAft>
+                <a:spcPts val="200"/>
+              </a:spcAft>
+            </a:pPr>
+            <a:r>
+              <a:rPr sz="1200">
+                <a:solidFill>
+                  <a:srgbClr val="3D5466"/>
+                </a:solidFill>
+                <a:latin typeface="Arial"/>
+              </a:rPr>
+              <a:t>Sichtbarkeit entsteht nicht durch Selbstlob, sondern durch konsistente Fachkompetenz, die anderen nutzt. Die wirkmächtigsten Formate:</a:t>
             </a:r>
           </a:p>
         </p:txBody>
@@ -10219,7 +10510,7 @@
                 </a:solidFill>
                 <a:latin typeface="Source Serif 4"/>
               </a:rPr>
-              <a:t>Format 2: Empfehlungen geben, bevor man welche bekommt</a:t>
+              <a:t>Format 1: Fachbeiträge und Impulse</a:t>
             </a:r>
           </a:p>
         </p:txBody>
@@ -10261,7 +10552,83 @@
                 </a:solidFill>
                 <a:latin typeface="Arial"/>
               </a:rPr>
-              <a:t>Praxisregel: „Ein guter Netzwerkpartner merkt, dass er zu mir gehört, bevor er das erste Mal mit mir gearbeitet hat."</a:t>
+              <a:t>Was: Kurze, prägnante Wissensimpulse – nicht als Werbung, sondern als echten Mehrwert für Netzwerkkontakte.</a:t>
+            </a:r>
+          </a:p>
+          <a:p>
+            <a:pPr>
+              <a:spcBef>
+                <a:spcPts val="400"/>
+              </a:spcBef>
+              <a:spcAft>
+                <a:spcPts val="200"/>
+              </a:spcAft>
+            </a:pPr>
+            <a:r>
+              <a:rPr sz="1200">
+                <a:solidFill>
+                  <a:srgbClr val="3D5466"/>
+                </a:solidFill>
+                <a:latin typeface="Arial"/>
+              </a:rPr>
+              <a:t>Beispiele:</a:t>
+            </a:r>
+          </a:p>
+          <a:p>
+            <a:pPr>
+              <a:spcBef>
+                <a:spcPts val="400"/>
+              </a:spcBef>
+              <a:spcAft>
+                <a:spcPts val="200"/>
+              </a:spcAft>
+            </a:pPr>
+            <a:r>
+              <a:rPr sz="1300">
+                <a:solidFill>
+                  <a:srgbClr val="3D5466"/>
+                </a:solidFill>
+                <a:latin typeface="Arial"/>
+              </a:rPr>
+              <a:t>▸  Monatliche E-Mail an 5–10 Steuerberater mit einem aktuellen Branchenhinweis: „Für Ihre Mandanten in der Landwirtschaft: GAP-Änderungen ab Q3 2026 – was das für Investitionsfinanzierungen bedeutet" (Hinweis: Regelmäßige E-Mail-Kommunikation an externe Multiplikatoren ist datenschutzrechtlich und complianceseitig vorab mit der Compliance-/Datenschutzabteilung der Bank abzustimmen. Empfehlung: Kommunikation über offizielle Bank-Einladungen oder bankveranstaltete Formate läuft oft reibungsloser.)</a:t>
+            </a:r>
+          </a:p>
+          <a:p>
+            <a:pPr>
+              <a:spcBef>
+                <a:spcPts val="400"/>
+              </a:spcBef>
+              <a:spcAft>
+                <a:spcPts val="200"/>
+              </a:spcAft>
+            </a:pPr>
+            <a:r>
+              <a:rPr sz="1300">
+                <a:solidFill>
+                  <a:srgbClr val="3D5466"/>
+                </a:solidFill>
+                <a:latin typeface="Arial"/>
+              </a:rPr>
+              <a:t>▸  Kurzer Vortrag (15 Min.) bei IHK-Frühstück zu einem konkreten Finanzierungsthema</a:t>
+            </a:r>
+          </a:p>
+          <a:p>
+            <a:pPr>
+              <a:spcBef>
+                <a:spcPts val="400"/>
+              </a:spcBef>
+              <a:spcAft>
+                <a:spcPts val="200"/>
+              </a:spcAft>
+            </a:pPr>
+            <a:r>
+              <a:rPr sz="1300">
+                <a:solidFill>
+                  <a:srgbClr val="3D5466"/>
+                </a:solidFill>
+                <a:latin typeface="Arial"/>
+              </a:rPr>
+              <a:t>▸  LinkedIn-Post mit einer praxisnahen Erkenntnis aus einem anonymisierten Kundengespräch</a:t>
             </a:r>
           </a:p>
         </p:txBody>

--- a/protected-downloads/praesentation/M20.pptx
+++ b/protected-downloads/praesentation/M20.pptx
@@ -20,6 +20,7 @@
     <p:sldId id="268" r:id="rId20"/>
     <p:sldId id="269" r:id="rId21"/>
     <p:sldId id="270" r:id="rId22"/>
+    <p:sldId id="271" r:id="rId23"/>
   </p:sldIdLst>
   <p:sldSz cx="12188952" cy="6858000" type="screen4x3"/>
   <p:notesSz cx="6858000" cy="9144000"/>
@@ -516,7 +517,7 @@
           <a:lstStyle/>
           <a:p>
             <a:r>
-              <a:t>Siehe Trainerhandbuch (Sektion 3) für Moderationshinweise, Timing und erwartete Teilnehmerreaktionen.</a:t>
+              <a:t>Agenda aus dem Ablaufplan (Sektion 3.1). Timing und Pausen siehe Trainerhandbuch.</a:t>
             </a:r>
           </a:p>
         </p:txBody>
@@ -542,76 +543,6 @@
 </file>
 
 <file path=ppt/notesSlides/notesSlide10.xml><?xml version="1.0" encoding="utf-8"?>
-<p:notes xmlns:a="http://schemas.openxmlformats.org/drawingml/2006/main" xmlns:p="http://schemas.openxmlformats.org/presentationml/2006/main" xmlns:r="http://schemas.openxmlformats.org/officeDocument/2006/relationships">
-  <p:cSld>
-    <p:spTree>
-      <p:nvGrpSpPr>
-        <p:cNvPr id="1" name=""/>
-        <p:cNvGrpSpPr/>
-        <p:nvPr/>
-      </p:nvGrpSpPr>
-      <p:grpSpPr>
-        <a:xfrm>
-          <a:off x="0" y="0"/>
-          <a:ext cx="0" cy="0"/>
-          <a:chOff x="0" y="0"/>
-          <a:chExt cx="0" cy="0"/>
-        </a:xfrm>
-      </p:grpSpPr>
-      <p:sp>
-        <p:nvSpPr>
-          <p:cNvPr id="2" name="Slide Image Placeholder 1"/>
-          <p:cNvSpPr>
-            <a:spLocks noGrp="1"/>
-          </p:cNvSpPr>
-          <p:nvPr>
-            <p:ph type="sldImg" idx="2"/>
-          </p:nvPr>
-        </p:nvSpPr>
-        <p:spPr/>
-      </p:sp>
-      <p:sp>
-        <p:nvSpPr>
-          <p:cNvPr id="3" name="Notes Placeholder 2"/>
-          <p:cNvSpPr>
-            <a:spLocks noGrp="1"/>
-          </p:cNvSpPr>
-          <p:nvPr>
-            <p:ph type="body" idx="3" sz="quarter"/>
-          </p:nvPr>
-        </p:nvSpPr>
-        <p:spPr/>
-        <p:txBody>
-          <a:bodyPr/>
-          <a:lstStyle/>
-          <a:p>
-            <a:r>
-              <a:t>Siehe Trainerhandbuch (Sektion 3) für Moderationshinweise, Timing und erwartete Teilnehmerreaktionen.</a:t>
-            </a:r>
-          </a:p>
-        </p:txBody>
-      </p:sp>
-      <p:sp>
-        <p:nvSpPr>
-          <p:cNvPr id="4" name="Slide Number Placeholder 3"/>
-          <p:cNvSpPr>
-            <a:spLocks noGrp="1"/>
-          </p:cNvSpPr>
-          <p:nvPr>
-            <p:ph type="sldNum" idx="5" sz="quarter"/>
-          </p:nvPr>
-        </p:nvSpPr>
-        <p:spPr/>
-      </p:sp>
-    </p:spTree>
-  </p:cSld>
-  <p:clrMapOvr>
-    <a:masterClrMapping/>
-  </p:clrMapOvr>
-</p:notes>
-</file>
-
-<file path=ppt/notesSlides/notesSlide11.xml><?xml version="1.0" encoding="utf-8"?>
 <p:notes xmlns:a="http://schemas.openxmlformats.org/drawingml/2006/main" xmlns:p="http://schemas.openxmlformats.org/presentationml/2006/main" xmlns:r="http://schemas.openxmlformats.org/officeDocument/2006/relationships">
   <p:cSld>
     <p:spTree>
@@ -5034,7 +4965,7 @@
                 </a:solidFill>
                 <a:latin typeface="Source Serif 4"/>
               </a:rPr>
-              <a:t>Format 2: Empfehlungen geben, bevor man welche bekommt</a:t>
+              <a:t>Format 1: Fachbeiträge und Impulse</a:t>
             </a:r>
           </a:p>
         </p:txBody>
@@ -5070,13 +5001,89 @@
               </a:spcAft>
             </a:pPr>
             <a:r>
-              <a:rPr sz="1200">
+              <a:rPr sz="1300">
                 <a:solidFill>
                   <a:srgbClr val="3D5466"/>
                 </a:solidFill>
                 <a:latin typeface="Arial"/>
               </a:rPr>
-              <a:t>Praxisregel: „Ein guter Netzwerkpartner merkt, dass er zu mir gehört, bevor er das erste Mal mit mir gearbeitet hat."</a:t>
+              <a:t>▸  Was: Kurze, prägnante Wissensimpulse – nicht als Werbung, sondern als echten Mehrwert für Netzwerkkontakte.</a:t>
+            </a:r>
+          </a:p>
+          <a:p>
+            <a:pPr>
+              <a:spcBef>
+                <a:spcPts val="400"/>
+              </a:spcBef>
+              <a:spcAft>
+                <a:spcPts val="200"/>
+              </a:spcAft>
+            </a:pPr>
+            <a:r>
+              <a:rPr sz="1300">
+                <a:solidFill>
+                  <a:srgbClr val="3D5466"/>
+                </a:solidFill>
+                <a:latin typeface="Arial"/>
+              </a:rPr>
+              <a:t>▸  Beispiele:</a:t>
+            </a:r>
+          </a:p>
+          <a:p>
+            <a:pPr>
+              <a:spcBef>
+                <a:spcPts val="400"/>
+              </a:spcBef>
+              <a:spcAft>
+                <a:spcPts val="200"/>
+              </a:spcAft>
+            </a:pPr>
+            <a:r>
+              <a:rPr sz="1300">
+                <a:solidFill>
+                  <a:srgbClr val="3D5466"/>
+                </a:solidFill>
+                <a:latin typeface="Arial"/>
+              </a:rPr>
+              <a:t>▸  Monatliche E-Mail an 5–10 Steuerberater mit einem aktuellen Branchenhinweis: „Für Ihre Mandanten in der Landwirtschaft: GAP-Änderungen ab Q3 2026 – was das für Investitionsfinanzierungen bedeutet" (Hinweis: Regelmäßige E-Mail-Kommunikation an externe Multiplikatoren ist datenschutzrechtlich und complianceseitig vorab mit der Compliance-/Datenschutzabteilung der Bank abzustimmen. Empfehlung: Kommunikation über offizielle Bank-Einladungen oder bankveranstaltete Formate läuft oft reibungsloser.)</a:t>
+            </a:r>
+          </a:p>
+          <a:p>
+            <a:pPr>
+              <a:spcBef>
+                <a:spcPts val="400"/>
+              </a:spcBef>
+              <a:spcAft>
+                <a:spcPts val="200"/>
+              </a:spcAft>
+            </a:pPr>
+            <a:r>
+              <a:rPr sz="1300">
+                <a:solidFill>
+                  <a:srgbClr val="3D5466"/>
+                </a:solidFill>
+                <a:latin typeface="Arial"/>
+              </a:rPr>
+              <a:t>▸  Kurzer Vortrag (15 Min.) bei IHK-Frühstück zu einem konkreten Finanzierungsthema</a:t>
+            </a:r>
+          </a:p>
+          <a:p>
+            <a:pPr>
+              <a:spcBef>
+                <a:spcPts val="400"/>
+              </a:spcBef>
+              <a:spcAft>
+                <a:spcPts val="200"/>
+              </a:spcAft>
+            </a:pPr>
+            <a:r>
+              <a:rPr sz="1300">
+                <a:solidFill>
+                  <a:srgbClr val="3D5466"/>
+                </a:solidFill>
+                <a:latin typeface="Arial"/>
+              </a:rPr>
+              <a:t>▸  LinkedIn-Post mit einer praxisnahen Erkenntnis aus einem anonymisierten Kundengespräch</a:t>
             </a:r>
           </a:p>
         </p:txBody>
@@ -5414,7 +5421,7 @@
                 </a:solidFill>
                 <a:latin typeface="Source Serif 4"/>
               </a:rPr>
-              <a:t>Format 3: Präsenz in Gremien und Verbänden</a:t>
+              <a:t>Format 2: Empfehlungen geben, bevor man welche bekommt</a:t>
             </a:r>
           </a:p>
         </p:txBody>
@@ -5450,89 +5457,13 @@
               </a:spcAft>
             </a:pPr>
             <a:r>
-              <a:rPr sz="1200">
+              <a:rPr sz="1300">
                 <a:solidFill>
                   <a:srgbClr val="3D5466"/>
                 </a:solidFill>
                 <a:latin typeface="Arial"/>
               </a:rPr>
-              <a:t>Strategisch wählen: Nicht jede Mitgliedschaft lohnt sich. Kriterien:</a:t>
-            </a:r>
-          </a:p>
-          <a:p>
-            <a:pPr>
-              <a:spcBef>
-                <a:spcPts val="400"/>
-              </a:spcBef>
-              <a:spcAft>
-                <a:spcPts val="200"/>
-              </a:spcAft>
-            </a:pPr>
-            <a:r>
-              <a:rPr sz="1300">
-                <a:solidFill>
-                  <a:srgbClr val="3D5466"/>
-                </a:solidFill>
-                <a:latin typeface="Arial"/>
-              </a:rPr>
-              <a:t>▸  Sind meine Zielkunden oder ihre Berater dort aktiv?</a:t>
-            </a:r>
-          </a:p>
-          <a:p>
-            <a:pPr>
-              <a:spcBef>
-                <a:spcPts val="400"/>
-              </a:spcBef>
-              <a:spcAft>
-                <a:spcPts val="200"/>
-              </a:spcAft>
-            </a:pPr>
-            <a:r>
-              <a:rPr sz="1300">
-                <a:solidFill>
-                  <a:srgbClr val="3D5466"/>
-                </a:solidFill>
-                <a:latin typeface="Arial"/>
-              </a:rPr>
-              <a:t>▸  Gibt es eine Möglichkeit, sich inhaltlich einzubringen (Vortrag, Arbeitskreis)?</a:t>
-            </a:r>
-          </a:p>
-          <a:p>
-            <a:pPr>
-              <a:spcBef>
-                <a:spcPts val="400"/>
-              </a:spcBef>
-              <a:spcAft>
-                <a:spcPts val="200"/>
-              </a:spcAft>
-            </a:pPr>
-            <a:r>
-              <a:rPr sz="1300">
-                <a:solidFill>
-                  <a:srgbClr val="3D5466"/>
-                </a:solidFill>
-                <a:latin typeface="Arial"/>
-              </a:rPr>
-              <a:t>▸  Lässt sich die Zeitinvestition rechtfertigen (qualitativ hochwertige Kontakte)?</a:t>
-            </a:r>
-          </a:p>
-          <a:p>
-            <a:pPr>
-              <a:spcBef>
-                <a:spcPts val="400"/>
-              </a:spcBef>
-              <a:spcAft>
-                <a:spcPts val="200"/>
-              </a:spcAft>
-            </a:pPr>
-            <a:r>
-              <a:rPr sz="1200">
-                <a:solidFill>
-                  <a:srgbClr val="3D5466"/>
-                </a:solidFill>
-                <a:latin typeface="Arial"/>
-              </a:rPr>
-              <a:t>Empfehlungen für FK-Berater in Süddeutschland – bewährteste Formate nach Zeitaufwand und Netzwerkqualität:</a:t>
+              <a:t>▸  Praxisregel: „Ein guter Netzwerkpartner merkt, dass er zu mir gehört, bevor er das erste Mal mit mir gearbeitet hat."</a:t>
             </a:r>
           </a:p>
         </p:txBody>
@@ -5870,7 +5801,7 @@
                 </a:solidFill>
                 <a:latin typeface="Source Serif 4"/>
               </a:rPr>
-              <a:t>Format 4: Digitale Sichtbarkeit (nachrangig, selektiv)</a:t>
+              <a:t>Format 3: Präsenz in Gremien und Verbänden</a:t>
             </a:r>
           </a:p>
         </p:txBody>
@@ -5906,13 +5837,13 @@
               </a:spcAft>
             </a:pPr>
             <a:r>
-              <a:rPr sz="1200">
+              <a:rPr sz="1300">
                 <a:solidFill>
                   <a:srgbClr val="3D5466"/>
                 </a:solidFill>
                 <a:latin typeface="Arial"/>
               </a:rPr>
-              <a:t>## 4.5 Der 90-Tage-Netzwerkplan</a:t>
+              <a:t>▸  Strategisch wählen: Nicht jede Mitgliedschaft lohnt sich. Kriterien:</a:t>
             </a:r>
           </a:p>
           <a:p>
@@ -5925,13 +5856,13 @@
               </a:spcAft>
             </a:pPr>
             <a:r>
-              <a:rPr sz="1200">
+              <a:rPr sz="1300">
                 <a:solidFill>
                   <a:srgbClr val="3D5466"/>
                 </a:solidFill>
                 <a:latin typeface="Arial"/>
               </a:rPr>
-              <a:t>Ein Netzwerk entsteht nicht durch einmalige Aktionen. Es braucht ein System – klein, aber regelmäßig.</a:t>
+              <a:t>▸  Sind meine Zielkunden oder ihre Berater dort aktiv?</a:t>
             </a:r>
           </a:p>
           <a:p>
@@ -5944,13 +5875,13 @@
               </a:spcAft>
             </a:pPr>
             <a:r>
-              <a:rPr sz="1200">
+              <a:rPr sz="1300">
                 <a:solidFill>
                   <a:srgbClr val="3D5466"/>
                 </a:solidFill>
                 <a:latin typeface="Arial"/>
               </a:rPr>
-              <a:t>## 4.6 Praxiscase: Stefan Köhler – vom Geheimtipp zur Autorität</a:t>
+              <a:t>▸  Gibt es eine Möglichkeit, sich inhaltlich einzubringen (Vortrag, Arbeitskreis)?</a:t>
             </a:r>
           </a:p>
           <a:p>
@@ -5963,13 +5894,13 @@
               </a:spcAft>
             </a:pPr>
             <a:r>
-              <a:rPr sz="1200">
+              <a:rPr sz="1300">
                 <a:solidFill>
                   <a:srgbClr val="3D5466"/>
                 </a:solidFill>
                 <a:latin typeface="Arial"/>
               </a:rPr>
-              <a:t>Ausgangssituation</a:t>
+              <a:t>▸  Lässt sich die Zeitinvestition rechtfertigen (qualitativ hochwertige Kontakte)?</a:t>
             </a:r>
           </a:p>
           <a:p>
@@ -5982,146 +5913,13 @@
               </a:spcAft>
             </a:pPr>
             <a:r>
-              <a:rPr sz="1200">
+              <a:rPr sz="1300">
                 <a:solidFill>
                   <a:srgbClr val="3D5466"/>
                 </a:solidFill>
                 <a:latin typeface="Arial"/>
               </a:rPr>
-              <a:t>Stefan arbeitet hart, berät gut – aber er ist unsichtbar.</a:t>
-            </a:r>
-          </a:p>
-          <a:p>
-            <a:pPr>
-              <a:spcBef>
-                <a:spcPts val="400"/>
-              </a:spcBef>
-              <a:spcAft>
-                <a:spcPts val="200"/>
-              </a:spcAft>
-            </a:pPr>
-            <a:r>
-              <a:rPr sz="1200">
-                <a:solidFill>
-                  <a:srgbClr val="3D5466"/>
-                </a:solidFill>
-                <a:latin typeface="Arial"/>
-              </a:rPr>
-              <a:t>Was Stefan verändert (in 90 Tagen)</a:t>
-            </a:r>
-          </a:p>
-          <a:p>
-            <a:pPr>
-              <a:spcBef>
-                <a:spcPts val="400"/>
-              </a:spcBef>
-              <a:spcAft>
-                <a:spcPts val="200"/>
-              </a:spcAft>
-            </a:pPr>
-            <a:r>
-              <a:rPr sz="1200">
-                <a:solidFill>
-                  <a:srgbClr val="3D5466"/>
-                </a:solidFill>
-                <a:latin typeface="Arial"/>
-              </a:rPr>
-              <a:t>Monat 1 – Analyse &amp; Positionierung:</a:t>
-            </a:r>
-          </a:p>
-          <a:p>
-            <a:pPr>
-              <a:spcBef>
-                <a:spcPts val="400"/>
-              </a:spcBef>
-              <a:spcAft>
-                <a:spcPts val="200"/>
-              </a:spcAft>
-            </a:pPr>
-            <a:r>
-              <a:rPr sz="1300">
-                <a:solidFill>
-                  <a:srgbClr val="3D5466"/>
-                </a:solidFill>
-                <a:latin typeface="Arial"/>
-              </a:rPr>
-              <a:t>▸  Stefan erstellt seine persönliche Netzwerkkarte. Ergebnis: Intern gut vernetzt, intern überbekannt. Extern: kaum Kontakte außerhalb seiner eigenen Kunden.</a:t>
-            </a:r>
-          </a:p>
-          <a:p>
-            <a:pPr>
-              <a:spcBef>
-                <a:spcPts val="400"/>
-              </a:spcBef>
-              <a:spcAft>
-                <a:spcPts val="200"/>
-              </a:spcAft>
-            </a:pPr>
-            <a:r>
-              <a:rPr sz="1300">
-                <a:solidFill>
-                  <a:srgbClr val="3D5466"/>
-                </a:solidFill>
-                <a:latin typeface="Arial"/>
-              </a:rPr>
-              <a:t>▸  Er identifiziert drei Multiplikatoren, die für sein Zielfeld entscheidend sind: (1) der größte Steuerberater für Landwirte in der Region, (2) der Geschäftsführer des regionalen Maschinenrings, (3) der BBV-Kreisverband.</a:t>
-            </a:r>
-          </a:p>
-          <a:p>
-            <a:pPr>
-              <a:spcBef>
-                <a:spcPts val="400"/>
-              </a:spcBef>
-              <a:spcAft>
-                <a:spcPts val="200"/>
-              </a:spcAft>
-            </a:pPr>
-            <a:r>
-              <a:rPr sz="1300">
-                <a:solidFill>
-                  <a:srgbClr val="3D5466"/>
-                </a:solidFill>
-                <a:latin typeface="Arial"/>
-              </a:rPr>
-              <a:t>▸  Er formuliert sein Positionierungsversprechen: „Ich bin der Ansprechpartner für Agrar- und Forstbetriebe ab 200 ha im Allgäu, wenn es um Investitionsfinanzierung, Betriebsumstrukturierung und Nachfolge geht."</a:t>
-            </a:r>
-          </a:p>
-          <a:p>
-            <a:pPr>
-              <a:spcBef>
-                <a:spcPts val="400"/>
-              </a:spcBef>
-              <a:spcAft>
-                <a:spcPts val="200"/>
-              </a:spcAft>
-            </a:pPr>
-            <a:r>
-              <a:rPr sz="1200">
-                <a:solidFill>
-                  <a:srgbClr val="3D5466"/>
-                </a:solidFill>
-                <a:latin typeface="Arial"/>
-              </a:rPr>
-              <a:t>Monat 2 – Erste Kontakte:</a:t>
-            </a:r>
-          </a:p>
-          <a:p>
-            <a:pPr>
-              <a:spcBef>
-                <a:spcPts val="400"/>
-              </a:spcBef>
-              <a:spcAft>
-                <a:spcPts val="200"/>
-              </a:spcAft>
-            </a:pPr>
-            <a:r>
-              <a:rPr sz="1300">
-                <a:solidFill>
-                  <a:srgbClr val="3D5466"/>
-                </a:solidFill>
-                <a:latin typeface="Arial"/>
-              </a:rPr>
-              <a:t>▸  Stefan ruft den Steuerberater an – nicht mit einem Verkaufsangebot, sondern mit einer konkreten Einladung: „Ich würde Ihnen gerne zeigen, wie wir bei Biogasinvestitionen vorgehen – vielleicht ist das für Ihre Mandanten relevant." Er bezieht sich dabei auf eine jüngste GAP-Meldung im Bayerischen Landwirtschaftlichen Wochenblatt als sachlichen Aufhänger. Der Steuerberater ist anfangs reserviert – Bankberater haben keinen guten Ruf bei Steuerberatern, die Direktvertrieb fürchten. Stefan macht deshalb keinen Produktbezug, sondern bietet ein fachliches Kurzgespräch über Fördermittel an, das dem Steuerberater selbst gegenüber seinen Mandanten nützt. → Treffen findet statt. Wäre möglich: Vorab-Kontakt über das BBV-Netzwerk oder ein gemeinsames IHK-Event hätte diesen Anruf noch einfacher gemacht.</a:t>
+              <a:t>▸  Empfehlungen für FK-Berater in Süddeutschland – bewährteste Formate nach Zeitaufwand und Netzwerkqualität:</a:t>
             </a:r>
           </a:p>
         </p:txBody>
@@ -6459,7 +6257,7 @@
                 </a:solidFill>
                 <a:latin typeface="Source Serif 4"/>
               </a:rPr>
-              <a:t>Arbeitsblatt 1: Persönliche Netzwerkkarte</a:t>
+              <a:t>Format 4: Digitale Sichtbarkeit (nachrangig, selektiv)</a:t>
             </a:r>
           </a:p>
         </p:txBody>
@@ -6495,13 +6293,222 @@
               </a:spcAft>
             </a:pPr>
             <a:r>
-              <a:rPr sz="1200">
+              <a:rPr sz="1300">
                 <a:solidFill>
                   <a:srgbClr val="3D5466"/>
                 </a:solidFill>
                 <a:latin typeface="Arial"/>
               </a:rPr>
-              <a:t>(Zeichnen oder tabellarisch ausfüllen)</a:t>
+              <a:t>▸  ## 4.5 Der 90-Tage-Netzwerkplan</a:t>
+            </a:r>
+          </a:p>
+          <a:p>
+            <a:pPr>
+              <a:spcBef>
+                <a:spcPts val="400"/>
+              </a:spcBef>
+              <a:spcAft>
+                <a:spcPts val="200"/>
+              </a:spcAft>
+            </a:pPr>
+            <a:r>
+              <a:rPr sz="1300">
+                <a:solidFill>
+                  <a:srgbClr val="3D5466"/>
+                </a:solidFill>
+                <a:latin typeface="Arial"/>
+              </a:rPr>
+              <a:t>▸  Ein Netzwerk entsteht nicht durch einmalige Aktionen. Es braucht ein System – klein, aber regelmäßig.</a:t>
+            </a:r>
+          </a:p>
+          <a:p>
+            <a:pPr>
+              <a:spcBef>
+                <a:spcPts val="400"/>
+              </a:spcBef>
+              <a:spcAft>
+                <a:spcPts val="200"/>
+              </a:spcAft>
+            </a:pPr>
+            <a:r>
+              <a:rPr sz="1300">
+                <a:solidFill>
+                  <a:srgbClr val="3D5466"/>
+                </a:solidFill>
+                <a:latin typeface="Arial"/>
+              </a:rPr>
+              <a:t>▸  ## 4.6 Praxiscase: Stefan Köhler – vom Geheimtipp zur Autorität</a:t>
+            </a:r>
+          </a:p>
+          <a:p>
+            <a:pPr>
+              <a:spcBef>
+                <a:spcPts val="400"/>
+              </a:spcBef>
+              <a:spcAft>
+                <a:spcPts val="200"/>
+              </a:spcAft>
+            </a:pPr>
+            <a:r>
+              <a:rPr sz="1300">
+                <a:solidFill>
+                  <a:srgbClr val="3D5466"/>
+                </a:solidFill>
+                <a:latin typeface="Arial"/>
+              </a:rPr>
+              <a:t>▸  Ausgangssituation</a:t>
+            </a:r>
+          </a:p>
+          <a:p>
+            <a:pPr>
+              <a:spcBef>
+                <a:spcPts val="400"/>
+              </a:spcBef>
+              <a:spcAft>
+                <a:spcPts val="200"/>
+              </a:spcAft>
+            </a:pPr>
+            <a:r>
+              <a:rPr sz="1300">
+                <a:solidFill>
+                  <a:srgbClr val="3D5466"/>
+                </a:solidFill>
+                <a:latin typeface="Arial"/>
+              </a:rPr>
+              <a:t>▸  Stefan arbeitet hart, berät gut – aber er ist unsichtbar.</a:t>
+            </a:r>
+          </a:p>
+          <a:p>
+            <a:pPr>
+              <a:spcBef>
+                <a:spcPts val="400"/>
+              </a:spcBef>
+              <a:spcAft>
+                <a:spcPts val="200"/>
+              </a:spcAft>
+            </a:pPr>
+            <a:r>
+              <a:rPr sz="1300">
+                <a:solidFill>
+                  <a:srgbClr val="3D5466"/>
+                </a:solidFill>
+                <a:latin typeface="Arial"/>
+              </a:rPr>
+              <a:t>▸  Was Stefan verändert (in 90 Tagen)</a:t>
+            </a:r>
+          </a:p>
+          <a:p>
+            <a:pPr>
+              <a:spcBef>
+                <a:spcPts val="400"/>
+              </a:spcBef>
+              <a:spcAft>
+                <a:spcPts val="200"/>
+              </a:spcAft>
+            </a:pPr>
+            <a:r>
+              <a:rPr sz="1300">
+                <a:solidFill>
+                  <a:srgbClr val="3D5466"/>
+                </a:solidFill>
+                <a:latin typeface="Arial"/>
+              </a:rPr>
+              <a:t>▸  Monat 1 – Analyse &amp; Positionierung:</a:t>
+            </a:r>
+          </a:p>
+          <a:p>
+            <a:pPr>
+              <a:spcBef>
+                <a:spcPts val="400"/>
+              </a:spcBef>
+              <a:spcAft>
+                <a:spcPts val="200"/>
+              </a:spcAft>
+            </a:pPr>
+            <a:r>
+              <a:rPr sz="1300">
+                <a:solidFill>
+                  <a:srgbClr val="3D5466"/>
+                </a:solidFill>
+                <a:latin typeface="Arial"/>
+              </a:rPr>
+              <a:t>▸  Stefan erstellt seine persönliche Netzwerkkarte. Ergebnis: Intern gut vernetzt, intern überbekannt. Extern: kaum Kontakte außerhalb seiner eigenen Kunden.</a:t>
+            </a:r>
+          </a:p>
+          <a:p>
+            <a:pPr>
+              <a:spcBef>
+                <a:spcPts val="400"/>
+              </a:spcBef>
+              <a:spcAft>
+                <a:spcPts val="200"/>
+              </a:spcAft>
+            </a:pPr>
+            <a:r>
+              <a:rPr sz="1300">
+                <a:solidFill>
+                  <a:srgbClr val="3D5466"/>
+                </a:solidFill>
+                <a:latin typeface="Arial"/>
+              </a:rPr>
+              <a:t>▸  Er identifiziert drei Multiplikatoren, die für sein Zielfeld entscheidend sind: (1) der größte Steuerberater für Landwirte in der Region, (2) der Geschäftsführer des regionalen Maschinenrings, (3) der BBV-Kreisverband.</a:t>
+            </a:r>
+          </a:p>
+          <a:p>
+            <a:pPr>
+              <a:spcBef>
+                <a:spcPts val="400"/>
+              </a:spcBef>
+              <a:spcAft>
+                <a:spcPts val="200"/>
+              </a:spcAft>
+            </a:pPr>
+            <a:r>
+              <a:rPr sz="1300">
+                <a:solidFill>
+                  <a:srgbClr val="3D5466"/>
+                </a:solidFill>
+                <a:latin typeface="Arial"/>
+              </a:rPr>
+              <a:t>▸  Er formuliert sein Positionierungsversprechen: „Ich bin der Ansprechpartner für Agrar- und Forstbetriebe ab 200 ha im Allgäu, wenn es um Investitionsfinanzierung, Betriebsumstrukturierung und Nachfolge geht."</a:t>
+            </a:r>
+          </a:p>
+          <a:p>
+            <a:pPr>
+              <a:spcBef>
+                <a:spcPts val="400"/>
+              </a:spcBef>
+              <a:spcAft>
+                <a:spcPts val="200"/>
+              </a:spcAft>
+            </a:pPr>
+            <a:r>
+              <a:rPr sz="1300">
+                <a:solidFill>
+                  <a:srgbClr val="3D5466"/>
+                </a:solidFill>
+                <a:latin typeface="Arial"/>
+              </a:rPr>
+              <a:t>▸  Monat 2 – Erste Kontakte:</a:t>
+            </a:r>
+          </a:p>
+          <a:p>
+            <a:pPr>
+              <a:spcBef>
+                <a:spcPts val="400"/>
+              </a:spcBef>
+              <a:spcAft>
+                <a:spcPts val="200"/>
+              </a:spcAft>
+            </a:pPr>
+            <a:r>
+              <a:rPr sz="1300">
+                <a:solidFill>
+                  <a:srgbClr val="3D5466"/>
+                </a:solidFill>
+                <a:latin typeface="Arial"/>
+              </a:rPr>
+              <a:t>▸  Stefan ruft den Steuerberater an – nicht mit einem Verkaufsangebot, sondern mit einer konkreten Einladung: „Ich würde Ihnen gerne zeigen, wie wir bei Biogasinvestitionen vorgehen – vielleicht ist das für Ihre Mandanten relevant." Er bezieht sich dabei auf eine jüngste GAP-Meldung im Bayerischen Landwirtschaftlichen Wochenblatt als sachlichen Aufhänger. Der Steuerberater ist anfangs reserviert – Bankberater haben keinen guten Ruf bei Steuerberatern, die Direktvertrieb fürchten. Stefan macht deshalb keinen Produktbezug, sondern bietet ein fachliches Kurzgespräch über Fördermittel an, das dem Steuerberater selbst gegenüber seinen Mandanten nützt. → Treffen findet statt. Wäre möglich: Vorab-Kontakt über das BBV-Netzwerk oder ein gemeinsames IHK-Event hätte diesen Anruf noch einfacher gemacht.</a:t>
             </a:r>
           </a:p>
         </p:txBody>
@@ -6839,14 +6846,56 @@
                 </a:solidFill>
                 <a:latin typeface="Source Serif 4"/>
               </a:rPr>
-              <a:t>Arbeitsblatt 2: Lückenanalyse</a:t>
-            </a:r>
-          </a:p>
-        </p:txBody>
-      </p:sp>
-      <p:sp>
-        <p:nvSpPr>
-          <p:cNvPr id="8" name="Rectangle 7"/>
+              <a:t>Arbeitsblatt 1: Persönliche Netzwerkkarte</a:t>
+            </a:r>
+          </a:p>
+        </p:txBody>
+      </p:sp>
+      <p:sp>
+        <p:nvSpPr>
+          <p:cNvPr id="8" name="TextBox 7"/>
+          <p:cNvSpPr txBox="1"/>
+          <p:nvPr/>
+        </p:nvSpPr>
+        <p:spPr>
+          <a:xfrm>
+            <a:off x="685800" y="1417320"/>
+            <a:ext cx="10817352" cy="5029200"/>
+          </a:xfrm>
+          <a:prstGeom prst="rect">
+            <a:avLst/>
+          </a:prstGeom>
+          <a:noFill/>
+        </p:spPr>
+        <p:txBody>
+          <a:bodyPr wrap="square">
+            <a:spAutoFit/>
+          </a:bodyPr>
+          <a:lstStyle/>
+          <a:p>
+            <a:pPr>
+              <a:spcBef>
+                <a:spcPts val="400"/>
+              </a:spcBef>
+              <a:spcAft>
+                <a:spcPts val="200"/>
+              </a:spcAft>
+            </a:pPr>
+            <a:r>
+              <a:rPr sz="1300">
+                <a:solidFill>
+                  <a:srgbClr val="3D5466"/>
+                </a:solidFill>
+                <a:latin typeface="Arial"/>
+              </a:rPr>
+              <a:t>▸  (Zeichnen oder tabellarisch ausfüllen)</a:t>
+            </a:r>
+          </a:p>
+        </p:txBody>
+      </p:sp>
+      <p:sp>
+        <p:nvSpPr>
+          <p:cNvPr id="9" name="Rectangle 8"/>
           <p:cNvSpPr/>
           <p:nvPr/>
         </p:nvSpPr>
@@ -6889,7 +6938,7 @@
       </p:sp>
       <p:sp>
         <p:nvSpPr>
-          <p:cNvPr id="9" name="TextBox 8"/>
+          <p:cNvPr id="10" name="TextBox 9"/>
           <p:cNvSpPr txBox="1"/>
           <p:nvPr/>
         </p:nvSpPr>
@@ -6955,7 +7004,7 @@
             <a:avLst/>
           </a:prstGeom>
           <a:solidFill>
-            <a:srgbClr val="EDEDF3"/>
+            <a:srgbClr val="FFFFFF"/>
           </a:solidFill>
           <a:ln>
             <a:noFill/>
@@ -7056,51 +7105,43 @@
                 </a:solidFill>
                 <a:latin typeface="JetBrains Mono"/>
               </a:rPr>
-              <a:t>M20  ·  INHALT</a:t>
-            </a:r>
-          </a:p>
-        </p:txBody>
-      </p:sp>
-      <p:sp>
-        <p:nvSpPr>
-          <p:cNvPr id="5" name="Rectangle 4"/>
-          <p:cNvSpPr/>
-          <p:nvPr/>
-        </p:nvSpPr>
-        <p:spPr>
-          <a:xfrm>
-            <a:off x="0" y="1234440"/>
-            <a:ext cx="12188952" cy="12700"/>
-          </a:xfrm>
-          <a:prstGeom prst="rect">
-            <a:avLst/>
-          </a:prstGeom>
-          <a:solidFill>
-            <a:srgbClr val="D8DFE4"/>
-          </a:solidFill>
-          <a:ln>
-            <a:noFill/>
-          </a:ln>
-        </p:spPr>
-        <p:style>
-          <a:lnRef idx="1">
-            <a:schemeClr val="accent1"/>
-          </a:lnRef>
-          <a:fillRef idx="3">
-            <a:schemeClr val="accent1"/>
-          </a:fillRef>
-          <a:effectRef idx="2">
-            <a:schemeClr val="accent1"/>
-          </a:effectRef>
-          <a:fontRef idx="minor">
-            <a:schemeClr val="lt1"/>
-          </a:fontRef>
-        </p:style>
-        <p:txBody>
-          <a:bodyPr rtlCol="0" anchor="ctr"/>
-          <a:lstStyle/>
-          <a:p>
-            <a:pPr algn="ctr"/>
+              <a:t>M20  ·  ÜBERSICHT</a:t>
+            </a:r>
+          </a:p>
+        </p:txBody>
+      </p:sp>
+      <p:sp>
+        <p:nvSpPr>
+          <p:cNvPr id="5" name="TextBox 4"/>
+          <p:cNvSpPr txBox="1"/>
+          <p:nvPr/>
+        </p:nvSpPr>
+        <p:spPr>
+          <a:xfrm>
+            <a:off x="685800" y="502920"/>
+            <a:ext cx="10817352" cy="594360"/>
+          </a:xfrm>
+          <a:prstGeom prst="rect">
+            <a:avLst/>
+          </a:prstGeom>
+          <a:noFill/>
+        </p:spPr>
+        <p:txBody>
+          <a:bodyPr wrap="square">
+            <a:spAutoFit/>
+          </a:bodyPr>
+          <a:lstStyle/>
+          <a:p>
+            <a:pPr algn="l"/>
+            <a:r>
+              <a:rPr sz="2000" b="1" i="0">
+                <a:solidFill>
+                  <a:srgbClr val="1F2C56"/>
+                </a:solidFill>
+                <a:latin typeface="Source Serif 4"/>
+              </a:rPr>
+              <a:t>Arbeitsblatt 1: Persönliche Netzwerkkarte</a:t>
+            </a:r>
           </a:p>
         </p:txBody>
       </p:sp>
@@ -7112,8 +7153,8 @@
         </p:nvSpPr>
         <p:spPr>
           <a:xfrm>
-            <a:off x="685800" y="502920"/>
-            <a:ext cx="36576" cy="658368"/>
+            <a:off x="685800" y="1143000"/>
+            <a:ext cx="10817352" cy="25400"/>
           </a:xfrm>
           <a:prstGeom prst="rect">
             <a:avLst/>
@@ -7147,41 +7188,563 @@
           </a:p>
         </p:txBody>
       </p:sp>
-      <p:sp>
-        <p:nvSpPr>
-          <p:cNvPr id="7" name="TextBox 6"/>
-          <p:cNvSpPr txBox="1"/>
-          <p:nvPr/>
-        </p:nvSpPr>
-        <p:spPr>
-          <a:xfrm>
-            <a:off x="813816" y="502920"/>
-            <a:ext cx="10634472" cy="685800"/>
-          </a:xfrm>
-          <a:prstGeom prst="rect">
-            <a:avLst/>
-          </a:prstGeom>
-          <a:noFill/>
-        </p:spPr>
-        <p:txBody>
-          <a:bodyPr wrap="square">
-            <a:spAutoFit/>
-          </a:bodyPr>
-          <a:lstStyle/>
-          <a:p>
-            <a:pPr algn="l"/>
-            <a:r>
-              <a:rPr sz="2400" b="1" i="0">
-                <a:solidFill>
-                  <a:srgbClr val="1F2C56"/>
-                </a:solidFill>
-                <a:latin typeface="Source Serif 4"/>
-              </a:rPr>
-              <a:t>Arbeitsblatt 3: 90-Tage-Aktionsplan</a:t>
-            </a:r>
-          </a:p>
-        </p:txBody>
-      </p:sp>
+      <p:graphicFrame>
+        <p:nvGraphicFramePr>
+          <p:cNvPr id="7" name="Table 6"/>
+          <p:cNvGraphicFramePr>
+            <a:graphicFrameLocks noGrp="1"/>
+          </p:cNvGraphicFramePr>
+          <p:nvPr/>
+        </p:nvGraphicFramePr>
+        <p:xfrm>
+          <a:off x="685800" y="1417320"/>
+          <a:ext cx="10817352" cy="3456432"/>
+        </p:xfrm>
+        <a:graphic>
+          <a:graphicData uri="http://schemas.openxmlformats.org/drawingml/2006/table">
+            <a:tbl>
+              <a:tblPr firstRow="1" bandRow="1">
+                <a:tableStyleId>{5C22544A-7EE6-4342-B048-85BDC9FD1C3A}</a:tableStyleId>
+              </a:tblPr>
+              <a:tblGrid>
+                <a:gridCol w="2163470"/>
+                <a:gridCol w="2163470"/>
+                <a:gridCol w="2163470"/>
+                <a:gridCol w="2163470"/>
+                <a:gridCol w="2163472"/>
+              </a:tblGrid>
+              <a:tr h="384048">
+                <a:tc>
+                  <a:txBody>
+                    <a:bodyPr/>
+                    <a:lstStyle/>
+                    <a:p>
+                      <a:r>
+                        <a:rPr sz="1100" b="1">
+                          <a:solidFill>
+                            <a:srgbClr val="FFFFFF"/>
+                          </a:solidFill>
+                          <a:latin typeface="Arial"/>
+                        </a:rPr>
+                        <a:t>Bereich</a:t>
+                      </a:r>
+                    </a:p>
+                  </a:txBody>
+                  <a:tcPr>
+                    <a:solidFill>
+                      <a:srgbClr val="1F2C56"/>
+                    </a:solidFill>
+                  </a:tcPr>
+                </a:tc>
+                <a:tc>
+                  <a:txBody>
+                    <a:bodyPr/>
+                    <a:lstStyle/>
+                    <a:p>
+                      <a:r>
+                        <a:rPr sz="1100" b="1">
+                          <a:solidFill>
+                            <a:srgbClr val="FFFFFF"/>
+                          </a:solidFill>
+                          <a:latin typeface="Arial"/>
+                        </a:rPr>
+                        <a:t>Meine wichtigsten Kontakte</a:t>
+                      </a:r>
+                    </a:p>
+                  </a:txBody>
+                  <a:tcPr>
+                    <a:solidFill>
+                      <a:srgbClr val="1F2C56"/>
+                    </a:solidFill>
+                  </a:tcPr>
+                </a:tc>
+                <a:tc>
+                  <a:txBody>
+                    <a:bodyPr/>
+                    <a:lstStyle/>
+                    <a:p>
+                      <a:r>
+                        <a:rPr sz="1100" b="1">
+                          <a:solidFill>
+                            <a:srgbClr val="FFFFFF"/>
+                          </a:solidFill>
+                          <a:latin typeface="Arial"/>
+                        </a:rPr>
+                        <a:t>Qualität (1–5)</a:t>
+                      </a:r>
+                    </a:p>
+                  </a:txBody>
+                  <a:tcPr>
+                    <a:solidFill>
+                      <a:srgbClr val="1F2C56"/>
+                    </a:solidFill>
+                  </a:tcPr>
+                </a:tc>
+                <a:tc>
+                  <a:txBody>
+                    <a:bodyPr/>
+                    <a:lstStyle/>
+                    <a:p>
+                      <a:r>
+                        <a:rPr sz="1100" b="1">
+                          <a:solidFill>
+                            <a:srgbClr val="FFFFFF"/>
+                          </a:solidFill>
+                          <a:latin typeface="Arial"/>
+                        </a:rPr>
+                        <a:t>Letzte Interaktion</a:t>
+                      </a:r>
+                    </a:p>
+                  </a:txBody>
+                  <a:tcPr>
+                    <a:solidFill>
+                      <a:srgbClr val="1F2C56"/>
+                    </a:solidFill>
+                  </a:tcPr>
+                </a:tc>
+                <a:tc>
+                  <a:txBody>
+                    <a:bodyPr/>
+                    <a:lstStyle/>
+                    <a:p>
+                      <a:r>
+                        <a:rPr sz="1100" b="1">
+                          <a:solidFill>
+                            <a:srgbClr val="FFFFFF"/>
+                          </a:solidFill>
+                          <a:latin typeface="Arial"/>
+                        </a:rPr>
+                        <a:t>Nächster Schritt</a:t>
+                      </a:r>
+                    </a:p>
+                  </a:txBody>
+                  <a:tcPr>
+                    <a:solidFill>
+                      <a:srgbClr val="1F2C56"/>
+                    </a:solidFill>
+                  </a:tcPr>
+                </a:tc>
+              </a:tr>
+              <a:tr h="384048">
+                <a:tc>
+                  <a:txBody>
+                    <a:bodyPr/>
+                    <a:lstStyle/>
+                    <a:p>
+                      <a:r>
+                        <a:rPr sz="1050">
+                          <a:solidFill>
+                            <a:srgbClr val="3D5466"/>
+                          </a:solidFill>
+                          <a:latin typeface="Arial"/>
+                        </a:rPr>
+                        <a:t>Internes FK-Team</a:t>
+                      </a:r>
+                    </a:p>
+                  </a:txBody>
+                  <a:tcPr/>
+                </a:tc>
+                <a:tc>
+                  <a:txBody>
+                    <a:bodyPr/>
+                    <a:lstStyle/>
+                    <a:p/>
+                  </a:txBody>
+                  <a:tcPr/>
+                </a:tc>
+                <a:tc>
+                  <a:txBody>
+                    <a:bodyPr/>
+                    <a:lstStyle/>
+                    <a:p/>
+                  </a:txBody>
+                  <a:tcPr/>
+                </a:tc>
+                <a:tc>
+                  <a:txBody>
+                    <a:bodyPr/>
+                    <a:lstStyle/>
+                    <a:p/>
+                  </a:txBody>
+                  <a:tcPr/>
+                </a:tc>
+                <a:tc>
+                  <a:txBody>
+                    <a:bodyPr/>
+                    <a:lstStyle/>
+                    <a:p/>
+                  </a:txBody>
+                  <a:tcPr/>
+                </a:tc>
+              </a:tr>
+              <a:tr h="384048">
+                <a:tc>
+                  <a:txBody>
+                    <a:bodyPr/>
+                    <a:lstStyle/>
+                    <a:p>
+                      <a:r>
+                        <a:rPr sz="1050">
+                          <a:solidFill>
+                            <a:srgbClr val="3D5466"/>
+                          </a:solidFill>
+                          <a:latin typeface="Arial"/>
+                        </a:rPr>
+                        <a:t>Interne Spezialisten</a:t>
+                      </a:r>
+                    </a:p>
+                  </a:txBody>
+                  <a:tcPr/>
+                </a:tc>
+                <a:tc>
+                  <a:txBody>
+                    <a:bodyPr/>
+                    <a:lstStyle/>
+                    <a:p/>
+                  </a:txBody>
+                  <a:tcPr/>
+                </a:tc>
+                <a:tc>
+                  <a:txBody>
+                    <a:bodyPr/>
+                    <a:lstStyle/>
+                    <a:p/>
+                  </a:txBody>
+                  <a:tcPr/>
+                </a:tc>
+                <a:tc>
+                  <a:txBody>
+                    <a:bodyPr/>
+                    <a:lstStyle/>
+                    <a:p/>
+                  </a:txBody>
+                  <a:tcPr/>
+                </a:tc>
+                <a:tc>
+                  <a:txBody>
+                    <a:bodyPr/>
+                    <a:lstStyle/>
+                    <a:p/>
+                  </a:txBody>
+                  <a:tcPr/>
+                </a:tc>
+              </a:tr>
+              <a:tr h="384048">
+                <a:tc>
+                  <a:txBody>
+                    <a:bodyPr/>
+                    <a:lstStyle/>
+                    <a:p>
+                      <a:r>
+                        <a:rPr sz="1050">
+                          <a:solidFill>
+                            <a:srgbClr val="3D5466"/>
+                          </a:solidFill>
+                          <a:latin typeface="Arial"/>
+                        </a:rPr>
+                        <a:t>Verbundpartner</a:t>
+                      </a:r>
+                    </a:p>
+                  </a:txBody>
+                  <a:tcPr/>
+                </a:tc>
+                <a:tc>
+                  <a:txBody>
+                    <a:bodyPr/>
+                    <a:lstStyle/>
+                    <a:p/>
+                  </a:txBody>
+                  <a:tcPr/>
+                </a:tc>
+                <a:tc>
+                  <a:txBody>
+                    <a:bodyPr/>
+                    <a:lstStyle/>
+                    <a:p/>
+                  </a:txBody>
+                  <a:tcPr/>
+                </a:tc>
+                <a:tc>
+                  <a:txBody>
+                    <a:bodyPr/>
+                    <a:lstStyle/>
+                    <a:p/>
+                  </a:txBody>
+                  <a:tcPr/>
+                </a:tc>
+                <a:tc>
+                  <a:txBody>
+                    <a:bodyPr/>
+                    <a:lstStyle/>
+                    <a:p/>
+                  </a:txBody>
+                  <a:tcPr/>
+                </a:tc>
+              </a:tr>
+              <a:tr h="384048">
+                <a:tc>
+                  <a:txBody>
+                    <a:bodyPr/>
+                    <a:lstStyle/>
+                    <a:p>
+                      <a:r>
+                        <a:rPr sz="1050">
+                          <a:solidFill>
+                            <a:srgbClr val="3D5466"/>
+                          </a:solidFill>
+                          <a:latin typeface="Arial"/>
+                        </a:rPr>
+                        <a:t>Steuerberater / WP</a:t>
+                      </a:r>
+                    </a:p>
+                  </a:txBody>
+                  <a:tcPr/>
+                </a:tc>
+                <a:tc>
+                  <a:txBody>
+                    <a:bodyPr/>
+                    <a:lstStyle/>
+                    <a:p/>
+                  </a:txBody>
+                  <a:tcPr/>
+                </a:tc>
+                <a:tc>
+                  <a:txBody>
+                    <a:bodyPr/>
+                    <a:lstStyle/>
+                    <a:p/>
+                  </a:txBody>
+                  <a:tcPr/>
+                </a:tc>
+                <a:tc>
+                  <a:txBody>
+                    <a:bodyPr/>
+                    <a:lstStyle/>
+                    <a:p/>
+                  </a:txBody>
+                  <a:tcPr/>
+                </a:tc>
+                <a:tc>
+                  <a:txBody>
+                    <a:bodyPr/>
+                    <a:lstStyle/>
+                    <a:p/>
+                  </a:txBody>
+                  <a:tcPr/>
+                </a:tc>
+              </a:tr>
+              <a:tr h="384048">
+                <a:tc>
+                  <a:txBody>
+                    <a:bodyPr/>
+                    <a:lstStyle/>
+                    <a:p>
+                      <a:r>
+                        <a:rPr sz="1050">
+                          <a:solidFill>
+                            <a:srgbClr val="3D5466"/>
+                          </a:solidFill>
+                          <a:latin typeface="Arial"/>
+                        </a:rPr>
+                        <a:t>Rechtsanwälte</a:t>
+                      </a:r>
+                    </a:p>
+                  </a:txBody>
+                  <a:tcPr/>
+                </a:tc>
+                <a:tc>
+                  <a:txBody>
+                    <a:bodyPr/>
+                    <a:lstStyle/>
+                    <a:p/>
+                  </a:txBody>
+                  <a:tcPr/>
+                </a:tc>
+                <a:tc>
+                  <a:txBody>
+                    <a:bodyPr/>
+                    <a:lstStyle/>
+                    <a:p/>
+                  </a:txBody>
+                  <a:tcPr/>
+                </a:tc>
+                <a:tc>
+                  <a:txBody>
+                    <a:bodyPr/>
+                    <a:lstStyle/>
+                    <a:p/>
+                  </a:txBody>
+                  <a:tcPr/>
+                </a:tc>
+                <a:tc>
+                  <a:txBody>
+                    <a:bodyPr/>
+                    <a:lstStyle/>
+                    <a:p/>
+                  </a:txBody>
+                  <a:tcPr/>
+                </a:tc>
+              </a:tr>
+              <a:tr h="384048">
+                <a:tc>
+                  <a:txBody>
+                    <a:bodyPr/>
+                    <a:lstStyle/>
+                    <a:p>
+                      <a:r>
+                        <a:rPr sz="1050">
+                          <a:solidFill>
+                            <a:srgbClr val="3D5466"/>
+                          </a:solidFill>
+                          <a:latin typeface="Arial"/>
+                        </a:rPr>
+                        <a:t>Branchenverbände</a:t>
+                      </a:r>
+                    </a:p>
+                  </a:txBody>
+                  <a:tcPr/>
+                </a:tc>
+                <a:tc>
+                  <a:txBody>
+                    <a:bodyPr/>
+                    <a:lstStyle/>
+                    <a:p/>
+                  </a:txBody>
+                  <a:tcPr/>
+                </a:tc>
+                <a:tc>
+                  <a:txBody>
+                    <a:bodyPr/>
+                    <a:lstStyle/>
+                    <a:p/>
+                  </a:txBody>
+                  <a:tcPr/>
+                </a:tc>
+                <a:tc>
+                  <a:txBody>
+                    <a:bodyPr/>
+                    <a:lstStyle/>
+                    <a:p/>
+                  </a:txBody>
+                  <a:tcPr/>
+                </a:tc>
+                <a:tc>
+                  <a:txBody>
+                    <a:bodyPr/>
+                    <a:lstStyle/>
+                    <a:p/>
+                  </a:txBody>
+                  <a:tcPr/>
+                </a:tc>
+              </a:tr>
+              <a:tr h="384048">
+                <a:tc>
+                  <a:txBody>
+                    <a:bodyPr/>
+                    <a:lstStyle/>
+                    <a:p>
+                      <a:r>
+                        <a:rPr sz="1050">
+                          <a:solidFill>
+                            <a:srgbClr val="3D5466"/>
+                          </a:solidFill>
+                          <a:latin typeface="Arial"/>
+                        </a:rPr>
+                        <a:t>Unternehmerclubs / Gremien</a:t>
+                      </a:r>
+                    </a:p>
+                  </a:txBody>
+                  <a:tcPr/>
+                </a:tc>
+                <a:tc>
+                  <a:txBody>
+                    <a:bodyPr/>
+                    <a:lstStyle/>
+                    <a:p/>
+                  </a:txBody>
+                  <a:tcPr/>
+                </a:tc>
+                <a:tc>
+                  <a:txBody>
+                    <a:bodyPr/>
+                    <a:lstStyle/>
+                    <a:p/>
+                  </a:txBody>
+                  <a:tcPr/>
+                </a:tc>
+                <a:tc>
+                  <a:txBody>
+                    <a:bodyPr/>
+                    <a:lstStyle/>
+                    <a:p/>
+                  </a:txBody>
+                  <a:tcPr/>
+                </a:tc>
+                <a:tc>
+                  <a:txBody>
+                    <a:bodyPr/>
+                    <a:lstStyle/>
+                    <a:p/>
+                  </a:txBody>
+                  <a:tcPr/>
+                </a:tc>
+              </a:tr>
+              <a:tr h="384048">
+                <a:tc>
+                  <a:txBody>
+                    <a:bodyPr/>
+                    <a:lstStyle/>
+                    <a:p>
+                      <a:r>
+                        <a:rPr sz="1050">
+                          <a:solidFill>
+                            <a:srgbClr val="3D5466"/>
+                          </a:solidFill>
+                          <a:latin typeface="Arial"/>
+                        </a:rPr>
+                        <a:t>Digitale Kontakte</a:t>
+                      </a:r>
+                    </a:p>
+                  </a:txBody>
+                  <a:tcPr/>
+                </a:tc>
+                <a:tc>
+                  <a:txBody>
+                    <a:bodyPr/>
+                    <a:lstStyle/>
+                    <a:p/>
+                  </a:txBody>
+                  <a:tcPr/>
+                </a:tc>
+                <a:tc>
+                  <a:txBody>
+                    <a:bodyPr/>
+                    <a:lstStyle/>
+                    <a:p/>
+                  </a:txBody>
+                  <a:tcPr/>
+                </a:tc>
+                <a:tc>
+                  <a:txBody>
+                    <a:bodyPr/>
+                    <a:lstStyle/>
+                    <a:p/>
+                  </a:txBody>
+                  <a:tcPr/>
+                </a:tc>
+                <a:tc>
+                  <a:txBody>
+                    <a:bodyPr/>
+                    <a:lstStyle/>
+                    <a:p/>
+                  </a:txBody>
+                  <a:tcPr/>
+                </a:tc>
+              </a:tr>
+            </a:tbl>
+          </a:graphicData>
+        </a:graphic>
+      </p:graphicFrame>
       <p:sp>
         <p:nvSpPr>
           <p:cNvPr id="8" name="Rectangle 7"/>
@@ -7256,6 +7819,720 @@
                 <a:latin typeface="JetBrains Mono"/>
               </a:rPr>
               <a:t>Benedikt Zoller Coaching  ·  FKB Campus  ·  M20</a:t>
+            </a:r>
+          </a:p>
+        </p:txBody>
+      </p:sp>
+      <p:sp>
+        <p:nvSpPr>
+          <p:cNvPr id="10" name="TextBox 9"/>
+          <p:cNvSpPr txBox="1"/>
+          <p:nvPr/>
+        </p:nvSpPr>
+        <p:spPr>
+          <a:xfrm>
+            <a:off x="7176211" y="6583680"/>
+            <a:ext cx="4326940" cy="256032"/>
+          </a:xfrm>
+          <a:prstGeom prst="rect">
+            <a:avLst/>
+          </a:prstGeom>
+          <a:noFill/>
+        </p:spPr>
+        <p:txBody>
+          <a:bodyPr wrap="none">
+            <a:spAutoFit/>
+          </a:bodyPr>
+          <a:lstStyle/>
+          <a:p>
+            <a:pPr algn="r"/>
+            <a:r>
+              <a:rPr sz="700">
+                <a:solidFill>
+                  <a:srgbClr val="A0B4D2"/>
+                </a:solidFill>
+                <a:latin typeface="JetBrains Mono"/>
+              </a:rPr>
+              <a:t>Übersicht</a:t>
+            </a:r>
+          </a:p>
+        </p:txBody>
+      </p:sp>
+    </p:spTree>
+  </p:cSld>
+  <p:clrMapOvr>
+    <a:masterClrMapping/>
+  </p:clrMapOvr>
+</p:sld>
+</file>
+
+<file path=ppt/slides/slide16.xml><?xml version="1.0" encoding="utf-8"?>
+<p:sld xmlns:a="http://schemas.openxmlformats.org/drawingml/2006/main" xmlns:p="http://schemas.openxmlformats.org/presentationml/2006/main" xmlns:r="http://schemas.openxmlformats.org/officeDocument/2006/relationships">
+  <p:cSld>
+    <p:spTree>
+      <p:nvGrpSpPr>
+        <p:cNvPr id="1" name=""/>
+        <p:cNvGrpSpPr/>
+        <p:nvPr/>
+      </p:nvGrpSpPr>
+      <p:grpSpPr/>
+      <p:sp>
+        <p:nvSpPr>
+          <p:cNvPr id="2" name="Rectangle 1"/>
+          <p:cNvSpPr/>
+          <p:nvPr/>
+        </p:nvSpPr>
+        <p:spPr>
+          <a:xfrm>
+            <a:off x="0" y="0"/>
+            <a:ext cx="12188952" cy="6858000"/>
+          </a:xfrm>
+          <a:prstGeom prst="rect">
+            <a:avLst/>
+          </a:prstGeom>
+          <a:solidFill>
+            <a:srgbClr val="FFFFFF"/>
+          </a:solidFill>
+          <a:ln>
+            <a:noFill/>
+          </a:ln>
+        </p:spPr>
+        <p:style>
+          <a:lnRef idx="1">
+            <a:schemeClr val="accent1"/>
+          </a:lnRef>
+          <a:fillRef idx="3">
+            <a:schemeClr val="accent1"/>
+          </a:fillRef>
+          <a:effectRef idx="2">
+            <a:schemeClr val="accent1"/>
+          </a:effectRef>
+          <a:fontRef idx="minor">
+            <a:schemeClr val="lt1"/>
+          </a:fontRef>
+        </p:style>
+        <p:txBody>
+          <a:bodyPr rtlCol="0" anchor="ctr"/>
+          <a:lstStyle/>
+          <a:p>
+            <a:pPr algn="ctr"/>
+          </a:p>
+        </p:txBody>
+      </p:sp>
+      <p:sp>
+        <p:nvSpPr>
+          <p:cNvPr id="3" name="Rectangle 2"/>
+          <p:cNvSpPr/>
+          <p:nvPr/>
+        </p:nvSpPr>
+        <p:spPr>
+          <a:xfrm>
+            <a:off x="0" y="0"/>
+            <a:ext cx="12188952" cy="50292"/>
+          </a:xfrm>
+          <a:prstGeom prst="rect">
+            <a:avLst/>
+          </a:prstGeom>
+          <a:solidFill>
+            <a:srgbClr val="1F2C56"/>
+          </a:solidFill>
+          <a:ln>
+            <a:noFill/>
+          </a:ln>
+        </p:spPr>
+        <p:style>
+          <a:lnRef idx="1">
+            <a:schemeClr val="accent1"/>
+          </a:lnRef>
+          <a:fillRef idx="3">
+            <a:schemeClr val="accent1"/>
+          </a:fillRef>
+          <a:effectRef idx="2">
+            <a:schemeClr val="accent1"/>
+          </a:effectRef>
+          <a:fontRef idx="minor">
+            <a:schemeClr val="lt1"/>
+          </a:fontRef>
+        </p:style>
+        <p:txBody>
+          <a:bodyPr rtlCol="0" anchor="ctr"/>
+          <a:lstStyle/>
+          <a:p>
+            <a:pPr algn="ctr"/>
+          </a:p>
+        </p:txBody>
+      </p:sp>
+      <p:sp>
+        <p:nvSpPr>
+          <p:cNvPr id="4" name="TextBox 3"/>
+          <p:cNvSpPr txBox="1"/>
+          <p:nvPr/>
+        </p:nvSpPr>
+        <p:spPr>
+          <a:xfrm>
+            <a:off x="685800" y="109728"/>
+            <a:ext cx="10817352" cy="228600"/>
+          </a:xfrm>
+          <a:prstGeom prst="rect">
+            <a:avLst/>
+          </a:prstGeom>
+          <a:noFill/>
+        </p:spPr>
+        <p:txBody>
+          <a:bodyPr wrap="none">
+            <a:spAutoFit/>
+          </a:bodyPr>
+          <a:lstStyle/>
+          <a:p>
+            <a:pPr algn="l"/>
+            <a:r>
+              <a:rPr sz="750">
+                <a:solidFill>
+                  <a:srgbClr val="78808C"/>
+                </a:solidFill>
+                <a:latin typeface="JetBrains Mono"/>
+              </a:rPr>
+              <a:t>M20  ·  ÜBERSICHT</a:t>
+            </a:r>
+          </a:p>
+        </p:txBody>
+      </p:sp>
+      <p:sp>
+        <p:nvSpPr>
+          <p:cNvPr id="5" name="TextBox 4"/>
+          <p:cNvSpPr txBox="1"/>
+          <p:nvPr/>
+        </p:nvSpPr>
+        <p:spPr>
+          <a:xfrm>
+            <a:off x="685800" y="502920"/>
+            <a:ext cx="10817352" cy="594360"/>
+          </a:xfrm>
+          <a:prstGeom prst="rect">
+            <a:avLst/>
+          </a:prstGeom>
+          <a:noFill/>
+        </p:spPr>
+        <p:txBody>
+          <a:bodyPr wrap="square">
+            <a:spAutoFit/>
+          </a:bodyPr>
+          <a:lstStyle/>
+          <a:p>
+            <a:pPr algn="l"/>
+            <a:r>
+              <a:rPr sz="2000" b="1" i="0">
+                <a:solidFill>
+                  <a:srgbClr val="1F2C56"/>
+                </a:solidFill>
+                <a:latin typeface="Source Serif 4"/>
+              </a:rPr>
+              <a:t>Arbeitsblatt 3: 90-Tage-Aktionsplan</a:t>
+            </a:r>
+          </a:p>
+        </p:txBody>
+      </p:sp>
+      <p:sp>
+        <p:nvSpPr>
+          <p:cNvPr id="6" name="Rectangle 5"/>
+          <p:cNvSpPr/>
+          <p:nvPr/>
+        </p:nvSpPr>
+        <p:spPr>
+          <a:xfrm>
+            <a:off x="685800" y="1143000"/>
+            <a:ext cx="10817352" cy="25400"/>
+          </a:xfrm>
+          <a:prstGeom prst="rect">
+            <a:avLst/>
+          </a:prstGeom>
+          <a:solidFill>
+            <a:srgbClr val="D9C089"/>
+          </a:solidFill>
+          <a:ln>
+            <a:noFill/>
+          </a:ln>
+        </p:spPr>
+        <p:style>
+          <a:lnRef idx="1">
+            <a:schemeClr val="accent1"/>
+          </a:lnRef>
+          <a:fillRef idx="3">
+            <a:schemeClr val="accent1"/>
+          </a:fillRef>
+          <a:effectRef idx="2">
+            <a:schemeClr val="accent1"/>
+          </a:effectRef>
+          <a:fontRef idx="minor">
+            <a:schemeClr val="lt1"/>
+          </a:fontRef>
+        </p:style>
+        <p:txBody>
+          <a:bodyPr rtlCol="0" anchor="ctr"/>
+          <a:lstStyle/>
+          <a:p>
+            <a:pPr algn="ctr"/>
+          </a:p>
+        </p:txBody>
+      </p:sp>
+      <p:graphicFrame>
+        <p:nvGraphicFramePr>
+          <p:cNvPr id="7" name="Table 6"/>
+          <p:cNvGraphicFramePr>
+            <a:graphicFrameLocks noGrp="1"/>
+          </p:cNvGraphicFramePr>
+          <p:nvPr/>
+        </p:nvGraphicFramePr>
+        <p:xfrm>
+          <a:off x="685800" y="1417320"/>
+          <a:ext cx="10817352" cy="1920240"/>
+        </p:xfrm>
+        <a:graphic>
+          <a:graphicData uri="http://schemas.openxmlformats.org/drawingml/2006/table">
+            <a:tbl>
+              <a:tblPr firstRow="1" bandRow="1">
+                <a:tableStyleId>{5C22544A-7EE6-4342-B048-85BDC9FD1C3A}</a:tableStyleId>
+              </a:tblPr>
+              <a:tblGrid>
+                <a:gridCol w="2163470"/>
+                <a:gridCol w="2163470"/>
+                <a:gridCol w="2163470"/>
+                <a:gridCol w="2163470"/>
+                <a:gridCol w="2163472"/>
+              </a:tblGrid>
+              <a:tr h="384048">
+                <a:tc>
+                  <a:txBody>
+                    <a:bodyPr/>
+                    <a:lstStyle/>
+                    <a:p>
+                      <a:r>
+                        <a:rPr sz="1100" b="1">
+                          <a:solidFill>
+                            <a:srgbClr val="FFFFFF"/>
+                          </a:solidFill>
+                          <a:latin typeface="Arial"/>
+                        </a:rPr>
+                        <a:t>Zeitraum</a:t>
+                      </a:r>
+                    </a:p>
+                  </a:txBody>
+                  <a:tcPr>
+                    <a:solidFill>
+                      <a:srgbClr val="1F2C56"/>
+                    </a:solidFill>
+                  </a:tcPr>
+                </a:tc>
+                <a:tc>
+                  <a:txBody>
+                    <a:bodyPr/>
+                    <a:lstStyle/>
+                    <a:p>
+                      <a:r>
+                        <a:rPr sz="1100" b="1">
+                          <a:solidFill>
+                            <a:srgbClr val="FFFFFF"/>
+                          </a:solidFill>
+                          <a:latin typeface="Arial"/>
+                        </a:rPr>
+                        <a:t>Aktivität</a:t>
+                      </a:r>
+                    </a:p>
+                  </a:txBody>
+                  <a:tcPr>
+                    <a:solidFill>
+                      <a:srgbClr val="1F2C56"/>
+                    </a:solidFill>
+                  </a:tcPr>
+                </a:tc>
+                <a:tc>
+                  <a:txBody>
+                    <a:bodyPr/>
+                    <a:lstStyle/>
+                    <a:p>
+                      <a:r>
+                        <a:rPr sz="1100" b="1">
+                          <a:solidFill>
+                            <a:srgbClr val="FFFFFF"/>
+                          </a:solidFill>
+                          <a:latin typeface="Arial"/>
+                        </a:rPr>
+                        <a:t>Zielkontakt</a:t>
+                      </a:r>
+                    </a:p>
+                  </a:txBody>
+                  <a:tcPr>
+                    <a:solidFill>
+                      <a:srgbClr val="1F2C56"/>
+                    </a:solidFill>
+                  </a:tcPr>
+                </a:tc>
+                <a:tc>
+                  <a:txBody>
+                    <a:bodyPr/>
+                    <a:lstStyle/>
+                    <a:p>
+                      <a:r>
+                        <a:rPr sz="1100" b="1">
+                          <a:solidFill>
+                            <a:srgbClr val="FFFFFF"/>
+                          </a:solidFill>
+                          <a:latin typeface="Arial"/>
+                        </a:rPr>
+                        <a:t>Ziel</a:t>
+                      </a:r>
+                    </a:p>
+                  </a:txBody>
+                  <a:tcPr>
+                    <a:solidFill>
+                      <a:srgbClr val="1F2C56"/>
+                    </a:solidFill>
+                  </a:tcPr>
+                </a:tc>
+                <a:tc>
+                  <a:txBody>
+                    <a:bodyPr/>
+                    <a:lstStyle/>
+                    <a:p>
+                      <a:r>
+                        <a:rPr sz="1100" b="1">
+                          <a:solidFill>
+                            <a:srgbClr val="FFFFFF"/>
+                          </a:solidFill>
+                          <a:latin typeface="Arial"/>
+                        </a:rPr>
+                        <a:t>Erledigt?</a:t>
+                      </a:r>
+                    </a:p>
+                  </a:txBody>
+                  <a:tcPr>
+                    <a:solidFill>
+                      <a:srgbClr val="1F2C56"/>
+                    </a:solidFill>
+                  </a:tcPr>
+                </a:tc>
+              </a:tr>
+              <a:tr h="384048">
+                <a:tc>
+                  <a:txBody>
+                    <a:bodyPr/>
+                    <a:lstStyle/>
+                    <a:p>
+                      <a:r>
+                        <a:rPr sz="1050">
+                          <a:solidFill>
+                            <a:srgbClr val="3D5466"/>
+                          </a:solidFill>
+                          <a:latin typeface="Arial"/>
+                        </a:rPr>
+                        <a:t>Woche 1–2</a:t>
+                      </a:r>
+                    </a:p>
+                  </a:txBody>
+                  <a:tcPr/>
+                </a:tc>
+                <a:tc>
+                  <a:txBody>
+                    <a:bodyPr/>
+                    <a:lstStyle/>
+                    <a:p/>
+                  </a:txBody>
+                  <a:tcPr/>
+                </a:tc>
+                <a:tc>
+                  <a:txBody>
+                    <a:bodyPr/>
+                    <a:lstStyle/>
+                    <a:p/>
+                  </a:txBody>
+                  <a:tcPr/>
+                </a:tc>
+                <a:tc>
+                  <a:txBody>
+                    <a:bodyPr/>
+                    <a:lstStyle/>
+                    <a:p/>
+                  </a:txBody>
+                  <a:tcPr/>
+                </a:tc>
+                <a:tc>
+                  <a:txBody>
+                    <a:bodyPr/>
+                    <a:lstStyle/>
+                    <a:p/>
+                  </a:txBody>
+                  <a:tcPr/>
+                </a:tc>
+              </a:tr>
+              <a:tr h="384048">
+                <a:tc>
+                  <a:txBody>
+                    <a:bodyPr/>
+                    <a:lstStyle/>
+                    <a:p>
+                      <a:r>
+                        <a:rPr sz="1050">
+                          <a:solidFill>
+                            <a:srgbClr val="3D5466"/>
+                          </a:solidFill>
+                          <a:latin typeface="Arial"/>
+                        </a:rPr>
+                        <a:t>Woche 3–4</a:t>
+                      </a:r>
+                    </a:p>
+                  </a:txBody>
+                  <a:tcPr/>
+                </a:tc>
+                <a:tc>
+                  <a:txBody>
+                    <a:bodyPr/>
+                    <a:lstStyle/>
+                    <a:p/>
+                  </a:txBody>
+                  <a:tcPr/>
+                </a:tc>
+                <a:tc>
+                  <a:txBody>
+                    <a:bodyPr/>
+                    <a:lstStyle/>
+                    <a:p/>
+                  </a:txBody>
+                  <a:tcPr/>
+                </a:tc>
+                <a:tc>
+                  <a:txBody>
+                    <a:bodyPr/>
+                    <a:lstStyle/>
+                    <a:p/>
+                  </a:txBody>
+                  <a:tcPr/>
+                </a:tc>
+                <a:tc>
+                  <a:txBody>
+                    <a:bodyPr/>
+                    <a:lstStyle/>
+                    <a:p/>
+                  </a:txBody>
+                  <a:tcPr/>
+                </a:tc>
+              </a:tr>
+              <a:tr h="384048">
+                <a:tc>
+                  <a:txBody>
+                    <a:bodyPr/>
+                    <a:lstStyle/>
+                    <a:p>
+                      <a:r>
+                        <a:rPr sz="1050">
+                          <a:solidFill>
+                            <a:srgbClr val="3D5466"/>
+                          </a:solidFill>
+                          <a:latin typeface="Arial"/>
+                        </a:rPr>
+                        <a:t>Monat 2</a:t>
+                      </a:r>
+                    </a:p>
+                  </a:txBody>
+                  <a:tcPr/>
+                </a:tc>
+                <a:tc>
+                  <a:txBody>
+                    <a:bodyPr/>
+                    <a:lstStyle/>
+                    <a:p/>
+                  </a:txBody>
+                  <a:tcPr/>
+                </a:tc>
+                <a:tc>
+                  <a:txBody>
+                    <a:bodyPr/>
+                    <a:lstStyle/>
+                    <a:p/>
+                  </a:txBody>
+                  <a:tcPr/>
+                </a:tc>
+                <a:tc>
+                  <a:txBody>
+                    <a:bodyPr/>
+                    <a:lstStyle/>
+                    <a:p/>
+                  </a:txBody>
+                  <a:tcPr/>
+                </a:tc>
+                <a:tc>
+                  <a:txBody>
+                    <a:bodyPr/>
+                    <a:lstStyle/>
+                    <a:p/>
+                  </a:txBody>
+                  <a:tcPr/>
+                </a:tc>
+              </a:tr>
+              <a:tr h="384048">
+                <a:tc>
+                  <a:txBody>
+                    <a:bodyPr/>
+                    <a:lstStyle/>
+                    <a:p>
+                      <a:r>
+                        <a:rPr sz="1050">
+                          <a:solidFill>
+                            <a:srgbClr val="3D5466"/>
+                          </a:solidFill>
+                          <a:latin typeface="Arial"/>
+                        </a:rPr>
+                        <a:t>Monat 3</a:t>
+                      </a:r>
+                    </a:p>
+                  </a:txBody>
+                  <a:tcPr/>
+                </a:tc>
+                <a:tc>
+                  <a:txBody>
+                    <a:bodyPr/>
+                    <a:lstStyle/>
+                    <a:p/>
+                  </a:txBody>
+                  <a:tcPr/>
+                </a:tc>
+                <a:tc>
+                  <a:txBody>
+                    <a:bodyPr/>
+                    <a:lstStyle/>
+                    <a:p/>
+                  </a:txBody>
+                  <a:tcPr/>
+                </a:tc>
+                <a:tc>
+                  <a:txBody>
+                    <a:bodyPr/>
+                    <a:lstStyle/>
+                    <a:p/>
+                  </a:txBody>
+                  <a:tcPr/>
+                </a:tc>
+                <a:tc>
+                  <a:txBody>
+                    <a:bodyPr/>
+                    <a:lstStyle/>
+                    <a:p/>
+                  </a:txBody>
+                  <a:tcPr/>
+                </a:tc>
+              </a:tr>
+            </a:tbl>
+          </a:graphicData>
+        </a:graphic>
+      </p:graphicFrame>
+      <p:sp>
+        <p:nvSpPr>
+          <p:cNvPr id="8" name="Rectangle 7"/>
+          <p:cNvSpPr/>
+          <p:nvPr/>
+        </p:nvSpPr>
+        <p:spPr>
+          <a:xfrm>
+            <a:off x="0" y="6510528"/>
+            <a:ext cx="12188952" cy="347472"/>
+          </a:xfrm>
+          <a:prstGeom prst="rect">
+            <a:avLst/>
+          </a:prstGeom>
+          <a:solidFill>
+            <a:srgbClr val="0A1937"/>
+          </a:solidFill>
+          <a:ln>
+            <a:noFill/>
+          </a:ln>
+        </p:spPr>
+        <p:style>
+          <a:lnRef idx="1">
+            <a:schemeClr val="accent1"/>
+          </a:lnRef>
+          <a:fillRef idx="3">
+            <a:schemeClr val="accent1"/>
+          </a:fillRef>
+          <a:effectRef idx="2">
+            <a:schemeClr val="accent1"/>
+          </a:effectRef>
+          <a:fontRef idx="minor">
+            <a:schemeClr val="lt1"/>
+          </a:fontRef>
+        </p:style>
+        <p:txBody>
+          <a:bodyPr rtlCol="0" anchor="ctr"/>
+          <a:lstStyle/>
+          <a:p>
+            <a:pPr algn="ctr"/>
+          </a:p>
+        </p:txBody>
+      </p:sp>
+      <p:sp>
+        <p:nvSpPr>
+          <p:cNvPr id="9" name="TextBox 8"/>
+          <p:cNvSpPr txBox="1"/>
+          <p:nvPr/>
+        </p:nvSpPr>
+        <p:spPr>
+          <a:xfrm>
+            <a:off x="685800" y="6583680"/>
+            <a:ext cx="6490411" cy="256032"/>
+          </a:xfrm>
+          <a:prstGeom prst="rect">
+            <a:avLst/>
+          </a:prstGeom>
+          <a:noFill/>
+        </p:spPr>
+        <p:txBody>
+          <a:bodyPr wrap="none">
+            <a:spAutoFit/>
+          </a:bodyPr>
+          <a:lstStyle/>
+          <a:p>
+            <a:pPr algn="l"/>
+            <a:r>
+              <a:rPr sz="700">
+                <a:solidFill>
+                  <a:srgbClr val="A0B4D2"/>
+                </a:solidFill>
+                <a:latin typeface="JetBrains Mono"/>
+              </a:rPr>
+              <a:t>Benedikt Zoller Coaching  ·  FKB Campus  ·  M20</a:t>
+            </a:r>
+          </a:p>
+        </p:txBody>
+      </p:sp>
+      <p:sp>
+        <p:nvSpPr>
+          <p:cNvPr id="10" name="TextBox 9"/>
+          <p:cNvSpPr txBox="1"/>
+          <p:nvPr/>
+        </p:nvSpPr>
+        <p:spPr>
+          <a:xfrm>
+            <a:off x="7176211" y="6583680"/>
+            <a:ext cx="4326940" cy="256032"/>
+          </a:xfrm>
+          <a:prstGeom prst="rect">
+            <a:avLst/>
+          </a:prstGeom>
+          <a:noFill/>
+        </p:spPr>
+        <p:txBody>
+          <a:bodyPr wrap="none">
+            <a:spAutoFit/>
+          </a:bodyPr>
+          <a:lstStyle/>
+          <a:p>
+            <a:pPr algn="r"/>
+            <a:r>
+              <a:rPr sz="700">
+                <a:solidFill>
+                  <a:srgbClr val="A0B4D2"/>
+                </a:solidFill>
+                <a:latin typeface="JetBrains Mono"/>
+              </a:rPr>
+              <a:t>Übersicht</a:t>
             </a:r>
           </a:p>
         </p:txBody>
@@ -8173,7 +9450,7 @@
                 </a:solidFill>
                 <a:latin typeface="JetBrains Mono"/>
               </a:rPr>
-              <a:t>M20  ·  INHALT</a:t>
+              <a:t>AGENDA  ·  M20</a:t>
             </a:r>
           </a:p>
         </p:txBody>
@@ -8223,57 +9500,14 @@
       </p:sp>
       <p:sp>
         <p:nvSpPr>
-          <p:cNvPr id="6" name="Rectangle 5"/>
-          <p:cNvSpPr/>
+          <p:cNvPr id="6" name="TextBox 5"/>
+          <p:cNvSpPr txBox="1"/>
           <p:nvPr/>
         </p:nvSpPr>
         <p:spPr>
           <a:xfrm>
             <a:off x="685800" y="502920"/>
-            <a:ext cx="36576" cy="658368"/>
-          </a:xfrm>
-          <a:prstGeom prst="rect">
-            <a:avLst/>
-          </a:prstGeom>
-          <a:solidFill>
-            <a:srgbClr val="D9C089"/>
-          </a:solidFill>
-          <a:ln>
-            <a:noFill/>
-          </a:ln>
-        </p:spPr>
-        <p:style>
-          <a:lnRef idx="1">
-            <a:schemeClr val="accent1"/>
-          </a:lnRef>
-          <a:fillRef idx="3">
-            <a:schemeClr val="accent1"/>
-          </a:fillRef>
-          <a:effectRef idx="2">
-            <a:schemeClr val="accent1"/>
-          </a:effectRef>
-          <a:fontRef idx="minor">
-            <a:schemeClr val="lt1"/>
-          </a:fontRef>
-        </p:style>
-        <p:txBody>
-          <a:bodyPr rtlCol="0" anchor="ctr"/>
-          <a:lstStyle/>
-          <a:p>
-            <a:pPr algn="ctr"/>
-          </a:p>
-        </p:txBody>
-      </p:sp>
-      <p:sp>
-        <p:nvSpPr>
-          <p:cNvPr id="7" name="TextBox 6"/>
-          <p:cNvSpPr txBox="1"/>
-          <p:nvPr/>
-        </p:nvSpPr>
-        <p:spPr>
-          <a:xfrm>
-            <a:off x="813816" y="502920"/>
-            <a:ext cx="10634472" cy="685800"/>
+            <a:ext cx="10817352" cy="658368"/>
           </a:xfrm>
           <a:prstGeom prst="rect">
             <a:avLst/>
@@ -8288,27 +9522,27 @@
           <a:p>
             <a:pPr algn="l"/>
             <a:r>
-              <a:rPr sz="2400" b="1" i="0">
+              <a:rPr sz="2600" b="1" i="0">
                 <a:solidFill>
                   <a:srgbClr val="1F2C56"/>
                 </a:solidFill>
                 <a:latin typeface="Source Serif 4"/>
               </a:rPr>
-              <a:t>Dimension 1: Internes Netzwerk</a:t>
-            </a:r>
-          </a:p>
-        </p:txBody>
-      </p:sp>
-      <p:sp>
-        <p:nvSpPr>
-          <p:cNvPr id="8" name="TextBox 7"/>
+              <a:t>So läuft das Modul</a:t>
+            </a:r>
+          </a:p>
+        </p:txBody>
+      </p:sp>
+      <p:sp>
+        <p:nvSpPr>
+          <p:cNvPr id="7" name="TextBox 6"/>
           <p:cNvSpPr txBox="1"/>
           <p:nvPr/>
         </p:nvSpPr>
         <p:spPr>
           <a:xfrm>
-            <a:off x="685800" y="1417320"/>
-            <a:ext cx="10817352" cy="5029200"/>
+            <a:off x="685800" y="1463040"/>
+            <a:ext cx="10817352" cy="4937760"/>
           </a:xfrm>
           <a:prstGeom prst="rect">
             <a:avLst/>
@@ -8326,17 +9560,35 @@
                 <a:spcPts val="400"/>
               </a:spcBef>
               <a:spcAft>
-                <a:spcPts val="200"/>
+                <a:spcPts val="100"/>
               </a:spcAft>
             </a:pPr>
             <a:r>
-              <a:rPr sz="1200">
+              <a:rPr sz="900">
+                <a:solidFill>
+                  <a:srgbClr val="78808C"/>
+                </a:solidFill>
+                <a:latin typeface="Consolas"/>
+              </a:rPr>
+              <a:t>00:00       </a:t>
+            </a:r>
+            <a:r>
+              <a:rPr sz="1200" b="1">
                 <a:solidFill>
                   <a:srgbClr val="3D5466"/>
                 </a:solidFill>
                 <a:latin typeface="Arial"/>
               </a:rPr>
-              <a:t>Die häufig unterschätzte Dimension. Wer im eigenen Haus als kompetenter Ansprechpartner bekannt ist, bekommt:</a:t>
+              <a:t>  Einstieg</a:t>
+            </a:r>
+            <a:r>
+              <a:rPr sz="900">
+                <a:solidFill>
+                  <a:srgbClr val="78808C"/>
+                </a:solidFill>
+                <a:latin typeface="Arial"/>
+              </a:rPr>
+              <a:t>  ·  Plenum</a:t>
             </a:r>
           </a:p>
           <a:p>
@@ -8345,17 +9597,35 @@
                 <a:spcPts val="400"/>
               </a:spcBef>
               <a:spcAft>
-                <a:spcPts val="200"/>
+                <a:spcPts val="100"/>
               </a:spcAft>
             </a:pPr>
             <a:r>
-              <a:rPr sz="1300">
+              <a:rPr sz="900">
+                <a:solidFill>
+                  <a:srgbClr val="78808C"/>
+                </a:solidFill>
+                <a:latin typeface="Consolas"/>
+              </a:rPr>
+              <a:t>00:08       </a:t>
+            </a:r>
+            <a:r>
+              <a:rPr sz="1200" b="1">
                 <a:solidFill>
                   <a:srgbClr val="3D5466"/>
                 </a:solidFill>
                 <a:latin typeface="Arial"/>
               </a:rPr>
-              <a:t>▸  Interne Empfehlungen aus Privatkundenbereichen</a:t>
+              <a:t>  Theorie-Block I</a:t>
+            </a:r>
+            <a:r>
+              <a:rPr sz="900">
+                <a:solidFill>
+                  <a:srgbClr val="78808C"/>
+                </a:solidFill>
+                <a:latin typeface="Arial"/>
+              </a:rPr>
+              <a:t>  ·  Vortrag + Folie</a:t>
             </a:r>
           </a:p>
           <a:p>
@@ -8364,17 +9634,35 @@
                 <a:spcPts val="400"/>
               </a:spcBef>
               <a:spcAft>
-                <a:spcPts val="200"/>
+                <a:spcPts val="100"/>
               </a:spcAft>
             </a:pPr>
             <a:r>
-              <a:rPr sz="1300">
+              <a:rPr sz="900">
+                <a:solidFill>
+                  <a:srgbClr val="78808C"/>
+                </a:solidFill>
+                <a:latin typeface="Consolas"/>
+              </a:rPr>
+              <a:t>00:28       </a:t>
+            </a:r>
+            <a:r>
+              <a:rPr sz="1200" b="1">
                 <a:solidFill>
                   <a:srgbClr val="3D5466"/>
                 </a:solidFill>
                 <a:latin typeface="Arial"/>
               </a:rPr>
-              <a:t>▸  Frühzeitige Informationen über anstehende Regulierungen oder Strategieänderungen</a:t>
+              <a:t>  Einzelarbeit I: Netzwerkkarte</a:t>
+            </a:r>
+            <a:r>
+              <a:rPr sz="900">
+                <a:solidFill>
+                  <a:srgbClr val="78808C"/>
+                </a:solidFill>
+                <a:latin typeface="Arial"/>
+              </a:rPr>
+              <a:t>  ·  Stille Einzelarbeit</a:t>
             </a:r>
           </a:p>
           <a:p>
@@ -8383,17 +9671,35 @@
                 <a:spcPts val="400"/>
               </a:spcBef>
               <a:spcAft>
-                <a:spcPts val="200"/>
+                <a:spcPts val="100"/>
               </a:spcAft>
             </a:pPr>
             <a:r>
-              <a:rPr sz="1300">
+              <a:rPr sz="900">
+                <a:solidFill>
+                  <a:srgbClr val="78808C"/>
+                </a:solidFill>
+                <a:latin typeface="Consolas"/>
+              </a:rPr>
+              <a:t>00:43       </a:t>
+            </a:r>
+            <a:r>
+              <a:rPr sz="1200" b="1">
                 <a:solidFill>
                   <a:srgbClr val="3D5466"/>
                 </a:solidFill>
                 <a:latin typeface="Arial"/>
               </a:rPr>
-              <a:t>▸  Unterstützung bei komplexen Fällen durch Spezialisten (Immobilien, Strukturierte Finanzierung, Ausland)</a:t>
+              <a:t>  Zweier-Austausch</a:t>
+            </a:r>
+            <a:r>
+              <a:rPr sz="900">
+                <a:solidFill>
+                  <a:srgbClr val="78808C"/>
+                </a:solidFill>
+                <a:latin typeface="Arial"/>
+              </a:rPr>
+              <a:t>  ·  Partnerarbeit</a:t>
             </a:r>
           </a:p>
           <a:p>
@@ -8402,24 +9708,218 @@
                 <a:spcPts val="400"/>
               </a:spcBef>
               <a:spcAft>
-                <a:spcPts val="200"/>
+                <a:spcPts val="100"/>
               </a:spcAft>
             </a:pPr>
             <a:r>
-              <a:rPr sz="1200">
+              <a:rPr sz="900">
+                <a:solidFill>
+                  <a:srgbClr val="78808C"/>
+                </a:solidFill>
+                <a:latin typeface="Consolas"/>
+              </a:rPr>
+              <a:t>00:50       </a:t>
+            </a:r>
+            <a:r>
+              <a:rPr sz="1200" b="1">
                 <a:solidFill>
                   <a:srgbClr val="3D5466"/>
                 </a:solidFill>
                 <a:latin typeface="Arial"/>
               </a:rPr>
-              <a:t>Netzwerkanker intern: Bereichsleiter FK, Kreditspezialisten, Risikomanager, Privatkundenberater mit Unternehmerkunden, Verbundpartner-Spezialisten (R+V, Union Investment).</a:t>
-            </a:r>
-          </a:p>
-        </p:txBody>
-      </p:sp>
-      <p:sp>
-        <p:nvSpPr>
-          <p:cNvPr id="9" name="Rectangle 8"/>
+              <a:t>  Theorie-Block II</a:t>
+            </a:r>
+            <a:r>
+              <a:rPr sz="900">
+                <a:solidFill>
+                  <a:srgbClr val="78808C"/>
+                </a:solidFill>
+                <a:latin typeface="Arial"/>
+              </a:rPr>
+              <a:t>  ·  Kurzvortrag + Beispiele</a:t>
+            </a:r>
+          </a:p>
+          <a:p>
+            <a:pPr>
+              <a:spcBef>
+                <a:spcPts val="400"/>
+              </a:spcBef>
+              <a:spcAft>
+                <a:spcPts val="100"/>
+              </a:spcAft>
+            </a:pPr>
+            <a:r>
+              <a:rPr sz="900">
+                <a:solidFill>
+                  <a:srgbClr val="78808C"/>
+                </a:solidFill>
+                <a:latin typeface="Consolas"/>
+              </a:rPr>
+              <a:t>01:00       </a:t>
+            </a:r>
+            <a:r>
+              <a:rPr sz="1200" b="1">
+                <a:solidFill>
+                  <a:srgbClr val="3D5466"/>
+                </a:solidFill>
+                <a:latin typeface="Arial"/>
+              </a:rPr>
+              <a:t>  Einzelarbeit II: Sichtbarkeits-Canvas</a:t>
+            </a:r>
+            <a:r>
+              <a:rPr sz="900">
+                <a:solidFill>
+                  <a:srgbClr val="78808C"/>
+                </a:solidFill>
+                <a:latin typeface="Arial"/>
+              </a:rPr>
+              <a:t>  ·  Einzelarbeit</a:t>
+            </a:r>
+          </a:p>
+          <a:p>
+            <a:pPr>
+              <a:spcBef>
+                <a:spcPts val="400"/>
+              </a:spcBef>
+              <a:spcAft>
+                <a:spcPts val="100"/>
+              </a:spcAft>
+            </a:pPr>
+            <a:r>
+              <a:rPr sz="900">
+                <a:solidFill>
+                  <a:srgbClr val="78808C"/>
+                </a:solidFill>
+                <a:latin typeface="Consolas"/>
+              </a:rPr>
+              <a:t>01:12       </a:t>
+            </a:r>
+            <a:r>
+              <a:rPr sz="1200" b="1">
+                <a:solidFill>
+                  <a:srgbClr val="3D5466"/>
+                </a:solidFill>
+                <a:latin typeface="Arial"/>
+              </a:rPr>
+              <a:t>  Einzelarbeit III: 90-Tage-Plan</a:t>
+            </a:r>
+            <a:r>
+              <a:rPr sz="900">
+                <a:solidFill>
+                  <a:srgbClr val="78808C"/>
+                </a:solidFill>
+                <a:latin typeface="Arial"/>
+              </a:rPr>
+              <a:t>  ·  Einzelarbeit</a:t>
+            </a:r>
+          </a:p>
+          <a:p>
+            <a:pPr>
+              <a:spcBef>
+                <a:spcPts val="400"/>
+              </a:spcBef>
+              <a:spcAft>
+                <a:spcPts val="100"/>
+              </a:spcAft>
+            </a:pPr>
+            <a:r>
+              <a:rPr sz="900">
+                <a:solidFill>
+                  <a:srgbClr val="78808C"/>
+                </a:solidFill>
+                <a:latin typeface="Consolas"/>
+              </a:rPr>
+              <a:t>01:20       </a:t>
+            </a:r>
+            <a:r>
+              <a:rPr sz="1200" b="1">
+                <a:solidFill>
+                  <a:srgbClr val="3D5466"/>
+                </a:solidFill>
+                <a:latin typeface="Arial"/>
+              </a:rPr>
+              <a:t>  Abschluss-Blitzlicht</a:t>
+            </a:r>
+            <a:r>
+              <a:rPr sz="900">
+                <a:solidFill>
+                  <a:srgbClr val="78808C"/>
+                </a:solidFill>
+                <a:latin typeface="Arial"/>
+              </a:rPr>
+              <a:t>  ·  Plenum</a:t>
+            </a:r>
+          </a:p>
+          <a:p>
+            <a:pPr>
+              <a:spcBef>
+                <a:spcPts val="400"/>
+              </a:spcBef>
+              <a:spcAft>
+                <a:spcPts val="100"/>
+              </a:spcAft>
+            </a:pPr>
+            <a:r>
+              <a:rPr sz="900">
+                <a:solidFill>
+                  <a:srgbClr val="78808C"/>
+                </a:solidFill>
+                <a:latin typeface="Consolas"/>
+              </a:rPr>
+              <a:t>01:27       </a:t>
+            </a:r>
+            <a:r>
+              <a:rPr sz="1200" b="1">
+                <a:solidFill>
+                  <a:srgbClr val="3D5466"/>
+                </a:solidFill>
+                <a:latin typeface="Arial"/>
+              </a:rPr>
+              <a:t>  Feedbackbogen</a:t>
+            </a:r>
+            <a:r>
+              <a:rPr sz="900">
+                <a:solidFill>
+                  <a:srgbClr val="78808C"/>
+                </a:solidFill>
+                <a:latin typeface="Arial"/>
+              </a:rPr>
+              <a:t>  ·  Einzeln</a:t>
+            </a:r>
+          </a:p>
+          <a:p>
+            <a:pPr>
+              <a:spcBef>
+                <a:spcPts val="400"/>
+              </a:spcBef>
+              <a:spcAft>
+                <a:spcPts val="100"/>
+              </a:spcAft>
+            </a:pPr>
+            <a:r>
+              <a:rPr sz="900">
+                <a:solidFill>
+                  <a:srgbClr val="78808C"/>
+                </a:solidFill>
+                <a:latin typeface="Consolas"/>
+              </a:rPr>
+              <a:t>01:30       </a:t>
+            </a:r>
+            <a:r>
+              <a:rPr sz="1200" b="1">
+                <a:solidFill>
+                  <a:srgbClr val="3D5466"/>
+                </a:solidFill>
+                <a:latin typeface="Arial"/>
+              </a:rPr>
+              <a:t>  Ende</a:t>
+            </a:r>
+          </a:p>
+        </p:txBody>
+      </p:sp>
+      <p:sp>
+        <p:nvSpPr>
+          <p:cNvPr id="8" name="Rectangle 7"/>
           <p:cNvSpPr/>
           <p:nvPr/>
         </p:nvSpPr>
@@ -8462,7 +9962,7 @@
       </p:sp>
       <p:sp>
         <p:nvSpPr>
-          <p:cNvPr id="10" name="TextBox 9"/>
+          <p:cNvPr id="9" name="TextBox 8"/>
           <p:cNvSpPr txBox="1"/>
           <p:nvPr/>
         </p:nvSpPr>
@@ -8750,7 +10250,7 @@
                 </a:solidFill>
                 <a:latin typeface="Source Serif 4"/>
               </a:rPr>
-              <a:t>Dimension 2: Verbundpartner-Netzwerk</a:t>
+              <a:t>Dimension 1: Internes Netzwerk</a:t>
             </a:r>
           </a:p>
         </p:txBody>
@@ -8786,13 +10286,13 @@
               </a:spcAft>
             </a:pPr>
             <a:r>
-              <a:rPr sz="1200">
+              <a:rPr sz="1300">
                 <a:solidFill>
                   <a:srgbClr val="3D5466"/>
                 </a:solidFill>
                 <a:latin typeface="Arial"/>
               </a:rPr>
-              <a:t>Strategischer Nutzen: Verbundpartner können den Berater bei ihren eigenen Kundenkontakten empfehlen; der Berater positioniert sich als Koordinator der gesamten Verbundleistung.</a:t>
+              <a:t>▸  Die häufig unterschätzte Dimension. Wer im eigenen Haus als kompetenter Ansprechpartner bekannt ist, bekommt:</a:t>
             </a:r>
           </a:p>
           <a:p>
@@ -8805,13 +10305,13 @@
               </a:spcAft>
             </a:pPr>
             <a:r>
-              <a:rPr sz="1200">
+              <a:rPr sz="1300">
                 <a:solidFill>
                   <a:srgbClr val="3D5466"/>
                 </a:solidFill>
                 <a:latin typeface="Arial"/>
               </a:rPr>
-              <a:t>Konkrete Formate, die in der Praxis funktionieren:</a:t>
+              <a:t>▸  Interne Empfehlungen aus Privatkundenbereichen</a:t>
             </a:r>
           </a:p>
           <a:p>
@@ -8830,7 +10330,7 @@
                 </a:solidFill>
                 <a:latin typeface="Arial"/>
               </a:rPr>
-              <a:t>▸  Gemeinsame Kundenveranstaltungen mit R+V oder Union Investment: Der FK-Berater tritt als Co-Moderator auf und gewinnt Sichtbarkeit bei Kunden anderer Berater.</a:t>
+              <a:t>▸  Frühzeitige Informationen über anstehende Regulierungen oder Strategieänderungen</a:t>
             </a:r>
           </a:p>
           <a:p>
@@ -8849,7 +10349,7 @@
                 </a:solidFill>
                 <a:latin typeface="Arial"/>
               </a:rPr>
-              <a:t>▸  Monatlicher Jour fixe (30 Min.) mit dem R+V-Gebietsleiter oder UIN-Regionalbetreuer: Leads gegenseitig teilen, aktuelle Cross-Selling-Opportunitäten besprechen.</a:t>
+              <a:t>▸  Unterstützung bei komplexen Fällen durch Spezialisten (Immobilien, Strukturierte Finanzierung, Ausland)</a:t>
             </a:r>
           </a:p>
           <a:p>
@@ -8868,7 +10368,7 @@
                 </a:solidFill>
                 <a:latin typeface="Arial"/>
               </a:rPr>
-              <a:t>▸  Internes Cross-Selling-Meeting: Privatkundenberater mit Unternehmerkunden systematisch ansprechen – das ist im Alltag oft der schnellste Weg zu Neukunden, wird aber selten als aktives Format geführt.</a:t>
+              <a:t>▸  Netzwerkanker intern: Bereichsleiter FK, Kreditspezialisten, Risikomanager, Privatkundenberater mit Unternehmerkunden, Verbundpartner-Spezialisten (R+V, Union Investment).</a:t>
             </a:r>
           </a:p>
         </p:txBody>
@@ -9206,7 +10706,7 @@
                 </a:solidFill>
                 <a:latin typeface="Source Serif 4"/>
               </a:rPr>
-              <a:t>Dimension 3: Markt-Netzwerk</a:t>
+              <a:t>Dimension 2: Verbundpartner-Netzwerk</a:t>
             </a:r>
           </a:p>
         </p:txBody>
@@ -9242,13 +10742,13 @@
               </a:spcAft>
             </a:pPr>
             <a:r>
-              <a:rPr sz="1200">
+              <a:rPr sz="1300">
                 <a:solidFill>
                   <a:srgbClr val="3D5466"/>
                 </a:solidFill>
                 <a:latin typeface="Arial"/>
               </a:rPr>
-              <a:t>## 4.3 Netzwerkanalyse: Den eigenen Status realistisch einschätzen</a:t>
+              <a:t>▸  Strategischer Nutzen: Verbundpartner können den Berater bei ihren eigenen Kundenkontakten empfehlen; der Berater positioniert sich als Koordinator der gesamten Verbundleistung.</a:t>
             </a:r>
           </a:p>
           <a:p>
@@ -9261,13 +10761,70 @@
               </a:spcAft>
             </a:pPr>
             <a:r>
-              <a:rPr sz="1200">
+              <a:rPr sz="1300">
                 <a:solidFill>
                   <a:srgbClr val="3D5466"/>
                 </a:solidFill>
                 <a:latin typeface="Arial"/>
               </a:rPr>
-              <a:t>Vor jeder Netzwerkstrategie steht die Analyse. Nicht: „Wie viele Kontakte habe ich?" – sondern: „Welche Verbindungen fehlen mir für meine Ziele?"</a:t>
+              <a:t>▸  Konkrete Formate, die in der Praxis funktionieren:</a:t>
+            </a:r>
+          </a:p>
+          <a:p>
+            <a:pPr>
+              <a:spcBef>
+                <a:spcPts val="400"/>
+              </a:spcBef>
+              <a:spcAft>
+                <a:spcPts val="200"/>
+              </a:spcAft>
+            </a:pPr>
+            <a:r>
+              <a:rPr sz="1300">
+                <a:solidFill>
+                  <a:srgbClr val="3D5466"/>
+                </a:solidFill>
+                <a:latin typeface="Arial"/>
+              </a:rPr>
+              <a:t>▸  Gemeinsame Kundenveranstaltungen mit R+V oder Union Investment: Der FK-Berater tritt als Co-Moderator auf und gewinnt Sichtbarkeit bei Kunden anderer Berater.</a:t>
+            </a:r>
+          </a:p>
+          <a:p>
+            <a:pPr>
+              <a:spcBef>
+                <a:spcPts val="400"/>
+              </a:spcBef>
+              <a:spcAft>
+                <a:spcPts val="200"/>
+              </a:spcAft>
+            </a:pPr>
+            <a:r>
+              <a:rPr sz="1300">
+                <a:solidFill>
+                  <a:srgbClr val="3D5466"/>
+                </a:solidFill>
+                <a:latin typeface="Arial"/>
+              </a:rPr>
+              <a:t>▸  Monatlicher Jour fixe (30 Min.) mit dem R+V-Gebietsleiter oder UIN-Regionalbetreuer: Leads gegenseitig teilen, aktuelle Cross-Selling-Opportunitäten besprechen.</a:t>
+            </a:r>
+          </a:p>
+          <a:p>
+            <a:pPr>
+              <a:spcBef>
+                <a:spcPts val="400"/>
+              </a:spcBef>
+              <a:spcAft>
+                <a:spcPts val="200"/>
+              </a:spcAft>
+            </a:pPr>
+            <a:r>
+              <a:rPr sz="1300">
+                <a:solidFill>
+                  <a:srgbClr val="3D5466"/>
+                </a:solidFill>
+                <a:latin typeface="Arial"/>
+              </a:rPr>
+              <a:t>▸  Internes Cross-Selling-Meeting: Privatkundenberater mit Unternehmerkunden systematisch ansprechen – das ist im Alltag oft der schnellste Weg zu Neukunden, wird aber selten als aktives Format geführt.</a:t>
             </a:r>
           </a:p>
         </p:txBody>
@@ -9383,7 +10940,7 @@
             <a:avLst/>
           </a:prstGeom>
           <a:solidFill>
-            <a:srgbClr val="FFFFFF"/>
+            <a:srgbClr val="EDEDF3"/>
           </a:solidFill>
           <a:ln>
             <a:noFill/>
@@ -9484,43 +11041,51 @@
                 </a:solidFill>
                 <a:latin typeface="JetBrains Mono"/>
               </a:rPr>
-              <a:t>M20  ·  SCHAUBILD</a:t>
-            </a:r>
-          </a:p>
-        </p:txBody>
-      </p:sp>
-      <p:sp>
-        <p:nvSpPr>
-          <p:cNvPr id="5" name="TextBox 4"/>
-          <p:cNvSpPr txBox="1"/>
-          <p:nvPr/>
-        </p:nvSpPr>
-        <p:spPr>
-          <a:xfrm>
-            <a:off x="685800" y="502920"/>
-            <a:ext cx="10817352" cy="594360"/>
-          </a:xfrm>
-          <a:prstGeom prst="rect">
-            <a:avLst/>
-          </a:prstGeom>
-          <a:noFill/>
-        </p:spPr>
-        <p:txBody>
-          <a:bodyPr wrap="square">
-            <a:spAutoFit/>
-          </a:bodyPr>
-          <a:lstStyle/>
-          <a:p>
-            <a:pPr algn="l"/>
-            <a:r>
-              <a:rPr sz="2000" b="1" i="0">
-                <a:solidFill>
-                  <a:srgbClr val="1F2C56"/>
-                </a:solidFill>
-                <a:latin typeface="Source Serif 4"/>
-              </a:rPr>
-              <a:t>Netzwerk-Dimensionen eines FK-Beraters</a:t>
-            </a:r>
+              <a:t>M20  ·  INHALT</a:t>
+            </a:r>
+          </a:p>
+        </p:txBody>
+      </p:sp>
+      <p:sp>
+        <p:nvSpPr>
+          <p:cNvPr id="5" name="Rectangle 4"/>
+          <p:cNvSpPr/>
+          <p:nvPr/>
+        </p:nvSpPr>
+        <p:spPr>
+          <a:xfrm>
+            <a:off x="0" y="1234440"/>
+            <a:ext cx="12188952" cy="12700"/>
+          </a:xfrm>
+          <a:prstGeom prst="rect">
+            <a:avLst/>
+          </a:prstGeom>
+          <a:solidFill>
+            <a:srgbClr val="D8DFE4"/>
+          </a:solidFill>
+          <a:ln>
+            <a:noFill/>
+          </a:ln>
+        </p:spPr>
+        <p:style>
+          <a:lnRef idx="1">
+            <a:schemeClr val="accent1"/>
+          </a:lnRef>
+          <a:fillRef idx="3">
+            <a:schemeClr val="accent1"/>
+          </a:fillRef>
+          <a:effectRef idx="2">
+            <a:schemeClr val="accent1"/>
+          </a:effectRef>
+          <a:fontRef idx="minor">
+            <a:schemeClr val="lt1"/>
+          </a:fontRef>
+        </p:style>
+        <p:txBody>
+          <a:bodyPr rtlCol="0" anchor="ctr"/>
+          <a:lstStyle/>
+          <a:p>
+            <a:pPr algn="ctr"/>
           </a:p>
         </p:txBody>
       </p:sp>
@@ -9532,8 +11097,8 @@
         </p:nvSpPr>
         <p:spPr>
           <a:xfrm>
-            <a:off x="685800" y="1143000"/>
-            <a:ext cx="10817352" cy="25400"/>
+            <a:off x="685800" y="502920"/>
+            <a:ext cx="36576" cy="658368"/>
           </a:xfrm>
           <a:prstGeom prst="rect">
             <a:avLst/>
@@ -9567,33 +11132,105 @@
           </a:p>
         </p:txBody>
       </p:sp>
-      <p:pic>
-        <p:nvPicPr>
-          <p:cNvPr id="7" name="Picture 6" descr="image.png"/>
-          <p:cNvPicPr>
-            <a:picLocks noChangeAspect="1"/>
-          </p:cNvPicPr>
-          <p:nvPr/>
-        </p:nvPicPr>
-        <p:blipFill>
-          <a:blip r:embed="rId2"/>
-          <a:stretch>
-            <a:fillRect/>
-          </a:stretch>
-        </p:blipFill>
-        <p:spPr>
-          <a:xfrm>
-            <a:off x="2303489" y="1325880"/>
-            <a:ext cx="7581973" cy="4937760"/>
-          </a:xfrm>
-          <a:prstGeom prst="rect">
-            <a:avLst/>
-          </a:prstGeom>
-        </p:spPr>
-      </p:pic>
-      <p:sp>
-        <p:nvSpPr>
-          <p:cNvPr id="8" name="Rectangle 7"/>
+      <p:sp>
+        <p:nvSpPr>
+          <p:cNvPr id="7" name="TextBox 6"/>
+          <p:cNvSpPr txBox="1"/>
+          <p:nvPr/>
+        </p:nvSpPr>
+        <p:spPr>
+          <a:xfrm>
+            <a:off x="813816" y="502920"/>
+            <a:ext cx="10634472" cy="685800"/>
+          </a:xfrm>
+          <a:prstGeom prst="rect">
+            <a:avLst/>
+          </a:prstGeom>
+          <a:noFill/>
+        </p:spPr>
+        <p:txBody>
+          <a:bodyPr wrap="square">
+            <a:spAutoFit/>
+          </a:bodyPr>
+          <a:lstStyle/>
+          <a:p>
+            <a:pPr algn="l"/>
+            <a:r>
+              <a:rPr sz="2400" b="1" i="0">
+                <a:solidFill>
+                  <a:srgbClr val="1F2C56"/>
+                </a:solidFill>
+                <a:latin typeface="Source Serif 4"/>
+              </a:rPr>
+              <a:t>Dimension 3: Markt-Netzwerk</a:t>
+            </a:r>
+          </a:p>
+        </p:txBody>
+      </p:sp>
+      <p:sp>
+        <p:nvSpPr>
+          <p:cNvPr id="8" name="TextBox 7"/>
+          <p:cNvSpPr txBox="1"/>
+          <p:nvPr/>
+        </p:nvSpPr>
+        <p:spPr>
+          <a:xfrm>
+            <a:off x="685800" y="1417320"/>
+            <a:ext cx="10817352" cy="5029200"/>
+          </a:xfrm>
+          <a:prstGeom prst="rect">
+            <a:avLst/>
+          </a:prstGeom>
+          <a:noFill/>
+        </p:spPr>
+        <p:txBody>
+          <a:bodyPr wrap="square">
+            <a:spAutoFit/>
+          </a:bodyPr>
+          <a:lstStyle/>
+          <a:p>
+            <a:pPr>
+              <a:spcBef>
+                <a:spcPts val="400"/>
+              </a:spcBef>
+              <a:spcAft>
+                <a:spcPts val="200"/>
+              </a:spcAft>
+            </a:pPr>
+            <a:r>
+              <a:rPr sz="1300">
+                <a:solidFill>
+                  <a:srgbClr val="3D5466"/>
+                </a:solidFill>
+                <a:latin typeface="Arial"/>
+              </a:rPr>
+              <a:t>▸  ## 4.3 Netzwerkanalyse: Den eigenen Status realistisch einschätzen</a:t>
+            </a:r>
+          </a:p>
+          <a:p>
+            <a:pPr>
+              <a:spcBef>
+                <a:spcPts val="400"/>
+              </a:spcBef>
+              <a:spcAft>
+                <a:spcPts val="200"/>
+              </a:spcAft>
+            </a:pPr>
+            <a:r>
+              <a:rPr sz="1300">
+                <a:solidFill>
+                  <a:srgbClr val="3D5466"/>
+                </a:solidFill>
+                <a:latin typeface="Arial"/>
+              </a:rPr>
+              <a:t>▸  Vor jeder Netzwerkstrategie steht die Analyse. Nicht: „Wie viele Kontakte habe ich?" – sondern: „Welche Verbindungen fehlen mir für meine Ziele?"</a:t>
+            </a:r>
+          </a:p>
+        </p:txBody>
+      </p:sp>
+      <p:sp>
+        <p:nvSpPr>
+          <p:cNvPr id="9" name="Rectangle 8"/>
           <p:cNvSpPr/>
           <p:nvPr/>
         </p:nvSpPr>
@@ -9636,7 +11273,7 @@
       </p:sp>
       <p:sp>
         <p:nvSpPr>
-          <p:cNvPr id="9" name="TextBox 8"/>
+          <p:cNvPr id="10" name="TextBox 9"/>
           <p:cNvSpPr txBox="1"/>
           <p:nvPr/>
         </p:nvSpPr>
@@ -9665,41 +11302,6 @@
                 <a:latin typeface="JetBrains Mono"/>
               </a:rPr>
               <a:t>Benedikt Zoller Coaching  ·  FKB Campus  ·  M20</a:t>
-            </a:r>
-          </a:p>
-        </p:txBody>
-      </p:sp>
-      <p:sp>
-        <p:nvSpPr>
-          <p:cNvPr id="10" name="TextBox 9"/>
-          <p:cNvSpPr txBox="1"/>
-          <p:nvPr/>
-        </p:nvSpPr>
-        <p:spPr>
-          <a:xfrm>
-            <a:off x="7176211" y="6583680"/>
-            <a:ext cx="4326940" cy="256032"/>
-          </a:xfrm>
-          <a:prstGeom prst="rect">
-            <a:avLst/>
-          </a:prstGeom>
-          <a:noFill/>
-        </p:spPr>
-        <p:txBody>
-          <a:bodyPr wrap="none">
-            <a:spAutoFit/>
-          </a:bodyPr>
-          <a:lstStyle/>
-          <a:p>
-            <a:pPr algn="r"/>
-            <a:r>
-              <a:rPr sz="700">
-                <a:solidFill>
-                  <a:srgbClr val="A0B4D2"/>
-                </a:solidFill>
-                <a:latin typeface="JetBrains Mono"/>
-              </a:rPr>
-              <a:t>Schaubild</a:t>
             </a:r>
           </a:p>
         </p:txBody>
@@ -9737,7 +11339,7 @@
             <a:avLst/>
           </a:prstGeom>
           <a:solidFill>
-            <a:srgbClr val="EDEDF3"/>
+            <a:srgbClr val="FFFFFF"/>
           </a:solidFill>
           <a:ln>
             <a:noFill/>
@@ -9838,51 +11440,43 @@
                 </a:solidFill>
                 <a:latin typeface="JetBrains Mono"/>
               </a:rPr>
-              <a:t>M20  ·  INHALT</a:t>
-            </a:r>
-          </a:p>
-        </p:txBody>
-      </p:sp>
-      <p:sp>
-        <p:nvSpPr>
-          <p:cNvPr id="5" name="Rectangle 4"/>
-          <p:cNvSpPr/>
-          <p:nvPr/>
-        </p:nvSpPr>
-        <p:spPr>
-          <a:xfrm>
-            <a:off x="0" y="1234440"/>
-            <a:ext cx="12188952" cy="12700"/>
-          </a:xfrm>
-          <a:prstGeom prst="rect">
-            <a:avLst/>
-          </a:prstGeom>
-          <a:solidFill>
-            <a:srgbClr val="D8DFE4"/>
-          </a:solidFill>
-          <a:ln>
-            <a:noFill/>
-          </a:ln>
-        </p:spPr>
-        <p:style>
-          <a:lnRef idx="1">
-            <a:schemeClr val="accent1"/>
-          </a:lnRef>
-          <a:fillRef idx="3">
-            <a:schemeClr val="accent1"/>
-          </a:fillRef>
-          <a:effectRef idx="2">
-            <a:schemeClr val="accent1"/>
-          </a:effectRef>
-          <a:fontRef idx="minor">
-            <a:schemeClr val="lt1"/>
-          </a:fontRef>
-        </p:style>
-        <p:txBody>
-          <a:bodyPr rtlCol="0" anchor="ctr"/>
-          <a:lstStyle/>
-          <a:p>
-            <a:pPr algn="ctr"/>
+              <a:t>M20  ·  SCHAUBILD</a:t>
+            </a:r>
+          </a:p>
+        </p:txBody>
+      </p:sp>
+      <p:sp>
+        <p:nvSpPr>
+          <p:cNvPr id="5" name="TextBox 4"/>
+          <p:cNvSpPr txBox="1"/>
+          <p:nvPr/>
+        </p:nvSpPr>
+        <p:spPr>
+          <a:xfrm>
+            <a:off x="685800" y="502920"/>
+            <a:ext cx="10817352" cy="594360"/>
+          </a:xfrm>
+          <a:prstGeom prst="rect">
+            <a:avLst/>
+          </a:prstGeom>
+          <a:noFill/>
+        </p:spPr>
+        <p:txBody>
+          <a:bodyPr wrap="square">
+            <a:spAutoFit/>
+          </a:bodyPr>
+          <a:lstStyle/>
+          <a:p>
+            <a:pPr algn="l"/>
+            <a:r>
+              <a:rPr sz="2000" b="1" i="0">
+                <a:solidFill>
+                  <a:srgbClr val="1F2C56"/>
+                </a:solidFill>
+                <a:latin typeface="Source Serif 4"/>
+              </a:rPr>
+              <a:t>Netzwerk-Dimensionen eines FK-Beraters</a:t>
+            </a:r>
           </a:p>
         </p:txBody>
       </p:sp>
@@ -9894,8 +11488,8 @@
         </p:nvSpPr>
         <p:spPr>
           <a:xfrm>
-            <a:off x="685800" y="502920"/>
-            <a:ext cx="36576" cy="658368"/>
+            <a:off x="685800" y="1143000"/>
+            <a:ext cx="10817352" cy="25400"/>
           </a:xfrm>
           <a:prstGeom prst="rect">
             <a:avLst/>
@@ -9929,257 +11523,33 @@
           </a:p>
         </p:txBody>
       </p:sp>
-      <p:sp>
-        <p:nvSpPr>
-          <p:cNvPr id="7" name="TextBox 6"/>
-          <p:cNvSpPr txBox="1"/>
-          <p:nvPr/>
-        </p:nvSpPr>
-        <p:spPr>
-          <a:xfrm>
-            <a:off x="813816" y="502920"/>
-            <a:ext cx="10634472" cy="685800"/>
-          </a:xfrm>
-          <a:prstGeom prst="rect">
-            <a:avLst/>
-          </a:prstGeom>
-          <a:noFill/>
-        </p:spPr>
-        <p:txBody>
-          <a:bodyPr wrap="square">
-            <a:spAutoFit/>
-          </a:bodyPr>
-          <a:lstStyle/>
-          <a:p>
-            <a:pPr algn="l"/>
-            <a:r>
-              <a:rPr sz="2400" b="1" i="0">
-                <a:solidFill>
-                  <a:srgbClr val="1F2C56"/>
-                </a:solidFill>
-                <a:latin typeface="Source Serif 4"/>
-              </a:rPr>
-              <a:t>Das Netzwerk-Audit (3 Fragen)</a:t>
-            </a:r>
-          </a:p>
-        </p:txBody>
-      </p:sp>
-      <p:sp>
-        <p:nvSpPr>
-          <p:cNvPr id="8" name="TextBox 7"/>
-          <p:cNvSpPr txBox="1"/>
-          <p:nvPr/>
-        </p:nvSpPr>
-        <p:spPr>
-          <a:xfrm>
-            <a:off x="685800" y="1417320"/>
-            <a:ext cx="10817352" cy="5029200"/>
-          </a:xfrm>
-          <a:prstGeom prst="rect">
-            <a:avLst/>
-          </a:prstGeom>
-          <a:noFill/>
-        </p:spPr>
-        <p:txBody>
-          <a:bodyPr wrap="square">
-            <a:spAutoFit/>
-          </a:bodyPr>
-          <a:lstStyle/>
-          <a:p>
-            <a:pPr>
-              <a:spcBef>
-                <a:spcPts val="400"/>
-              </a:spcBef>
-              <a:spcAft>
-                <a:spcPts val="200"/>
-              </a:spcAft>
-            </a:pPr>
-            <a:r>
-              <a:rPr sz="1200">
-                <a:solidFill>
-                  <a:srgbClr val="3D5466"/>
-                </a:solidFill>
-                <a:latin typeface="Arial"/>
-              </a:rPr>
-              <a:t>Frage 1: Stärke meiner bestehenden Verbindungen</a:t>
-            </a:r>
-          </a:p>
-          <a:p>
-            <a:pPr>
-              <a:spcBef>
-                <a:spcPts val="400"/>
-              </a:spcBef>
-              <a:spcAft>
-                <a:spcPts val="200"/>
-              </a:spcAft>
-            </a:pPr>
-            <a:r>
-              <a:rPr sz="1200">
-                <a:solidFill>
-                  <a:srgbClr val="3D5466"/>
-                </a:solidFill>
-                <a:latin typeface="Arial"/>
-              </a:rPr>
-              <a:t>Frage 2: Wo sind meine strukturellen Lücken?</a:t>
-            </a:r>
-          </a:p>
-          <a:p>
-            <a:pPr>
-              <a:spcBef>
-                <a:spcPts val="400"/>
-              </a:spcBef>
-              <a:spcAft>
-                <a:spcPts val="200"/>
-              </a:spcAft>
-            </a:pPr>
-            <a:r>
-              <a:rPr sz="1300">
-                <a:solidFill>
-                  <a:srgbClr val="3D5466"/>
-                </a:solidFill>
-                <a:latin typeface="Arial"/>
-              </a:rPr>
-              <a:t>▸  In welchen Branchen kenne ich niemanden außer meinen eigenen Kunden?</a:t>
-            </a:r>
-          </a:p>
-          <a:p>
-            <a:pPr>
-              <a:spcBef>
-                <a:spcPts val="400"/>
-              </a:spcBef>
-              <a:spcAft>
-                <a:spcPts val="200"/>
-              </a:spcAft>
-            </a:pPr>
-            <a:r>
-              <a:rPr sz="1300">
-                <a:solidFill>
-                  <a:srgbClr val="3D5466"/>
-                </a:solidFill>
-                <a:latin typeface="Arial"/>
-              </a:rPr>
-              <a:t>▸  Mit welchen Multiplikatoren hätte ich gerne Kontakt, aber noch keinen?</a:t>
-            </a:r>
-          </a:p>
-          <a:p>
-            <a:pPr>
-              <a:spcBef>
-                <a:spcPts val="400"/>
-              </a:spcBef>
-              <a:spcAft>
-                <a:spcPts val="200"/>
-              </a:spcAft>
-            </a:pPr>
-            <a:r>
-              <a:rPr sz="1300">
-                <a:solidFill>
-                  <a:srgbClr val="3D5466"/>
-                </a:solidFill>
-                <a:latin typeface="Arial"/>
-              </a:rPr>
-              <a:t>▸  Welche internen Bereiche kenne ich zu wenig?</a:t>
-            </a:r>
-          </a:p>
-          <a:p>
-            <a:pPr>
-              <a:spcBef>
-                <a:spcPts val="400"/>
-              </a:spcBef>
-              <a:spcAft>
-                <a:spcPts val="200"/>
-              </a:spcAft>
-            </a:pPr>
-            <a:r>
-              <a:rPr sz="1200">
-                <a:solidFill>
-                  <a:srgbClr val="3D5466"/>
-                </a:solidFill>
-                <a:latin typeface="Arial"/>
-              </a:rPr>
-              <a:t>Frage 3: Wo liegt mein Broker-Potenzial?</a:t>
-            </a:r>
-          </a:p>
-          <a:p>
-            <a:pPr>
-              <a:spcBef>
-                <a:spcPts val="400"/>
-              </a:spcBef>
-              <a:spcAft>
-                <a:spcPts val="200"/>
-              </a:spcAft>
-            </a:pPr>
-            <a:r>
-              <a:rPr sz="1300">
-                <a:solidFill>
-                  <a:srgbClr val="3D5466"/>
-                </a:solidFill>
-                <a:latin typeface="Arial"/>
-              </a:rPr>
-              <a:t>▸  Welche zwei Gruppen in meinem Netzwerk kennen sich nicht, würden aber voneinander profitieren?</a:t>
-            </a:r>
-          </a:p>
-          <a:p>
-            <a:pPr>
-              <a:spcBef>
-                <a:spcPts val="400"/>
-              </a:spcBef>
-              <a:spcAft>
-                <a:spcPts val="200"/>
-              </a:spcAft>
-            </a:pPr>
-            <a:r>
-              <a:rPr sz="1300">
-                <a:solidFill>
-                  <a:srgbClr val="3D5466"/>
-                </a:solidFill>
-                <a:latin typeface="Arial"/>
-              </a:rPr>
-              <a:t>▸  Wo kann ich durch Zusammenführen Mehrwert stiften – ohne Eigeninteresse?</a:t>
-            </a:r>
-          </a:p>
-          <a:p>
-            <a:pPr>
-              <a:spcBef>
-                <a:spcPts val="400"/>
-              </a:spcBef>
-              <a:spcAft>
-                <a:spcPts val="200"/>
-              </a:spcAft>
-            </a:pPr>
-            <a:r>
-              <a:rPr sz="1200">
-                <a:solidFill>
-                  <a:srgbClr val="3D5466"/>
-                </a:solidFill>
-                <a:latin typeface="Arial"/>
-              </a:rPr>
-              <a:t>## 4.4 Sichtbarkeit: Expertise sichtbar machen ohne Eigenwerbung</a:t>
-            </a:r>
-          </a:p>
-          <a:p>
-            <a:pPr>
-              <a:spcBef>
-                <a:spcPts val="400"/>
-              </a:spcBef>
-              <a:spcAft>
-                <a:spcPts val="200"/>
-              </a:spcAft>
-            </a:pPr>
-            <a:r>
-              <a:rPr sz="1200">
-                <a:solidFill>
-                  <a:srgbClr val="3D5466"/>
-                </a:solidFill>
-                <a:latin typeface="Arial"/>
-              </a:rPr>
-              <a:t>Sichtbarkeit entsteht nicht durch Selbstlob, sondern durch konsistente Fachkompetenz, die anderen nutzt. Die wirkmächtigsten Formate:</a:t>
-            </a:r>
-          </a:p>
-        </p:txBody>
-      </p:sp>
-      <p:sp>
-        <p:nvSpPr>
-          <p:cNvPr id="9" name="Rectangle 8"/>
+      <p:pic>
+        <p:nvPicPr>
+          <p:cNvPr id="7" name="Picture 6" descr="image.png"/>
+          <p:cNvPicPr>
+            <a:picLocks noChangeAspect="1"/>
+          </p:cNvPicPr>
+          <p:nvPr/>
+        </p:nvPicPr>
+        <p:blipFill>
+          <a:blip r:embed="rId2"/>
+          <a:stretch>
+            <a:fillRect/>
+          </a:stretch>
+        </p:blipFill>
+        <p:spPr>
+          <a:xfrm>
+            <a:off x="2303489" y="1325880"/>
+            <a:ext cx="7581973" cy="4937760"/>
+          </a:xfrm>
+          <a:prstGeom prst="rect">
+            <a:avLst/>
+          </a:prstGeom>
+        </p:spPr>
+      </p:pic>
+      <p:sp>
+        <p:nvSpPr>
+          <p:cNvPr id="8" name="Rectangle 7"/>
           <p:cNvSpPr/>
           <p:nvPr/>
         </p:nvSpPr>
@@ -10222,7 +11592,7 @@
       </p:sp>
       <p:sp>
         <p:nvSpPr>
-          <p:cNvPr id="10" name="TextBox 9"/>
+          <p:cNvPr id="9" name="TextBox 8"/>
           <p:cNvSpPr txBox="1"/>
           <p:nvPr/>
         </p:nvSpPr>
@@ -10251,6 +11621,41 @@
                 <a:latin typeface="JetBrains Mono"/>
               </a:rPr>
               <a:t>Benedikt Zoller Coaching  ·  FKB Campus  ·  M20</a:t>
+            </a:r>
+          </a:p>
+        </p:txBody>
+      </p:sp>
+      <p:sp>
+        <p:nvSpPr>
+          <p:cNvPr id="10" name="TextBox 9"/>
+          <p:cNvSpPr txBox="1"/>
+          <p:nvPr/>
+        </p:nvSpPr>
+        <p:spPr>
+          <a:xfrm>
+            <a:off x="7176211" y="6583680"/>
+            <a:ext cx="4326940" cy="256032"/>
+          </a:xfrm>
+          <a:prstGeom prst="rect">
+            <a:avLst/>
+          </a:prstGeom>
+          <a:noFill/>
+        </p:spPr>
+        <p:txBody>
+          <a:bodyPr wrap="none">
+            <a:spAutoFit/>
+          </a:bodyPr>
+          <a:lstStyle/>
+          <a:p>
+            <a:pPr algn="r"/>
+            <a:r>
+              <a:rPr sz="700">
+                <a:solidFill>
+                  <a:srgbClr val="A0B4D2"/>
+                </a:solidFill>
+                <a:latin typeface="JetBrains Mono"/>
+              </a:rPr>
+              <a:t>Schaubild</a:t>
             </a:r>
           </a:p>
         </p:txBody>
@@ -10510,7 +11915,7 @@
                 </a:solidFill>
                 <a:latin typeface="Source Serif 4"/>
               </a:rPr>
-              <a:t>Format 1: Fachbeiträge und Impulse</a:t>
+              <a:t>Das Netzwerk-Audit (3 Fragen)</a:t>
             </a:r>
           </a:p>
         </p:txBody>
@@ -10546,13 +11951,13 @@
               </a:spcAft>
             </a:pPr>
             <a:r>
-              <a:rPr sz="1200">
+              <a:rPr sz="1300">
                 <a:solidFill>
                   <a:srgbClr val="3D5466"/>
                 </a:solidFill>
                 <a:latin typeface="Arial"/>
               </a:rPr>
-              <a:t>Was: Kurze, prägnante Wissensimpulse – nicht als Werbung, sondern als echten Mehrwert für Netzwerkkontakte.</a:t>
+              <a:t>▸  Frage 1: Stärke meiner bestehenden Verbindungen</a:t>
             </a:r>
           </a:p>
           <a:p>
@@ -10565,13 +11970,13 @@
               </a:spcAft>
             </a:pPr>
             <a:r>
-              <a:rPr sz="1200">
+              <a:rPr sz="1300">
                 <a:solidFill>
                   <a:srgbClr val="3D5466"/>
                 </a:solidFill>
                 <a:latin typeface="Arial"/>
               </a:rPr>
-              <a:t>Beispiele:</a:t>
+              <a:t>▸  Frage 2: Wo sind meine strukturellen Lücken?</a:t>
             </a:r>
           </a:p>
           <a:p>
@@ -10590,7 +11995,7 @@
                 </a:solidFill>
                 <a:latin typeface="Arial"/>
               </a:rPr>
-              <a:t>▸  Monatliche E-Mail an 5–10 Steuerberater mit einem aktuellen Branchenhinweis: „Für Ihre Mandanten in der Landwirtschaft: GAP-Änderungen ab Q3 2026 – was das für Investitionsfinanzierungen bedeutet" (Hinweis: Regelmäßige E-Mail-Kommunikation an externe Multiplikatoren ist datenschutzrechtlich und complianceseitig vorab mit der Compliance-/Datenschutzabteilung der Bank abzustimmen. Empfehlung: Kommunikation über offizielle Bank-Einladungen oder bankveranstaltete Formate läuft oft reibungsloser.)</a:t>
+              <a:t>▸  In welchen Branchen kenne ich niemanden außer meinen eigenen Kunden?</a:t>
             </a:r>
           </a:p>
           <a:p>
@@ -10609,7 +12014,7 @@
                 </a:solidFill>
                 <a:latin typeface="Arial"/>
               </a:rPr>
-              <a:t>▸  Kurzer Vortrag (15 Min.) bei IHK-Frühstück zu einem konkreten Finanzierungsthema</a:t>
+              <a:t>▸  Mit welchen Multiplikatoren hätte ich gerne Kontakt, aber noch keinen?</a:t>
             </a:r>
           </a:p>
           <a:p>
@@ -10628,7 +12033,102 @@
                 </a:solidFill>
                 <a:latin typeface="Arial"/>
               </a:rPr>
-              <a:t>▸  LinkedIn-Post mit einer praxisnahen Erkenntnis aus einem anonymisierten Kundengespräch</a:t>
+              <a:t>▸  Welche internen Bereiche kenne ich zu wenig?</a:t>
+            </a:r>
+          </a:p>
+          <a:p>
+            <a:pPr>
+              <a:spcBef>
+                <a:spcPts val="400"/>
+              </a:spcBef>
+              <a:spcAft>
+                <a:spcPts val="200"/>
+              </a:spcAft>
+            </a:pPr>
+            <a:r>
+              <a:rPr sz="1300">
+                <a:solidFill>
+                  <a:srgbClr val="3D5466"/>
+                </a:solidFill>
+                <a:latin typeface="Arial"/>
+              </a:rPr>
+              <a:t>▸  Frage 3: Wo liegt mein Broker-Potenzial?</a:t>
+            </a:r>
+          </a:p>
+          <a:p>
+            <a:pPr>
+              <a:spcBef>
+                <a:spcPts val="400"/>
+              </a:spcBef>
+              <a:spcAft>
+                <a:spcPts val="200"/>
+              </a:spcAft>
+            </a:pPr>
+            <a:r>
+              <a:rPr sz="1300">
+                <a:solidFill>
+                  <a:srgbClr val="3D5466"/>
+                </a:solidFill>
+                <a:latin typeface="Arial"/>
+              </a:rPr>
+              <a:t>▸  Welche zwei Gruppen in meinem Netzwerk kennen sich nicht, würden aber voneinander profitieren?</a:t>
+            </a:r>
+          </a:p>
+          <a:p>
+            <a:pPr>
+              <a:spcBef>
+                <a:spcPts val="400"/>
+              </a:spcBef>
+              <a:spcAft>
+                <a:spcPts val="200"/>
+              </a:spcAft>
+            </a:pPr>
+            <a:r>
+              <a:rPr sz="1300">
+                <a:solidFill>
+                  <a:srgbClr val="3D5466"/>
+                </a:solidFill>
+                <a:latin typeface="Arial"/>
+              </a:rPr>
+              <a:t>▸  Wo kann ich durch Zusammenführen Mehrwert stiften – ohne Eigeninteresse?</a:t>
+            </a:r>
+          </a:p>
+          <a:p>
+            <a:pPr>
+              <a:spcBef>
+                <a:spcPts val="400"/>
+              </a:spcBef>
+              <a:spcAft>
+                <a:spcPts val="200"/>
+              </a:spcAft>
+            </a:pPr>
+            <a:r>
+              <a:rPr sz="1300">
+                <a:solidFill>
+                  <a:srgbClr val="3D5466"/>
+                </a:solidFill>
+                <a:latin typeface="Arial"/>
+              </a:rPr>
+              <a:t>▸  ## 4.4 Sichtbarkeit: Expertise sichtbar machen ohne Eigenwerbung</a:t>
+            </a:r>
+          </a:p>
+          <a:p>
+            <a:pPr>
+              <a:spcBef>
+                <a:spcPts val="400"/>
+              </a:spcBef>
+              <a:spcAft>
+                <a:spcPts val="200"/>
+              </a:spcAft>
+            </a:pPr>
+            <a:r>
+              <a:rPr sz="1300">
+                <a:solidFill>
+                  <a:srgbClr val="3D5466"/>
+                </a:solidFill>
+                <a:latin typeface="Arial"/>
+              </a:rPr>
+              <a:t>▸  Sichtbarkeit entsteht nicht durch Selbstlob, sondern durch konsistente Fachkompetenz, die anderen nutzt. Die wirkmächtigsten Formate:</a:t>
             </a:r>
           </a:p>
         </p:txBody>

--- a/protected-downloads/praesentation/M20.pptx
+++ b/protected-downloads/praesentation/M20.pptx
@@ -4670,7 +4670,7 @@
                 </a:solidFill>
                 <a:latin typeface="JetBrains Mono"/>
               </a:rPr>
-              <a:t>Benedikt Zoller Coaching  ·  FKB Campus  ·  2026</a:t>
+              <a:t>FKB Campus  ·  2026</a:t>
             </a:r>
           </a:p>
         </p:txBody>
@@ -5161,7 +5161,7 @@
                 </a:solidFill>
                 <a:latin typeface="JetBrains Mono"/>
               </a:rPr>
-              <a:t>Benedikt Zoller Coaching  ·  FKB Campus  ·  M20</a:t>
+              <a:t>FKB Campus  ·  M20</a:t>
             </a:r>
           </a:p>
         </p:txBody>
@@ -5541,7 +5541,7 @@
                 </a:solidFill>
                 <a:latin typeface="JetBrains Mono"/>
               </a:rPr>
-              <a:t>Benedikt Zoller Coaching  ·  FKB Campus  ·  M20</a:t>
+              <a:t>FKB Campus  ·  M20</a:t>
             </a:r>
           </a:p>
         </p:txBody>
@@ -5997,7 +5997,7 @@
                 </a:solidFill>
                 <a:latin typeface="JetBrains Mono"/>
               </a:rPr>
-              <a:t>Benedikt Zoller Coaching  ·  FKB Campus  ·  M20</a:t>
+              <a:t>FKB Campus  ·  M20</a:t>
             </a:r>
           </a:p>
         </p:txBody>
@@ -6586,7 +6586,7 @@
                 </a:solidFill>
                 <a:latin typeface="JetBrains Mono"/>
               </a:rPr>
-              <a:t>Benedikt Zoller Coaching  ·  FKB Campus  ·  M20</a:t>
+              <a:t>FKB Campus  ·  M20</a:t>
             </a:r>
           </a:p>
         </p:txBody>
@@ -6966,7 +6966,7 @@
                 </a:solidFill>
                 <a:latin typeface="JetBrains Mono"/>
               </a:rPr>
-              <a:t>Benedikt Zoller Coaching  ·  FKB Campus  ·  M20</a:t>
+              <a:t>FKB Campus  ·  M20</a:t>
             </a:r>
           </a:p>
         </p:txBody>
@@ -7818,7 +7818,7 @@
                 </a:solidFill>
                 <a:latin typeface="JetBrains Mono"/>
               </a:rPr>
-              <a:t>Benedikt Zoller Coaching  ·  FKB Campus  ·  M20</a:t>
+              <a:t>FKB Campus  ·  M20</a:t>
             </a:r>
           </a:p>
         </p:txBody>
@@ -8497,7 +8497,7 @@
                 </a:solidFill>
                 <a:latin typeface="JetBrains Mono"/>
               </a:rPr>
-              <a:t>Benedikt Zoller Coaching  ·  FKB Campus  ·  M20</a:t>
+              <a:t>FKB Campus  ·  M20</a:t>
             </a:r>
           </a:p>
         </p:txBody>
@@ -8898,7 +8898,7 @@
                 </a:solidFill>
                 <a:latin typeface="JetBrains Mono"/>
               </a:rPr>
-              <a:t>Benedikt Zoller Coaching  ·  FKB Campus  ·  M20</a:t>
+              <a:t>FKB Campus  ·  M20</a:t>
             </a:r>
           </a:p>
         </p:txBody>
@@ -9311,7 +9311,7 @@
                 </a:solidFill>
                 <a:latin typeface="JetBrains Mono"/>
               </a:rPr>
-              <a:t>Benedikt Zoller Coaching  ·  FKB Campus  ·  M20</a:t>
+              <a:t>FKB Campus  ·  M20</a:t>
             </a:r>
           </a:p>
         </p:txBody>
@@ -9990,7 +9990,7 @@
                 </a:solidFill>
                 <a:latin typeface="JetBrains Mono"/>
               </a:rPr>
-              <a:t>Benedikt Zoller Coaching  ·  FKB Campus  ·  M20</a:t>
+              <a:t>FKB Campus  ·  M20</a:t>
             </a:r>
           </a:p>
         </p:txBody>
@@ -10446,7 +10446,7 @@
                 </a:solidFill>
                 <a:latin typeface="JetBrains Mono"/>
               </a:rPr>
-              <a:t>Benedikt Zoller Coaching  ·  FKB Campus  ·  M20</a:t>
+              <a:t>FKB Campus  ·  M20</a:t>
             </a:r>
           </a:p>
         </p:txBody>
@@ -10902,7 +10902,7 @@
                 </a:solidFill>
                 <a:latin typeface="JetBrains Mono"/>
               </a:rPr>
-              <a:t>Benedikt Zoller Coaching  ·  FKB Campus  ·  M20</a:t>
+              <a:t>FKB Campus  ·  M20</a:t>
             </a:r>
           </a:p>
         </p:txBody>
@@ -11301,7 +11301,7 @@
                 </a:solidFill>
                 <a:latin typeface="JetBrains Mono"/>
               </a:rPr>
-              <a:t>Benedikt Zoller Coaching  ·  FKB Campus  ·  M20</a:t>
+              <a:t>FKB Campus  ·  M20</a:t>
             </a:r>
           </a:p>
         </p:txBody>
@@ -11620,7 +11620,7 @@
                 </a:solidFill>
                 <a:latin typeface="JetBrains Mono"/>
               </a:rPr>
-              <a:t>Benedikt Zoller Coaching  ·  FKB Campus  ·  M20</a:t>
+              <a:t>FKB Campus  ·  M20</a:t>
             </a:r>
           </a:p>
         </p:txBody>
@@ -12206,7 +12206,7 @@
                 </a:solidFill>
                 <a:latin typeface="JetBrains Mono"/>
               </a:rPr>
-              <a:t>Benedikt Zoller Coaching  ·  FKB Campus  ·  M20</a:t>
+              <a:t>FKB Campus  ·  M20</a:t>
             </a:r>
           </a:p>
         </p:txBody>

--- a/protected-downloads/praesentation/M20.pptx
+++ b/protected-downloads/praesentation/M20.pptx
@@ -9644,7 +9644,7 @@
                 </a:solidFill>
                 <a:latin typeface="Consolas"/>
               </a:rPr>
-              <a:t>00:28       </a:t>
+              <a:t>00:30       </a:t>
             </a:r>
             <a:r>
               <a:rPr sz="1200" b="1">
@@ -9681,7 +9681,7 @@
                 </a:solidFill>
                 <a:latin typeface="Consolas"/>
               </a:rPr>
-              <a:t>00:43       </a:t>
+              <a:t>00:45       </a:t>
             </a:r>
             <a:r>
               <a:rPr sz="1200" b="1">
@@ -9718,7 +9718,7 @@
                 </a:solidFill>
                 <a:latin typeface="Consolas"/>
               </a:rPr>
-              <a:t>00:50       </a:t>
+              <a:t>00:55       </a:t>
             </a:r>
             <a:r>
               <a:rPr sz="1200" b="1">
@@ -9755,7 +9755,7 @@
                 </a:solidFill>
                 <a:latin typeface="Consolas"/>
               </a:rPr>
-              <a:t>01:00       </a:t>
+              <a:t>01:05       </a:t>
             </a:r>
             <a:r>
               <a:rPr sz="1200" b="1">
@@ -9792,7 +9792,7 @@
                 </a:solidFill>
                 <a:latin typeface="Consolas"/>
               </a:rPr>
-              <a:t>01:12       </a:t>
+              <a:t>01:17       </a:t>
             </a:r>
             <a:r>
               <a:rPr sz="1200" b="1">
@@ -9829,7 +9829,7 @@
                 </a:solidFill>
                 <a:latin typeface="Consolas"/>
               </a:rPr>
-              <a:t>01:20       </a:t>
+              <a:t>01:25       </a:t>
             </a:r>
             <a:r>
               <a:rPr sz="1200" b="1">
@@ -9866,7 +9866,7 @@
                 </a:solidFill>
                 <a:latin typeface="Consolas"/>
               </a:rPr>
-              <a:t>01:27       </a:t>
+              <a:t>01:35       </a:t>
             </a:r>
             <a:r>
               <a:rPr sz="1200" b="1">
@@ -9903,7 +9903,7 @@
                 </a:solidFill>
                 <a:latin typeface="Consolas"/>
               </a:rPr>
-              <a:t>01:30       </a:t>
+              <a:t>01:40       </a:t>
             </a:r>
             <a:r>
               <a:rPr sz="1200" b="1">

--- a/protected-downloads/praesentation/M20.pptx
+++ b/protected-downloads/praesentation/M20.pptx
@@ -4592,7 +4592,7 @@
                 </a:solidFill>
                 <a:latin typeface="Arial"/>
               </a:rPr>
-              <a:t>v0.4</a:t>
+              <a:t>v1.0</a:t>
             </a:r>
           </a:p>
         </p:txBody>

--- a/protected-downloads/praesentation/M20.pptx
+++ b/protected-downloads/praesentation/M20.pptx
@@ -587,7 +587,7 @@
           <a:lstStyle/>
           <a:p>
             <a:r>
-              <a:t>Siehe Trainerhandbuch (Sektion 3) für Moderationshinweise, Timing und erwartete Teilnehmerreaktionen.</a:t>
+              <a:t>Moderation (HB Sec 3): Kein perfektes Tool nötig – ein leeres A3-Blatt und Stifte reichen Strukturhilfe anbieten: TN zeichnen sich in die Mitte; dann 3 Kreise: enger Kontakt / gelegentlicher Kontakt / Schlafende Verbindungen Häufig unbehagliches Schweigen – das ist produktiv, nicht dramatisch In der Arbeitsanweisung die Spalte „Nächster Schritt" in AB-1 explizit erwähnen: „Füllen Sie auch die letzte Spalte aus – was wäre Ihr nächster Schritt mit diesem Kontakt?" Puffer-Auftrag für Schnellfertige: „Schauen Sie sich Ihre Lückenanalyse auf AB-2 an. Welche drei Personen fehlen in Ihrem Netzwerk – und was wäre Ihr konkreter Anlass für einen ersten Kontakt? Schreiben Sie das unter ‚Nächster Schritt' in AB-1." Das überbrückt die Wartezeit und bereitet den Zweier-Austausch vor.</a:t>
             </a:r>
           </a:p>
         </p:txBody>
@@ -6846,7 +6846,7 @@
                 </a:solidFill>
                 <a:latin typeface="Source Serif 4"/>
               </a:rPr>
-              <a:t>Arbeitsblatt 1: Persönliche Netzwerkkarte</a:t>
+              <a:t>AB-1: Persönliche Netzwerkkarte</a:t>
             </a:r>
           </a:p>
         </p:txBody>
@@ -7140,7 +7140,7 @@
                 </a:solidFill>
                 <a:latin typeface="Source Serif 4"/>
               </a:rPr>
-              <a:t>Arbeitsblatt 1: Persönliche Netzwerkkarte</a:t>
+              <a:t>AB-1: Persönliche Netzwerkkarte</a:t>
             </a:r>
           </a:p>
         </p:txBody>
@@ -8027,7 +8027,7 @@
                 </a:solidFill>
                 <a:latin typeface="Source Serif 4"/>
               </a:rPr>
-              <a:t>Arbeitsblatt 3: 90-Tage-Aktionsplan</a:t>
+              <a:t>AB-3: 90-Tage-Aktionsplan</a:t>
             </a:r>
           </a:p>
         </p:txBody>

--- a/protected-downloads/praesentation/M20.pptx
+++ b/protected-downloads/praesentation/M20.pptx
@@ -4267,7 +4267,7 @@
                 <a:solidFill>
                   <a:srgbClr val="C8D2E6"/>
                 </a:solidFill>
-                <a:latin typeface="JetBrains Mono"/>
+                <a:latin typeface="Consolas"/>
               </a:rPr>
               <a:t>FKB CAMPUS  ·  FIRMENKUNDENAKADEMIE  ·  M20</a:t>
             </a:r>
@@ -4302,7 +4302,7 @@
                 <a:solidFill>
                   <a:srgbClr val="FFFFFF"/>
                 </a:solidFill>
-                <a:latin typeface="Source Serif 4"/>
+                <a:latin typeface="Arial"/>
               </a:rPr>
               <a:t>Netzwerk &amp; Sichtbarkeit</a:t>
             </a:r>
@@ -4337,7 +4337,7 @@
                 <a:solidFill>
                   <a:srgbClr val="BECDE6"/>
                 </a:solidFill>
-                <a:latin typeface="Source Serif 4"/>
+                <a:latin typeface="Arial"/>
               </a:rPr>
               <a:t>Strategisches Beziehungskapital aufbauen und Fachexpertise im Markt positionieren</a:t>
             </a:r>
@@ -4415,7 +4415,7 @@
                 <a:solidFill>
                   <a:srgbClr val="A0B4D2"/>
                 </a:solidFill>
-                <a:latin typeface="JetBrains Mono"/>
+                <a:latin typeface="Consolas"/>
               </a:rPr>
               <a:t>KOMPETENZFELD</a:t>
             </a:r>
@@ -4485,7 +4485,7 @@
                 <a:solidFill>
                   <a:srgbClr val="A0B4D2"/>
                 </a:solidFill>
-                <a:latin typeface="JetBrains Mono"/>
+                <a:latin typeface="Consolas"/>
               </a:rPr>
               <a:t>KOMPETENZSTUFE</a:t>
             </a:r>
@@ -4555,7 +4555,7 @@
                 <a:solidFill>
                   <a:srgbClr val="A0B4D2"/>
                 </a:solidFill>
-                <a:latin typeface="JetBrains Mono"/>
+                <a:latin typeface="Consolas"/>
               </a:rPr>
               <a:t>VERSION</a:t>
             </a:r>
@@ -4668,7 +4668,7 @@
                 <a:solidFill>
                   <a:srgbClr val="96A5BE"/>
                 </a:solidFill>
-                <a:latin typeface="JetBrains Mono"/>
+                <a:latin typeface="Consolas"/>
               </a:rPr>
               <a:t>FKB Campus  ·  2026</a:t>
             </a:r>
@@ -4703,7 +4703,7 @@
                 <a:solidFill>
                   <a:srgbClr val="96A5BE"/>
                 </a:solidFill>
-                <a:latin typeface="JetBrains Mono"/>
+                <a:latin typeface="Consolas"/>
               </a:rPr>
               <a:t>Trainer-Präsentation</a:t>
             </a:r>
@@ -4842,7 +4842,7 @@
                 <a:solidFill>
                   <a:srgbClr val="78808C"/>
                 </a:solidFill>
-                <a:latin typeface="JetBrains Mono"/>
+                <a:latin typeface="Consolas"/>
               </a:rPr>
               <a:t>M20  ·  INHALT</a:t>
             </a:r>
@@ -4963,7 +4963,7 @@
                 <a:solidFill>
                   <a:srgbClr val="1F2C56"/>
                 </a:solidFill>
-                <a:latin typeface="Source Serif 4"/>
+                <a:latin typeface="Arial"/>
               </a:rPr>
               <a:t>Format 1: Fachbeiträge und Impulse</a:t>
             </a:r>
@@ -4979,7 +4979,7 @@
         <p:spPr>
           <a:xfrm>
             <a:off x="685800" y="1417320"/>
-            <a:ext cx="10817352" cy="5029200"/>
+            <a:ext cx="10817352" cy="4892040"/>
           </a:xfrm>
           <a:prstGeom prst="rect">
             <a:avLst/>
@@ -4987,12 +4987,12 @@
           <a:noFill/>
         </p:spPr>
         <p:txBody>
-          <a:bodyPr wrap="square">
+          <a:bodyPr wrap="square" anchor="ctr">
             <a:spAutoFit/>
           </a:bodyPr>
           <a:lstStyle/>
           <a:p>
-            <a:pPr>
+            <a:pPr marL="190500" indent="-190500">
               <a:spcBef>
                 <a:spcPts val="400"/>
               </a:spcBef>
@@ -5011,7 +5011,7 @@
             </a:r>
           </a:p>
           <a:p>
-            <a:pPr>
+            <a:pPr marL="190500" indent="-190500">
               <a:spcBef>
                 <a:spcPts val="400"/>
               </a:spcBef>
@@ -5030,7 +5030,7 @@
             </a:r>
           </a:p>
           <a:p>
-            <a:pPr>
+            <a:pPr marL="190500" indent="-190500">
               <a:spcBef>
                 <a:spcPts val="400"/>
               </a:spcBef>
@@ -5049,7 +5049,7 @@
             </a:r>
           </a:p>
           <a:p>
-            <a:pPr>
+            <a:pPr marL="190500" indent="-190500">
               <a:spcBef>
                 <a:spcPts val="400"/>
               </a:spcBef>
@@ -5068,7 +5068,7 @@
             </a:r>
           </a:p>
           <a:p>
-            <a:pPr>
+            <a:pPr marL="190500" indent="-190500">
               <a:spcBef>
                 <a:spcPts val="400"/>
               </a:spcBef>
@@ -5159,7 +5159,7 @@
                 <a:solidFill>
                   <a:srgbClr val="A0B4D2"/>
                 </a:solidFill>
-                <a:latin typeface="JetBrains Mono"/>
+                <a:latin typeface="Consolas"/>
               </a:rPr>
               <a:t>FKB Campus  ·  M20</a:t>
             </a:r>
@@ -5298,7 +5298,7 @@
                 <a:solidFill>
                   <a:srgbClr val="78808C"/>
                 </a:solidFill>
-                <a:latin typeface="JetBrains Mono"/>
+                <a:latin typeface="Consolas"/>
               </a:rPr>
               <a:t>M20  ·  INHALT</a:t>
             </a:r>
@@ -5419,7 +5419,7 @@
                 <a:solidFill>
                   <a:srgbClr val="1F2C56"/>
                 </a:solidFill>
-                <a:latin typeface="Source Serif 4"/>
+                <a:latin typeface="Arial"/>
               </a:rPr>
               <a:t>Format 2: Empfehlungen geben, bevor man welche bekommt</a:t>
             </a:r>
@@ -5435,7 +5435,7 @@
         <p:spPr>
           <a:xfrm>
             <a:off x="685800" y="1417320"/>
-            <a:ext cx="10817352" cy="5029200"/>
+            <a:ext cx="10817352" cy="4892040"/>
           </a:xfrm>
           <a:prstGeom prst="rect">
             <a:avLst/>
@@ -5443,12 +5443,12 @@
           <a:noFill/>
         </p:spPr>
         <p:txBody>
-          <a:bodyPr wrap="square">
+          <a:bodyPr wrap="square" anchor="ctr">
             <a:spAutoFit/>
           </a:bodyPr>
           <a:lstStyle/>
           <a:p>
-            <a:pPr>
+            <a:pPr marL="190500" indent="-190500">
               <a:spcBef>
                 <a:spcPts val="400"/>
               </a:spcBef>
@@ -5539,7 +5539,7 @@
                 <a:solidFill>
                   <a:srgbClr val="A0B4D2"/>
                 </a:solidFill>
-                <a:latin typeface="JetBrains Mono"/>
+                <a:latin typeface="Consolas"/>
               </a:rPr>
               <a:t>FKB Campus  ·  M20</a:t>
             </a:r>
@@ -5678,7 +5678,7 @@
                 <a:solidFill>
                   <a:srgbClr val="78808C"/>
                 </a:solidFill>
-                <a:latin typeface="JetBrains Mono"/>
+                <a:latin typeface="Consolas"/>
               </a:rPr>
               <a:t>M20  ·  INHALT</a:t>
             </a:r>
@@ -5799,7 +5799,7 @@
                 <a:solidFill>
                   <a:srgbClr val="1F2C56"/>
                 </a:solidFill>
-                <a:latin typeface="Source Serif 4"/>
+                <a:latin typeface="Arial"/>
               </a:rPr>
               <a:t>Format 3: Präsenz in Gremien und Verbänden</a:t>
             </a:r>
@@ -5815,7 +5815,7 @@
         <p:spPr>
           <a:xfrm>
             <a:off x="685800" y="1417320"/>
-            <a:ext cx="10817352" cy="5029200"/>
+            <a:ext cx="10817352" cy="4892040"/>
           </a:xfrm>
           <a:prstGeom prst="rect">
             <a:avLst/>
@@ -5823,12 +5823,12 @@
           <a:noFill/>
         </p:spPr>
         <p:txBody>
-          <a:bodyPr wrap="square">
+          <a:bodyPr wrap="square" anchor="ctr">
             <a:spAutoFit/>
           </a:bodyPr>
           <a:lstStyle/>
           <a:p>
-            <a:pPr>
+            <a:pPr marL="190500" indent="-190500">
               <a:spcBef>
                 <a:spcPts val="400"/>
               </a:spcBef>
@@ -5847,7 +5847,7 @@
             </a:r>
           </a:p>
           <a:p>
-            <a:pPr>
+            <a:pPr marL="190500" indent="-190500">
               <a:spcBef>
                 <a:spcPts val="400"/>
               </a:spcBef>
@@ -5866,7 +5866,7 @@
             </a:r>
           </a:p>
           <a:p>
-            <a:pPr>
+            <a:pPr marL="190500" indent="-190500">
               <a:spcBef>
                 <a:spcPts val="400"/>
               </a:spcBef>
@@ -5885,7 +5885,7 @@
             </a:r>
           </a:p>
           <a:p>
-            <a:pPr>
+            <a:pPr marL="190500" indent="-190500">
               <a:spcBef>
                 <a:spcPts val="400"/>
               </a:spcBef>
@@ -5904,7 +5904,7 @@
             </a:r>
           </a:p>
           <a:p>
-            <a:pPr>
+            <a:pPr marL="190500" indent="-190500">
               <a:spcBef>
                 <a:spcPts val="400"/>
               </a:spcBef>
@@ -5995,7 +5995,7 @@
                 <a:solidFill>
                   <a:srgbClr val="A0B4D2"/>
                 </a:solidFill>
-                <a:latin typeface="JetBrains Mono"/>
+                <a:latin typeface="Consolas"/>
               </a:rPr>
               <a:t>FKB Campus  ·  M20</a:t>
             </a:r>
@@ -6134,7 +6134,7 @@
                 <a:solidFill>
                   <a:srgbClr val="78808C"/>
                 </a:solidFill>
-                <a:latin typeface="JetBrains Mono"/>
+                <a:latin typeface="Consolas"/>
               </a:rPr>
               <a:t>M20  ·  INHALT</a:t>
             </a:r>
@@ -6255,7 +6255,7 @@
                 <a:solidFill>
                   <a:srgbClr val="1F2C56"/>
                 </a:solidFill>
-                <a:latin typeface="Source Serif 4"/>
+                <a:latin typeface="Arial"/>
               </a:rPr>
               <a:t>Format 4: Digitale Sichtbarkeit (nachrangig, selektiv)</a:t>
             </a:r>
@@ -6271,7 +6271,7 @@
         <p:spPr>
           <a:xfrm>
             <a:off x="685800" y="1417320"/>
-            <a:ext cx="10817352" cy="5029200"/>
+            <a:ext cx="10817352" cy="4892040"/>
           </a:xfrm>
           <a:prstGeom prst="rect">
             <a:avLst/>
@@ -6284,7 +6284,7 @@
           </a:bodyPr>
           <a:lstStyle/>
           <a:p>
-            <a:pPr>
+            <a:pPr marL="190500" indent="-190500">
               <a:spcBef>
                 <a:spcPts val="400"/>
               </a:spcBef>
@@ -6303,7 +6303,7 @@
             </a:r>
           </a:p>
           <a:p>
-            <a:pPr>
+            <a:pPr marL="190500" indent="-190500">
               <a:spcBef>
                 <a:spcPts val="400"/>
               </a:spcBef>
@@ -6322,7 +6322,7 @@
             </a:r>
           </a:p>
           <a:p>
-            <a:pPr>
+            <a:pPr marL="190500" indent="-190500">
               <a:spcBef>
                 <a:spcPts val="400"/>
               </a:spcBef>
@@ -6341,7 +6341,7 @@
             </a:r>
           </a:p>
           <a:p>
-            <a:pPr>
+            <a:pPr marL="190500" indent="-190500">
               <a:spcBef>
                 <a:spcPts val="400"/>
               </a:spcBef>
@@ -6360,7 +6360,7 @@
             </a:r>
           </a:p>
           <a:p>
-            <a:pPr>
+            <a:pPr marL="190500" indent="-190500">
               <a:spcBef>
                 <a:spcPts val="400"/>
               </a:spcBef>
@@ -6379,7 +6379,7 @@
             </a:r>
           </a:p>
           <a:p>
-            <a:pPr>
+            <a:pPr marL="190500" indent="-190500">
               <a:spcBef>
                 <a:spcPts val="400"/>
               </a:spcBef>
@@ -6398,7 +6398,7 @@
             </a:r>
           </a:p>
           <a:p>
-            <a:pPr>
+            <a:pPr marL="190500" indent="-190500">
               <a:spcBef>
                 <a:spcPts val="400"/>
               </a:spcBef>
@@ -6417,7 +6417,7 @@
             </a:r>
           </a:p>
           <a:p>
-            <a:pPr>
+            <a:pPr marL="190500" indent="-190500">
               <a:spcBef>
                 <a:spcPts val="400"/>
               </a:spcBef>
@@ -6436,7 +6436,7 @@
             </a:r>
           </a:p>
           <a:p>
-            <a:pPr>
+            <a:pPr marL="190500" indent="-190500">
               <a:spcBef>
                 <a:spcPts val="400"/>
               </a:spcBef>
@@ -6455,7 +6455,7 @@
             </a:r>
           </a:p>
           <a:p>
-            <a:pPr>
+            <a:pPr marL="190500" indent="-190500">
               <a:spcBef>
                 <a:spcPts val="400"/>
               </a:spcBef>
@@ -6474,7 +6474,7 @@
             </a:r>
           </a:p>
           <a:p>
-            <a:pPr>
+            <a:pPr marL="190500" indent="-190500">
               <a:spcBef>
                 <a:spcPts val="400"/>
               </a:spcBef>
@@ -6493,7 +6493,7 @@
             </a:r>
           </a:p>
           <a:p>
-            <a:pPr>
+            <a:pPr marL="190500" indent="-190500">
               <a:spcBef>
                 <a:spcPts val="400"/>
               </a:spcBef>
@@ -6584,7 +6584,7 @@
                 <a:solidFill>
                   <a:srgbClr val="A0B4D2"/>
                 </a:solidFill>
-                <a:latin typeface="JetBrains Mono"/>
+                <a:latin typeface="Consolas"/>
               </a:rPr>
               <a:t>FKB Campus  ·  M20</a:t>
             </a:r>
@@ -6723,7 +6723,7 @@
                 <a:solidFill>
                   <a:srgbClr val="78808C"/>
                 </a:solidFill>
-                <a:latin typeface="JetBrains Mono"/>
+                <a:latin typeface="Consolas"/>
               </a:rPr>
               <a:t>M20  ·  INHALT</a:t>
             </a:r>
@@ -6844,7 +6844,7 @@
                 <a:solidFill>
                   <a:srgbClr val="1F2C56"/>
                 </a:solidFill>
-                <a:latin typeface="Source Serif 4"/>
+                <a:latin typeface="Arial"/>
               </a:rPr>
               <a:t>AB-1: Persönliche Netzwerkkarte</a:t>
             </a:r>
@@ -6860,7 +6860,7 @@
         <p:spPr>
           <a:xfrm>
             <a:off x="685800" y="1417320"/>
-            <a:ext cx="10817352" cy="5029200"/>
+            <a:ext cx="10817352" cy="4892040"/>
           </a:xfrm>
           <a:prstGeom prst="rect">
             <a:avLst/>
@@ -6868,12 +6868,12 @@
           <a:noFill/>
         </p:spPr>
         <p:txBody>
-          <a:bodyPr wrap="square">
+          <a:bodyPr wrap="square" anchor="ctr">
             <a:spAutoFit/>
           </a:bodyPr>
           <a:lstStyle/>
           <a:p>
-            <a:pPr>
+            <a:pPr marL="190500" indent="-190500">
               <a:spcBef>
                 <a:spcPts val="400"/>
               </a:spcBef>
@@ -6964,7 +6964,7 @@
                 <a:solidFill>
                   <a:srgbClr val="A0B4D2"/>
                 </a:solidFill>
-                <a:latin typeface="JetBrains Mono"/>
+                <a:latin typeface="Consolas"/>
               </a:rPr>
               <a:t>FKB Campus  ·  M20</a:t>
             </a:r>
@@ -7103,7 +7103,7 @@
                 <a:solidFill>
                   <a:srgbClr val="78808C"/>
                 </a:solidFill>
-                <a:latin typeface="JetBrains Mono"/>
+                <a:latin typeface="Consolas"/>
               </a:rPr>
               <a:t>M20  ·  ÜBERSICHT</a:t>
             </a:r>
@@ -7138,7 +7138,7 @@
                 <a:solidFill>
                   <a:srgbClr val="1F2C56"/>
                 </a:solidFill>
-                <a:latin typeface="Source Serif 4"/>
+                <a:latin typeface="Arial"/>
               </a:rPr>
               <a:t>AB-1: Persönliche Netzwerkkarte</a:t>
             </a:r>
@@ -7816,7 +7816,7 @@
                 <a:solidFill>
                   <a:srgbClr val="A0B4D2"/>
                 </a:solidFill>
-                <a:latin typeface="JetBrains Mono"/>
+                <a:latin typeface="Consolas"/>
               </a:rPr>
               <a:t>FKB Campus  ·  M20</a:t>
             </a:r>
@@ -7851,7 +7851,7 @@
                 <a:solidFill>
                   <a:srgbClr val="A0B4D2"/>
                 </a:solidFill>
-                <a:latin typeface="JetBrains Mono"/>
+                <a:latin typeface="Consolas"/>
               </a:rPr>
               <a:t>Übersicht</a:t>
             </a:r>
@@ -7990,7 +7990,7 @@
                 <a:solidFill>
                   <a:srgbClr val="78808C"/>
                 </a:solidFill>
-                <a:latin typeface="JetBrains Mono"/>
+                <a:latin typeface="Consolas"/>
               </a:rPr>
               <a:t>M20  ·  ÜBERSICHT</a:t>
             </a:r>
@@ -8025,7 +8025,7 @@
                 <a:solidFill>
                   <a:srgbClr val="1F2C56"/>
                 </a:solidFill>
-                <a:latin typeface="Source Serif 4"/>
+                <a:latin typeface="Arial"/>
               </a:rPr>
               <a:t>AB-3: 90-Tage-Aktionsplan</a:t>
             </a:r>
@@ -8495,7 +8495,7 @@
                 <a:solidFill>
                   <a:srgbClr val="A0B4D2"/>
                 </a:solidFill>
-                <a:latin typeface="JetBrains Mono"/>
+                <a:latin typeface="Consolas"/>
               </a:rPr>
               <a:t>FKB Campus  ·  M20</a:t>
             </a:r>
@@ -8530,7 +8530,7 @@
                 <a:solidFill>
                   <a:srgbClr val="A0B4D2"/>
                 </a:solidFill>
-                <a:latin typeface="JetBrains Mono"/>
+                <a:latin typeface="Consolas"/>
               </a:rPr>
               <a:t>Übersicht</a:t>
             </a:r>
@@ -8669,7 +8669,7 @@
                 <a:solidFill>
                   <a:srgbClr val="78808C"/>
                 </a:solidFill>
-                <a:latin typeface="JetBrains Mono"/>
+                <a:latin typeface="Consolas"/>
               </a:rPr>
               <a:t>ÜBERBLICK  ·  M20</a:t>
             </a:r>
@@ -8747,7 +8747,7 @@
                 <a:solidFill>
                   <a:srgbClr val="1F2C56"/>
                 </a:solidFill>
-                <a:latin typeface="Source Serif 4"/>
+                <a:latin typeface="Arial"/>
               </a:rPr>
               <a:t>Worum geht es heute</a:t>
             </a:r>
@@ -8896,7 +8896,7 @@
                 <a:solidFill>
                   <a:srgbClr val="A0B4D2"/>
                 </a:solidFill>
-                <a:latin typeface="JetBrains Mono"/>
+                <a:latin typeface="Consolas"/>
               </a:rPr>
               <a:t>FKB Campus  ·  M20</a:t>
             </a:r>
@@ -9035,7 +9035,7 @@
                 <a:solidFill>
                   <a:srgbClr val="78808C"/>
                 </a:solidFill>
-                <a:latin typeface="JetBrains Mono"/>
+                <a:latin typeface="Consolas"/>
               </a:rPr>
               <a:t>LERNZIELE  ·  M20</a:t>
             </a:r>
@@ -9113,7 +9113,7 @@
                 <a:solidFill>
                   <a:srgbClr val="1F2C56"/>
                 </a:solidFill>
-                <a:latin typeface="Source Serif 4"/>
+                <a:latin typeface="Arial"/>
               </a:rPr>
               <a:t>Was Sie heute mitnehmen</a:t>
             </a:r>
@@ -9309,7 +9309,7 @@
                 <a:solidFill>
                   <a:srgbClr val="A0B4D2"/>
                 </a:solidFill>
-                <a:latin typeface="JetBrains Mono"/>
+                <a:latin typeface="Consolas"/>
               </a:rPr>
               <a:t>FKB Campus  ·  M20</a:t>
             </a:r>
@@ -9448,7 +9448,7 @@
                 <a:solidFill>
                   <a:srgbClr val="78808C"/>
                 </a:solidFill>
-                <a:latin typeface="JetBrains Mono"/>
+                <a:latin typeface="Consolas"/>
               </a:rPr>
               <a:t>AGENDA  ·  M20</a:t>
             </a:r>
@@ -9526,7 +9526,7 @@
                 <a:solidFill>
                   <a:srgbClr val="1F2C56"/>
                 </a:solidFill>
-                <a:latin typeface="Source Serif 4"/>
+                <a:latin typeface="Arial"/>
               </a:rPr>
               <a:t>So läuft das Modul</a:t>
             </a:r>
@@ -9988,7 +9988,7 @@
                 <a:solidFill>
                   <a:srgbClr val="A0B4D2"/>
                 </a:solidFill>
-                <a:latin typeface="JetBrains Mono"/>
+                <a:latin typeface="Consolas"/>
               </a:rPr>
               <a:t>FKB Campus  ·  M20</a:t>
             </a:r>
@@ -10127,7 +10127,7 @@
                 <a:solidFill>
                   <a:srgbClr val="78808C"/>
                 </a:solidFill>
-                <a:latin typeface="JetBrains Mono"/>
+                <a:latin typeface="Consolas"/>
               </a:rPr>
               <a:t>M20  ·  INHALT</a:t>
             </a:r>
@@ -10248,7 +10248,7 @@
                 <a:solidFill>
                   <a:srgbClr val="1F2C56"/>
                 </a:solidFill>
-                <a:latin typeface="Source Serif 4"/>
+                <a:latin typeface="Arial"/>
               </a:rPr>
               <a:t>Dimension 1: Internes Netzwerk</a:t>
             </a:r>
@@ -10264,7 +10264,7 @@
         <p:spPr>
           <a:xfrm>
             <a:off x="685800" y="1417320"/>
-            <a:ext cx="10817352" cy="5029200"/>
+            <a:ext cx="10817352" cy="4892040"/>
           </a:xfrm>
           <a:prstGeom prst="rect">
             <a:avLst/>
@@ -10272,12 +10272,12 @@
           <a:noFill/>
         </p:spPr>
         <p:txBody>
-          <a:bodyPr wrap="square">
+          <a:bodyPr wrap="square" anchor="ctr">
             <a:spAutoFit/>
           </a:bodyPr>
           <a:lstStyle/>
           <a:p>
-            <a:pPr>
+            <a:pPr marL="190500" indent="-190500">
               <a:spcBef>
                 <a:spcPts val="400"/>
               </a:spcBef>
@@ -10296,7 +10296,7 @@
             </a:r>
           </a:p>
           <a:p>
-            <a:pPr>
+            <a:pPr marL="190500" indent="-190500">
               <a:spcBef>
                 <a:spcPts val="400"/>
               </a:spcBef>
@@ -10315,7 +10315,7 @@
             </a:r>
           </a:p>
           <a:p>
-            <a:pPr>
+            <a:pPr marL="190500" indent="-190500">
               <a:spcBef>
                 <a:spcPts val="400"/>
               </a:spcBef>
@@ -10334,7 +10334,7 @@
             </a:r>
           </a:p>
           <a:p>
-            <a:pPr>
+            <a:pPr marL="190500" indent="-190500">
               <a:spcBef>
                 <a:spcPts val="400"/>
               </a:spcBef>
@@ -10353,7 +10353,7 @@
             </a:r>
           </a:p>
           <a:p>
-            <a:pPr>
+            <a:pPr marL="190500" indent="-190500">
               <a:spcBef>
                 <a:spcPts val="400"/>
               </a:spcBef>
@@ -10444,7 +10444,7 @@
                 <a:solidFill>
                   <a:srgbClr val="A0B4D2"/>
                 </a:solidFill>
-                <a:latin typeface="JetBrains Mono"/>
+                <a:latin typeface="Consolas"/>
               </a:rPr>
               <a:t>FKB Campus  ·  M20</a:t>
             </a:r>
@@ -10583,7 +10583,7 @@
                 <a:solidFill>
                   <a:srgbClr val="78808C"/>
                 </a:solidFill>
-                <a:latin typeface="JetBrains Mono"/>
+                <a:latin typeface="Consolas"/>
               </a:rPr>
               <a:t>M20  ·  INHALT</a:t>
             </a:r>
@@ -10704,7 +10704,7 @@
                 <a:solidFill>
                   <a:srgbClr val="1F2C56"/>
                 </a:solidFill>
-                <a:latin typeface="Source Serif 4"/>
+                <a:latin typeface="Arial"/>
               </a:rPr>
               <a:t>Dimension 2: Verbundpartner-Netzwerk</a:t>
             </a:r>
@@ -10720,7 +10720,7 @@
         <p:spPr>
           <a:xfrm>
             <a:off x="685800" y="1417320"/>
-            <a:ext cx="10817352" cy="5029200"/>
+            <a:ext cx="10817352" cy="4892040"/>
           </a:xfrm>
           <a:prstGeom prst="rect">
             <a:avLst/>
@@ -10728,12 +10728,12 @@
           <a:noFill/>
         </p:spPr>
         <p:txBody>
-          <a:bodyPr wrap="square">
+          <a:bodyPr wrap="square" anchor="ctr">
             <a:spAutoFit/>
           </a:bodyPr>
           <a:lstStyle/>
           <a:p>
-            <a:pPr>
+            <a:pPr marL="190500" indent="-190500">
               <a:spcBef>
                 <a:spcPts val="400"/>
               </a:spcBef>
@@ -10752,7 +10752,7 @@
             </a:r>
           </a:p>
           <a:p>
-            <a:pPr>
+            <a:pPr marL="190500" indent="-190500">
               <a:spcBef>
                 <a:spcPts val="400"/>
               </a:spcBef>
@@ -10771,7 +10771,7 @@
             </a:r>
           </a:p>
           <a:p>
-            <a:pPr>
+            <a:pPr marL="190500" indent="-190500">
               <a:spcBef>
                 <a:spcPts val="400"/>
               </a:spcBef>
@@ -10790,7 +10790,7 @@
             </a:r>
           </a:p>
           <a:p>
-            <a:pPr>
+            <a:pPr marL="190500" indent="-190500">
               <a:spcBef>
                 <a:spcPts val="400"/>
               </a:spcBef>
@@ -10809,7 +10809,7 @@
             </a:r>
           </a:p>
           <a:p>
-            <a:pPr>
+            <a:pPr marL="190500" indent="-190500">
               <a:spcBef>
                 <a:spcPts val="400"/>
               </a:spcBef>
@@ -10900,7 +10900,7 @@
                 <a:solidFill>
                   <a:srgbClr val="A0B4D2"/>
                 </a:solidFill>
-                <a:latin typeface="JetBrains Mono"/>
+                <a:latin typeface="Consolas"/>
               </a:rPr>
               <a:t>FKB Campus  ·  M20</a:t>
             </a:r>
@@ -11039,7 +11039,7 @@
                 <a:solidFill>
                   <a:srgbClr val="78808C"/>
                 </a:solidFill>
-                <a:latin typeface="JetBrains Mono"/>
+                <a:latin typeface="Consolas"/>
               </a:rPr>
               <a:t>M20  ·  INHALT</a:t>
             </a:r>
@@ -11160,7 +11160,7 @@
                 <a:solidFill>
                   <a:srgbClr val="1F2C56"/>
                 </a:solidFill>
-                <a:latin typeface="Source Serif 4"/>
+                <a:latin typeface="Arial"/>
               </a:rPr>
               <a:t>Dimension 3: Markt-Netzwerk</a:t>
             </a:r>
@@ -11176,7 +11176,7 @@
         <p:spPr>
           <a:xfrm>
             <a:off x="685800" y="1417320"/>
-            <a:ext cx="10817352" cy="5029200"/>
+            <a:ext cx="10817352" cy="4892040"/>
           </a:xfrm>
           <a:prstGeom prst="rect">
             <a:avLst/>
@@ -11184,12 +11184,12 @@
           <a:noFill/>
         </p:spPr>
         <p:txBody>
-          <a:bodyPr wrap="square">
+          <a:bodyPr wrap="square" anchor="ctr">
             <a:spAutoFit/>
           </a:bodyPr>
           <a:lstStyle/>
           <a:p>
-            <a:pPr>
+            <a:pPr marL="190500" indent="-190500">
               <a:spcBef>
                 <a:spcPts val="400"/>
               </a:spcBef>
@@ -11208,7 +11208,7 @@
             </a:r>
           </a:p>
           <a:p>
-            <a:pPr>
+            <a:pPr marL="190500" indent="-190500">
               <a:spcBef>
                 <a:spcPts val="400"/>
               </a:spcBef>
@@ -11299,7 +11299,7 @@
                 <a:solidFill>
                   <a:srgbClr val="A0B4D2"/>
                 </a:solidFill>
-                <a:latin typeface="JetBrains Mono"/>
+                <a:latin typeface="Consolas"/>
               </a:rPr>
               <a:t>FKB Campus  ·  M20</a:t>
             </a:r>
@@ -11438,7 +11438,7 @@
                 <a:solidFill>
                   <a:srgbClr val="78808C"/>
                 </a:solidFill>
-                <a:latin typeface="JetBrains Mono"/>
+                <a:latin typeface="Consolas"/>
               </a:rPr>
               <a:t>M20  ·  SCHAUBILD</a:t>
             </a:r>
@@ -11473,7 +11473,7 @@
                 <a:solidFill>
                   <a:srgbClr val="1F2C56"/>
                 </a:solidFill>
-                <a:latin typeface="Source Serif 4"/>
+                <a:latin typeface="Arial"/>
               </a:rPr>
               <a:t>Netzwerk-Dimensionen eines FK-Beraters</a:t>
             </a:r>
@@ -11618,7 +11618,7 @@
                 <a:solidFill>
                   <a:srgbClr val="A0B4D2"/>
                 </a:solidFill>
-                <a:latin typeface="JetBrains Mono"/>
+                <a:latin typeface="Consolas"/>
               </a:rPr>
               <a:t>FKB Campus  ·  M20</a:t>
             </a:r>
@@ -11653,7 +11653,7 @@
                 <a:solidFill>
                   <a:srgbClr val="A0B4D2"/>
                 </a:solidFill>
-                <a:latin typeface="JetBrains Mono"/>
+                <a:latin typeface="Consolas"/>
               </a:rPr>
               <a:t>Schaubild</a:t>
             </a:r>
@@ -11792,7 +11792,7 @@
                 <a:solidFill>
                   <a:srgbClr val="78808C"/>
                 </a:solidFill>
-                <a:latin typeface="JetBrains Mono"/>
+                <a:latin typeface="Consolas"/>
               </a:rPr>
               <a:t>M20  ·  INHALT</a:t>
             </a:r>
@@ -11913,7 +11913,7 @@
                 <a:solidFill>
                   <a:srgbClr val="1F2C56"/>
                 </a:solidFill>
-                <a:latin typeface="Source Serif 4"/>
+                <a:latin typeface="Arial"/>
               </a:rPr>
               <a:t>Das Netzwerk-Audit (3 Fragen)</a:t>
             </a:r>
@@ -11929,7 +11929,7 @@
         <p:spPr>
           <a:xfrm>
             <a:off x="685800" y="1417320"/>
-            <a:ext cx="10817352" cy="5029200"/>
+            <a:ext cx="10817352" cy="4892040"/>
           </a:xfrm>
           <a:prstGeom prst="rect">
             <a:avLst/>
@@ -11942,7 +11942,7 @@
           </a:bodyPr>
           <a:lstStyle/>
           <a:p>
-            <a:pPr>
+            <a:pPr marL="190500" indent="-190500">
               <a:spcBef>
                 <a:spcPts val="400"/>
               </a:spcBef>
@@ -11961,7 +11961,7 @@
             </a:r>
           </a:p>
           <a:p>
-            <a:pPr>
+            <a:pPr marL="190500" indent="-190500">
               <a:spcBef>
                 <a:spcPts val="400"/>
               </a:spcBef>
@@ -11980,7 +11980,7 @@
             </a:r>
           </a:p>
           <a:p>
-            <a:pPr>
+            <a:pPr marL="190500" indent="-190500">
               <a:spcBef>
                 <a:spcPts val="400"/>
               </a:spcBef>
@@ -11999,7 +11999,7 @@
             </a:r>
           </a:p>
           <a:p>
-            <a:pPr>
+            <a:pPr marL="190500" indent="-190500">
               <a:spcBef>
                 <a:spcPts val="400"/>
               </a:spcBef>
@@ -12018,7 +12018,7 @@
             </a:r>
           </a:p>
           <a:p>
-            <a:pPr>
+            <a:pPr marL="190500" indent="-190500">
               <a:spcBef>
                 <a:spcPts val="400"/>
               </a:spcBef>
@@ -12037,7 +12037,7 @@
             </a:r>
           </a:p>
           <a:p>
-            <a:pPr>
+            <a:pPr marL="190500" indent="-190500">
               <a:spcBef>
                 <a:spcPts val="400"/>
               </a:spcBef>
@@ -12056,7 +12056,7 @@
             </a:r>
           </a:p>
           <a:p>
-            <a:pPr>
+            <a:pPr marL="190500" indent="-190500">
               <a:spcBef>
                 <a:spcPts val="400"/>
               </a:spcBef>
@@ -12075,7 +12075,7 @@
             </a:r>
           </a:p>
           <a:p>
-            <a:pPr>
+            <a:pPr marL="190500" indent="-190500">
               <a:spcBef>
                 <a:spcPts val="400"/>
               </a:spcBef>
@@ -12094,7 +12094,7 @@
             </a:r>
           </a:p>
           <a:p>
-            <a:pPr>
+            <a:pPr marL="190500" indent="-190500">
               <a:spcBef>
                 <a:spcPts val="400"/>
               </a:spcBef>
@@ -12113,7 +12113,7 @@
             </a:r>
           </a:p>
           <a:p>
-            <a:pPr>
+            <a:pPr marL="190500" indent="-190500">
               <a:spcBef>
                 <a:spcPts val="400"/>
               </a:spcBef>
@@ -12204,7 +12204,7 @@
                 <a:solidFill>
                   <a:srgbClr val="A0B4D2"/>
                 </a:solidFill>
-                <a:latin typeface="JetBrains Mono"/>
+                <a:latin typeface="Consolas"/>
               </a:rPr>
               <a:t>FKB Campus  ·  M20</a:t>
             </a:r>

--- a/protected-downloads/praesentation/M20.pptx
+++ b/protected-downloads/praesentation/M20.pptx
@@ -19,8 +19,6 @@
     <p:sldId id="267" r:id="rId19"/>
     <p:sldId id="268" r:id="rId20"/>
     <p:sldId id="269" r:id="rId21"/>
-    <p:sldId id="270" r:id="rId22"/>
-    <p:sldId id="271" r:id="rId23"/>
   </p:sldIdLst>
   <p:sldSz cx="12188952" cy="6858000" type="screen4x3"/>
   <p:notesSz cx="6858000" cy="9144000"/>
@@ -542,76 +540,6 @@
 </p:notes>
 </file>
 
-<file path=ppt/notesSlides/notesSlide10.xml><?xml version="1.0" encoding="utf-8"?>
-<p:notes xmlns:a="http://schemas.openxmlformats.org/drawingml/2006/main" xmlns:p="http://schemas.openxmlformats.org/presentationml/2006/main" xmlns:r="http://schemas.openxmlformats.org/officeDocument/2006/relationships">
-  <p:cSld>
-    <p:spTree>
-      <p:nvGrpSpPr>
-        <p:cNvPr id="1" name=""/>
-        <p:cNvGrpSpPr/>
-        <p:nvPr/>
-      </p:nvGrpSpPr>
-      <p:grpSpPr>
-        <a:xfrm>
-          <a:off x="0" y="0"/>
-          <a:ext cx="0" cy="0"/>
-          <a:chOff x="0" y="0"/>
-          <a:chExt cx="0" cy="0"/>
-        </a:xfrm>
-      </p:grpSpPr>
-      <p:sp>
-        <p:nvSpPr>
-          <p:cNvPr id="2" name="Slide Image Placeholder 1"/>
-          <p:cNvSpPr>
-            <a:spLocks noGrp="1"/>
-          </p:cNvSpPr>
-          <p:nvPr>
-            <p:ph type="sldImg" idx="2"/>
-          </p:nvPr>
-        </p:nvSpPr>
-        <p:spPr/>
-      </p:sp>
-      <p:sp>
-        <p:nvSpPr>
-          <p:cNvPr id="3" name="Notes Placeholder 2"/>
-          <p:cNvSpPr>
-            <a:spLocks noGrp="1"/>
-          </p:cNvSpPr>
-          <p:nvPr>
-            <p:ph type="body" idx="3" sz="quarter"/>
-          </p:nvPr>
-        </p:nvSpPr>
-        <p:spPr/>
-        <p:txBody>
-          <a:bodyPr/>
-          <a:lstStyle/>
-          <a:p>
-            <a:r>
-              <a:t>Moderation (HB Sec 3): Kein perfektes Tool nötig – ein leeres A3-Blatt und Stifte reichen Strukturhilfe anbieten: TN zeichnen sich in die Mitte; dann 3 Kreise: enger Kontakt / gelegentlicher Kontakt / Schlafende Verbindungen Häufig unbehagliches Schweigen – das ist produktiv, nicht dramatisch In der Arbeitsanweisung die Spalte „Nächster Schritt" in AB-1 explizit erwähnen: „Füllen Sie auch die letzte Spalte aus – was wäre Ihr nächster Schritt mit diesem Kontakt?" Puffer-Auftrag für Schnellfertige: „Schauen Sie sich Ihre Lückenanalyse auf AB-2 an. Welche drei Personen fehlen in Ihrem Netzwerk – und was wäre Ihr konkreter Anlass für einen ersten Kontakt? Schreiben Sie das unter ‚Nächster Schritt' in AB-1." Das überbrückt die Wartezeit und bereitet den Zweier-Austausch vor.</a:t>
-            </a:r>
-          </a:p>
-        </p:txBody>
-      </p:sp>
-      <p:sp>
-        <p:nvSpPr>
-          <p:cNvPr id="4" name="Slide Number Placeholder 3"/>
-          <p:cNvSpPr>
-            <a:spLocks noGrp="1"/>
-          </p:cNvSpPr>
-          <p:nvPr>
-            <p:ph type="sldNum" idx="5" sz="quarter"/>
-          </p:nvPr>
-        </p:nvSpPr>
-        <p:spPr/>
-      </p:sp>
-    </p:spTree>
-  </p:cSld>
-  <p:clrMapOvr>
-    <a:masterClrMapping/>
-  </p:clrMapOvr>
-</p:notes>
-</file>
-
 <file path=ppt/notesSlides/notesSlide2.xml><?xml version="1.0" encoding="utf-8"?>
 <p:notes xmlns:a="http://schemas.openxmlformats.org/drawingml/2006/main" xmlns:p="http://schemas.openxmlformats.org/presentationml/2006/main" xmlns:r="http://schemas.openxmlformats.org/officeDocument/2006/relationships">
   <p:cSld>
@@ -657,7 +585,7 @@
           <a:lstStyle/>
           <a:p>
             <a:r>
-              <a:t>Siehe Trainerhandbuch (Sektion 3) für Moderationshinweise, Timing und erwartete Teilnehmerreaktionen.</a:t>
+              <a:t>Einstieg: „Wie viele Ihrer letzten drei Neukunden kamen über eine Empfehlung – und wie viele über Kaltakquise?"</a:t>
             </a:r>
           </a:p>
         </p:txBody>
@@ -727,7 +655,7 @@
           <a:lstStyle/>
           <a:p>
             <a:r>
-              <a:t>Siehe Trainerhandbuch (Sektion 3) für Moderationshinweise, Timing und erwartete Teilnehmerreaktionen.</a:t>
+              <a:t>Die drei Dimensionen unterscheiden sich in Pflegeaufwand und Ertrag – das Markt-Netzwerk bringt die Neuanfragen.</a:t>
             </a:r>
           </a:p>
         </p:txBody>
@@ -797,7 +725,7 @@
           <a:lstStyle/>
           <a:p>
             <a:r>
-              <a:t>Siehe Trainerhandbuch (Sektion 3) für Moderationshinweise, Timing und erwartete Teilnehmerreaktionen.</a:t>
+              <a:t>Ehrlichkeit im Audit ist die Grundlage des 90-Tage-Plans – geschönte Selbsteinschätzung bringt keinen Fortschritt.</a:t>
             </a:r>
           </a:p>
         </p:txBody>
@@ -867,7 +795,7 @@
           <a:lstStyle/>
           <a:p>
             <a:r>
-              <a:t>Siehe Trainerhandbuch (Sektion 3) für Moderationshinweise, Timing und erwartete Teilnehmerreaktionen.</a:t>
+              <a:t>Format 2 ist der stärkste Hebel: wer zuerst gibt, bekommt zurück. Digitale Sichtbarkeit ist Ergänzung, nicht Kern.</a:t>
             </a:r>
           </a:p>
         </p:txBody>
@@ -937,7 +865,12 @@
           <a:lstStyle/>
           <a:p>
             <a:r>
-              <a:t>Siehe Trainerhandbuch (Sektion 3) für Moderationshinweise, Timing und erwartete Teilnehmerreaktionen.</a:t>
+              <a:t>Fall Stefan Köhler: vom Geheimtipp zur Autorität durch systematische Sichtbarkeit über Fachbeiträge und Empfehlungen. Kein Talent, sondern Methode.</a:t>
+            </a:r>
+          </a:p>
+          <a:p>
+            <a:r>
+              <a:t>Moderation (HB Sec 3): Kein perfektes Tool nötig – ein leeres A3-Blatt und Stifte reichen Strukturhilfe anbieten: TN zeichnen sich in die Mitte; dann 3 Kreise: enger Kontakt / gelegentlicher Kontakt / Schlafende Verbindungen Häufig unbehagliches Schweigen – das ist produktiv, nicht dramatisch In der Arbeitsanweisung die Spalte „Nächster Schritt" in AB-1 explizit erwähnen: „Füllen Sie auch die letzte Spalte aus – was wäre Ihr nächster Schritt mit diesem Kontakt?" Puffer-Auftrag für Schnellfertige: „Schauen Sie sich Ihre Lückenanalyse auf AB-2 an. Welche drei Personen fehlen in Ihrem Netzwerk – und was wäre Ihr konkreter Anlass für einen ersten Kontakt? Schreiben Sie das unter ‚Nächster Schritt' in AB-1." Das überbrückt die Wartezeit und bereitet den Zweier-Austausch vor.</a:t>
             </a:r>
           </a:p>
         </p:txBody>
@@ -1007,7 +940,7 @@
           <a:lstStyle/>
           <a:p>
             <a:r>
-              <a:t>Siehe Trainerhandbuch (Sektion 3) für Moderationshinweise, Timing und erwartete Teilnehmerreaktionen.</a:t>
+              <a:t>Überleitung zum 90-Tage-Plan als Transferanker.</a:t>
             </a:r>
           </a:p>
         </p:txBody>
@@ -1077,77 +1010,7 @@
           <a:lstStyle/>
           <a:p>
             <a:r>
-              <a:t>Siehe Trainerhandbuch (Sektion 3) für Moderationshinweise, Timing und erwartete Teilnehmerreaktionen.</a:t>
-            </a:r>
-          </a:p>
-        </p:txBody>
-      </p:sp>
-      <p:sp>
-        <p:nvSpPr>
-          <p:cNvPr id="4" name="Slide Number Placeholder 3"/>
-          <p:cNvSpPr>
-            <a:spLocks noGrp="1"/>
-          </p:cNvSpPr>
-          <p:nvPr>
-            <p:ph type="sldNum" idx="5" sz="quarter"/>
-          </p:nvPr>
-        </p:nvSpPr>
-        <p:spPr/>
-      </p:sp>
-    </p:spTree>
-  </p:cSld>
-  <p:clrMapOvr>
-    <a:masterClrMapping/>
-  </p:clrMapOvr>
-</p:notes>
-</file>
-
-<file path=ppt/notesSlides/notesSlide9.xml><?xml version="1.0" encoding="utf-8"?>
-<p:notes xmlns:a="http://schemas.openxmlformats.org/drawingml/2006/main" xmlns:p="http://schemas.openxmlformats.org/presentationml/2006/main" xmlns:r="http://schemas.openxmlformats.org/officeDocument/2006/relationships">
-  <p:cSld>
-    <p:spTree>
-      <p:nvGrpSpPr>
-        <p:cNvPr id="1" name=""/>
-        <p:cNvGrpSpPr/>
-        <p:nvPr/>
-      </p:nvGrpSpPr>
-      <p:grpSpPr>
-        <a:xfrm>
-          <a:off x="0" y="0"/>
-          <a:ext cx="0" cy="0"/>
-          <a:chOff x="0" y="0"/>
-          <a:chExt cx="0" cy="0"/>
-        </a:xfrm>
-      </p:grpSpPr>
-      <p:sp>
-        <p:nvSpPr>
-          <p:cNvPr id="2" name="Slide Image Placeholder 1"/>
-          <p:cNvSpPr>
-            <a:spLocks noGrp="1"/>
-          </p:cNvSpPr>
-          <p:nvPr>
-            <p:ph type="sldImg" idx="2"/>
-          </p:nvPr>
-        </p:nvSpPr>
-        <p:spPr/>
-      </p:sp>
-      <p:sp>
-        <p:nvSpPr>
-          <p:cNvPr id="3" name="Notes Placeholder 2"/>
-          <p:cNvSpPr>
-            <a:spLocks noGrp="1"/>
-          </p:cNvSpPr>
-          <p:nvPr>
-            <p:ph type="body" idx="3" sz="quarter"/>
-          </p:nvPr>
-        </p:nvSpPr>
-        <p:spPr/>
-        <p:txBody>
-          <a:bodyPr/>
-          <a:lstStyle/>
-          <a:p>
-            <a:r>
-              <a:t>Siehe Trainerhandbuch (Sektion 3) für Moderationshinweise, Timing und erwartete Teilnehmerreaktionen.</a:t>
+              <a:t>90-Tage-Plan und Selbstcheck als Transferanker.</a:t>
             </a:r>
           </a:p>
         </p:txBody>
@@ -4965,7 +4828,7 @@
                 </a:solidFill>
                 <a:latin typeface="Arial"/>
               </a:rPr>
-              <a:t>Format 1: Fachbeiträge und Impulse</a:t>
+              <a:t>Vier Formate für Sichtbarkeit</a:t>
             </a:r>
           </a:p>
         </p:txBody>
@@ -4991,6 +4854,25 @@
             <a:spAutoFit/>
           </a:bodyPr>
           <a:lstStyle/>
+          <a:p>
+            <a:pPr marL="177800" indent="-177800">
+              <a:spcBef>
+                <a:spcPts val="600"/>
+              </a:spcBef>
+              <a:spcAft>
+                <a:spcPts val="200"/>
+              </a:spcAft>
+            </a:pPr>
+            <a:r>
+              <a:rPr sz="1200" i="1">
+                <a:solidFill>
+                  <a:srgbClr val="3D5466"/>
+                </a:solidFill>
+                <a:latin typeface="Arial"/>
+              </a:rPr>
+              <a:t>→  Sichtbarkeit entsteht durch Nutzen, nicht durch Werbung – man zeigt Expertise, indem man sie teilt.</a:t>
+            </a:r>
+          </a:p>
           <a:p>
             <a:pPr marL="190500" indent="-190500">
               <a:spcBef>
@@ -5007,7 +4889,7 @@
                 </a:solidFill>
                 <a:latin typeface="Arial"/>
               </a:rPr>
-              <a:t>▸  Was: Kurze, prägnante Wissensimpulse – nicht als Werbung, sondern als echten Mehrwert für Netzwerkkontakte.</a:t>
+              <a:t>▸  Fachbeiträge und Impulse: Wissen teilen statt Produkte bewerben.</a:t>
             </a:r>
           </a:p>
           <a:p>
@@ -5026,7 +4908,7 @@
                 </a:solidFill>
                 <a:latin typeface="Arial"/>
               </a:rPr>
-              <a:t>▸  Beispiele:</a:t>
+              <a:t>▸  Empfehlungen geben, bevor man welche bekommt – Reziprozität.</a:t>
             </a:r>
           </a:p>
           <a:p>
@@ -5045,45 +4927,7 @@
                 </a:solidFill>
                 <a:latin typeface="Arial"/>
               </a:rPr>
-              <a:t>▸  Monatliche E-Mail an 5–10 Steuerberater mit einem aktuellen Branchenhinweis: „Für Ihre Mandanten in der Landwirtschaft: GAP-Änderungen ab Q3 2026 – was das für Investitionsfinanzierungen bedeutet" (Hinweis: Regelmäßige E-Mail-Kommunikation an externe Multiplikatoren ist datenschutzrechtlich und complianceseitig vorab mit der Compliance-/Datenschutzabteilung der Bank abzustimmen. Empfehlung: Kommunikation über offizielle Bank-Einladungen oder bankveranstaltete Formate läuft oft reibungsloser.)</a:t>
-            </a:r>
-          </a:p>
-          <a:p>
-            <a:pPr marL="190500" indent="-190500">
-              <a:spcBef>
-                <a:spcPts val="400"/>
-              </a:spcBef>
-              <a:spcAft>
-                <a:spcPts val="200"/>
-              </a:spcAft>
-            </a:pPr>
-            <a:r>
-              <a:rPr sz="1300">
-                <a:solidFill>
-                  <a:srgbClr val="3D5466"/>
-                </a:solidFill>
-                <a:latin typeface="Arial"/>
-              </a:rPr>
-              <a:t>▸  Kurzer Vortrag (15 Min.) bei IHK-Frühstück zu einem konkreten Finanzierungsthema</a:t>
-            </a:r>
-          </a:p>
-          <a:p>
-            <a:pPr marL="190500" indent="-190500">
-              <a:spcBef>
-                <a:spcPts val="400"/>
-              </a:spcBef>
-              <a:spcAft>
-                <a:spcPts val="200"/>
-              </a:spcAft>
-            </a:pPr>
-            <a:r>
-              <a:rPr sz="1300">
-                <a:solidFill>
-                  <a:srgbClr val="3D5466"/>
-                </a:solidFill>
-                <a:latin typeface="Arial"/>
-              </a:rPr>
-              <a:t>▸  LinkedIn-Post mit einer praxisnahen Erkenntnis aus einem anonymisierten Kundengespräch</a:t>
+              <a:t>▸  Präsenz in Gremien und Verbänden; digitale Sichtbarkeit nachrangig und selektiv.</a:t>
             </a:r>
           </a:p>
         </p:txBody>
@@ -5199,7 +5043,7 @@
             <a:avLst/>
           </a:prstGeom>
           <a:solidFill>
-            <a:srgbClr val="EDEDF3"/>
+            <a:srgbClr val="1F2C56"/>
           </a:solidFill>
           <a:ln>
             <a:noFill/>
@@ -5229,57 +5073,14 @@
       </p:sp>
       <p:sp>
         <p:nvSpPr>
-          <p:cNvPr id="3" name="Rectangle 2"/>
-          <p:cNvSpPr/>
-          <p:nvPr/>
-        </p:nvSpPr>
-        <p:spPr>
-          <a:xfrm>
-            <a:off x="0" y="0"/>
-            <a:ext cx="12188952" cy="50292"/>
-          </a:xfrm>
-          <a:prstGeom prst="rect">
-            <a:avLst/>
-          </a:prstGeom>
-          <a:solidFill>
-            <a:srgbClr val="1F2C56"/>
-          </a:solidFill>
-          <a:ln>
-            <a:noFill/>
-          </a:ln>
-        </p:spPr>
-        <p:style>
-          <a:lnRef idx="1">
-            <a:schemeClr val="accent1"/>
-          </a:lnRef>
-          <a:fillRef idx="3">
-            <a:schemeClr val="accent1"/>
-          </a:fillRef>
-          <a:effectRef idx="2">
-            <a:schemeClr val="accent1"/>
-          </a:effectRef>
-          <a:fontRef idx="minor">
-            <a:schemeClr val="lt1"/>
-          </a:fontRef>
-        </p:style>
-        <p:txBody>
-          <a:bodyPr rtlCol="0" anchor="ctr"/>
-          <a:lstStyle/>
-          <a:p>
-            <a:pPr algn="ctr"/>
-          </a:p>
-        </p:txBody>
-      </p:sp>
-      <p:sp>
-        <p:nvSpPr>
-          <p:cNvPr id="4" name="TextBox 3"/>
+          <p:cNvPr id="3" name="TextBox 2"/>
           <p:cNvSpPr txBox="1"/>
           <p:nvPr/>
         </p:nvSpPr>
         <p:spPr>
           <a:xfrm>
-            <a:off x="685800" y="109728"/>
-            <a:ext cx="10817352" cy="228600"/>
+            <a:off x="685800" y="2377440"/>
+            <a:ext cx="10817352" cy="365760"/>
           </a:xfrm>
           <a:prstGeom prst="rect">
             <a:avLst/>
@@ -5294,70 +5095,27 @@
           <a:p>
             <a:pPr algn="l"/>
             <a:r>
-              <a:rPr sz="750">
-                <a:solidFill>
-                  <a:srgbClr val="78808C"/>
+              <a:rPr sz="1200">
+                <a:solidFill>
+                  <a:srgbClr val="D9C089"/>
                 </a:solidFill>
                 <a:latin typeface="Consolas"/>
               </a:rPr>
-              <a:t>M20  ·  INHALT</a:t>
-            </a:r>
-          </a:p>
-        </p:txBody>
-      </p:sp>
-      <p:sp>
-        <p:nvSpPr>
-          <p:cNvPr id="5" name="Rectangle 4"/>
+              <a:t>FALLARBEIT</a:t>
+            </a:r>
+          </a:p>
+        </p:txBody>
+      </p:sp>
+      <p:sp>
+        <p:nvSpPr>
+          <p:cNvPr id="4" name="Rectangle 3"/>
           <p:cNvSpPr/>
           <p:nvPr/>
         </p:nvSpPr>
         <p:spPr>
           <a:xfrm>
-            <a:off x="0" y="1234440"/>
-            <a:ext cx="12188952" cy="12700"/>
-          </a:xfrm>
-          <a:prstGeom prst="rect">
-            <a:avLst/>
-          </a:prstGeom>
-          <a:solidFill>
-            <a:srgbClr val="D8DFE4"/>
-          </a:solidFill>
-          <a:ln>
-            <a:noFill/>
-          </a:ln>
-        </p:spPr>
-        <p:style>
-          <a:lnRef idx="1">
-            <a:schemeClr val="accent1"/>
-          </a:lnRef>
-          <a:fillRef idx="3">
-            <a:schemeClr val="accent1"/>
-          </a:fillRef>
-          <a:effectRef idx="2">
-            <a:schemeClr val="accent1"/>
-          </a:effectRef>
-          <a:fontRef idx="minor">
-            <a:schemeClr val="lt1"/>
-          </a:fontRef>
-        </p:style>
-        <p:txBody>
-          <a:bodyPr rtlCol="0" anchor="ctr"/>
-          <a:lstStyle/>
-          <a:p>
-            <a:pPr algn="ctr"/>
-          </a:p>
-        </p:txBody>
-      </p:sp>
-      <p:sp>
-        <p:nvSpPr>
-          <p:cNvPr id="6" name="Rectangle 5"/>
-          <p:cNvSpPr/>
-          <p:nvPr/>
-        </p:nvSpPr>
-        <p:spPr>
-          <a:xfrm>
-            <a:off x="685800" y="502920"/>
-            <a:ext cx="36576" cy="658368"/>
+            <a:off x="685800" y="2788920"/>
+            <a:ext cx="548640" cy="38100"/>
           </a:xfrm>
           <a:prstGeom prst="rect">
             <a:avLst/>
@@ -5393,14 +5151,14 @@
       </p:sp>
       <p:sp>
         <p:nvSpPr>
-          <p:cNvPr id="7" name="TextBox 6"/>
+          <p:cNvPr id="5" name="TextBox 4"/>
           <p:cNvSpPr txBox="1"/>
           <p:nvPr/>
         </p:nvSpPr>
         <p:spPr>
           <a:xfrm>
-            <a:off x="813816" y="502920"/>
-            <a:ext cx="10634472" cy="685800"/>
+            <a:off x="685800" y="3017520"/>
+            <a:ext cx="10817352" cy="1463040"/>
           </a:xfrm>
           <a:prstGeom prst="rect">
             <a:avLst/>
@@ -5415,27 +5173,27 @@
           <a:p>
             <a:pPr algn="l"/>
             <a:r>
-              <a:rPr sz="2400" b="1" i="0">
-                <a:solidFill>
-                  <a:srgbClr val="1F2C56"/>
+              <a:rPr sz="4000" b="1" i="0">
+                <a:solidFill>
+                  <a:srgbClr val="FFFFFF"/>
                 </a:solidFill>
                 <a:latin typeface="Arial"/>
               </a:rPr>
-              <a:t>Format 2: Empfehlungen geben, bevor man welche bekommt</a:t>
-            </a:r>
-          </a:p>
-        </p:txBody>
-      </p:sp>
-      <p:sp>
-        <p:nvSpPr>
-          <p:cNvPr id="8" name="TextBox 7"/>
+              <a:t>Praxiscase &amp; 90-Tage-Plan</a:t>
+            </a:r>
+          </a:p>
+        </p:txBody>
+      </p:sp>
+      <p:sp>
+        <p:nvSpPr>
+          <p:cNvPr id="6" name="TextBox 5"/>
           <p:cNvSpPr txBox="1"/>
           <p:nvPr/>
         </p:nvSpPr>
         <p:spPr>
           <a:xfrm>
-            <a:off x="685800" y="1417320"/>
-            <a:ext cx="10817352" cy="4892040"/>
+            <a:off x="685800" y="4480560"/>
+            <a:ext cx="8653881" cy="1280160"/>
           </a:xfrm>
           <a:prstGeom prst="rect">
             <a:avLst/>
@@ -5443,84 +5201,34 @@
           <a:noFill/>
         </p:spPr>
         <p:txBody>
-          <a:bodyPr wrap="square" anchor="ctr">
+          <a:bodyPr wrap="square">
             <a:spAutoFit/>
           </a:bodyPr>
           <a:lstStyle/>
           <a:p>
-            <a:pPr marL="190500" indent="-190500">
-              <a:spcBef>
-                <a:spcPts val="400"/>
-              </a:spcBef>
-              <a:spcAft>
-                <a:spcPts val="200"/>
-              </a:spcAft>
-            </a:pPr>
-            <a:r>
-              <a:rPr sz="1300">
-                <a:solidFill>
-                  <a:srgbClr val="3D5466"/>
+            <a:pPr algn="l"/>
+            <a:r>
+              <a:rPr sz="1600" b="0" i="0">
+                <a:solidFill>
+                  <a:srgbClr val="C8D2E6"/>
                 </a:solidFill>
                 <a:latin typeface="Arial"/>
               </a:rPr>
-              <a:t>▸  Praxisregel: „Ein guter Netzwerkpartner merkt, dass er zu mir gehört, bevor er das erste Mal mit mir gearbeitet hat."</a:t>
-            </a:r>
-          </a:p>
-        </p:txBody>
-      </p:sp>
-      <p:sp>
-        <p:nvSpPr>
-          <p:cNvPr id="9" name="Rectangle 8"/>
-          <p:cNvSpPr/>
-          <p:nvPr/>
-        </p:nvSpPr>
-        <p:spPr>
-          <a:xfrm>
-            <a:off x="0" y="6510528"/>
-            <a:ext cx="12188952" cy="347472"/>
-          </a:xfrm>
-          <a:prstGeom prst="rect">
-            <a:avLst/>
-          </a:prstGeom>
-          <a:solidFill>
-            <a:srgbClr val="0A1937"/>
-          </a:solidFill>
-          <a:ln>
-            <a:noFill/>
-          </a:ln>
-        </p:spPr>
-        <p:style>
-          <a:lnRef idx="1">
-            <a:schemeClr val="accent1"/>
-          </a:lnRef>
-          <a:fillRef idx="3">
-            <a:schemeClr val="accent1"/>
-          </a:fillRef>
-          <a:effectRef idx="2">
-            <a:schemeClr val="accent1"/>
-          </a:effectRef>
-          <a:fontRef idx="minor">
-            <a:schemeClr val="lt1"/>
-          </a:fontRef>
-        </p:style>
-        <p:txBody>
-          <a:bodyPr rtlCol="0" anchor="ctr"/>
-          <a:lstStyle/>
-          <a:p>
-            <a:pPr algn="ctr"/>
-          </a:p>
-        </p:txBody>
-      </p:sp>
-      <p:sp>
-        <p:nvSpPr>
-          <p:cNvPr id="10" name="TextBox 9"/>
+              <a:t>Vom Geheimtipp zur Autorität – einen konkreten Netzwerkplan bauen.</a:t>
+            </a:r>
+          </a:p>
+        </p:txBody>
+      </p:sp>
+      <p:sp>
+        <p:nvSpPr>
+          <p:cNvPr id="7" name="TextBox 6"/>
           <p:cNvSpPr txBox="1"/>
           <p:nvPr/>
         </p:nvSpPr>
         <p:spPr>
           <a:xfrm>
-            <a:off x="685800" y="6583680"/>
-            <a:ext cx="6490411" cy="256032"/>
+            <a:off x="685800" y="6355080"/>
+            <a:ext cx="10817352" cy="274320"/>
           </a:xfrm>
           <a:prstGeom prst="rect">
             <a:avLst/>
@@ -5537,7 +5245,7 @@
             <a:r>
               <a:rPr sz="700">
                 <a:solidFill>
-                  <a:srgbClr val="A0B4D2"/>
+                  <a:srgbClr val="8CA0C3"/>
                 </a:solidFill>
                 <a:latin typeface="Consolas"/>
               </a:rPr>
@@ -5680,7 +5388,7 @@
                 </a:solidFill>
                 <a:latin typeface="Consolas"/>
               </a:rPr>
-              <a:t>M20  ·  INHALT</a:t>
+              <a:t>M20  ·  ARBEITSBLATT</a:t>
             </a:r>
           </a:p>
         </p:txBody>
@@ -5801,7 +5509,7 @@
                 </a:solidFill>
                 <a:latin typeface="Arial"/>
               </a:rPr>
-              <a:t>Format 3: Präsenz in Gremien und Verbänden</a:t>
+              <a:t>Netzwerkkarte und 90-Tage-Plan erstellen</a:t>
             </a:r>
           </a:p>
         </p:txBody>
@@ -5814,8 +5522,8 @@
         </p:nvSpPr>
         <p:spPr>
           <a:xfrm>
-            <a:off x="685800" y="1417320"/>
-            <a:ext cx="10817352" cy="4892040"/>
+            <a:off x="685800" y="1554480"/>
+            <a:ext cx="10817352" cy="3840480"/>
           </a:xfrm>
           <a:prstGeom prst="rect">
             <a:avLst/>
@@ -5823,7 +5531,7 @@
           <a:noFill/>
         </p:spPr>
         <p:txBody>
-          <a:bodyPr wrap="square" anchor="ctr">
+          <a:bodyPr wrap="square">
             <a:spAutoFit/>
           </a:bodyPr>
           <a:lstStyle/>
@@ -5837,13 +5545,13 @@
               </a:spcAft>
             </a:pPr>
             <a:r>
-              <a:rPr sz="1300">
+              <a:rPr sz="1400">
                 <a:solidFill>
                   <a:srgbClr val="3D5466"/>
                 </a:solidFill>
                 <a:latin typeface="Arial"/>
               </a:rPr>
-              <a:t>▸  Strategisch wählen: Nicht jede Mitgliedschaft lohnt sich. Kriterien:</a:t>
+              <a:t>▸  Erstellen Sie Ihre persönliche Netzwerkkarte über die drei Dimensionen (AB-1).</a:t>
             </a:r>
           </a:p>
           <a:p>
@@ -5856,13 +5564,13 @@
               </a:spcAft>
             </a:pPr>
             <a:r>
-              <a:rPr sz="1300">
+              <a:rPr sz="1400">
                 <a:solidFill>
                   <a:srgbClr val="3D5466"/>
                 </a:solidFill>
                 <a:latin typeface="Arial"/>
               </a:rPr>
-              <a:t>▸  Sind meine Zielkunden oder ihre Berater dort aktiv?</a:t>
+              <a:t>▸  Führen Sie das Netzwerk-Audit durch und identifizieren Sie die fehlenden Brücken.</a:t>
             </a:r>
           </a:p>
           <a:p>
@@ -5875,58 +5583,98 @@
               </a:spcAft>
             </a:pPr>
             <a:r>
-              <a:rPr sz="1300">
+              <a:rPr sz="1400">
                 <a:solidFill>
                   <a:srgbClr val="3D5466"/>
                 </a:solidFill>
                 <a:latin typeface="Arial"/>
               </a:rPr>
-              <a:t>▸  Gibt es eine Möglichkeit, sich inhaltlich einzubringen (Vortrag, Arbeitskreis)?</a:t>
-            </a:r>
-          </a:p>
-          <a:p>
-            <a:pPr marL="190500" indent="-190500">
-              <a:spcBef>
-                <a:spcPts val="400"/>
-              </a:spcBef>
-              <a:spcAft>
-                <a:spcPts val="200"/>
-              </a:spcAft>
-            </a:pPr>
-            <a:r>
-              <a:rPr sz="1300">
-                <a:solidFill>
-                  <a:srgbClr val="3D5466"/>
+              <a:t>▸  Entwickeln Sie Ihren 90-Tage-Aktionsplan mit konkreten Schritten (AB-3).</a:t>
+            </a:r>
+          </a:p>
+        </p:txBody>
+      </p:sp>
+      <p:sp>
+        <p:nvSpPr>
+          <p:cNvPr id="9" name="Rectangle 8"/>
+          <p:cNvSpPr/>
+          <p:nvPr/>
+        </p:nvSpPr>
+        <p:spPr>
+          <a:xfrm>
+            <a:off x="685800" y="5486400"/>
+            <a:ext cx="10817352" cy="640080"/>
+          </a:xfrm>
+          <a:prstGeom prst="rect">
+            <a:avLst/>
+          </a:prstGeom>
+          <a:solidFill>
+            <a:srgbClr val="1F2C56"/>
+          </a:solidFill>
+          <a:ln>
+            <a:noFill/>
+          </a:ln>
+        </p:spPr>
+        <p:style>
+          <a:lnRef idx="1">
+            <a:schemeClr val="accent1"/>
+          </a:lnRef>
+          <a:fillRef idx="3">
+            <a:schemeClr val="accent1"/>
+          </a:fillRef>
+          <a:effectRef idx="2">
+            <a:schemeClr val="accent1"/>
+          </a:effectRef>
+          <a:fontRef idx="minor">
+            <a:schemeClr val="lt1"/>
+          </a:fontRef>
+        </p:style>
+        <p:txBody>
+          <a:bodyPr rtlCol="0" anchor="ctr"/>
+          <a:lstStyle/>
+          <a:p>
+            <a:pPr algn="ctr"/>
+          </a:p>
+        </p:txBody>
+      </p:sp>
+      <p:sp>
+        <p:nvSpPr>
+          <p:cNvPr id="10" name="TextBox 9"/>
+          <p:cNvSpPr txBox="1"/>
+          <p:nvPr/>
+        </p:nvSpPr>
+        <p:spPr>
+          <a:xfrm>
+            <a:off x="868680" y="5596128"/>
+            <a:ext cx="10451592" cy="457200"/>
+          </a:xfrm>
+          <a:prstGeom prst="rect">
+            <a:avLst/>
+          </a:prstGeom>
+          <a:noFill/>
+        </p:spPr>
+        <p:txBody>
+          <a:bodyPr wrap="square">
+            <a:spAutoFit/>
+          </a:bodyPr>
+          <a:lstStyle/>
+          <a:p>
+            <a:pPr algn="l"/>
+            <a:r>
+              <a:rPr sz="1300" b="1" i="0">
+                <a:solidFill>
+                  <a:srgbClr val="FFFFFF"/>
                 </a:solidFill>
                 <a:latin typeface="Arial"/>
               </a:rPr>
-              <a:t>▸  Lässt sich die Zeitinvestition rechtfertigen (qualitativ hochwertige Kontakte)?</a:t>
-            </a:r>
-          </a:p>
-          <a:p>
-            <a:pPr marL="190500" indent="-190500">
-              <a:spcBef>
-                <a:spcPts val="400"/>
-              </a:spcBef>
-              <a:spcAft>
-                <a:spcPts val="200"/>
-              </a:spcAft>
-            </a:pPr>
-            <a:r>
-              <a:rPr sz="1300">
-                <a:solidFill>
-                  <a:srgbClr val="3D5466"/>
-                </a:solidFill>
-                <a:latin typeface="Arial"/>
-              </a:rPr>
-              <a:t>▸  Empfehlungen für FK-Berater in Süddeutschland – bewährteste Formate nach Zeitaufwand und Netzwerkqualität:</a:t>
-            </a:r>
-          </a:p>
-        </p:txBody>
-      </p:sp>
-      <p:sp>
-        <p:nvSpPr>
-          <p:cNvPr id="9" name="Rectangle 8"/>
+              <a:t>→  Bearbeitung im Teilnehmer-Workbook (Arbeitsblatt mit Ausfüllfeldern)</a:t>
+            </a:r>
+          </a:p>
+        </p:txBody>
+      </p:sp>
+      <p:sp>
+        <p:nvSpPr>
+          <p:cNvPr id="11" name="Rectangle 10"/>
           <p:cNvSpPr/>
           <p:nvPr/>
         </p:nvSpPr>
@@ -5969,7 +5717,7 @@
       </p:sp>
       <p:sp>
         <p:nvSpPr>
-          <p:cNvPr id="10" name="TextBox 9"/>
+          <p:cNvPr id="12" name="TextBox 11"/>
           <p:cNvSpPr txBox="1"/>
           <p:nvPr/>
         </p:nvSpPr>
@@ -6257,7 +6005,7 @@
                 </a:solidFill>
                 <a:latin typeface="Arial"/>
               </a:rPr>
-              <a:t>Format 4: Digitale Sichtbarkeit (nachrangig, selektiv)</a:t>
+              <a:t>Prinzip dieses Moduls</a:t>
             </a:r>
           </a:p>
         </p:txBody>
@@ -6279,10 +6027,29 @@
           <a:noFill/>
         </p:spPr>
         <p:txBody>
-          <a:bodyPr wrap="square">
+          <a:bodyPr wrap="square" anchor="ctr">
             <a:spAutoFit/>
           </a:bodyPr>
           <a:lstStyle/>
+          <a:p>
+            <a:pPr marL="177800" indent="-177800">
+              <a:spcBef>
+                <a:spcPts val="600"/>
+              </a:spcBef>
+              <a:spcAft>
+                <a:spcPts val="200"/>
+              </a:spcAft>
+            </a:pPr>
+            <a:r>
+              <a:rPr sz="1200" i="1">
+                <a:solidFill>
+                  <a:srgbClr val="3D5466"/>
+                </a:solidFill>
+                <a:latin typeface="Arial"/>
+              </a:rPr>
+              <a:t>→  Beziehungen baut man, bevor man sie braucht.</a:t>
+            </a:r>
+          </a:p>
           <a:p>
             <a:pPr marL="190500" indent="-190500">
               <a:spcBef>
@@ -6299,216 +6066,7 @@
                 </a:solidFill>
                 <a:latin typeface="Arial"/>
               </a:rPr>
-              <a:t>▸  ## 4.5 Der 90-Tage-Netzwerkplan</a:t>
-            </a:r>
-          </a:p>
-          <a:p>
-            <a:pPr marL="190500" indent="-190500">
-              <a:spcBef>
-                <a:spcPts val="400"/>
-              </a:spcBef>
-              <a:spcAft>
-                <a:spcPts val="200"/>
-              </a:spcAft>
-            </a:pPr>
-            <a:r>
-              <a:rPr sz="1300">
-                <a:solidFill>
-                  <a:srgbClr val="3D5466"/>
-                </a:solidFill>
-                <a:latin typeface="Arial"/>
-              </a:rPr>
-              <a:t>▸  Ein Netzwerk entsteht nicht durch einmalige Aktionen. Es braucht ein System – klein, aber regelmäßig.</a:t>
-            </a:r>
-          </a:p>
-          <a:p>
-            <a:pPr marL="190500" indent="-190500">
-              <a:spcBef>
-                <a:spcPts val="400"/>
-              </a:spcBef>
-              <a:spcAft>
-                <a:spcPts val="200"/>
-              </a:spcAft>
-            </a:pPr>
-            <a:r>
-              <a:rPr sz="1300">
-                <a:solidFill>
-                  <a:srgbClr val="3D5466"/>
-                </a:solidFill>
-                <a:latin typeface="Arial"/>
-              </a:rPr>
-              <a:t>▸  ## 4.6 Praxiscase: Stefan Köhler – vom Geheimtipp zur Autorität</a:t>
-            </a:r>
-          </a:p>
-          <a:p>
-            <a:pPr marL="190500" indent="-190500">
-              <a:spcBef>
-                <a:spcPts val="400"/>
-              </a:spcBef>
-              <a:spcAft>
-                <a:spcPts val="200"/>
-              </a:spcAft>
-            </a:pPr>
-            <a:r>
-              <a:rPr sz="1300">
-                <a:solidFill>
-                  <a:srgbClr val="3D5466"/>
-                </a:solidFill>
-                <a:latin typeface="Arial"/>
-              </a:rPr>
-              <a:t>▸  Ausgangssituation</a:t>
-            </a:r>
-          </a:p>
-          <a:p>
-            <a:pPr marL="190500" indent="-190500">
-              <a:spcBef>
-                <a:spcPts val="400"/>
-              </a:spcBef>
-              <a:spcAft>
-                <a:spcPts val="200"/>
-              </a:spcAft>
-            </a:pPr>
-            <a:r>
-              <a:rPr sz="1300">
-                <a:solidFill>
-                  <a:srgbClr val="3D5466"/>
-                </a:solidFill>
-                <a:latin typeface="Arial"/>
-              </a:rPr>
-              <a:t>▸  Stefan arbeitet hart, berät gut – aber er ist unsichtbar.</a:t>
-            </a:r>
-          </a:p>
-          <a:p>
-            <a:pPr marL="190500" indent="-190500">
-              <a:spcBef>
-                <a:spcPts val="400"/>
-              </a:spcBef>
-              <a:spcAft>
-                <a:spcPts val="200"/>
-              </a:spcAft>
-            </a:pPr>
-            <a:r>
-              <a:rPr sz="1300">
-                <a:solidFill>
-                  <a:srgbClr val="3D5466"/>
-                </a:solidFill>
-                <a:latin typeface="Arial"/>
-              </a:rPr>
-              <a:t>▸  Was Stefan verändert (in 90 Tagen)</a:t>
-            </a:r>
-          </a:p>
-          <a:p>
-            <a:pPr marL="190500" indent="-190500">
-              <a:spcBef>
-                <a:spcPts val="400"/>
-              </a:spcBef>
-              <a:spcAft>
-                <a:spcPts val="200"/>
-              </a:spcAft>
-            </a:pPr>
-            <a:r>
-              <a:rPr sz="1300">
-                <a:solidFill>
-                  <a:srgbClr val="3D5466"/>
-                </a:solidFill>
-                <a:latin typeface="Arial"/>
-              </a:rPr>
-              <a:t>▸  Monat 1 – Analyse &amp; Positionierung:</a:t>
-            </a:r>
-          </a:p>
-          <a:p>
-            <a:pPr marL="190500" indent="-190500">
-              <a:spcBef>
-                <a:spcPts val="400"/>
-              </a:spcBef>
-              <a:spcAft>
-                <a:spcPts val="200"/>
-              </a:spcAft>
-            </a:pPr>
-            <a:r>
-              <a:rPr sz="1300">
-                <a:solidFill>
-                  <a:srgbClr val="3D5466"/>
-                </a:solidFill>
-                <a:latin typeface="Arial"/>
-              </a:rPr>
-              <a:t>▸  Stefan erstellt seine persönliche Netzwerkkarte. Ergebnis: Intern gut vernetzt, intern überbekannt. Extern: kaum Kontakte außerhalb seiner eigenen Kunden.</a:t>
-            </a:r>
-          </a:p>
-          <a:p>
-            <a:pPr marL="190500" indent="-190500">
-              <a:spcBef>
-                <a:spcPts val="400"/>
-              </a:spcBef>
-              <a:spcAft>
-                <a:spcPts val="200"/>
-              </a:spcAft>
-            </a:pPr>
-            <a:r>
-              <a:rPr sz="1300">
-                <a:solidFill>
-                  <a:srgbClr val="3D5466"/>
-                </a:solidFill>
-                <a:latin typeface="Arial"/>
-              </a:rPr>
-              <a:t>▸  Er identifiziert drei Multiplikatoren, die für sein Zielfeld entscheidend sind: (1) der größte Steuerberater für Landwirte in der Region, (2) der Geschäftsführer des regionalen Maschinenrings, (3) der BBV-Kreisverband.</a:t>
-            </a:r>
-          </a:p>
-          <a:p>
-            <a:pPr marL="190500" indent="-190500">
-              <a:spcBef>
-                <a:spcPts val="400"/>
-              </a:spcBef>
-              <a:spcAft>
-                <a:spcPts val="200"/>
-              </a:spcAft>
-            </a:pPr>
-            <a:r>
-              <a:rPr sz="1300">
-                <a:solidFill>
-                  <a:srgbClr val="3D5466"/>
-                </a:solidFill>
-                <a:latin typeface="Arial"/>
-              </a:rPr>
-              <a:t>▸  Er formuliert sein Positionierungsversprechen: „Ich bin der Ansprechpartner für Agrar- und Forstbetriebe ab 200 ha im Allgäu, wenn es um Investitionsfinanzierung, Betriebsumstrukturierung und Nachfolge geht."</a:t>
-            </a:r>
-          </a:p>
-          <a:p>
-            <a:pPr marL="190500" indent="-190500">
-              <a:spcBef>
-                <a:spcPts val="400"/>
-              </a:spcBef>
-              <a:spcAft>
-                <a:spcPts val="200"/>
-              </a:spcAft>
-            </a:pPr>
-            <a:r>
-              <a:rPr sz="1300">
-                <a:solidFill>
-                  <a:srgbClr val="3D5466"/>
-                </a:solidFill>
-                <a:latin typeface="Arial"/>
-              </a:rPr>
-              <a:t>▸  Monat 2 – Erste Kontakte:</a:t>
-            </a:r>
-          </a:p>
-          <a:p>
-            <a:pPr marL="190500" indent="-190500">
-              <a:spcBef>
-                <a:spcPts val="400"/>
-              </a:spcBef>
-              <a:spcAft>
-                <a:spcPts val="200"/>
-              </a:spcAft>
-            </a:pPr>
-            <a:r>
-              <a:rPr sz="1300">
-                <a:solidFill>
-                  <a:srgbClr val="3D5466"/>
-                </a:solidFill>
-                <a:latin typeface="Arial"/>
-              </a:rPr>
-              <a:t>▸  Stefan ruft den Steuerberater an – nicht mit einem Verkaufsangebot, sondern mit einer konkreten Einladung: „Ich würde Ihnen gerne zeigen, wie wir bei Biogasinvestitionen vorgehen – vielleicht ist das für Ihre Mandanten relevant." Er bezieht sich dabei auf eine jüngste GAP-Meldung im Bayerischen Landwirtschaftlichen Wochenblatt als sachlichen Aufhänger. Der Steuerberater ist anfangs reserviert – Bankberater haben keinen guten Ruf bei Steuerberatern, die Direktvertrieb fürchten. Stefan macht deshalb keinen Produktbezug, sondern bietet ein fachliches Kurzgespräch über Fördermittel an, das dem Steuerberater selbst gegenüber seinen Mandanten nützt. → Treffen findet statt. Wäre möglich: Vorab-Kontakt über das BBV-Netzwerk oder ein gemeinsames IHK-Event hätte diesen Anruf noch einfacher gemacht.</a:t>
+              <a:t>▸  Ein Netzwerk aus Brücken (nicht nur Kontakten) und gezielte Sichtbarkeit bringen Anfragen, bevor der Wettbewerb sie sieht.</a:t>
             </a:r>
           </a:p>
         </p:txBody>
@@ -6846,7 +6404,7 @@
                 </a:solidFill>
                 <a:latin typeface="Arial"/>
               </a:rPr>
-              <a:t>AB-1: Persönliche Netzwerkkarte</a:t>
+              <a:t>Reflexion und Selbstcheck</a:t>
             </a:r>
           </a:p>
         </p:txBody>
@@ -6888,7 +6446,45 @@
                 </a:solidFill>
                 <a:latin typeface="Arial"/>
               </a:rPr>
-              <a:t>▸  (Zeichnen oder tabellarisch ausfüllen)</a:t>
+              <a:t>▸  Welche der drei Netzwerkdimensionen ist bei Ihnen am schwächsten?</a:t>
+            </a:r>
+          </a:p>
+          <a:p>
+            <a:pPr marL="190500" indent="-190500">
+              <a:spcBef>
+                <a:spcPts val="400"/>
+              </a:spcBef>
+              <a:spcAft>
+                <a:spcPts val="200"/>
+              </a:spcAft>
+            </a:pPr>
+            <a:r>
+              <a:rPr sz="1300">
+                <a:solidFill>
+                  <a:srgbClr val="3D5466"/>
+                </a:solidFill>
+                <a:latin typeface="Arial"/>
+              </a:rPr>
+              <a:t>▸  Wem könnten Sie diese Woche eine Empfehlung geben, ohne eine Gegenleistung zu erwarten?</a:t>
+            </a:r>
+          </a:p>
+          <a:p>
+            <a:pPr marL="190500" indent="-190500">
+              <a:spcBef>
+                <a:spcPts val="400"/>
+              </a:spcBef>
+              <a:spcAft>
+                <a:spcPts val="200"/>
+              </a:spcAft>
+            </a:pPr>
+            <a:r>
+              <a:rPr sz="1300">
+                <a:solidFill>
+                  <a:srgbClr val="3D5466"/>
+                </a:solidFill>
+                <a:latin typeface="Arial"/>
+              </a:rPr>
+              <a:t>▸  Welche eine Brücke bauen Sie in den nächsten 90 Tagen zuerst?</a:t>
             </a:r>
           </a:p>
         </p:txBody>
@@ -6967,1572 +6563,6 @@
                 <a:latin typeface="Consolas"/>
               </a:rPr>
               <a:t>FKB Campus  ·  M20</a:t>
-            </a:r>
-          </a:p>
-        </p:txBody>
-      </p:sp>
-    </p:spTree>
-  </p:cSld>
-  <p:clrMapOvr>
-    <a:masterClrMapping/>
-  </p:clrMapOvr>
-</p:sld>
-</file>
-
-<file path=ppt/slides/slide15.xml><?xml version="1.0" encoding="utf-8"?>
-<p:sld xmlns:a="http://schemas.openxmlformats.org/drawingml/2006/main" xmlns:p="http://schemas.openxmlformats.org/presentationml/2006/main" xmlns:r="http://schemas.openxmlformats.org/officeDocument/2006/relationships">
-  <p:cSld>
-    <p:spTree>
-      <p:nvGrpSpPr>
-        <p:cNvPr id="1" name=""/>
-        <p:cNvGrpSpPr/>
-        <p:nvPr/>
-      </p:nvGrpSpPr>
-      <p:grpSpPr/>
-      <p:sp>
-        <p:nvSpPr>
-          <p:cNvPr id="2" name="Rectangle 1"/>
-          <p:cNvSpPr/>
-          <p:nvPr/>
-        </p:nvSpPr>
-        <p:spPr>
-          <a:xfrm>
-            <a:off x="0" y="0"/>
-            <a:ext cx="12188952" cy="6858000"/>
-          </a:xfrm>
-          <a:prstGeom prst="rect">
-            <a:avLst/>
-          </a:prstGeom>
-          <a:solidFill>
-            <a:srgbClr val="FFFFFF"/>
-          </a:solidFill>
-          <a:ln>
-            <a:noFill/>
-          </a:ln>
-        </p:spPr>
-        <p:style>
-          <a:lnRef idx="1">
-            <a:schemeClr val="accent1"/>
-          </a:lnRef>
-          <a:fillRef idx="3">
-            <a:schemeClr val="accent1"/>
-          </a:fillRef>
-          <a:effectRef idx="2">
-            <a:schemeClr val="accent1"/>
-          </a:effectRef>
-          <a:fontRef idx="minor">
-            <a:schemeClr val="lt1"/>
-          </a:fontRef>
-        </p:style>
-        <p:txBody>
-          <a:bodyPr rtlCol="0" anchor="ctr"/>
-          <a:lstStyle/>
-          <a:p>
-            <a:pPr algn="ctr"/>
-          </a:p>
-        </p:txBody>
-      </p:sp>
-      <p:sp>
-        <p:nvSpPr>
-          <p:cNvPr id="3" name="Rectangle 2"/>
-          <p:cNvSpPr/>
-          <p:nvPr/>
-        </p:nvSpPr>
-        <p:spPr>
-          <a:xfrm>
-            <a:off x="0" y="0"/>
-            <a:ext cx="12188952" cy="50292"/>
-          </a:xfrm>
-          <a:prstGeom prst="rect">
-            <a:avLst/>
-          </a:prstGeom>
-          <a:solidFill>
-            <a:srgbClr val="1F2C56"/>
-          </a:solidFill>
-          <a:ln>
-            <a:noFill/>
-          </a:ln>
-        </p:spPr>
-        <p:style>
-          <a:lnRef idx="1">
-            <a:schemeClr val="accent1"/>
-          </a:lnRef>
-          <a:fillRef idx="3">
-            <a:schemeClr val="accent1"/>
-          </a:fillRef>
-          <a:effectRef idx="2">
-            <a:schemeClr val="accent1"/>
-          </a:effectRef>
-          <a:fontRef idx="minor">
-            <a:schemeClr val="lt1"/>
-          </a:fontRef>
-        </p:style>
-        <p:txBody>
-          <a:bodyPr rtlCol="0" anchor="ctr"/>
-          <a:lstStyle/>
-          <a:p>
-            <a:pPr algn="ctr"/>
-          </a:p>
-        </p:txBody>
-      </p:sp>
-      <p:sp>
-        <p:nvSpPr>
-          <p:cNvPr id="4" name="TextBox 3"/>
-          <p:cNvSpPr txBox="1"/>
-          <p:nvPr/>
-        </p:nvSpPr>
-        <p:spPr>
-          <a:xfrm>
-            <a:off x="685800" y="109728"/>
-            <a:ext cx="10817352" cy="228600"/>
-          </a:xfrm>
-          <a:prstGeom prst="rect">
-            <a:avLst/>
-          </a:prstGeom>
-          <a:noFill/>
-        </p:spPr>
-        <p:txBody>
-          <a:bodyPr wrap="none">
-            <a:spAutoFit/>
-          </a:bodyPr>
-          <a:lstStyle/>
-          <a:p>
-            <a:pPr algn="l"/>
-            <a:r>
-              <a:rPr sz="750">
-                <a:solidFill>
-                  <a:srgbClr val="78808C"/>
-                </a:solidFill>
-                <a:latin typeface="Consolas"/>
-              </a:rPr>
-              <a:t>M20  ·  ÜBERSICHT</a:t>
-            </a:r>
-          </a:p>
-        </p:txBody>
-      </p:sp>
-      <p:sp>
-        <p:nvSpPr>
-          <p:cNvPr id="5" name="TextBox 4"/>
-          <p:cNvSpPr txBox="1"/>
-          <p:nvPr/>
-        </p:nvSpPr>
-        <p:spPr>
-          <a:xfrm>
-            <a:off x="685800" y="502920"/>
-            <a:ext cx="10817352" cy="594360"/>
-          </a:xfrm>
-          <a:prstGeom prst="rect">
-            <a:avLst/>
-          </a:prstGeom>
-          <a:noFill/>
-        </p:spPr>
-        <p:txBody>
-          <a:bodyPr wrap="square">
-            <a:spAutoFit/>
-          </a:bodyPr>
-          <a:lstStyle/>
-          <a:p>
-            <a:pPr algn="l"/>
-            <a:r>
-              <a:rPr sz="2000" b="1" i="0">
-                <a:solidFill>
-                  <a:srgbClr val="1F2C56"/>
-                </a:solidFill>
-                <a:latin typeface="Arial"/>
-              </a:rPr>
-              <a:t>AB-1: Persönliche Netzwerkkarte</a:t>
-            </a:r>
-          </a:p>
-        </p:txBody>
-      </p:sp>
-      <p:sp>
-        <p:nvSpPr>
-          <p:cNvPr id="6" name="Rectangle 5"/>
-          <p:cNvSpPr/>
-          <p:nvPr/>
-        </p:nvSpPr>
-        <p:spPr>
-          <a:xfrm>
-            <a:off x="685800" y="1143000"/>
-            <a:ext cx="10817352" cy="25400"/>
-          </a:xfrm>
-          <a:prstGeom prst="rect">
-            <a:avLst/>
-          </a:prstGeom>
-          <a:solidFill>
-            <a:srgbClr val="D9C089"/>
-          </a:solidFill>
-          <a:ln>
-            <a:noFill/>
-          </a:ln>
-        </p:spPr>
-        <p:style>
-          <a:lnRef idx="1">
-            <a:schemeClr val="accent1"/>
-          </a:lnRef>
-          <a:fillRef idx="3">
-            <a:schemeClr val="accent1"/>
-          </a:fillRef>
-          <a:effectRef idx="2">
-            <a:schemeClr val="accent1"/>
-          </a:effectRef>
-          <a:fontRef idx="minor">
-            <a:schemeClr val="lt1"/>
-          </a:fontRef>
-        </p:style>
-        <p:txBody>
-          <a:bodyPr rtlCol="0" anchor="ctr"/>
-          <a:lstStyle/>
-          <a:p>
-            <a:pPr algn="ctr"/>
-          </a:p>
-        </p:txBody>
-      </p:sp>
-      <p:graphicFrame>
-        <p:nvGraphicFramePr>
-          <p:cNvPr id="7" name="Table 6"/>
-          <p:cNvGraphicFramePr>
-            <a:graphicFrameLocks noGrp="1"/>
-          </p:cNvGraphicFramePr>
-          <p:nvPr/>
-        </p:nvGraphicFramePr>
-        <p:xfrm>
-          <a:off x="685800" y="1417320"/>
-          <a:ext cx="10817352" cy="3456432"/>
-        </p:xfrm>
-        <a:graphic>
-          <a:graphicData uri="http://schemas.openxmlformats.org/drawingml/2006/table">
-            <a:tbl>
-              <a:tblPr firstRow="1" bandRow="1">
-                <a:tableStyleId>{5C22544A-7EE6-4342-B048-85BDC9FD1C3A}</a:tableStyleId>
-              </a:tblPr>
-              <a:tblGrid>
-                <a:gridCol w="2163470"/>
-                <a:gridCol w="2163470"/>
-                <a:gridCol w="2163470"/>
-                <a:gridCol w="2163470"/>
-                <a:gridCol w="2163472"/>
-              </a:tblGrid>
-              <a:tr h="384048">
-                <a:tc>
-                  <a:txBody>
-                    <a:bodyPr/>
-                    <a:lstStyle/>
-                    <a:p>
-                      <a:r>
-                        <a:rPr sz="1100" b="1">
-                          <a:solidFill>
-                            <a:srgbClr val="FFFFFF"/>
-                          </a:solidFill>
-                          <a:latin typeface="Arial"/>
-                        </a:rPr>
-                        <a:t>Bereich</a:t>
-                      </a:r>
-                    </a:p>
-                  </a:txBody>
-                  <a:tcPr>
-                    <a:solidFill>
-                      <a:srgbClr val="1F2C56"/>
-                    </a:solidFill>
-                  </a:tcPr>
-                </a:tc>
-                <a:tc>
-                  <a:txBody>
-                    <a:bodyPr/>
-                    <a:lstStyle/>
-                    <a:p>
-                      <a:r>
-                        <a:rPr sz="1100" b="1">
-                          <a:solidFill>
-                            <a:srgbClr val="FFFFFF"/>
-                          </a:solidFill>
-                          <a:latin typeface="Arial"/>
-                        </a:rPr>
-                        <a:t>Meine wichtigsten Kontakte</a:t>
-                      </a:r>
-                    </a:p>
-                  </a:txBody>
-                  <a:tcPr>
-                    <a:solidFill>
-                      <a:srgbClr val="1F2C56"/>
-                    </a:solidFill>
-                  </a:tcPr>
-                </a:tc>
-                <a:tc>
-                  <a:txBody>
-                    <a:bodyPr/>
-                    <a:lstStyle/>
-                    <a:p>
-                      <a:r>
-                        <a:rPr sz="1100" b="1">
-                          <a:solidFill>
-                            <a:srgbClr val="FFFFFF"/>
-                          </a:solidFill>
-                          <a:latin typeface="Arial"/>
-                        </a:rPr>
-                        <a:t>Qualität (1–5)</a:t>
-                      </a:r>
-                    </a:p>
-                  </a:txBody>
-                  <a:tcPr>
-                    <a:solidFill>
-                      <a:srgbClr val="1F2C56"/>
-                    </a:solidFill>
-                  </a:tcPr>
-                </a:tc>
-                <a:tc>
-                  <a:txBody>
-                    <a:bodyPr/>
-                    <a:lstStyle/>
-                    <a:p>
-                      <a:r>
-                        <a:rPr sz="1100" b="1">
-                          <a:solidFill>
-                            <a:srgbClr val="FFFFFF"/>
-                          </a:solidFill>
-                          <a:latin typeface="Arial"/>
-                        </a:rPr>
-                        <a:t>Letzte Interaktion</a:t>
-                      </a:r>
-                    </a:p>
-                  </a:txBody>
-                  <a:tcPr>
-                    <a:solidFill>
-                      <a:srgbClr val="1F2C56"/>
-                    </a:solidFill>
-                  </a:tcPr>
-                </a:tc>
-                <a:tc>
-                  <a:txBody>
-                    <a:bodyPr/>
-                    <a:lstStyle/>
-                    <a:p>
-                      <a:r>
-                        <a:rPr sz="1100" b="1">
-                          <a:solidFill>
-                            <a:srgbClr val="FFFFFF"/>
-                          </a:solidFill>
-                          <a:latin typeface="Arial"/>
-                        </a:rPr>
-                        <a:t>Nächster Schritt</a:t>
-                      </a:r>
-                    </a:p>
-                  </a:txBody>
-                  <a:tcPr>
-                    <a:solidFill>
-                      <a:srgbClr val="1F2C56"/>
-                    </a:solidFill>
-                  </a:tcPr>
-                </a:tc>
-              </a:tr>
-              <a:tr h="384048">
-                <a:tc>
-                  <a:txBody>
-                    <a:bodyPr/>
-                    <a:lstStyle/>
-                    <a:p>
-                      <a:r>
-                        <a:rPr sz="1050">
-                          <a:solidFill>
-                            <a:srgbClr val="3D5466"/>
-                          </a:solidFill>
-                          <a:latin typeface="Arial"/>
-                        </a:rPr>
-                        <a:t>Internes FK-Team</a:t>
-                      </a:r>
-                    </a:p>
-                  </a:txBody>
-                  <a:tcPr/>
-                </a:tc>
-                <a:tc>
-                  <a:txBody>
-                    <a:bodyPr/>
-                    <a:lstStyle/>
-                    <a:p/>
-                  </a:txBody>
-                  <a:tcPr/>
-                </a:tc>
-                <a:tc>
-                  <a:txBody>
-                    <a:bodyPr/>
-                    <a:lstStyle/>
-                    <a:p/>
-                  </a:txBody>
-                  <a:tcPr/>
-                </a:tc>
-                <a:tc>
-                  <a:txBody>
-                    <a:bodyPr/>
-                    <a:lstStyle/>
-                    <a:p/>
-                  </a:txBody>
-                  <a:tcPr/>
-                </a:tc>
-                <a:tc>
-                  <a:txBody>
-                    <a:bodyPr/>
-                    <a:lstStyle/>
-                    <a:p/>
-                  </a:txBody>
-                  <a:tcPr/>
-                </a:tc>
-              </a:tr>
-              <a:tr h="384048">
-                <a:tc>
-                  <a:txBody>
-                    <a:bodyPr/>
-                    <a:lstStyle/>
-                    <a:p>
-                      <a:r>
-                        <a:rPr sz="1050">
-                          <a:solidFill>
-                            <a:srgbClr val="3D5466"/>
-                          </a:solidFill>
-                          <a:latin typeface="Arial"/>
-                        </a:rPr>
-                        <a:t>Interne Spezialisten</a:t>
-                      </a:r>
-                    </a:p>
-                  </a:txBody>
-                  <a:tcPr/>
-                </a:tc>
-                <a:tc>
-                  <a:txBody>
-                    <a:bodyPr/>
-                    <a:lstStyle/>
-                    <a:p/>
-                  </a:txBody>
-                  <a:tcPr/>
-                </a:tc>
-                <a:tc>
-                  <a:txBody>
-                    <a:bodyPr/>
-                    <a:lstStyle/>
-                    <a:p/>
-                  </a:txBody>
-                  <a:tcPr/>
-                </a:tc>
-                <a:tc>
-                  <a:txBody>
-                    <a:bodyPr/>
-                    <a:lstStyle/>
-                    <a:p/>
-                  </a:txBody>
-                  <a:tcPr/>
-                </a:tc>
-                <a:tc>
-                  <a:txBody>
-                    <a:bodyPr/>
-                    <a:lstStyle/>
-                    <a:p/>
-                  </a:txBody>
-                  <a:tcPr/>
-                </a:tc>
-              </a:tr>
-              <a:tr h="384048">
-                <a:tc>
-                  <a:txBody>
-                    <a:bodyPr/>
-                    <a:lstStyle/>
-                    <a:p>
-                      <a:r>
-                        <a:rPr sz="1050">
-                          <a:solidFill>
-                            <a:srgbClr val="3D5466"/>
-                          </a:solidFill>
-                          <a:latin typeface="Arial"/>
-                        </a:rPr>
-                        <a:t>Verbundpartner</a:t>
-                      </a:r>
-                    </a:p>
-                  </a:txBody>
-                  <a:tcPr/>
-                </a:tc>
-                <a:tc>
-                  <a:txBody>
-                    <a:bodyPr/>
-                    <a:lstStyle/>
-                    <a:p/>
-                  </a:txBody>
-                  <a:tcPr/>
-                </a:tc>
-                <a:tc>
-                  <a:txBody>
-                    <a:bodyPr/>
-                    <a:lstStyle/>
-                    <a:p/>
-                  </a:txBody>
-                  <a:tcPr/>
-                </a:tc>
-                <a:tc>
-                  <a:txBody>
-                    <a:bodyPr/>
-                    <a:lstStyle/>
-                    <a:p/>
-                  </a:txBody>
-                  <a:tcPr/>
-                </a:tc>
-                <a:tc>
-                  <a:txBody>
-                    <a:bodyPr/>
-                    <a:lstStyle/>
-                    <a:p/>
-                  </a:txBody>
-                  <a:tcPr/>
-                </a:tc>
-              </a:tr>
-              <a:tr h="384048">
-                <a:tc>
-                  <a:txBody>
-                    <a:bodyPr/>
-                    <a:lstStyle/>
-                    <a:p>
-                      <a:r>
-                        <a:rPr sz="1050">
-                          <a:solidFill>
-                            <a:srgbClr val="3D5466"/>
-                          </a:solidFill>
-                          <a:latin typeface="Arial"/>
-                        </a:rPr>
-                        <a:t>Steuerberater / WP</a:t>
-                      </a:r>
-                    </a:p>
-                  </a:txBody>
-                  <a:tcPr/>
-                </a:tc>
-                <a:tc>
-                  <a:txBody>
-                    <a:bodyPr/>
-                    <a:lstStyle/>
-                    <a:p/>
-                  </a:txBody>
-                  <a:tcPr/>
-                </a:tc>
-                <a:tc>
-                  <a:txBody>
-                    <a:bodyPr/>
-                    <a:lstStyle/>
-                    <a:p/>
-                  </a:txBody>
-                  <a:tcPr/>
-                </a:tc>
-                <a:tc>
-                  <a:txBody>
-                    <a:bodyPr/>
-                    <a:lstStyle/>
-                    <a:p/>
-                  </a:txBody>
-                  <a:tcPr/>
-                </a:tc>
-                <a:tc>
-                  <a:txBody>
-                    <a:bodyPr/>
-                    <a:lstStyle/>
-                    <a:p/>
-                  </a:txBody>
-                  <a:tcPr/>
-                </a:tc>
-              </a:tr>
-              <a:tr h="384048">
-                <a:tc>
-                  <a:txBody>
-                    <a:bodyPr/>
-                    <a:lstStyle/>
-                    <a:p>
-                      <a:r>
-                        <a:rPr sz="1050">
-                          <a:solidFill>
-                            <a:srgbClr val="3D5466"/>
-                          </a:solidFill>
-                          <a:latin typeface="Arial"/>
-                        </a:rPr>
-                        <a:t>Rechtsanwälte</a:t>
-                      </a:r>
-                    </a:p>
-                  </a:txBody>
-                  <a:tcPr/>
-                </a:tc>
-                <a:tc>
-                  <a:txBody>
-                    <a:bodyPr/>
-                    <a:lstStyle/>
-                    <a:p/>
-                  </a:txBody>
-                  <a:tcPr/>
-                </a:tc>
-                <a:tc>
-                  <a:txBody>
-                    <a:bodyPr/>
-                    <a:lstStyle/>
-                    <a:p/>
-                  </a:txBody>
-                  <a:tcPr/>
-                </a:tc>
-                <a:tc>
-                  <a:txBody>
-                    <a:bodyPr/>
-                    <a:lstStyle/>
-                    <a:p/>
-                  </a:txBody>
-                  <a:tcPr/>
-                </a:tc>
-                <a:tc>
-                  <a:txBody>
-                    <a:bodyPr/>
-                    <a:lstStyle/>
-                    <a:p/>
-                  </a:txBody>
-                  <a:tcPr/>
-                </a:tc>
-              </a:tr>
-              <a:tr h="384048">
-                <a:tc>
-                  <a:txBody>
-                    <a:bodyPr/>
-                    <a:lstStyle/>
-                    <a:p>
-                      <a:r>
-                        <a:rPr sz="1050">
-                          <a:solidFill>
-                            <a:srgbClr val="3D5466"/>
-                          </a:solidFill>
-                          <a:latin typeface="Arial"/>
-                        </a:rPr>
-                        <a:t>Branchenverbände</a:t>
-                      </a:r>
-                    </a:p>
-                  </a:txBody>
-                  <a:tcPr/>
-                </a:tc>
-                <a:tc>
-                  <a:txBody>
-                    <a:bodyPr/>
-                    <a:lstStyle/>
-                    <a:p/>
-                  </a:txBody>
-                  <a:tcPr/>
-                </a:tc>
-                <a:tc>
-                  <a:txBody>
-                    <a:bodyPr/>
-                    <a:lstStyle/>
-                    <a:p/>
-                  </a:txBody>
-                  <a:tcPr/>
-                </a:tc>
-                <a:tc>
-                  <a:txBody>
-                    <a:bodyPr/>
-                    <a:lstStyle/>
-                    <a:p/>
-                  </a:txBody>
-                  <a:tcPr/>
-                </a:tc>
-                <a:tc>
-                  <a:txBody>
-                    <a:bodyPr/>
-                    <a:lstStyle/>
-                    <a:p/>
-                  </a:txBody>
-                  <a:tcPr/>
-                </a:tc>
-              </a:tr>
-              <a:tr h="384048">
-                <a:tc>
-                  <a:txBody>
-                    <a:bodyPr/>
-                    <a:lstStyle/>
-                    <a:p>
-                      <a:r>
-                        <a:rPr sz="1050">
-                          <a:solidFill>
-                            <a:srgbClr val="3D5466"/>
-                          </a:solidFill>
-                          <a:latin typeface="Arial"/>
-                        </a:rPr>
-                        <a:t>Unternehmerclubs / Gremien</a:t>
-                      </a:r>
-                    </a:p>
-                  </a:txBody>
-                  <a:tcPr/>
-                </a:tc>
-                <a:tc>
-                  <a:txBody>
-                    <a:bodyPr/>
-                    <a:lstStyle/>
-                    <a:p/>
-                  </a:txBody>
-                  <a:tcPr/>
-                </a:tc>
-                <a:tc>
-                  <a:txBody>
-                    <a:bodyPr/>
-                    <a:lstStyle/>
-                    <a:p/>
-                  </a:txBody>
-                  <a:tcPr/>
-                </a:tc>
-                <a:tc>
-                  <a:txBody>
-                    <a:bodyPr/>
-                    <a:lstStyle/>
-                    <a:p/>
-                  </a:txBody>
-                  <a:tcPr/>
-                </a:tc>
-                <a:tc>
-                  <a:txBody>
-                    <a:bodyPr/>
-                    <a:lstStyle/>
-                    <a:p/>
-                  </a:txBody>
-                  <a:tcPr/>
-                </a:tc>
-              </a:tr>
-              <a:tr h="384048">
-                <a:tc>
-                  <a:txBody>
-                    <a:bodyPr/>
-                    <a:lstStyle/>
-                    <a:p>
-                      <a:r>
-                        <a:rPr sz="1050">
-                          <a:solidFill>
-                            <a:srgbClr val="3D5466"/>
-                          </a:solidFill>
-                          <a:latin typeface="Arial"/>
-                        </a:rPr>
-                        <a:t>Digitale Kontakte</a:t>
-                      </a:r>
-                    </a:p>
-                  </a:txBody>
-                  <a:tcPr/>
-                </a:tc>
-                <a:tc>
-                  <a:txBody>
-                    <a:bodyPr/>
-                    <a:lstStyle/>
-                    <a:p/>
-                  </a:txBody>
-                  <a:tcPr/>
-                </a:tc>
-                <a:tc>
-                  <a:txBody>
-                    <a:bodyPr/>
-                    <a:lstStyle/>
-                    <a:p/>
-                  </a:txBody>
-                  <a:tcPr/>
-                </a:tc>
-                <a:tc>
-                  <a:txBody>
-                    <a:bodyPr/>
-                    <a:lstStyle/>
-                    <a:p/>
-                  </a:txBody>
-                  <a:tcPr/>
-                </a:tc>
-                <a:tc>
-                  <a:txBody>
-                    <a:bodyPr/>
-                    <a:lstStyle/>
-                    <a:p/>
-                  </a:txBody>
-                  <a:tcPr/>
-                </a:tc>
-              </a:tr>
-            </a:tbl>
-          </a:graphicData>
-        </a:graphic>
-      </p:graphicFrame>
-      <p:sp>
-        <p:nvSpPr>
-          <p:cNvPr id="8" name="Rectangle 7"/>
-          <p:cNvSpPr/>
-          <p:nvPr/>
-        </p:nvSpPr>
-        <p:spPr>
-          <a:xfrm>
-            <a:off x="0" y="6510528"/>
-            <a:ext cx="12188952" cy="347472"/>
-          </a:xfrm>
-          <a:prstGeom prst="rect">
-            <a:avLst/>
-          </a:prstGeom>
-          <a:solidFill>
-            <a:srgbClr val="0A1937"/>
-          </a:solidFill>
-          <a:ln>
-            <a:noFill/>
-          </a:ln>
-        </p:spPr>
-        <p:style>
-          <a:lnRef idx="1">
-            <a:schemeClr val="accent1"/>
-          </a:lnRef>
-          <a:fillRef idx="3">
-            <a:schemeClr val="accent1"/>
-          </a:fillRef>
-          <a:effectRef idx="2">
-            <a:schemeClr val="accent1"/>
-          </a:effectRef>
-          <a:fontRef idx="minor">
-            <a:schemeClr val="lt1"/>
-          </a:fontRef>
-        </p:style>
-        <p:txBody>
-          <a:bodyPr rtlCol="0" anchor="ctr"/>
-          <a:lstStyle/>
-          <a:p>
-            <a:pPr algn="ctr"/>
-          </a:p>
-        </p:txBody>
-      </p:sp>
-      <p:sp>
-        <p:nvSpPr>
-          <p:cNvPr id="9" name="TextBox 8"/>
-          <p:cNvSpPr txBox="1"/>
-          <p:nvPr/>
-        </p:nvSpPr>
-        <p:spPr>
-          <a:xfrm>
-            <a:off x="685800" y="6583680"/>
-            <a:ext cx="6490411" cy="256032"/>
-          </a:xfrm>
-          <a:prstGeom prst="rect">
-            <a:avLst/>
-          </a:prstGeom>
-          <a:noFill/>
-        </p:spPr>
-        <p:txBody>
-          <a:bodyPr wrap="none">
-            <a:spAutoFit/>
-          </a:bodyPr>
-          <a:lstStyle/>
-          <a:p>
-            <a:pPr algn="l"/>
-            <a:r>
-              <a:rPr sz="700">
-                <a:solidFill>
-                  <a:srgbClr val="A0B4D2"/>
-                </a:solidFill>
-                <a:latin typeface="Consolas"/>
-              </a:rPr>
-              <a:t>FKB Campus  ·  M20</a:t>
-            </a:r>
-          </a:p>
-        </p:txBody>
-      </p:sp>
-      <p:sp>
-        <p:nvSpPr>
-          <p:cNvPr id="10" name="TextBox 9"/>
-          <p:cNvSpPr txBox="1"/>
-          <p:nvPr/>
-        </p:nvSpPr>
-        <p:spPr>
-          <a:xfrm>
-            <a:off x="7176211" y="6583680"/>
-            <a:ext cx="4326940" cy="256032"/>
-          </a:xfrm>
-          <a:prstGeom prst="rect">
-            <a:avLst/>
-          </a:prstGeom>
-          <a:noFill/>
-        </p:spPr>
-        <p:txBody>
-          <a:bodyPr wrap="none">
-            <a:spAutoFit/>
-          </a:bodyPr>
-          <a:lstStyle/>
-          <a:p>
-            <a:pPr algn="r"/>
-            <a:r>
-              <a:rPr sz="700">
-                <a:solidFill>
-                  <a:srgbClr val="A0B4D2"/>
-                </a:solidFill>
-                <a:latin typeface="Consolas"/>
-              </a:rPr>
-              <a:t>Übersicht</a:t>
-            </a:r>
-          </a:p>
-        </p:txBody>
-      </p:sp>
-    </p:spTree>
-  </p:cSld>
-  <p:clrMapOvr>
-    <a:masterClrMapping/>
-  </p:clrMapOvr>
-</p:sld>
-</file>
-
-<file path=ppt/slides/slide16.xml><?xml version="1.0" encoding="utf-8"?>
-<p:sld xmlns:a="http://schemas.openxmlformats.org/drawingml/2006/main" xmlns:p="http://schemas.openxmlformats.org/presentationml/2006/main" xmlns:r="http://schemas.openxmlformats.org/officeDocument/2006/relationships">
-  <p:cSld>
-    <p:spTree>
-      <p:nvGrpSpPr>
-        <p:cNvPr id="1" name=""/>
-        <p:cNvGrpSpPr/>
-        <p:nvPr/>
-      </p:nvGrpSpPr>
-      <p:grpSpPr/>
-      <p:sp>
-        <p:nvSpPr>
-          <p:cNvPr id="2" name="Rectangle 1"/>
-          <p:cNvSpPr/>
-          <p:nvPr/>
-        </p:nvSpPr>
-        <p:spPr>
-          <a:xfrm>
-            <a:off x="0" y="0"/>
-            <a:ext cx="12188952" cy="6858000"/>
-          </a:xfrm>
-          <a:prstGeom prst="rect">
-            <a:avLst/>
-          </a:prstGeom>
-          <a:solidFill>
-            <a:srgbClr val="FFFFFF"/>
-          </a:solidFill>
-          <a:ln>
-            <a:noFill/>
-          </a:ln>
-        </p:spPr>
-        <p:style>
-          <a:lnRef idx="1">
-            <a:schemeClr val="accent1"/>
-          </a:lnRef>
-          <a:fillRef idx="3">
-            <a:schemeClr val="accent1"/>
-          </a:fillRef>
-          <a:effectRef idx="2">
-            <a:schemeClr val="accent1"/>
-          </a:effectRef>
-          <a:fontRef idx="minor">
-            <a:schemeClr val="lt1"/>
-          </a:fontRef>
-        </p:style>
-        <p:txBody>
-          <a:bodyPr rtlCol="0" anchor="ctr"/>
-          <a:lstStyle/>
-          <a:p>
-            <a:pPr algn="ctr"/>
-          </a:p>
-        </p:txBody>
-      </p:sp>
-      <p:sp>
-        <p:nvSpPr>
-          <p:cNvPr id="3" name="Rectangle 2"/>
-          <p:cNvSpPr/>
-          <p:nvPr/>
-        </p:nvSpPr>
-        <p:spPr>
-          <a:xfrm>
-            <a:off x="0" y="0"/>
-            <a:ext cx="12188952" cy="50292"/>
-          </a:xfrm>
-          <a:prstGeom prst="rect">
-            <a:avLst/>
-          </a:prstGeom>
-          <a:solidFill>
-            <a:srgbClr val="1F2C56"/>
-          </a:solidFill>
-          <a:ln>
-            <a:noFill/>
-          </a:ln>
-        </p:spPr>
-        <p:style>
-          <a:lnRef idx="1">
-            <a:schemeClr val="accent1"/>
-          </a:lnRef>
-          <a:fillRef idx="3">
-            <a:schemeClr val="accent1"/>
-          </a:fillRef>
-          <a:effectRef idx="2">
-            <a:schemeClr val="accent1"/>
-          </a:effectRef>
-          <a:fontRef idx="minor">
-            <a:schemeClr val="lt1"/>
-          </a:fontRef>
-        </p:style>
-        <p:txBody>
-          <a:bodyPr rtlCol="0" anchor="ctr"/>
-          <a:lstStyle/>
-          <a:p>
-            <a:pPr algn="ctr"/>
-          </a:p>
-        </p:txBody>
-      </p:sp>
-      <p:sp>
-        <p:nvSpPr>
-          <p:cNvPr id="4" name="TextBox 3"/>
-          <p:cNvSpPr txBox="1"/>
-          <p:nvPr/>
-        </p:nvSpPr>
-        <p:spPr>
-          <a:xfrm>
-            <a:off x="685800" y="109728"/>
-            <a:ext cx="10817352" cy="228600"/>
-          </a:xfrm>
-          <a:prstGeom prst="rect">
-            <a:avLst/>
-          </a:prstGeom>
-          <a:noFill/>
-        </p:spPr>
-        <p:txBody>
-          <a:bodyPr wrap="none">
-            <a:spAutoFit/>
-          </a:bodyPr>
-          <a:lstStyle/>
-          <a:p>
-            <a:pPr algn="l"/>
-            <a:r>
-              <a:rPr sz="750">
-                <a:solidFill>
-                  <a:srgbClr val="78808C"/>
-                </a:solidFill>
-                <a:latin typeface="Consolas"/>
-              </a:rPr>
-              <a:t>M20  ·  ÜBERSICHT</a:t>
-            </a:r>
-          </a:p>
-        </p:txBody>
-      </p:sp>
-      <p:sp>
-        <p:nvSpPr>
-          <p:cNvPr id="5" name="TextBox 4"/>
-          <p:cNvSpPr txBox="1"/>
-          <p:nvPr/>
-        </p:nvSpPr>
-        <p:spPr>
-          <a:xfrm>
-            <a:off x="685800" y="502920"/>
-            <a:ext cx="10817352" cy="594360"/>
-          </a:xfrm>
-          <a:prstGeom prst="rect">
-            <a:avLst/>
-          </a:prstGeom>
-          <a:noFill/>
-        </p:spPr>
-        <p:txBody>
-          <a:bodyPr wrap="square">
-            <a:spAutoFit/>
-          </a:bodyPr>
-          <a:lstStyle/>
-          <a:p>
-            <a:pPr algn="l"/>
-            <a:r>
-              <a:rPr sz="2000" b="1" i="0">
-                <a:solidFill>
-                  <a:srgbClr val="1F2C56"/>
-                </a:solidFill>
-                <a:latin typeface="Arial"/>
-              </a:rPr>
-              <a:t>AB-3: 90-Tage-Aktionsplan</a:t>
-            </a:r>
-          </a:p>
-        </p:txBody>
-      </p:sp>
-      <p:sp>
-        <p:nvSpPr>
-          <p:cNvPr id="6" name="Rectangle 5"/>
-          <p:cNvSpPr/>
-          <p:nvPr/>
-        </p:nvSpPr>
-        <p:spPr>
-          <a:xfrm>
-            <a:off x="685800" y="1143000"/>
-            <a:ext cx="10817352" cy="25400"/>
-          </a:xfrm>
-          <a:prstGeom prst="rect">
-            <a:avLst/>
-          </a:prstGeom>
-          <a:solidFill>
-            <a:srgbClr val="D9C089"/>
-          </a:solidFill>
-          <a:ln>
-            <a:noFill/>
-          </a:ln>
-        </p:spPr>
-        <p:style>
-          <a:lnRef idx="1">
-            <a:schemeClr val="accent1"/>
-          </a:lnRef>
-          <a:fillRef idx="3">
-            <a:schemeClr val="accent1"/>
-          </a:fillRef>
-          <a:effectRef idx="2">
-            <a:schemeClr val="accent1"/>
-          </a:effectRef>
-          <a:fontRef idx="minor">
-            <a:schemeClr val="lt1"/>
-          </a:fontRef>
-        </p:style>
-        <p:txBody>
-          <a:bodyPr rtlCol="0" anchor="ctr"/>
-          <a:lstStyle/>
-          <a:p>
-            <a:pPr algn="ctr"/>
-          </a:p>
-        </p:txBody>
-      </p:sp>
-      <p:graphicFrame>
-        <p:nvGraphicFramePr>
-          <p:cNvPr id="7" name="Table 6"/>
-          <p:cNvGraphicFramePr>
-            <a:graphicFrameLocks noGrp="1"/>
-          </p:cNvGraphicFramePr>
-          <p:nvPr/>
-        </p:nvGraphicFramePr>
-        <p:xfrm>
-          <a:off x="685800" y="1417320"/>
-          <a:ext cx="10817352" cy="1920240"/>
-        </p:xfrm>
-        <a:graphic>
-          <a:graphicData uri="http://schemas.openxmlformats.org/drawingml/2006/table">
-            <a:tbl>
-              <a:tblPr firstRow="1" bandRow="1">
-                <a:tableStyleId>{5C22544A-7EE6-4342-B048-85BDC9FD1C3A}</a:tableStyleId>
-              </a:tblPr>
-              <a:tblGrid>
-                <a:gridCol w="2163470"/>
-                <a:gridCol w="2163470"/>
-                <a:gridCol w="2163470"/>
-                <a:gridCol w="2163470"/>
-                <a:gridCol w="2163472"/>
-              </a:tblGrid>
-              <a:tr h="384048">
-                <a:tc>
-                  <a:txBody>
-                    <a:bodyPr/>
-                    <a:lstStyle/>
-                    <a:p>
-                      <a:r>
-                        <a:rPr sz="1100" b="1">
-                          <a:solidFill>
-                            <a:srgbClr val="FFFFFF"/>
-                          </a:solidFill>
-                          <a:latin typeface="Arial"/>
-                        </a:rPr>
-                        <a:t>Zeitraum</a:t>
-                      </a:r>
-                    </a:p>
-                  </a:txBody>
-                  <a:tcPr>
-                    <a:solidFill>
-                      <a:srgbClr val="1F2C56"/>
-                    </a:solidFill>
-                  </a:tcPr>
-                </a:tc>
-                <a:tc>
-                  <a:txBody>
-                    <a:bodyPr/>
-                    <a:lstStyle/>
-                    <a:p>
-                      <a:r>
-                        <a:rPr sz="1100" b="1">
-                          <a:solidFill>
-                            <a:srgbClr val="FFFFFF"/>
-                          </a:solidFill>
-                          <a:latin typeface="Arial"/>
-                        </a:rPr>
-                        <a:t>Aktivität</a:t>
-                      </a:r>
-                    </a:p>
-                  </a:txBody>
-                  <a:tcPr>
-                    <a:solidFill>
-                      <a:srgbClr val="1F2C56"/>
-                    </a:solidFill>
-                  </a:tcPr>
-                </a:tc>
-                <a:tc>
-                  <a:txBody>
-                    <a:bodyPr/>
-                    <a:lstStyle/>
-                    <a:p>
-                      <a:r>
-                        <a:rPr sz="1100" b="1">
-                          <a:solidFill>
-                            <a:srgbClr val="FFFFFF"/>
-                          </a:solidFill>
-                          <a:latin typeface="Arial"/>
-                        </a:rPr>
-                        <a:t>Zielkontakt</a:t>
-                      </a:r>
-                    </a:p>
-                  </a:txBody>
-                  <a:tcPr>
-                    <a:solidFill>
-                      <a:srgbClr val="1F2C56"/>
-                    </a:solidFill>
-                  </a:tcPr>
-                </a:tc>
-                <a:tc>
-                  <a:txBody>
-                    <a:bodyPr/>
-                    <a:lstStyle/>
-                    <a:p>
-                      <a:r>
-                        <a:rPr sz="1100" b="1">
-                          <a:solidFill>
-                            <a:srgbClr val="FFFFFF"/>
-                          </a:solidFill>
-                          <a:latin typeface="Arial"/>
-                        </a:rPr>
-                        <a:t>Ziel</a:t>
-                      </a:r>
-                    </a:p>
-                  </a:txBody>
-                  <a:tcPr>
-                    <a:solidFill>
-                      <a:srgbClr val="1F2C56"/>
-                    </a:solidFill>
-                  </a:tcPr>
-                </a:tc>
-                <a:tc>
-                  <a:txBody>
-                    <a:bodyPr/>
-                    <a:lstStyle/>
-                    <a:p>
-                      <a:r>
-                        <a:rPr sz="1100" b="1">
-                          <a:solidFill>
-                            <a:srgbClr val="FFFFFF"/>
-                          </a:solidFill>
-                          <a:latin typeface="Arial"/>
-                        </a:rPr>
-                        <a:t>Erledigt?</a:t>
-                      </a:r>
-                    </a:p>
-                  </a:txBody>
-                  <a:tcPr>
-                    <a:solidFill>
-                      <a:srgbClr val="1F2C56"/>
-                    </a:solidFill>
-                  </a:tcPr>
-                </a:tc>
-              </a:tr>
-              <a:tr h="384048">
-                <a:tc>
-                  <a:txBody>
-                    <a:bodyPr/>
-                    <a:lstStyle/>
-                    <a:p>
-                      <a:r>
-                        <a:rPr sz="1050">
-                          <a:solidFill>
-                            <a:srgbClr val="3D5466"/>
-                          </a:solidFill>
-                          <a:latin typeface="Arial"/>
-                        </a:rPr>
-                        <a:t>Woche 1–2</a:t>
-                      </a:r>
-                    </a:p>
-                  </a:txBody>
-                  <a:tcPr/>
-                </a:tc>
-                <a:tc>
-                  <a:txBody>
-                    <a:bodyPr/>
-                    <a:lstStyle/>
-                    <a:p/>
-                  </a:txBody>
-                  <a:tcPr/>
-                </a:tc>
-                <a:tc>
-                  <a:txBody>
-                    <a:bodyPr/>
-                    <a:lstStyle/>
-                    <a:p/>
-                  </a:txBody>
-                  <a:tcPr/>
-                </a:tc>
-                <a:tc>
-                  <a:txBody>
-                    <a:bodyPr/>
-                    <a:lstStyle/>
-                    <a:p/>
-                  </a:txBody>
-                  <a:tcPr/>
-                </a:tc>
-                <a:tc>
-                  <a:txBody>
-                    <a:bodyPr/>
-                    <a:lstStyle/>
-                    <a:p/>
-                  </a:txBody>
-                  <a:tcPr/>
-                </a:tc>
-              </a:tr>
-              <a:tr h="384048">
-                <a:tc>
-                  <a:txBody>
-                    <a:bodyPr/>
-                    <a:lstStyle/>
-                    <a:p>
-                      <a:r>
-                        <a:rPr sz="1050">
-                          <a:solidFill>
-                            <a:srgbClr val="3D5466"/>
-                          </a:solidFill>
-                          <a:latin typeface="Arial"/>
-                        </a:rPr>
-                        <a:t>Woche 3–4</a:t>
-                      </a:r>
-                    </a:p>
-                  </a:txBody>
-                  <a:tcPr/>
-                </a:tc>
-                <a:tc>
-                  <a:txBody>
-                    <a:bodyPr/>
-                    <a:lstStyle/>
-                    <a:p/>
-                  </a:txBody>
-                  <a:tcPr/>
-                </a:tc>
-                <a:tc>
-                  <a:txBody>
-                    <a:bodyPr/>
-                    <a:lstStyle/>
-                    <a:p/>
-                  </a:txBody>
-                  <a:tcPr/>
-                </a:tc>
-                <a:tc>
-                  <a:txBody>
-                    <a:bodyPr/>
-                    <a:lstStyle/>
-                    <a:p/>
-                  </a:txBody>
-                  <a:tcPr/>
-                </a:tc>
-                <a:tc>
-                  <a:txBody>
-                    <a:bodyPr/>
-                    <a:lstStyle/>
-                    <a:p/>
-                  </a:txBody>
-                  <a:tcPr/>
-                </a:tc>
-              </a:tr>
-              <a:tr h="384048">
-                <a:tc>
-                  <a:txBody>
-                    <a:bodyPr/>
-                    <a:lstStyle/>
-                    <a:p>
-                      <a:r>
-                        <a:rPr sz="1050">
-                          <a:solidFill>
-                            <a:srgbClr val="3D5466"/>
-                          </a:solidFill>
-                          <a:latin typeface="Arial"/>
-                        </a:rPr>
-                        <a:t>Monat 2</a:t>
-                      </a:r>
-                    </a:p>
-                  </a:txBody>
-                  <a:tcPr/>
-                </a:tc>
-                <a:tc>
-                  <a:txBody>
-                    <a:bodyPr/>
-                    <a:lstStyle/>
-                    <a:p/>
-                  </a:txBody>
-                  <a:tcPr/>
-                </a:tc>
-                <a:tc>
-                  <a:txBody>
-                    <a:bodyPr/>
-                    <a:lstStyle/>
-                    <a:p/>
-                  </a:txBody>
-                  <a:tcPr/>
-                </a:tc>
-                <a:tc>
-                  <a:txBody>
-                    <a:bodyPr/>
-                    <a:lstStyle/>
-                    <a:p/>
-                  </a:txBody>
-                  <a:tcPr/>
-                </a:tc>
-                <a:tc>
-                  <a:txBody>
-                    <a:bodyPr/>
-                    <a:lstStyle/>
-                    <a:p/>
-                  </a:txBody>
-                  <a:tcPr/>
-                </a:tc>
-              </a:tr>
-              <a:tr h="384048">
-                <a:tc>
-                  <a:txBody>
-                    <a:bodyPr/>
-                    <a:lstStyle/>
-                    <a:p>
-                      <a:r>
-                        <a:rPr sz="1050">
-                          <a:solidFill>
-                            <a:srgbClr val="3D5466"/>
-                          </a:solidFill>
-                          <a:latin typeface="Arial"/>
-                        </a:rPr>
-                        <a:t>Monat 3</a:t>
-                      </a:r>
-                    </a:p>
-                  </a:txBody>
-                  <a:tcPr/>
-                </a:tc>
-                <a:tc>
-                  <a:txBody>
-                    <a:bodyPr/>
-                    <a:lstStyle/>
-                    <a:p/>
-                  </a:txBody>
-                  <a:tcPr/>
-                </a:tc>
-                <a:tc>
-                  <a:txBody>
-                    <a:bodyPr/>
-                    <a:lstStyle/>
-                    <a:p/>
-                  </a:txBody>
-                  <a:tcPr/>
-                </a:tc>
-                <a:tc>
-                  <a:txBody>
-                    <a:bodyPr/>
-                    <a:lstStyle/>
-                    <a:p/>
-                  </a:txBody>
-                  <a:tcPr/>
-                </a:tc>
-                <a:tc>
-                  <a:txBody>
-                    <a:bodyPr/>
-                    <a:lstStyle/>
-                    <a:p/>
-                  </a:txBody>
-                  <a:tcPr/>
-                </a:tc>
-              </a:tr>
-            </a:tbl>
-          </a:graphicData>
-        </a:graphic>
-      </p:graphicFrame>
-      <p:sp>
-        <p:nvSpPr>
-          <p:cNvPr id="8" name="Rectangle 7"/>
-          <p:cNvSpPr/>
-          <p:nvPr/>
-        </p:nvSpPr>
-        <p:spPr>
-          <a:xfrm>
-            <a:off x="0" y="6510528"/>
-            <a:ext cx="12188952" cy="347472"/>
-          </a:xfrm>
-          <a:prstGeom prst="rect">
-            <a:avLst/>
-          </a:prstGeom>
-          <a:solidFill>
-            <a:srgbClr val="0A1937"/>
-          </a:solidFill>
-          <a:ln>
-            <a:noFill/>
-          </a:ln>
-        </p:spPr>
-        <p:style>
-          <a:lnRef idx="1">
-            <a:schemeClr val="accent1"/>
-          </a:lnRef>
-          <a:fillRef idx="3">
-            <a:schemeClr val="accent1"/>
-          </a:fillRef>
-          <a:effectRef idx="2">
-            <a:schemeClr val="accent1"/>
-          </a:effectRef>
-          <a:fontRef idx="minor">
-            <a:schemeClr val="lt1"/>
-          </a:fontRef>
-        </p:style>
-        <p:txBody>
-          <a:bodyPr rtlCol="0" anchor="ctr"/>
-          <a:lstStyle/>
-          <a:p>
-            <a:pPr algn="ctr"/>
-          </a:p>
-        </p:txBody>
-      </p:sp>
-      <p:sp>
-        <p:nvSpPr>
-          <p:cNvPr id="9" name="TextBox 8"/>
-          <p:cNvSpPr txBox="1"/>
-          <p:nvPr/>
-        </p:nvSpPr>
-        <p:spPr>
-          <a:xfrm>
-            <a:off x="685800" y="6583680"/>
-            <a:ext cx="6490411" cy="256032"/>
-          </a:xfrm>
-          <a:prstGeom prst="rect">
-            <a:avLst/>
-          </a:prstGeom>
-          <a:noFill/>
-        </p:spPr>
-        <p:txBody>
-          <a:bodyPr wrap="none">
-            <a:spAutoFit/>
-          </a:bodyPr>
-          <a:lstStyle/>
-          <a:p>
-            <a:pPr algn="l"/>
-            <a:r>
-              <a:rPr sz="700">
-                <a:solidFill>
-                  <a:srgbClr val="A0B4D2"/>
-                </a:solidFill>
-                <a:latin typeface="Consolas"/>
-              </a:rPr>
-              <a:t>FKB Campus  ·  M20</a:t>
-            </a:r>
-          </a:p>
-        </p:txBody>
-      </p:sp>
-      <p:sp>
-        <p:nvSpPr>
-          <p:cNvPr id="10" name="TextBox 9"/>
-          <p:cNvSpPr txBox="1"/>
-          <p:nvPr/>
-        </p:nvSpPr>
-        <p:spPr>
-          <a:xfrm>
-            <a:off x="7176211" y="6583680"/>
-            <a:ext cx="4326940" cy="256032"/>
-          </a:xfrm>
-          <a:prstGeom prst="rect">
-            <a:avLst/>
-          </a:prstGeom>
-          <a:noFill/>
-        </p:spPr>
-        <p:txBody>
-          <a:bodyPr wrap="none">
-            <a:spAutoFit/>
-          </a:bodyPr>
-          <a:lstStyle/>
-          <a:p>
-            <a:pPr algn="r"/>
-            <a:r>
-              <a:rPr sz="700">
-                <a:solidFill>
-                  <a:srgbClr val="A0B4D2"/>
-                </a:solidFill>
-                <a:latin typeface="Consolas"/>
-              </a:rPr>
-              <a:t>Übersicht</a:t>
             </a:r>
           </a:p>
         </p:txBody>
@@ -10250,7 +8280,7 @@
                 </a:solidFill>
                 <a:latin typeface="Arial"/>
               </a:rPr>
-              <a:t>Dimension 1: Internes Netzwerk</a:t>
+              <a:t>Beziehungen baut man, bevor man sie braucht</a:t>
             </a:r>
           </a:p>
         </p:txBody>
@@ -10276,6 +8306,25 @@
             <a:spAutoFit/>
           </a:bodyPr>
           <a:lstStyle/>
+          <a:p>
+            <a:pPr marL="177800" indent="-177800">
+              <a:spcBef>
+                <a:spcPts val="600"/>
+              </a:spcBef>
+              <a:spcAft>
+                <a:spcPts val="200"/>
+              </a:spcAft>
+            </a:pPr>
+            <a:r>
+              <a:rPr sz="1200" i="1">
+                <a:solidFill>
+                  <a:srgbClr val="3D5466"/>
+                </a:solidFill>
+                <a:latin typeface="Arial"/>
+              </a:rPr>
+              <a:t>→  Beziehungen baut man, bevor man sie braucht.</a:t>
+            </a:r>
+          </a:p>
           <a:p>
             <a:pPr marL="190500" indent="-190500">
               <a:spcBef>
@@ -10292,7 +8341,7 @@
                 </a:solidFill>
                 <a:latin typeface="Arial"/>
               </a:rPr>
-              <a:t>▸  Die häufig unterschätzte Dimension. Wer im eigenen Haus als kompetenter Ansprechpartner bekannt ist, bekommt:</a:t>
+              <a:t>▸  Ein Netzwerk aus Brücken (nicht nur Kontakten) bringt Anfragen, bevor der Wettbewerb sie sieht.</a:t>
             </a:r>
           </a:p>
           <a:p>
@@ -10311,64 +8360,7 @@
                 </a:solidFill>
                 <a:latin typeface="Arial"/>
               </a:rPr>
-              <a:t>▸  Interne Empfehlungen aus Privatkundenbereichen</a:t>
-            </a:r>
-          </a:p>
-          <a:p>
-            <a:pPr marL="190500" indent="-190500">
-              <a:spcBef>
-                <a:spcPts val="400"/>
-              </a:spcBef>
-              <a:spcAft>
-                <a:spcPts val="200"/>
-              </a:spcAft>
-            </a:pPr>
-            <a:r>
-              <a:rPr sz="1300">
-                <a:solidFill>
-                  <a:srgbClr val="3D5466"/>
-                </a:solidFill>
-                <a:latin typeface="Arial"/>
-              </a:rPr>
-              <a:t>▸  Frühzeitige Informationen über anstehende Regulierungen oder Strategieänderungen</a:t>
-            </a:r>
-          </a:p>
-          <a:p>
-            <a:pPr marL="190500" indent="-190500">
-              <a:spcBef>
-                <a:spcPts val="400"/>
-              </a:spcBef>
-              <a:spcAft>
-                <a:spcPts val="200"/>
-              </a:spcAft>
-            </a:pPr>
-            <a:r>
-              <a:rPr sz="1300">
-                <a:solidFill>
-                  <a:srgbClr val="3D5466"/>
-                </a:solidFill>
-                <a:latin typeface="Arial"/>
-              </a:rPr>
-              <a:t>▸  Unterstützung bei komplexen Fällen durch Spezialisten (Immobilien, Strukturierte Finanzierung, Ausland)</a:t>
-            </a:r>
-          </a:p>
-          <a:p>
-            <a:pPr marL="190500" indent="-190500">
-              <a:spcBef>
-                <a:spcPts val="400"/>
-              </a:spcBef>
-              <a:spcAft>
-                <a:spcPts val="200"/>
-              </a:spcAft>
-            </a:pPr>
-            <a:r>
-              <a:rPr sz="1300">
-                <a:solidFill>
-                  <a:srgbClr val="3D5466"/>
-                </a:solidFill>
-                <a:latin typeface="Arial"/>
-              </a:rPr>
-              <a:t>▸  Netzwerkanker intern: Bereichsleiter FK, Kreditspezialisten, Risikomanager, Privatkundenberater mit Unternehmerkunden, Verbundpartner-Spezialisten (R+V, Union Investment).</a:t>
+              <a:t>▸  Netzwerk und Sichtbarkeit sind keine Selbstvermarktung, sondern professionelle Marktbearbeitung.</a:t>
             </a:r>
           </a:p>
         </p:txBody>
@@ -10706,7 +8698,7 @@
                 </a:solidFill>
                 <a:latin typeface="Arial"/>
               </a:rPr>
-              <a:t>Dimension 2: Verbundpartner-Netzwerk</a:t>
+              <a:t>Drei Netzwerkdimensionen eines FK-Beraters</a:t>
             </a:r>
           </a:p>
         </p:txBody>
@@ -10732,6 +8724,25 @@
             <a:spAutoFit/>
           </a:bodyPr>
           <a:lstStyle/>
+          <a:p>
+            <a:pPr marL="177800" indent="-177800">
+              <a:spcBef>
+                <a:spcPts val="600"/>
+              </a:spcBef>
+              <a:spcAft>
+                <a:spcPts val="200"/>
+              </a:spcAft>
+            </a:pPr>
+            <a:r>
+              <a:rPr sz="1200" i="1">
+                <a:solidFill>
+                  <a:srgbClr val="3D5466"/>
+                </a:solidFill>
+                <a:latin typeface="Arial"/>
+              </a:rPr>
+              <a:t>→  Ein tragfähiges Netzwerk hat drei Dimensionen – wer nur eine pflegt, steht auf einem Bein.</a:t>
+            </a:r>
+          </a:p>
           <a:p>
             <a:pPr marL="190500" indent="-190500">
               <a:spcBef>
@@ -10748,7 +8759,7 @@
                 </a:solidFill>
                 <a:latin typeface="Arial"/>
               </a:rPr>
-              <a:t>▸  Strategischer Nutzen: Verbundpartner können den Berater bei ihren eigenen Kundenkontakten empfehlen; der Berater positioniert sich als Koordinator der gesamten Verbundleistung.</a:t>
+              <a:t>▸  Internes Netzwerk: Marktfolge, Verbund-Ansprechpartner, Teamleitung.</a:t>
             </a:r>
           </a:p>
           <a:p>
@@ -10767,7 +8778,7 @@
                 </a:solidFill>
                 <a:latin typeface="Arial"/>
               </a:rPr>
-              <a:t>▸  Konkrete Formate, die in der Praxis funktionieren:</a:t>
+              <a:t>▸  Verbundpartner-Netzwerk: R+V, Union Investment, DZ BANK, Bausparkasse.</a:t>
             </a:r>
           </a:p>
           <a:p>
@@ -10786,45 +8797,7 @@
                 </a:solidFill>
                 <a:latin typeface="Arial"/>
               </a:rPr>
-              <a:t>▸  Gemeinsame Kundenveranstaltungen mit R+V oder Union Investment: Der FK-Berater tritt als Co-Moderator auf und gewinnt Sichtbarkeit bei Kunden anderer Berater.</a:t>
-            </a:r>
-          </a:p>
-          <a:p>
-            <a:pPr marL="190500" indent="-190500">
-              <a:spcBef>
-                <a:spcPts val="400"/>
-              </a:spcBef>
-              <a:spcAft>
-                <a:spcPts val="200"/>
-              </a:spcAft>
-            </a:pPr>
-            <a:r>
-              <a:rPr sz="1300">
-                <a:solidFill>
-                  <a:srgbClr val="3D5466"/>
-                </a:solidFill>
-                <a:latin typeface="Arial"/>
-              </a:rPr>
-              <a:t>▸  Monatlicher Jour fixe (30 Min.) mit dem R+V-Gebietsleiter oder UIN-Regionalbetreuer: Leads gegenseitig teilen, aktuelle Cross-Selling-Opportunitäten besprechen.</a:t>
-            </a:r>
-          </a:p>
-          <a:p>
-            <a:pPr marL="190500" indent="-190500">
-              <a:spcBef>
-                <a:spcPts val="400"/>
-              </a:spcBef>
-              <a:spcAft>
-                <a:spcPts val="200"/>
-              </a:spcAft>
-            </a:pPr>
-            <a:r>
-              <a:rPr sz="1300">
-                <a:solidFill>
-                  <a:srgbClr val="3D5466"/>
-                </a:solidFill>
-                <a:latin typeface="Arial"/>
-              </a:rPr>
-              <a:t>▸  Internes Cross-Selling-Meeting: Privatkundenberater mit Unternehmerkunden systematisch ansprechen – das ist im Alltag oft der schnellste Weg zu Neukunden, wird aber selten als aktives Format geführt.</a:t>
+              <a:t>▸  Markt-Netzwerk: Steuerberater, Kammern, Multiplikatoren, Bestandskunden.</a:t>
             </a:r>
           </a:p>
         </p:txBody>
@@ -10940,7 +8913,7 @@
             <a:avLst/>
           </a:prstGeom>
           <a:solidFill>
-            <a:srgbClr val="EDEDF3"/>
+            <a:srgbClr val="FFFFFF"/>
           </a:solidFill>
           <a:ln>
             <a:noFill/>
@@ -11041,51 +9014,43 @@
                 </a:solidFill>
                 <a:latin typeface="Consolas"/>
               </a:rPr>
-              <a:t>M20  ·  INHALT</a:t>
-            </a:r>
-          </a:p>
-        </p:txBody>
-      </p:sp>
-      <p:sp>
-        <p:nvSpPr>
-          <p:cNvPr id="5" name="Rectangle 4"/>
-          <p:cNvSpPr/>
-          <p:nvPr/>
-        </p:nvSpPr>
-        <p:spPr>
-          <a:xfrm>
-            <a:off x="0" y="1234440"/>
-            <a:ext cx="12188952" cy="12700"/>
-          </a:xfrm>
-          <a:prstGeom prst="rect">
-            <a:avLst/>
-          </a:prstGeom>
-          <a:solidFill>
-            <a:srgbClr val="D8DFE4"/>
-          </a:solidFill>
-          <a:ln>
-            <a:noFill/>
-          </a:ln>
-        </p:spPr>
-        <p:style>
-          <a:lnRef idx="1">
-            <a:schemeClr val="accent1"/>
-          </a:lnRef>
-          <a:fillRef idx="3">
-            <a:schemeClr val="accent1"/>
-          </a:fillRef>
-          <a:effectRef idx="2">
-            <a:schemeClr val="accent1"/>
-          </a:effectRef>
-          <a:fontRef idx="minor">
-            <a:schemeClr val="lt1"/>
-          </a:fontRef>
-        </p:style>
-        <p:txBody>
-          <a:bodyPr rtlCol="0" anchor="ctr"/>
-          <a:lstStyle/>
-          <a:p>
-            <a:pPr algn="ctr"/>
+              <a:t>M20  ·  SCHAUBILD</a:t>
+            </a:r>
+          </a:p>
+        </p:txBody>
+      </p:sp>
+      <p:sp>
+        <p:nvSpPr>
+          <p:cNvPr id="5" name="TextBox 4"/>
+          <p:cNvSpPr txBox="1"/>
+          <p:nvPr/>
+        </p:nvSpPr>
+        <p:spPr>
+          <a:xfrm>
+            <a:off x="685800" y="502920"/>
+            <a:ext cx="10817352" cy="594360"/>
+          </a:xfrm>
+          <a:prstGeom prst="rect">
+            <a:avLst/>
+          </a:prstGeom>
+          <a:noFill/>
+        </p:spPr>
+        <p:txBody>
+          <a:bodyPr wrap="square">
+            <a:spAutoFit/>
+          </a:bodyPr>
+          <a:lstStyle/>
+          <a:p>
+            <a:pPr algn="l"/>
+            <a:r>
+              <a:rPr sz="2000" b="1" i="0">
+                <a:solidFill>
+                  <a:srgbClr val="1F2C56"/>
+                </a:solidFill>
+                <a:latin typeface="Arial"/>
+              </a:rPr>
+              <a:t>Die drei Netzwerk-Dimensionen eines FK-Beraters</a:t>
+            </a:r>
           </a:p>
         </p:txBody>
       </p:sp>
@@ -11097,8 +9062,8 @@
         </p:nvSpPr>
         <p:spPr>
           <a:xfrm>
-            <a:off x="685800" y="502920"/>
-            <a:ext cx="36576" cy="658368"/>
+            <a:off x="685800" y="1143000"/>
+            <a:ext cx="10817352" cy="25400"/>
           </a:xfrm>
           <a:prstGeom prst="rect">
             <a:avLst/>
@@ -11132,105 +9097,33 @@
           </a:p>
         </p:txBody>
       </p:sp>
-      <p:sp>
-        <p:nvSpPr>
-          <p:cNvPr id="7" name="TextBox 6"/>
-          <p:cNvSpPr txBox="1"/>
-          <p:nvPr/>
-        </p:nvSpPr>
-        <p:spPr>
-          <a:xfrm>
-            <a:off x="813816" y="502920"/>
-            <a:ext cx="10634472" cy="685800"/>
-          </a:xfrm>
-          <a:prstGeom prst="rect">
-            <a:avLst/>
-          </a:prstGeom>
-          <a:noFill/>
-        </p:spPr>
-        <p:txBody>
-          <a:bodyPr wrap="square">
-            <a:spAutoFit/>
-          </a:bodyPr>
-          <a:lstStyle/>
-          <a:p>
-            <a:pPr algn="l"/>
-            <a:r>
-              <a:rPr sz="2400" b="1" i="0">
-                <a:solidFill>
-                  <a:srgbClr val="1F2C56"/>
-                </a:solidFill>
-                <a:latin typeface="Arial"/>
-              </a:rPr>
-              <a:t>Dimension 3: Markt-Netzwerk</a:t>
-            </a:r>
-          </a:p>
-        </p:txBody>
-      </p:sp>
-      <p:sp>
-        <p:nvSpPr>
-          <p:cNvPr id="8" name="TextBox 7"/>
-          <p:cNvSpPr txBox="1"/>
-          <p:nvPr/>
-        </p:nvSpPr>
-        <p:spPr>
-          <a:xfrm>
-            <a:off x="685800" y="1417320"/>
-            <a:ext cx="10817352" cy="4892040"/>
-          </a:xfrm>
-          <a:prstGeom prst="rect">
-            <a:avLst/>
-          </a:prstGeom>
-          <a:noFill/>
-        </p:spPr>
-        <p:txBody>
-          <a:bodyPr wrap="square" anchor="ctr">
-            <a:spAutoFit/>
-          </a:bodyPr>
-          <a:lstStyle/>
-          <a:p>
-            <a:pPr marL="190500" indent="-190500">
-              <a:spcBef>
-                <a:spcPts val="400"/>
-              </a:spcBef>
-              <a:spcAft>
-                <a:spcPts val="200"/>
-              </a:spcAft>
-            </a:pPr>
-            <a:r>
-              <a:rPr sz="1300">
-                <a:solidFill>
-                  <a:srgbClr val="3D5466"/>
-                </a:solidFill>
-                <a:latin typeface="Arial"/>
-              </a:rPr>
-              <a:t>▸  ## 4.3 Netzwerkanalyse: Den eigenen Status realistisch einschätzen</a:t>
-            </a:r>
-          </a:p>
-          <a:p>
-            <a:pPr marL="190500" indent="-190500">
-              <a:spcBef>
-                <a:spcPts val="400"/>
-              </a:spcBef>
-              <a:spcAft>
-                <a:spcPts val="200"/>
-              </a:spcAft>
-            </a:pPr>
-            <a:r>
-              <a:rPr sz="1300">
-                <a:solidFill>
-                  <a:srgbClr val="3D5466"/>
-                </a:solidFill>
-                <a:latin typeface="Arial"/>
-              </a:rPr>
-              <a:t>▸  Vor jeder Netzwerkstrategie steht die Analyse. Nicht: „Wie viele Kontakte habe ich?" – sondern: „Welche Verbindungen fehlen mir für meine Ziele?"</a:t>
-            </a:r>
-          </a:p>
-        </p:txBody>
-      </p:sp>
-      <p:sp>
-        <p:nvSpPr>
-          <p:cNvPr id="9" name="Rectangle 8"/>
+      <p:pic>
+        <p:nvPicPr>
+          <p:cNvPr id="7" name="Picture 6" descr="image.png"/>
+          <p:cNvPicPr>
+            <a:picLocks noChangeAspect="1"/>
+          </p:cNvPicPr>
+          <p:nvPr/>
+        </p:nvPicPr>
+        <p:blipFill>
+          <a:blip r:embed="rId2"/>
+          <a:stretch>
+            <a:fillRect/>
+          </a:stretch>
+        </p:blipFill>
+        <p:spPr>
+          <a:xfrm>
+            <a:off x="2303489" y="1325880"/>
+            <a:ext cx="7581973" cy="4937760"/>
+          </a:xfrm>
+          <a:prstGeom prst="rect">
+            <a:avLst/>
+          </a:prstGeom>
+        </p:spPr>
+      </p:pic>
+      <p:sp>
+        <p:nvSpPr>
+          <p:cNvPr id="8" name="Rectangle 7"/>
           <p:cNvSpPr/>
           <p:nvPr/>
         </p:nvSpPr>
@@ -11273,7 +9166,7 @@
       </p:sp>
       <p:sp>
         <p:nvSpPr>
-          <p:cNvPr id="10" name="TextBox 9"/>
+          <p:cNvPr id="9" name="TextBox 8"/>
           <p:cNvSpPr txBox="1"/>
           <p:nvPr/>
         </p:nvSpPr>
@@ -11302,6 +9195,41 @@
                 <a:latin typeface="Consolas"/>
               </a:rPr>
               <a:t>FKB Campus  ·  M20</a:t>
+            </a:r>
+          </a:p>
+        </p:txBody>
+      </p:sp>
+      <p:sp>
+        <p:nvSpPr>
+          <p:cNvPr id="10" name="TextBox 9"/>
+          <p:cNvSpPr txBox="1"/>
+          <p:nvPr/>
+        </p:nvSpPr>
+        <p:spPr>
+          <a:xfrm>
+            <a:off x="7176211" y="6583680"/>
+            <a:ext cx="4326940" cy="256032"/>
+          </a:xfrm>
+          <a:prstGeom prst="rect">
+            <a:avLst/>
+          </a:prstGeom>
+          <a:noFill/>
+        </p:spPr>
+        <p:txBody>
+          <a:bodyPr wrap="none">
+            <a:spAutoFit/>
+          </a:bodyPr>
+          <a:lstStyle/>
+          <a:p>
+            <a:pPr algn="r"/>
+            <a:r>
+              <a:rPr sz="700">
+                <a:solidFill>
+                  <a:srgbClr val="A0B4D2"/>
+                </a:solidFill>
+                <a:latin typeface="Consolas"/>
+              </a:rPr>
+              <a:t>Schaubild</a:t>
             </a:r>
           </a:p>
         </p:txBody>
@@ -11339,7 +9267,7 @@
             <a:avLst/>
           </a:prstGeom>
           <a:solidFill>
-            <a:srgbClr val="FFFFFF"/>
+            <a:srgbClr val="EDEDF3"/>
           </a:solidFill>
           <a:ln>
             <a:noFill/>
@@ -11440,43 +9368,51 @@
                 </a:solidFill>
                 <a:latin typeface="Consolas"/>
               </a:rPr>
-              <a:t>M20  ·  SCHAUBILD</a:t>
-            </a:r>
-          </a:p>
-        </p:txBody>
-      </p:sp>
-      <p:sp>
-        <p:nvSpPr>
-          <p:cNvPr id="5" name="TextBox 4"/>
-          <p:cNvSpPr txBox="1"/>
-          <p:nvPr/>
-        </p:nvSpPr>
-        <p:spPr>
-          <a:xfrm>
-            <a:off x="685800" y="502920"/>
-            <a:ext cx="10817352" cy="594360"/>
-          </a:xfrm>
-          <a:prstGeom prst="rect">
-            <a:avLst/>
-          </a:prstGeom>
-          <a:noFill/>
-        </p:spPr>
-        <p:txBody>
-          <a:bodyPr wrap="square">
-            <a:spAutoFit/>
-          </a:bodyPr>
-          <a:lstStyle/>
-          <a:p>
-            <a:pPr algn="l"/>
-            <a:r>
-              <a:rPr sz="2000" b="1" i="0">
-                <a:solidFill>
-                  <a:srgbClr val="1F2C56"/>
-                </a:solidFill>
-                <a:latin typeface="Arial"/>
-              </a:rPr>
-              <a:t>Netzwerk-Dimensionen eines FK-Beraters</a:t>
-            </a:r>
+              <a:t>M20  ·  INHALT</a:t>
+            </a:r>
+          </a:p>
+        </p:txBody>
+      </p:sp>
+      <p:sp>
+        <p:nvSpPr>
+          <p:cNvPr id="5" name="Rectangle 4"/>
+          <p:cNvSpPr/>
+          <p:nvPr/>
+        </p:nvSpPr>
+        <p:spPr>
+          <a:xfrm>
+            <a:off x="0" y="1234440"/>
+            <a:ext cx="12188952" cy="12700"/>
+          </a:xfrm>
+          <a:prstGeom prst="rect">
+            <a:avLst/>
+          </a:prstGeom>
+          <a:solidFill>
+            <a:srgbClr val="D8DFE4"/>
+          </a:solidFill>
+          <a:ln>
+            <a:noFill/>
+          </a:ln>
+        </p:spPr>
+        <p:style>
+          <a:lnRef idx="1">
+            <a:schemeClr val="accent1"/>
+          </a:lnRef>
+          <a:fillRef idx="3">
+            <a:schemeClr val="accent1"/>
+          </a:fillRef>
+          <a:effectRef idx="2">
+            <a:schemeClr val="accent1"/>
+          </a:effectRef>
+          <a:fontRef idx="minor">
+            <a:schemeClr val="lt1"/>
+          </a:fontRef>
+        </p:style>
+        <p:txBody>
+          <a:bodyPr rtlCol="0" anchor="ctr"/>
+          <a:lstStyle/>
+          <a:p>
+            <a:pPr algn="ctr"/>
           </a:p>
         </p:txBody>
       </p:sp>
@@ -11488,8 +9424,8 @@
         </p:nvSpPr>
         <p:spPr>
           <a:xfrm>
-            <a:off x="685800" y="1143000"/>
-            <a:ext cx="10817352" cy="25400"/>
+            <a:off x="685800" y="502920"/>
+            <a:ext cx="36576" cy="658368"/>
           </a:xfrm>
           <a:prstGeom prst="rect">
             <a:avLst/>
@@ -11523,33 +9459,143 @@
           </a:p>
         </p:txBody>
       </p:sp>
-      <p:pic>
-        <p:nvPicPr>
-          <p:cNvPr id="7" name="Picture 6" descr="image.png"/>
-          <p:cNvPicPr>
-            <a:picLocks noChangeAspect="1"/>
-          </p:cNvPicPr>
-          <p:nvPr/>
-        </p:nvPicPr>
-        <p:blipFill>
-          <a:blip r:embed="rId2"/>
-          <a:stretch>
-            <a:fillRect/>
-          </a:stretch>
-        </p:blipFill>
-        <p:spPr>
-          <a:xfrm>
-            <a:off x="2303489" y="1325880"/>
-            <a:ext cx="7581973" cy="4937760"/>
-          </a:xfrm>
-          <a:prstGeom prst="rect">
-            <a:avLst/>
-          </a:prstGeom>
-        </p:spPr>
-      </p:pic>
-      <p:sp>
-        <p:nvSpPr>
-          <p:cNvPr id="8" name="Rectangle 7"/>
+      <p:sp>
+        <p:nvSpPr>
+          <p:cNvPr id="7" name="TextBox 6"/>
+          <p:cNvSpPr txBox="1"/>
+          <p:nvPr/>
+        </p:nvSpPr>
+        <p:spPr>
+          <a:xfrm>
+            <a:off x="813816" y="502920"/>
+            <a:ext cx="10634472" cy="685800"/>
+          </a:xfrm>
+          <a:prstGeom prst="rect">
+            <a:avLst/>
+          </a:prstGeom>
+          <a:noFill/>
+        </p:spPr>
+        <p:txBody>
+          <a:bodyPr wrap="square">
+            <a:spAutoFit/>
+          </a:bodyPr>
+          <a:lstStyle/>
+          <a:p>
+            <a:pPr algn="l"/>
+            <a:r>
+              <a:rPr sz="2400" b="1" i="0">
+                <a:solidFill>
+                  <a:srgbClr val="1F2C56"/>
+                </a:solidFill>
+                <a:latin typeface="Arial"/>
+              </a:rPr>
+              <a:t>Das Netzwerk-Audit: drei ehrliche Fragen</a:t>
+            </a:r>
+          </a:p>
+        </p:txBody>
+      </p:sp>
+      <p:sp>
+        <p:nvSpPr>
+          <p:cNvPr id="8" name="TextBox 7"/>
+          <p:cNvSpPr txBox="1"/>
+          <p:nvPr/>
+        </p:nvSpPr>
+        <p:spPr>
+          <a:xfrm>
+            <a:off x="685800" y="1417320"/>
+            <a:ext cx="10817352" cy="4892040"/>
+          </a:xfrm>
+          <a:prstGeom prst="rect">
+            <a:avLst/>
+          </a:prstGeom>
+          <a:noFill/>
+        </p:spPr>
+        <p:txBody>
+          <a:bodyPr wrap="square" anchor="ctr">
+            <a:spAutoFit/>
+          </a:bodyPr>
+          <a:lstStyle/>
+          <a:p>
+            <a:pPr marL="177800" indent="-177800">
+              <a:spcBef>
+                <a:spcPts val="600"/>
+              </a:spcBef>
+              <a:spcAft>
+                <a:spcPts val="200"/>
+              </a:spcAft>
+            </a:pPr>
+            <a:r>
+              <a:rPr sz="1200" i="1">
+                <a:solidFill>
+                  <a:srgbClr val="3D5466"/>
+                </a:solidFill>
+                <a:latin typeface="Arial"/>
+              </a:rPr>
+              <a:t>→  Bevor man baut, misst man – das Netzwerk-Audit zeigt schonungslos, wo Brücken fehlen.</a:t>
+            </a:r>
+          </a:p>
+          <a:p>
+            <a:pPr marL="190500" indent="-190500">
+              <a:spcBef>
+                <a:spcPts val="400"/>
+              </a:spcBef>
+              <a:spcAft>
+                <a:spcPts val="200"/>
+              </a:spcAft>
+            </a:pPr>
+            <a:r>
+              <a:rPr sz="1300">
+                <a:solidFill>
+                  <a:srgbClr val="3D5466"/>
+                </a:solidFill>
+                <a:latin typeface="Arial"/>
+              </a:rPr>
+              <a:t>▸  Wen kenne ich – und wer kennt mich als Experten?</a:t>
+            </a:r>
+          </a:p>
+          <a:p>
+            <a:pPr marL="190500" indent="-190500">
+              <a:spcBef>
+                <a:spcPts val="400"/>
+              </a:spcBef>
+              <a:spcAft>
+                <a:spcPts val="200"/>
+              </a:spcAft>
+            </a:pPr>
+            <a:r>
+              <a:rPr sz="1300">
+                <a:solidFill>
+                  <a:srgbClr val="3D5466"/>
+                </a:solidFill>
+                <a:latin typeface="Arial"/>
+              </a:rPr>
+              <a:t>▸  Welche Dimension ist unterentwickelt?</a:t>
+            </a:r>
+          </a:p>
+          <a:p>
+            <a:pPr marL="190500" indent="-190500">
+              <a:spcBef>
+                <a:spcPts val="400"/>
+              </a:spcBef>
+              <a:spcAft>
+                <a:spcPts val="200"/>
+              </a:spcAft>
+            </a:pPr>
+            <a:r>
+              <a:rPr sz="1300">
+                <a:solidFill>
+                  <a:srgbClr val="3D5466"/>
+                </a:solidFill>
+                <a:latin typeface="Arial"/>
+              </a:rPr>
+              <a:t>▸  Welche drei Brücken fehlen mir für mein Zielsegment?</a:t>
+            </a:r>
+          </a:p>
+        </p:txBody>
+      </p:sp>
+      <p:sp>
+        <p:nvSpPr>
+          <p:cNvPr id="9" name="Rectangle 8"/>
           <p:cNvSpPr/>
           <p:nvPr/>
         </p:nvSpPr>
@@ -11592,7 +9638,7 @@
       </p:sp>
       <p:sp>
         <p:nvSpPr>
-          <p:cNvPr id="9" name="TextBox 8"/>
+          <p:cNvPr id="10" name="TextBox 9"/>
           <p:cNvSpPr txBox="1"/>
           <p:nvPr/>
         </p:nvSpPr>
@@ -11621,41 +9667,6 @@
                 <a:latin typeface="Consolas"/>
               </a:rPr>
               <a:t>FKB Campus  ·  M20</a:t>
-            </a:r>
-          </a:p>
-        </p:txBody>
-      </p:sp>
-      <p:sp>
-        <p:nvSpPr>
-          <p:cNvPr id="10" name="TextBox 9"/>
-          <p:cNvSpPr txBox="1"/>
-          <p:nvPr/>
-        </p:nvSpPr>
-        <p:spPr>
-          <a:xfrm>
-            <a:off x="7176211" y="6583680"/>
-            <a:ext cx="4326940" cy="256032"/>
-          </a:xfrm>
-          <a:prstGeom prst="rect">
-            <a:avLst/>
-          </a:prstGeom>
-          <a:noFill/>
-        </p:spPr>
-        <p:txBody>
-          <a:bodyPr wrap="none">
-            <a:spAutoFit/>
-          </a:bodyPr>
-          <a:lstStyle/>
-          <a:p>
-            <a:pPr algn="r"/>
-            <a:r>
-              <a:rPr sz="700">
-                <a:solidFill>
-                  <a:srgbClr val="A0B4D2"/>
-                </a:solidFill>
-                <a:latin typeface="Consolas"/>
-              </a:rPr>
-              <a:t>Schaubild</a:t>
             </a:r>
           </a:p>
         </p:txBody>
@@ -11693,7 +9704,7 @@
             <a:avLst/>
           </a:prstGeom>
           <a:solidFill>
-            <a:srgbClr val="EDEDF3"/>
+            <a:srgbClr val="1F2C56"/>
           </a:solidFill>
           <a:ln>
             <a:noFill/>
@@ -11723,57 +9734,14 @@
       </p:sp>
       <p:sp>
         <p:nvSpPr>
-          <p:cNvPr id="3" name="Rectangle 2"/>
-          <p:cNvSpPr/>
-          <p:nvPr/>
-        </p:nvSpPr>
-        <p:spPr>
-          <a:xfrm>
-            <a:off x="0" y="0"/>
-            <a:ext cx="12188952" cy="50292"/>
-          </a:xfrm>
-          <a:prstGeom prst="rect">
-            <a:avLst/>
-          </a:prstGeom>
-          <a:solidFill>
-            <a:srgbClr val="1F2C56"/>
-          </a:solidFill>
-          <a:ln>
-            <a:noFill/>
-          </a:ln>
-        </p:spPr>
-        <p:style>
-          <a:lnRef idx="1">
-            <a:schemeClr val="accent1"/>
-          </a:lnRef>
-          <a:fillRef idx="3">
-            <a:schemeClr val="accent1"/>
-          </a:fillRef>
-          <a:effectRef idx="2">
-            <a:schemeClr val="accent1"/>
-          </a:effectRef>
-          <a:fontRef idx="minor">
-            <a:schemeClr val="lt1"/>
-          </a:fontRef>
-        </p:style>
-        <p:txBody>
-          <a:bodyPr rtlCol="0" anchor="ctr"/>
-          <a:lstStyle/>
-          <a:p>
-            <a:pPr algn="ctr"/>
-          </a:p>
-        </p:txBody>
-      </p:sp>
-      <p:sp>
-        <p:nvSpPr>
-          <p:cNvPr id="4" name="TextBox 3"/>
+          <p:cNvPr id="3" name="TextBox 2"/>
           <p:cNvSpPr txBox="1"/>
           <p:nvPr/>
         </p:nvSpPr>
         <p:spPr>
           <a:xfrm>
-            <a:off x="685800" y="109728"/>
-            <a:ext cx="10817352" cy="228600"/>
+            <a:off x="685800" y="2377440"/>
+            <a:ext cx="10817352" cy="365760"/>
           </a:xfrm>
           <a:prstGeom prst="rect">
             <a:avLst/>
@@ -11788,70 +9756,27 @@
           <a:p>
             <a:pPr algn="l"/>
             <a:r>
-              <a:rPr sz="750">
-                <a:solidFill>
-                  <a:srgbClr val="78808C"/>
+              <a:rPr sz="1200">
+                <a:solidFill>
+                  <a:srgbClr val="D9C089"/>
                 </a:solidFill>
                 <a:latin typeface="Consolas"/>
               </a:rPr>
-              <a:t>M20  ·  INHALT</a:t>
-            </a:r>
-          </a:p>
-        </p:txBody>
-      </p:sp>
-      <p:sp>
-        <p:nvSpPr>
-          <p:cNvPr id="5" name="Rectangle 4"/>
+              <a:t>FORMATE</a:t>
+            </a:r>
+          </a:p>
+        </p:txBody>
+      </p:sp>
+      <p:sp>
+        <p:nvSpPr>
+          <p:cNvPr id="4" name="Rectangle 3"/>
           <p:cNvSpPr/>
           <p:nvPr/>
         </p:nvSpPr>
         <p:spPr>
           <a:xfrm>
-            <a:off x="0" y="1234440"/>
-            <a:ext cx="12188952" cy="12700"/>
-          </a:xfrm>
-          <a:prstGeom prst="rect">
-            <a:avLst/>
-          </a:prstGeom>
-          <a:solidFill>
-            <a:srgbClr val="D8DFE4"/>
-          </a:solidFill>
-          <a:ln>
-            <a:noFill/>
-          </a:ln>
-        </p:spPr>
-        <p:style>
-          <a:lnRef idx="1">
-            <a:schemeClr val="accent1"/>
-          </a:lnRef>
-          <a:fillRef idx="3">
-            <a:schemeClr val="accent1"/>
-          </a:fillRef>
-          <a:effectRef idx="2">
-            <a:schemeClr val="accent1"/>
-          </a:effectRef>
-          <a:fontRef idx="minor">
-            <a:schemeClr val="lt1"/>
-          </a:fontRef>
-        </p:style>
-        <p:txBody>
-          <a:bodyPr rtlCol="0" anchor="ctr"/>
-          <a:lstStyle/>
-          <a:p>
-            <a:pPr algn="ctr"/>
-          </a:p>
-        </p:txBody>
-      </p:sp>
-      <p:sp>
-        <p:nvSpPr>
-          <p:cNvPr id="6" name="Rectangle 5"/>
-          <p:cNvSpPr/>
-          <p:nvPr/>
-        </p:nvSpPr>
-        <p:spPr>
-          <a:xfrm>
-            <a:off x="685800" y="502920"/>
-            <a:ext cx="36576" cy="658368"/>
+            <a:off x="685800" y="2788920"/>
+            <a:ext cx="548640" cy="38100"/>
           </a:xfrm>
           <a:prstGeom prst="rect">
             <a:avLst/>
@@ -11887,14 +9812,14 @@
       </p:sp>
       <p:sp>
         <p:nvSpPr>
-          <p:cNvPr id="7" name="TextBox 6"/>
+          <p:cNvPr id="5" name="TextBox 4"/>
           <p:cNvSpPr txBox="1"/>
           <p:nvPr/>
         </p:nvSpPr>
         <p:spPr>
           <a:xfrm>
-            <a:off x="813816" y="502920"/>
-            <a:ext cx="10634472" cy="685800"/>
+            <a:off x="685800" y="3017520"/>
+            <a:ext cx="10817352" cy="1463040"/>
           </a:xfrm>
           <a:prstGeom prst="rect">
             <a:avLst/>
@@ -11909,27 +9834,27 @@
           <a:p>
             <a:pPr algn="l"/>
             <a:r>
-              <a:rPr sz="2400" b="1" i="0">
-                <a:solidFill>
-                  <a:srgbClr val="1F2C56"/>
+              <a:rPr sz="4000" b="1" i="0">
+                <a:solidFill>
+                  <a:srgbClr val="FFFFFF"/>
                 </a:solidFill>
                 <a:latin typeface="Arial"/>
               </a:rPr>
-              <a:t>Das Netzwerk-Audit (3 Fragen)</a:t>
-            </a:r>
-          </a:p>
-        </p:txBody>
-      </p:sp>
-      <p:sp>
-        <p:nvSpPr>
-          <p:cNvPr id="8" name="TextBox 7"/>
+              <a:t>Sichtbarkeit ohne Eigenwerbung</a:t>
+            </a:r>
+          </a:p>
+        </p:txBody>
+      </p:sp>
+      <p:sp>
+        <p:nvSpPr>
+          <p:cNvPr id="6" name="TextBox 5"/>
           <p:cNvSpPr txBox="1"/>
           <p:nvPr/>
         </p:nvSpPr>
         <p:spPr>
           <a:xfrm>
-            <a:off x="685800" y="1417320"/>
-            <a:ext cx="10817352" cy="4892040"/>
+            <a:off x="685800" y="4480560"/>
+            <a:ext cx="8653881" cy="1280160"/>
           </a:xfrm>
           <a:prstGeom prst="rect">
             <a:avLst/>
@@ -11942,250 +9867,29 @@
           </a:bodyPr>
           <a:lstStyle/>
           <a:p>
-            <a:pPr marL="190500" indent="-190500">
-              <a:spcBef>
-                <a:spcPts val="400"/>
-              </a:spcBef>
-              <a:spcAft>
-                <a:spcPts val="200"/>
-              </a:spcAft>
-            </a:pPr>
-            <a:r>
-              <a:rPr sz="1300">
-                <a:solidFill>
-                  <a:srgbClr val="3D5466"/>
+            <a:pPr algn="l"/>
+            <a:r>
+              <a:rPr sz="1600" b="0" i="0">
+                <a:solidFill>
+                  <a:srgbClr val="C8D2E6"/>
                 </a:solidFill>
                 <a:latin typeface="Arial"/>
               </a:rPr>
-              <a:t>▸  Frage 1: Stärke meiner bestehenden Verbindungen</a:t>
-            </a:r>
-          </a:p>
-          <a:p>
-            <a:pPr marL="190500" indent="-190500">
-              <a:spcBef>
-                <a:spcPts val="400"/>
-              </a:spcBef>
-              <a:spcAft>
-                <a:spcPts val="200"/>
-              </a:spcAft>
-            </a:pPr>
-            <a:r>
-              <a:rPr sz="1300">
-                <a:solidFill>
-                  <a:srgbClr val="3D5466"/>
-                </a:solidFill>
-                <a:latin typeface="Arial"/>
-              </a:rPr>
-              <a:t>▸  Frage 2: Wo sind meine strukturellen Lücken?</a:t>
-            </a:r>
-          </a:p>
-          <a:p>
-            <a:pPr marL="190500" indent="-190500">
-              <a:spcBef>
-                <a:spcPts val="400"/>
-              </a:spcBef>
-              <a:spcAft>
-                <a:spcPts val="200"/>
-              </a:spcAft>
-            </a:pPr>
-            <a:r>
-              <a:rPr sz="1300">
-                <a:solidFill>
-                  <a:srgbClr val="3D5466"/>
-                </a:solidFill>
-                <a:latin typeface="Arial"/>
-              </a:rPr>
-              <a:t>▸  In welchen Branchen kenne ich niemanden außer meinen eigenen Kunden?</a:t>
-            </a:r>
-          </a:p>
-          <a:p>
-            <a:pPr marL="190500" indent="-190500">
-              <a:spcBef>
-                <a:spcPts val="400"/>
-              </a:spcBef>
-              <a:spcAft>
-                <a:spcPts val="200"/>
-              </a:spcAft>
-            </a:pPr>
-            <a:r>
-              <a:rPr sz="1300">
-                <a:solidFill>
-                  <a:srgbClr val="3D5466"/>
-                </a:solidFill>
-                <a:latin typeface="Arial"/>
-              </a:rPr>
-              <a:t>▸  Mit welchen Multiplikatoren hätte ich gerne Kontakt, aber noch keinen?</a:t>
-            </a:r>
-          </a:p>
-          <a:p>
-            <a:pPr marL="190500" indent="-190500">
-              <a:spcBef>
-                <a:spcPts val="400"/>
-              </a:spcBef>
-              <a:spcAft>
-                <a:spcPts val="200"/>
-              </a:spcAft>
-            </a:pPr>
-            <a:r>
-              <a:rPr sz="1300">
-                <a:solidFill>
-                  <a:srgbClr val="3D5466"/>
-                </a:solidFill>
-                <a:latin typeface="Arial"/>
-              </a:rPr>
-              <a:t>▸  Welche internen Bereiche kenne ich zu wenig?</a:t>
-            </a:r>
-          </a:p>
-          <a:p>
-            <a:pPr marL="190500" indent="-190500">
-              <a:spcBef>
-                <a:spcPts val="400"/>
-              </a:spcBef>
-              <a:spcAft>
-                <a:spcPts val="200"/>
-              </a:spcAft>
-            </a:pPr>
-            <a:r>
-              <a:rPr sz="1300">
-                <a:solidFill>
-                  <a:srgbClr val="3D5466"/>
-                </a:solidFill>
-                <a:latin typeface="Arial"/>
-              </a:rPr>
-              <a:t>▸  Frage 3: Wo liegt mein Broker-Potenzial?</a:t>
-            </a:r>
-          </a:p>
-          <a:p>
-            <a:pPr marL="190500" indent="-190500">
-              <a:spcBef>
-                <a:spcPts val="400"/>
-              </a:spcBef>
-              <a:spcAft>
-                <a:spcPts val="200"/>
-              </a:spcAft>
-            </a:pPr>
-            <a:r>
-              <a:rPr sz="1300">
-                <a:solidFill>
-                  <a:srgbClr val="3D5466"/>
-                </a:solidFill>
-                <a:latin typeface="Arial"/>
-              </a:rPr>
-              <a:t>▸  Welche zwei Gruppen in meinem Netzwerk kennen sich nicht, würden aber voneinander profitieren?</a:t>
-            </a:r>
-          </a:p>
-          <a:p>
-            <a:pPr marL="190500" indent="-190500">
-              <a:spcBef>
-                <a:spcPts val="400"/>
-              </a:spcBef>
-              <a:spcAft>
-                <a:spcPts val="200"/>
-              </a:spcAft>
-            </a:pPr>
-            <a:r>
-              <a:rPr sz="1300">
-                <a:solidFill>
-                  <a:srgbClr val="3D5466"/>
-                </a:solidFill>
-                <a:latin typeface="Arial"/>
-              </a:rPr>
-              <a:t>▸  Wo kann ich durch Zusammenführen Mehrwert stiften – ohne Eigeninteresse?</a:t>
-            </a:r>
-          </a:p>
-          <a:p>
-            <a:pPr marL="190500" indent="-190500">
-              <a:spcBef>
-                <a:spcPts val="400"/>
-              </a:spcBef>
-              <a:spcAft>
-                <a:spcPts val="200"/>
-              </a:spcAft>
-            </a:pPr>
-            <a:r>
-              <a:rPr sz="1300">
-                <a:solidFill>
-                  <a:srgbClr val="3D5466"/>
-                </a:solidFill>
-                <a:latin typeface="Arial"/>
-              </a:rPr>
-              <a:t>▸  ## 4.4 Sichtbarkeit: Expertise sichtbar machen ohne Eigenwerbung</a:t>
-            </a:r>
-          </a:p>
-          <a:p>
-            <a:pPr marL="190500" indent="-190500">
-              <a:spcBef>
-                <a:spcPts val="400"/>
-              </a:spcBef>
-              <a:spcAft>
-                <a:spcPts val="200"/>
-              </a:spcAft>
-            </a:pPr>
-            <a:r>
-              <a:rPr sz="1300">
-                <a:solidFill>
-                  <a:srgbClr val="3D5466"/>
-                </a:solidFill>
-                <a:latin typeface="Arial"/>
-              </a:rPr>
-              <a:t>▸  Sichtbarkeit entsteht nicht durch Selbstlob, sondern durch konsistente Fachkompetenz, die anderen nutzt. Die wirkmächtigsten Formate:</a:t>
-            </a:r>
-          </a:p>
-        </p:txBody>
-      </p:sp>
-      <p:sp>
-        <p:nvSpPr>
-          <p:cNvPr id="9" name="Rectangle 8"/>
-          <p:cNvSpPr/>
-          <p:nvPr/>
-        </p:nvSpPr>
-        <p:spPr>
-          <a:xfrm>
-            <a:off x="0" y="6510528"/>
-            <a:ext cx="12188952" cy="347472"/>
-          </a:xfrm>
-          <a:prstGeom prst="rect">
-            <a:avLst/>
-          </a:prstGeom>
-          <a:solidFill>
-            <a:srgbClr val="0A1937"/>
-          </a:solidFill>
-          <a:ln>
-            <a:noFill/>
-          </a:ln>
-        </p:spPr>
-        <p:style>
-          <a:lnRef idx="1">
-            <a:schemeClr val="accent1"/>
-          </a:lnRef>
-          <a:fillRef idx="3">
-            <a:schemeClr val="accent1"/>
-          </a:fillRef>
-          <a:effectRef idx="2">
-            <a:schemeClr val="accent1"/>
-          </a:effectRef>
-          <a:fontRef idx="minor">
-            <a:schemeClr val="lt1"/>
-          </a:fontRef>
-        </p:style>
-        <p:txBody>
-          <a:bodyPr rtlCol="0" anchor="ctr"/>
-          <a:lstStyle/>
-          <a:p>
-            <a:pPr algn="ctr"/>
-          </a:p>
-        </p:txBody>
-      </p:sp>
-      <p:sp>
-        <p:nvSpPr>
-          <p:cNvPr id="10" name="TextBox 9"/>
+              <a:t>Expertise sichtbar machen, ohne sich anzupreisen.</a:t>
+            </a:r>
+          </a:p>
+        </p:txBody>
+      </p:sp>
+      <p:sp>
+        <p:nvSpPr>
+          <p:cNvPr id="7" name="TextBox 6"/>
           <p:cNvSpPr txBox="1"/>
           <p:nvPr/>
         </p:nvSpPr>
         <p:spPr>
           <a:xfrm>
-            <a:off x="685800" y="6583680"/>
-            <a:ext cx="6490411" cy="256032"/>
+            <a:off x="685800" y="6355080"/>
+            <a:ext cx="10817352" cy="274320"/>
           </a:xfrm>
           <a:prstGeom prst="rect">
             <a:avLst/>
@@ -12202,7 +9906,7 @@
             <a:r>
               <a:rPr sz="700">
                 <a:solidFill>
-                  <a:srgbClr val="A0B4D2"/>
+                  <a:srgbClr val="8CA0C3"/>
                 </a:solidFill>
                 <a:latin typeface="Consolas"/>
               </a:rPr>
